--- a/examples/svg-seeded/01-modular-agent/qa/powerpoint-live-case/input/candidate.pptx
+++ b/examples/svg-seeded/01-modular-agent/qa/powerpoint-live-case/input/candidate.pptx
@@ -5,10 +5,13 @@
     <p:sldMasterId id="2147483648" r:id="rId1"/>
   </p:sldMasterIdLst>
   <p:sldIdLst>
-    <p:sldId id="256" r:id="rId7"/>
+    <p:sldId id="256" r:id="rId2"/>
   </p:sldIdLst>
-  <p:sldSz cx="13611225" cy="5972175" type="screen4x3"/>
+  <p:sldSz cx="13611225" cy="5972175"/>
   <p:notesSz cx="6858000" cy="9144000"/>
+  <p:custDataLst>
+    <p:tags r:id="rId3"/>
+  </p:custDataLst>
   <p:defaultTextStyle>
     <a:defPPr>
       <a:defRPr lang="en-US"/>
@@ -104,6 +107,22 @@
       </a:defRPr>
     </a:lvl9pPr>
   </p:defaultTextStyle>
+  <p:extLst>
+    <p:ext uri="{EFAFB233-063F-42B5-8137-9DF3F51BA10A}">
+      <p15:sldGuideLst xmlns:p15="http://schemas.microsoft.com/office/powerpoint/2012/main">
+        <p15:guide id="1" orient="horz" pos="2160">
+          <p15:clr>
+            <a:srgbClr val="A4A3A4"/>
+          </p15:clr>
+        </p15:guide>
+        <p15:guide id="2" pos="2880">
+          <p15:clr>
+            <a:srgbClr val="A4A3A4"/>
+          </p15:clr>
+        </p15:guide>
+      </p15:sldGuideLst>
+    </p:ext>
+  </p:extLst>
 </p:presentation>
 </file>
 
@@ -145,10 +164,9 @@
           <a:lstStyle/>
           <a:p>
             <a:r>
-              <a:rPr lang="en-US" smtClean="0"/>
+              <a:rPr lang="en-US"/>
               <a:t>Click to edit Master title style</a:t>
             </a:r>
-            <a:endParaRPr lang="en-US"/>
           </a:p>
         </p:txBody>
       </p:sp>
@@ -264,10 +282,9 @@
           </a:lstStyle>
           <a:p>
             <a:r>
-              <a:rPr lang="en-US" smtClean="0"/>
+              <a:rPr lang="en-US"/>
               <a:t>Click to edit Master subtitle style</a:t>
             </a:r>
-            <a:endParaRPr lang="en-US"/>
           </a:p>
         </p:txBody>
       </p:sp>
@@ -288,7 +305,7 @@
           <a:p>
             <a:fld id="{5BCAD085-E8A6-8845-BD4E-CB4CCA059FC4}" type="datetimeFigureOut">
               <a:rPr lang="en-US" smtClean="0"/>
-              <a:t>1/27/13</a:t>
+              <a:t>8/23/2026</a:t>
             </a:fld>
             <a:endParaRPr lang="en-US"/>
           </a:p>
@@ -382,10 +399,9 @@
           <a:lstStyle/>
           <a:p>
             <a:r>
-              <a:rPr lang="en-US" smtClean="0"/>
+              <a:rPr lang="en-US"/>
               <a:t>Click to edit Master title style</a:t>
             </a:r>
-            <a:endParaRPr lang="en-US"/>
           </a:p>
         </p:txBody>
       </p:sp>
@@ -406,38 +422,37 @@
           <a:p>
             <a:pPr lvl="0"/>
             <a:r>
-              <a:rPr lang="en-US" smtClean="0"/>
+              <a:rPr lang="en-US"/>
               <a:t>Click to edit Master text styles</a:t>
             </a:r>
           </a:p>
           <a:p>
             <a:pPr lvl="1"/>
             <a:r>
-              <a:rPr lang="en-US" smtClean="0"/>
+              <a:rPr lang="en-US"/>
               <a:t>Second level</a:t>
             </a:r>
           </a:p>
           <a:p>
             <a:pPr lvl="2"/>
             <a:r>
-              <a:rPr lang="en-US" smtClean="0"/>
+              <a:rPr lang="en-US"/>
               <a:t>Third level</a:t>
             </a:r>
           </a:p>
           <a:p>
             <a:pPr lvl="3"/>
             <a:r>
-              <a:rPr lang="en-US" smtClean="0"/>
+              <a:rPr lang="en-US"/>
               <a:t>Fourth level</a:t>
             </a:r>
           </a:p>
           <a:p>
             <a:pPr lvl="4"/>
             <a:r>
-              <a:rPr lang="en-US" smtClean="0"/>
+              <a:rPr lang="en-US"/>
               <a:t>Fifth level</a:t>
             </a:r>
-            <a:endParaRPr lang="en-US"/>
           </a:p>
         </p:txBody>
       </p:sp>
@@ -458,7 +473,7 @@
           <a:p>
             <a:fld id="{5BCAD085-E8A6-8845-BD4E-CB4CCA059FC4}" type="datetimeFigureOut">
               <a:rPr lang="en-US" smtClean="0"/>
-              <a:t>1/27/13</a:t>
+              <a:t>8/23/2026</a:t>
             </a:fld>
             <a:endParaRPr lang="en-US"/>
           </a:p>
@@ -557,10 +572,9 @@
           <a:lstStyle/>
           <a:p>
             <a:r>
-              <a:rPr lang="en-US" smtClean="0"/>
+              <a:rPr lang="en-US"/>
               <a:t>Click to edit Master title style</a:t>
             </a:r>
-            <a:endParaRPr lang="en-US"/>
           </a:p>
         </p:txBody>
       </p:sp>
@@ -586,38 +600,37 @@
           <a:p>
             <a:pPr lvl="0"/>
             <a:r>
-              <a:rPr lang="en-US" smtClean="0"/>
+              <a:rPr lang="en-US"/>
               <a:t>Click to edit Master text styles</a:t>
             </a:r>
           </a:p>
           <a:p>
             <a:pPr lvl="1"/>
             <a:r>
-              <a:rPr lang="en-US" smtClean="0"/>
+              <a:rPr lang="en-US"/>
               <a:t>Second level</a:t>
             </a:r>
           </a:p>
           <a:p>
             <a:pPr lvl="2"/>
             <a:r>
-              <a:rPr lang="en-US" smtClean="0"/>
+              <a:rPr lang="en-US"/>
               <a:t>Third level</a:t>
             </a:r>
           </a:p>
           <a:p>
             <a:pPr lvl="3"/>
             <a:r>
-              <a:rPr lang="en-US" smtClean="0"/>
+              <a:rPr lang="en-US"/>
               <a:t>Fourth level</a:t>
             </a:r>
           </a:p>
           <a:p>
             <a:pPr lvl="4"/>
             <a:r>
-              <a:rPr lang="en-US" smtClean="0"/>
+              <a:rPr lang="en-US"/>
               <a:t>Fifth level</a:t>
             </a:r>
-            <a:endParaRPr lang="en-US"/>
           </a:p>
         </p:txBody>
       </p:sp>
@@ -638,7 +651,7 @@
           <a:p>
             <a:fld id="{5BCAD085-E8A6-8845-BD4E-CB4CCA059FC4}" type="datetimeFigureOut">
               <a:rPr lang="en-US" smtClean="0"/>
-              <a:t>1/27/13</a:t>
+              <a:t>8/23/2026</a:t>
             </a:fld>
             <a:endParaRPr lang="en-US"/>
           </a:p>
@@ -732,10 +745,9 @@
           <a:lstStyle/>
           <a:p>
             <a:r>
-              <a:rPr lang="en-US" smtClean="0"/>
+              <a:rPr lang="en-US"/>
               <a:t>Click to edit Master title style</a:t>
             </a:r>
-            <a:endParaRPr lang="en-US"/>
           </a:p>
         </p:txBody>
       </p:sp>
@@ -756,38 +768,37 @@
           <a:p>
             <a:pPr lvl="0"/>
             <a:r>
-              <a:rPr lang="en-US" smtClean="0"/>
+              <a:rPr lang="en-US"/>
               <a:t>Click to edit Master text styles</a:t>
             </a:r>
           </a:p>
           <a:p>
             <a:pPr lvl="1"/>
             <a:r>
-              <a:rPr lang="en-US" smtClean="0"/>
+              <a:rPr lang="en-US"/>
               <a:t>Second level</a:t>
             </a:r>
           </a:p>
           <a:p>
             <a:pPr lvl="2"/>
             <a:r>
-              <a:rPr lang="en-US" smtClean="0"/>
+              <a:rPr lang="en-US"/>
               <a:t>Third level</a:t>
             </a:r>
           </a:p>
           <a:p>
             <a:pPr lvl="3"/>
             <a:r>
-              <a:rPr lang="en-US" smtClean="0"/>
+              <a:rPr lang="en-US"/>
               <a:t>Fourth level</a:t>
             </a:r>
           </a:p>
           <a:p>
             <a:pPr lvl="4"/>
             <a:r>
-              <a:rPr lang="en-US" smtClean="0"/>
+              <a:rPr lang="en-US"/>
               <a:t>Fifth level</a:t>
             </a:r>
-            <a:endParaRPr lang="en-US"/>
           </a:p>
         </p:txBody>
       </p:sp>
@@ -808,7 +819,7 @@
           <a:p>
             <a:fld id="{5BCAD085-E8A6-8845-BD4E-CB4CCA059FC4}" type="datetimeFigureOut">
               <a:rPr lang="en-US" smtClean="0"/>
-              <a:t>1/27/13</a:t>
+              <a:t>8/23/2026</a:t>
             </a:fld>
             <a:endParaRPr lang="en-US"/>
           </a:p>
@@ -911,10 +922,9 @@
           </a:lstStyle>
           <a:p>
             <a:r>
-              <a:rPr lang="en-US" smtClean="0"/>
+              <a:rPr lang="en-US"/>
               <a:t>Click to edit Master title style</a:t>
             </a:r>
-            <a:endParaRPr lang="en-US"/>
           </a:p>
         </p:txBody>
       </p:sp>
@@ -1031,7 +1041,7 @@
           <a:p>
             <a:pPr lvl="0"/>
             <a:r>
-              <a:rPr lang="en-US" smtClean="0"/>
+              <a:rPr lang="en-US"/>
               <a:t>Click to edit Master text styles</a:t>
             </a:r>
           </a:p>
@@ -1054,7 +1064,7 @@
           <a:p>
             <a:fld id="{5BCAD085-E8A6-8845-BD4E-CB4CCA059FC4}" type="datetimeFigureOut">
               <a:rPr lang="en-US" smtClean="0"/>
-              <a:t>1/27/13</a:t>
+              <a:t>8/23/2026</a:t>
             </a:fld>
             <a:endParaRPr lang="en-US"/>
           </a:p>
@@ -1148,10 +1158,9 @@
           <a:lstStyle/>
           <a:p>
             <a:r>
-              <a:rPr lang="en-US" smtClean="0"/>
+              <a:rPr lang="en-US"/>
               <a:t>Click to edit Master title style</a:t>
             </a:r>
-            <a:endParaRPr lang="en-US"/>
           </a:p>
         </p:txBody>
       </p:sp>
@@ -1205,38 +1214,37 @@
           <a:p>
             <a:pPr lvl="0"/>
             <a:r>
-              <a:rPr lang="en-US" smtClean="0"/>
+              <a:rPr lang="en-US"/>
               <a:t>Click to edit Master text styles</a:t>
             </a:r>
           </a:p>
           <a:p>
             <a:pPr lvl="1"/>
             <a:r>
-              <a:rPr lang="en-US" smtClean="0"/>
+              <a:rPr lang="en-US"/>
               <a:t>Second level</a:t>
             </a:r>
           </a:p>
           <a:p>
             <a:pPr lvl="2"/>
             <a:r>
-              <a:rPr lang="en-US" smtClean="0"/>
+              <a:rPr lang="en-US"/>
               <a:t>Third level</a:t>
             </a:r>
           </a:p>
           <a:p>
             <a:pPr lvl="3"/>
             <a:r>
-              <a:rPr lang="en-US" smtClean="0"/>
+              <a:rPr lang="en-US"/>
               <a:t>Fourth level</a:t>
             </a:r>
           </a:p>
           <a:p>
             <a:pPr lvl="4"/>
             <a:r>
-              <a:rPr lang="en-US" smtClean="0"/>
+              <a:rPr lang="en-US"/>
               <a:t>Fifth level</a:t>
             </a:r>
-            <a:endParaRPr lang="en-US"/>
           </a:p>
         </p:txBody>
       </p:sp>
@@ -1290,38 +1298,37 @@
           <a:p>
             <a:pPr lvl="0"/>
             <a:r>
-              <a:rPr lang="en-US" smtClean="0"/>
+              <a:rPr lang="en-US"/>
               <a:t>Click to edit Master text styles</a:t>
             </a:r>
           </a:p>
           <a:p>
             <a:pPr lvl="1"/>
             <a:r>
-              <a:rPr lang="en-US" smtClean="0"/>
+              <a:rPr lang="en-US"/>
               <a:t>Second level</a:t>
             </a:r>
           </a:p>
           <a:p>
             <a:pPr lvl="2"/>
             <a:r>
-              <a:rPr lang="en-US" smtClean="0"/>
+              <a:rPr lang="en-US"/>
               <a:t>Third level</a:t>
             </a:r>
           </a:p>
           <a:p>
             <a:pPr lvl="3"/>
             <a:r>
-              <a:rPr lang="en-US" smtClean="0"/>
+              <a:rPr lang="en-US"/>
               <a:t>Fourth level</a:t>
             </a:r>
           </a:p>
           <a:p>
             <a:pPr lvl="4"/>
             <a:r>
-              <a:rPr lang="en-US" smtClean="0"/>
+              <a:rPr lang="en-US"/>
               <a:t>Fifth level</a:t>
             </a:r>
-            <a:endParaRPr lang="en-US"/>
           </a:p>
         </p:txBody>
       </p:sp>
@@ -1342,7 +1349,7 @@
           <a:p>
             <a:fld id="{5BCAD085-E8A6-8845-BD4E-CB4CCA059FC4}" type="datetimeFigureOut">
               <a:rPr lang="en-US" smtClean="0"/>
-              <a:t>1/27/13</a:t>
+              <a:t>8/23/2026</a:t>
             </a:fld>
             <a:endParaRPr lang="en-US"/>
           </a:p>
@@ -1440,10 +1447,9 @@
           </a:lstStyle>
           <a:p>
             <a:r>
-              <a:rPr lang="en-US" smtClean="0"/>
+              <a:rPr lang="en-US"/>
               <a:t>Click to edit Master title style</a:t>
             </a:r>
-            <a:endParaRPr lang="en-US"/>
           </a:p>
         </p:txBody>
       </p:sp>
@@ -1506,7 +1512,7 @@
           <a:p>
             <a:pPr lvl="0"/>
             <a:r>
-              <a:rPr lang="en-US" smtClean="0"/>
+              <a:rPr lang="en-US"/>
               <a:t>Click to edit Master text styles</a:t>
             </a:r>
           </a:p>
@@ -1562,38 +1568,37 @@
           <a:p>
             <a:pPr lvl="0"/>
             <a:r>
-              <a:rPr lang="en-US" smtClean="0"/>
+              <a:rPr lang="en-US"/>
               <a:t>Click to edit Master text styles</a:t>
             </a:r>
           </a:p>
           <a:p>
             <a:pPr lvl="1"/>
             <a:r>
-              <a:rPr lang="en-US" smtClean="0"/>
+              <a:rPr lang="en-US"/>
               <a:t>Second level</a:t>
             </a:r>
           </a:p>
           <a:p>
             <a:pPr lvl="2"/>
             <a:r>
-              <a:rPr lang="en-US" smtClean="0"/>
+              <a:rPr lang="en-US"/>
               <a:t>Third level</a:t>
             </a:r>
           </a:p>
           <a:p>
             <a:pPr lvl="3"/>
             <a:r>
-              <a:rPr lang="en-US" smtClean="0"/>
+              <a:rPr lang="en-US"/>
               <a:t>Fourth level</a:t>
             </a:r>
           </a:p>
           <a:p>
             <a:pPr lvl="4"/>
             <a:r>
-              <a:rPr lang="en-US" smtClean="0"/>
+              <a:rPr lang="en-US"/>
               <a:t>Fifth level</a:t>
             </a:r>
-            <a:endParaRPr lang="en-US"/>
           </a:p>
         </p:txBody>
       </p:sp>
@@ -1656,7 +1661,7 @@
           <a:p>
             <a:pPr lvl="0"/>
             <a:r>
-              <a:rPr lang="en-US" smtClean="0"/>
+              <a:rPr lang="en-US"/>
               <a:t>Click to edit Master text styles</a:t>
             </a:r>
           </a:p>
@@ -1712,38 +1717,37 @@
           <a:p>
             <a:pPr lvl="0"/>
             <a:r>
-              <a:rPr lang="en-US" smtClean="0"/>
+              <a:rPr lang="en-US"/>
               <a:t>Click to edit Master text styles</a:t>
             </a:r>
           </a:p>
           <a:p>
             <a:pPr lvl="1"/>
             <a:r>
-              <a:rPr lang="en-US" smtClean="0"/>
+              <a:rPr lang="en-US"/>
               <a:t>Second level</a:t>
             </a:r>
           </a:p>
           <a:p>
             <a:pPr lvl="2"/>
             <a:r>
-              <a:rPr lang="en-US" smtClean="0"/>
+              <a:rPr lang="en-US"/>
               <a:t>Third level</a:t>
             </a:r>
           </a:p>
           <a:p>
             <a:pPr lvl="3"/>
             <a:r>
-              <a:rPr lang="en-US" smtClean="0"/>
+              <a:rPr lang="en-US"/>
               <a:t>Fourth level</a:t>
             </a:r>
           </a:p>
           <a:p>
             <a:pPr lvl="4"/>
             <a:r>
-              <a:rPr lang="en-US" smtClean="0"/>
+              <a:rPr lang="en-US"/>
               <a:t>Fifth level</a:t>
             </a:r>
-            <a:endParaRPr lang="en-US"/>
           </a:p>
         </p:txBody>
       </p:sp>
@@ -1764,7 +1768,7 @@
           <a:p>
             <a:fld id="{5BCAD085-E8A6-8845-BD4E-CB4CCA059FC4}" type="datetimeFigureOut">
               <a:rPr lang="en-US" smtClean="0"/>
-              <a:t>1/27/13</a:t>
+              <a:t>8/23/2026</a:t>
             </a:fld>
             <a:endParaRPr lang="en-US"/>
           </a:p>
@@ -1858,10 +1862,9 @@
           <a:lstStyle/>
           <a:p>
             <a:r>
-              <a:rPr lang="en-US" smtClean="0"/>
+              <a:rPr lang="en-US"/>
               <a:t>Click to edit Master title style</a:t>
             </a:r>
-            <a:endParaRPr lang="en-US"/>
           </a:p>
         </p:txBody>
       </p:sp>
@@ -1882,7 +1885,7 @@
           <a:p>
             <a:fld id="{5BCAD085-E8A6-8845-BD4E-CB4CCA059FC4}" type="datetimeFigureOut">
               <a:rPr lang="en-US" smtClean="0"/>
-              <a:t>1/27/13</a:t>
+              <a:t>8/23/2026</a:t>
             </a:fld>
             <a:endParaRPr lang="en-US"/>
           </a:p>
@@ -1977,7 +1980,7 @@
           <a:p>
             <a:fld id="{5BCAD085-E8A6-8845-BD4E-CB4CCA059FC4}" type="datetimeFigureOut">
               <a:rPr lang="en-US" smtClean="0"/>
-              <a:t>1/27/13</a:t>
+              <a:t>8/23/2026</a:t>
             </a:fld>
             <a:endParaRPr lang="en-US"/>
           </a:p>
@@ -2080,10 +2083,9 @@
           </a:lstStyle>
           <a:p>
             <a:r>
-              <a:rPr lang="en-US" smtClean="0"/>
+              <a:rPr lang="en-US"/>
               <a:t>Click to edit Master title style</a:t>
             </a:r>
-            <a:endParaRPr lang="en-US"/>
           </a:p>
         </p:txBody>
       </p:sp>
@@ -2137,38 +2139,37 @@
           <a:p>
             <a:pPr lvl="0"/>
             <a:r>
-              <a:rPr lang="en-US" smtClean="0"/>
+              <a:rPr lang="en-US"/>
               <a:t>Click to edit Master text styles</a:t>
             </a:r>
           </a:p>
           <a:p>
             <a:pPr lvl="1"/>
             <a:r>
-              <a:rPr lang="en-US" smtClean="0"/>
+              <a:rPr lang="en-US"/>
               <a:t>Second level</a:t>
             </a:r>
           </a:p>
           <a:p>
             <a:pPr lvl="2"/>
             <a:r>
-              <a:rPr lang="en-US" smtClean="0"/>
+              <a:rPr lang="en-US"/>
               <a:t>Third level</a:t>
             </a:r>
           </a:p>
           <a:p>
             <a:pPr lvl="3"/>
             <a:r>
-              <a:rPr lang="en-US" smtClean="0"/>
+              <a:rPr lang="en-US"/>
               <a:t>Fourth level</a:t>
             </a:r>
           </a:p>
           <a:p>
             <a:pPr lvl="4"/>
             <a:r>
-              <a:rPr lang="en-US" smtClean="0"/>
+              <a:rPr lang="en-US"/>
               <a:t>Fifth level</a:t>
             </a:r>
-            <a:endParaRPr lang="en-US"/>
           </a:p>
         </p:txBody>
       </p:sp>
@@ -2231,7 +2232,7 @@
           <a:p>
             <a:pPr lvl="0"/>
             <a:r>
-              <a:rPr lang="en-US" smtClean="0"/>
+              <a:rPr lang="en-US"/>
               <a:t>Click to edit Master text styles</a:t>
             </a:r>
           </a:p>
@@ -2254,7 +2255,7 @@
           <a:p>
             <a:fld id="{5BCAD085-E8A6-8845-BD4E-CB4CCA059FC4}" type="datetimeFigureOut">
               <a:rPr lang="en-US" smtClean="0"/>
-              <a:t>1/27/13</a:t>
+              <a:t>8/23/2026</a:t>
             </a:fld>
             <a:endParaRPr lang="en-US"/>
           </a:p>
@@ -2357,10 +2358,9 @@
           </a:lstStyle>
           <a:p>
             <a:r>
-              <a:rPr lang="en-US" smtClean="0"/>
+              <a:rPr lang="en-US"/>
               <a:t>Click to edit Master title style</a:t>
             </a:r>
-            <a:endParaRPr lang="en-US"/>
           </a:p>
         </p:txBody>
       </p:sp>
@@ -2484,7 +2484,7 @@
           <a:p>
             <a:pPr lvl="0"/>
             <a:r>
-              <a:rPr lang="en-US" smtClean="0"/>
+              <a:rPr lang="en-US"/>
               <a:t>Click to edit Master text styles</a:t>
             </a:r>
           </a:p>
@@ -2507,7 +2507,7 @@
           <a:p>
             <a:fld id="{5BCAD085-E8A6-8845-BD4E-CB4CCA059FC4}" type="datetimeFigureOut">
               <a:rPr lang="en-US" smtClean="0"/>
-              <a:t>1/27/13</a:t>
+              <a:t>8/23/2026</a:t>
             </a:fld>
             <a:endParaRPr lang="en-US"/>
           </a:p>
@@ -2616,10 +2616,9 @@
           <a:lstStyle/>
           <a:p>
             <a:r>
-              <a:rPr lang="en-US" smtClean="0"/>
+              <a:rPr lang="en-US"/>
               <a:t>Click to edit Master title style</a:t>
             </a:r>
-            <a:endParaRPr lang="en-US"/>
           </a:p>
         </p:txBody>
       </p:sp>
@@ -2650,38 +2649,37 @@
           <a:p>
             <a:pPr lvl="0"/>
             <a:r>
-              <a:rPr lang="en-US" smtClean="0"/>
+              <a:rPr lang="en-US"/>
               <a:t>Click to edit Master text styles</a:t>
             </a:r>
           </a:p>
           <a:p>
             <a:pPr lvl="1"/>
             <a:r>
-              <a:rPr lang="en-US" smtClean="0"/>
+              <a:rPr lang="en-US"/>
               <a:t>Second level</a:t>
             </a:r>
           </a:p>
           <a:p>
             <a:pPr lvl="2"/>
             <a:r>
-              <a:rPr lang="en-US" smtClean="0"/>
+              <a:rPr lang="en-US"/>
               <a:t>Third level</a:t>
             </a:r>
           </a:p>
           <a:p>
             <a:pPr lvl="3"/>
             <a:r>
-              <a:rPr lang="en-US" smtClean="0"/>
+              <a:rPr lang="en-US"/>
               <a:t>Fourth level</a:t>
             </a:r>
           </a:p>
           <a:p>
             <a:pPr lvl="4"/>
             <a:r>
-              <a:rPr lang="en-US" smtClean="0"/>
+              <a:rPr lang="en-US"/>
               <a:t>Fifth level</a:t>
             </a:r>
-            <a:endParaRPr lang="en-US"/>
           </a:p>
         </p:txBody>
       </p:sp>
@@ -2720,7 +2718,7 @@
           <a:p>
             <a:fld id="{5BCAD085-E8A6-8845-BD4E-CB4CCA059FC4}" type="datetimeFigureOut">
               <a:rPr lang="en-US" smtClean="0"/>
-              <a:t>1/27/13</a:t>
+              <a:t>8/23/2026</a:t>
             </a:fld>
             <a:endParaRPr lang="en-US"/>
           </a:p>
@@ -3079,7 +3077,7 @@
 </file>
 
 <file path=ppt/slides/slide1.xml><?xml version="1.0" encoding="utf-8"?>
-<p:sld xmlns:a="http://schemas.openxmlformats.org/drawingml/2006/main" xmlns:p="http://schemas.openxmlformats.org/presentationml/2006/main" xmlns:r="http://schemas.openxmlformats.org/officeDocument/2006/relationships">
+<p:sld xmlns:a="http://schemas.openxmlformats.org/drawingml/2006/main" xmlns:r="http://schemas.openxmlformats.org/officeDocument/2006/relationships" xmlns:p="http://schemas.openxmlformats.org/presentationml/2006/main">
   <p:cSld>
     <p:spTree>
       <p:nvGrpSpPr>
@@ -3087,10 +3085,17 @@
         <p:cNvGrpSpPr/>
         <p:nvPr/>
       </p:nvGrpSpPr>
-      <p:grpSpPr/>
-      <p:sp>
-        <p:nvSpPr>
-          <p:cNvPr id="2" name="af-svg-rect-0001-rect-01"/>
+      <p:grpSpPr>
+        <a:xfrm>
+          <a:off x="0" y="0"/>
+          <a:ext cx="0" cy="0"/>
+          <a:chOff x="0" y="0"/>
+          <a:chExt cx="0" cy="0"/>
+        </a:xfrm>
+      </p:grpSpPr>
+      <p:sp>
+        <p:nvSpPr>
+          <p:cNvPr id="2" name="af-svg-rect-0001-rect-01" descr="{&quot;autofigure_element_id&quot;:&quot;svg-rect-0001&quot;}"/>
           <p:cNvSpPr/>
           <p:nvPr/>
         </p:nvSpPr>
@@ -3129,12 +3134,13 @@
           <a:lstStyle/>
           <a:p>
             <a:pPr algn="ctr"/>
-          </a:p>
-        </p:txBody>
-      </p:sp>
-      <p:sp>
-        <p:nvSpPr>
-          <p:cNvPr id="3" name="af-task-list-rect-01"/>
+            <a:endParaRPr/>
+          </a:p>
+        </p:txBody>
+      </p:sp>
+      <p:sp>
+        <p:nvSpPr>
+          <p:cNvPr id="3" name="af-task-list-rect-01" descr="{&quot;autofigure_element_id&quot;:&quot;task-list&quot;}"/>
           <p:cNvSpPr/>
           <p:nvPr/>
         </p:nvSpPr>
@@ -3155,6 +3161,7 @@
             <a:solidFill>
               <a:srgbClr val="243B63"/>
             </a:solidFill>
+            <a:miter/>
           </a:ln>
           <a:effectLst/>
         </p:spPr>
@@ -3177,12 +3184,13 @@
           <a:lstStyle/>
           <a:p>
             <a:pPr algn="ctr"/>
-          </a:p>
-        </p:txBody>
-      </p:sp>
-      <p:sp>
-        <p:nvSpPr>
-          <p:cNvPr id="4" name="af-svg-circle-0001-ellipse-01"/>
+            <a:endParaRPr/>
+          </a:p>
+        </p:txBody>
+      </p:sp>
+      <p:sp>
+        <p:nvSpPr>
+          <p:cNvPr id="4" name="af-svg-circle-0001-ellipse-01" descr="{&quot;autofigure_element_id&quot;:&quot;svg-circle-0001&quot;}"/>
           <p:cNvSpPr/>
           <p:nvPr/>
         </p:nvSpPr>
@@ -3201,6 +3209,7 @@
             <a:solidFill>
               <a:srgbClr val="000000"/>
             </a:solidFill>
+            <a:miter/>
           </a:ln>
           <a:effectLst/>
         </p:spPr>
@@ -3223,12 +3232,13 @@
           <a:lstStyle/>
           <a:p>
             <a:pPr algn="ctr"/>
-          </a:p>
-        </p:txBody>
-      </p:sp>
-      <p:sp>
-        <p:nvSpPr>
-          <p:cNvPr id="5" name="af-svg-circle-0002-ellipse-01"/>
+            <a:endParaRPr/>
+          </a:p>
+        </p:txBody>
+      </p:sp>
+      <p:sp>
+        <p:nvSpPr>
+          <p:cNvPr id="5" name="af-svg-circle-0002-ellipse-01" descr="{&quot;autofigure_element_id&quot;:&quot;svg-circle-0002&quot;}"/>
           <p:cNvSpPr/>
           <p:nvPr/>
         </p:nvSpPr>
@@ -3247,6 +3257,7 @@
             <a:solidFill>
               <a:srgbClr val="000000"/>
             </a:solidFill>
+            <a:miter/>
           </a:ln>
           <a:effectLst/>
         </p:spPr>
@@ -3269,12 +3280,13 @@
           <a:lstStyle/>
           <a:p>
             <a:pPr algn="ctr"/>
-          </a:p>
-        </p:txBody>
-      </p:sp>
-      <p:sp>
-        <p:nvSpPr>
-          <p:cNvPr id="6" name="af-svg-path-0001-freeform-01"/>
+            <a:endParaRPr/>
+          </a:p>
+        </p:txBody>
+      </p:sp>
+      <p:sp>
+        <p:nvSpPr>
+          <p:cNvPr id="6" name="af-svg-path-0001-freeform-01" descr="{&quot;autofigure_element_id&quot;:&quot;svg-path-0001&quot;}"/>
           <p:cNvSpPr/>
           <p:nvPr/>
         </p:nvSpPr>
@@ -3315,16 +3327,20 @@
             <a:solidFill>
               <a:srgbClr val="000000"/>
             </a:solidFill>
+            <a:round/>
           </a:ln>
         </p:spPr>
         <p:txBody>
           <a:bodyPr/>
-          <a:p/>
-        </p:txBody>
-      </p:sp>
-      <p:sp>
-        <p:nvSpPr>
-          <p:cNvPr id="7" name="af-svg-text-0001-text-01"/>
+          <a:lstStyle/>
+          <a:p>
+            <a:endParaRPr/>
+          </a:p>
+        </p:txBody>
+      </p:sp>
+      <p:sp>
+        <p:nvSpPr>
+          <p:cNvPr id="7" name="af-svg-text-0001-text-01" descr="{&quot;autofigure_element_id&quot;:&quot;svg-text-0001&quot;}"/>
           <p:cNvSpPr txBox="1"/>
           <p:nvPr/>
         </p:nvSpPr>
@@ -3340,7 +3356,7 @@
           <a:effectLst/>
         </p:spPr>
         <p:txBody>
-          <a:bodyPr wrap="none" anchor="t" lIns="0" rIns="0" tIns="0" bIns="0">
+          <a:bodyPr wrap="none" lIns="0" tIns="0" rIns="0" bIns="0" anchor="t">
             <a:spAutoFit/>
           </a:bodyPr>
           <a:lstStyle/>
@@ -3360,7 +3376,7 @@
       </p:sp>
       <p:sp>
         <p:nvSpPr>
-          <p:cNvPr id="8" name="af-svg-text-0002-text-01"/>
+          <p:cNvPr id="8" name="af-svg-text-0002-text-01" descr="{&quot;autofigure_element_id&quot;:&quot;svg-text-0002&quot;}"/>
           <p:cNvSpPr txBox="1"/>
           <p:nvPr/>
         </p:nvSpPr>
@@ -3376,7 +3392,7 @@
           <a:effectLst/>
         </p:spPr>
         <p:txBody>
-          <a:bodyPr wrap="none" anchor="t" lIns="0" rIns="0" tIns="0" bIns="0">
+          <a:bodyPr wrap="none" lIns="0" tIns="0" rIns="0" bIns="0" anchor="t">
             <a:spAutoFit/>
           </a:bodyPr>
           <a:lstStyle/>
@@ -3396,7 +3412,7 @@
       </p:sp>
       <p:cxnSp>
         <p:nvCxnSpPr>
-          <p:cNvPr id="9" name="af-task-list-to-encoder-connector-01"/>
+          <p:cNvPr id="9" name="af-task-list-to-encoder-connector-01" descr="{&quot;arrow_spec_sha256&quot;:&quot;264991c2b11a136cb01bdbc631d6a4bfe2947a89dae0840ced96ee89abf239bb&quot;,&quot;autofigure_element_id&quot;:&quot;task-list-to-encoder&quot;}"/>
           <p:cNvCxnSpPr/>
           <p:nvPr/>
         </p:nvCxnSpPr>
@@ -3412,6 +3428,7 @@
             <a:solidFill>
               <a:srgbClr val="777777"/>
             </a:solidFill>
+            <a:miter/>
             <a:tailEnd type="triangle" w="med" len="med"/>
           </a:ln>
           <a:effectLst/>
@@ -3433,7 +3450,7 @@
       </p:cxnSp>
       <p:sp>
         <p:nvSpPr>
-          <p:cNvPr id="10" name="af-task-encoder-rect-01"/>
+          <p:cNvPr id="10" name="af-task-encoder-rect-01" descr="{&quot;autofigure_element_id&quot;:&quot;task-encoder&quot;}"/>
           <p:cNvSpPr/>
           <p:nvPr/>
         </p:nvSpPr>
@@ -3474,12 +3491,13 @@
           <a:lstStyle/>
           <a:p>
             <a:pPr algn="ctr"/>
-          </a:p>
-        </p:txBody>
-      </p:sp>
-      <p:sp>
-        <p:nvSpPr>
-          <p:cNvPr id="11" name="af-svg-text-0003-text-01"/>
+            <a:endParaRPr/>
+          </a:p>
+        </p:txBody>
+      </p:sp>
+      <p:sp>
+        <p:nvSpPr>
+          <p:cNvPr id="11" name="af-svg-text-0003-text-01" descr="{&quot;autofigure_element_id&quot;:&quot;svg-text-0003&quot;}"/>
           <p:cNvSpPr txBox="1"/>
           <p:nvPr/>
         </p:nvSpPr>
@@ -3495,7 +3513,7 @@
           <a:effectLst/>
         </p:spPr>
         <p:txBody>
-          <a:bodyPr wrap="none" anchor="t" lIns="0" rIns="0" tIns="0" bIns="0">
+          <a:bodyPr wrap="none" lIns="0" tIns="0" rIns="0" bIns="0" anchor="t">
             <a:spAutoFit/>
           </a:bodyPr>
           <a:lstStyle/>
@@ -3515,7 +3533,7 @@
       </p:sp>
       <p:sp>
         <p:nvSpPr>
-          <p:cNvPr id="12" name="af-svg-text-0004-text-01"/>
+          <p:cNvPr id="12" name="af-svg-text-0004-text-01" descr="{&quot;autofigure_element_id&quot;:&quot;svg-text-0004&quot;}"/>
           <p:cNvSpPr txBox="1"/>
           <p:nvPr/>
         </p:nvSpPr>
@@ -3531,7 +3549,7 @@
           <a:effectLst/>
         </p:spPr>
         <p:txBody>
-          <a:bodyPr wrap="none" anchor="t" lIns="0" rIns="0" tIns="0" bIns="0">
+          <a:bodyPr wrap="none" lIns="0" tIns="0" rIns="0" bIns="0" anchor="t">
             <a:spAutoFit/>
           </a:bodyPr>
           <a:lstStyle/>
@@ -3551,7 +3569,7 @@
       </p:sp>
       <p:cxnSp>
         <p:nvCxnSpPr>
-          <p:cNvPr id="13" name="af-task-encoder-to-token-connector-01"/>
+          <p:cNvPr id="13" name="af-task-encoder-to-token-connector-01" descr="{&quot;arrow_spec_sha256&quot;:&quot;455d9d9f2732094842efa5bc6292c19745e3b6a6c3cb5b78d97724175fc625ce&quot;,&quot;autofigure_element_id&quot;:&quot;task-encoder-to-token&quot;}"/>
           <p:cNvCxnSpPr/>
           <p:nvPr/>
         </p:nvCxnSpPr>
@@ -3567,6 +3585,7 @@
             <a:solidFill>
               <a:srgbClr val="777777"/>
             </a:solidFill>
+            <a:miter/>
             <a:tailEnd type="triangle" w="med" len="med"/>
           </a:ln>
           <a:effectLst/>
@@ -3588,7 +3607,7 @@
       </p:cxnSp>
       <p:sp>
         <p:nvSpPr>
-          <p:cNvPr id="14" name="af-task-token-vector-rect-01"/>
+          <p:cNvPr id="14" name="af-task-token-vector-rect-01" descr="{&quot;autofigure_element_id&quot;:&quot;task-token-vector&quot;}"/>
           <p:cNvSpPr/>
           <p:nvPr/>
         </p:nvSpPr>
@@ -3607,6 +3626,7 @@
             <a:solidFill>
               <a:srgbClr val="233C63"/>
             </a:solidFill>
+            <a:miter/>
           </a:ln>
           <a:effectLst/>
         </p:spPr>
@@ -3629,12 +3649,13 @@
           <a:lstStyle/>
           <a:p>
             <a:pPr algn="ctr"/>
-          </a:p>
-        </p:txBody>
-      </p:sp>
-      <p:sp>
-        <p:nvSpPr>
-          <p:cNvPr id="15" name="af-svg-circle-0003-ellipse-01"/>
+            <a:endParaRPr/>
+          </a:p>
+        </p:txBody>
+      </p:sp>
+      <p:sp>
+        <p:nvSpPr>
+          <p:cNvPr id="15" name="af-svg-circle-0003-ellipse-01" descr="{&quot;autofigure_element_id&quot;:&quot;svg-circle-0003&quot;}"/>
           <p:cNvSpPr/>
           <p:nvPr/>
         </p:nvSpPr>
@@ -3673,12 +3694,13 @@
           <a:lstStyle/>
           <a:p>
             <a:pPr algn="ctr"/>
-          </a:p>
-        </p:txBody>
-      </p:sp>
-      <p:sp>
-        <p:nvSpPr>
-          <p:cNvPr id="16" name="af-svg-circle-0004-ellipse-01"/>
+            <a:endParaRPr/>
+          </a:p>
+        </p:txBody>
+      </p:sp>
+      <p:sp>
+        <p:nvSpPr>
+          <p:cNvPr id="16" name="af-svg-circle-0004-ellipse-01" descr="{&quot;autofigure_element_id&quot;:&quot;svg-circle-0004&quot;}"/>
           <p:cNvSpPr/>
           <p:nvPr/>
         </p:nvSpPr>
@@ -3717,12 +3739,13 @@
           <a:lstStyle/>
           <a:p>
             <a:pPr algn="ctr"/>
-          </a:p>
-        </p:txBody>
-      </p:sp>
-      <p:sp>
-        <p:nvSpPr>
-          <p:cNvPr id="17" name="af-svg-circle-0005-ellipse-01"/>
+            <a:endParaRPr/>
+          </a:p>
+        </p:txBody>
+      </p:sp>
+      <p:sp>
+        <p:nvSpPr>
+          <p:cNvPr id="17" name="af-svg-circle-0005-ellipse-01" descr="{&quot;autofigure_element_id&quot;:&quot;svg-circle-0005&quot;}"/>
           <p:cNvSpPr/>
           <p:nvPr/>
         </p:nvSpPr>
@@ -3761,11 +3784,12 @@
           <a:lstStyle/>
           <a:p>
             <a:pPr algn="ctr"/>
-          </a:p>
-        </p:txBody>
-      </p:sp>
-      <mc:AlternateContent xmlns:mc="http://schemas.openxmlformats.org/markup-compatibility/2006">
-        <mc:Choice xmlns:a14="http://schemas.microsoft.com/office/drawing/2010/main" Requires="a14">
+            <a:endParaRPr/>
+          </a:p>
+        </p:txBody>
+      </p:sp>
+      <mc:AlternateContent xmlns:mc="http://schemas.openxmlformats.org/markup-compatibility/2006" xmlns:a14="http://schemas.microsoft.com/office/drawing/2010/main">
+        <mc:Choice Requires="a14">
           <p:sp>
             <p:nvSpPr>
               <p:cNvPr id="18" name="math:001" descr="AI_AUTOFIGURE_NATIVE_MATH_V1:eyJjb250ZW50X3J1bnMiOlt7ImNhbm9uaWNhbF9sYXRleCI6IlxcdGF1IiwiZm9ybXVsYV9pZCI6IkVRMDAxIiwia2luZCI6Im1hdGgiLCJsYXRleF9zaGEyNTYiOiI1NWQxODIzNTQ1YjViNGMzY2JjNDJiNzg0YzVlODQ2MDVmZmJlOGU1OWQxZGVlOTc4MmNkODc3NDFlZWY5ZGMzIiwibW9kZSI6ImlubGluZSIsIm9tbWxfc2hhMjU2IjoiNjI3NThjYWJiNjU4Yjc3NjgxYmFhNjE0ZmE0MDA1M2M0NDliNWZjZTkzMmYxYzlhNGQxZTNhMTBlZjI2MWFiMiIsInNlbWFudGljX29tbWxfcHJvZmlsZSI6Im9mZmljZS1tYXRoLXNlbWFudGljLXYyIiwic2VtYW50aWNfb21tbF9zaGEyNTYiOiIxZjMyN2Q3M2RkZGIzMWY1YWJjZmZiY2QwODNlMWJmOGIwNWEzMGY2ZGZkMDk2ZWFjZjdlYjljYTBlMTBhMzY4In1dLCJmb3JtdWxhcyI6W3siY2Fub25pY2FsX2xhdGV4IjoiXFx0YXUiLCJmb3JtdWxhX2lkIjoiRVEwMDEiLCJsYXRleF9zaGEyNTYiOiI1NWQxODIzNTQ1YjViNGMzY2JjNDJiNzg0YzVlODQ2MDVmZmJlOGU1OWQxZGVlOTc4MmNkODc3NDFlZWY5ZGMzIiwibW9kZSI6ImlubGluZSIsIm9tbWxfc2hhMjU2IjoiNjI3NThjYWJiNjU4Yjc3NjgxYmFhNjE0ZmE0MDA1M2M0NDliNWZjZTkzMmYxYzlhNGQxZTNhMTBlZjI2MWFiMiIsInNlbWFudGljX29tbWxfcHJvZmlsZSI6Im9mZmljZS1tYXRoLXNlbWFudGljLXYyIiwic2VtYW50aWNfb21tbF9zaGEyNTYiOiIxZjMyN2Q3M2RkZGIzMWY1YWJjZmZiY2QwODNlMWJmOGIwNWEzMGY2ZGZkMDk2ZWFjZjdlYjljYTBlMTBhMzY4In1dLCJraW5kIjoibmF0aXZlX29mZmljZV9tYXRoIiwicGxhY2Vob2xkZXJfbmFtZSI6Im1hdGg6MDAxIiwic2NoZW1hX3ZlcnNpb24iOiIxLjAifQ=="/>
@@ -3784,26 +3808,28 @@
               <a:effectLst/>
             </p:spPr>
             <p:txBody>
-              <a:bodyPr wrap="none" anchor="t" lIns="0" rIns="0" tIns="0" bIns="0">
+              <a:bodyPr wrap="none" lIns="0" tIns="0" rIns="0" bIns="0" anchor="t">
                 <a:spAutoFit/>
               </a:bodyPr>
               <a:lstStyle/>
               <a:p>
                 <a:pPr algn="ctr"/>
                 <a14:m>
-                  <m:oMath xmlns:m="http://schemas.openxmlformats.org/officeDocument/2006/math">
-                    <m:r>
-                      <a:rPr lang="en-US" dirty="0" sz="1650">
-                        <a:solidFill>
-                          <a:srgbClr val="111111"/>
-                        </a:solidFill>
-                        <a:latin typeface="Cambria Math"/>
-                      </a:rPr>
-                      <m:t>τ</m:t>
-                    </m:r>
-                  </m:oMath>
+                  <m:oMathPara xmlns:m="http://schemas.openxmlformats.org/officeDocument/2006/math">
+                    <m:oMath>
+                      <m:r>
+                        <a:rPr lang="en-US" sz="1650" dirty="0">
+                          <a:solidFill>
+                            <a:srgbClr val="111111"/>
+                          </a:solidFill>
+                          <a:latin typeface="Cambria Math"/>
+                        </a:rPr>
+                        <m:t>𝜏</m:t>
+                      </m:r>
+                    </m:oMath>
+                  </m:oMathPara>
                 </a14:m>
-                <a:endParaRPr lang="en-US" dirty="0" sz="1650">
+                <a:endParaRPr lang="en-US" sz="1650" dirty="0">
                   <a:solidFill>
                     <a:srgbClr val="111111"/>
                   </a:solidFill>
@@ -3813,7 +3839,7 @@
             </p:txBody>
           </p:sp>
         </mc:Choice>
-        <mc:Fallback>
+        <mc:Fallback xmlns="">
           <p:sp>
             <p:nvSpPr>
               <p:cNvPr id="18" name="math:001" descr="AI_AUTOFIGURE_MATH_FALLBACK_ONLY_V1:eyJjb250ZW50X3J1bnMiOlt7ImNhbm9uaWNhbF9sYXRleCI6IlxcdGF1IiwiZm9ybXVsYV9pZCI6IkVRMDAxIiwia2luZCI6Im1hdGgiLCJsYXRleF9zaGEyNTYiOiI1NWQxODIzNTQ1YjViNGMzY2JjNDJiNzg0YzVlODQ2MDVmZmJlOGU1OWQxZGVlOTc4MmNkODc3NDFlZWY5ZGMzIiwibW9kZSI6ImlubGluZSIsIm9tbWxfc2hhMjU2IjoiNjI3NThjYWJiNjU4Yjc3NjgxYmFhNjE0ZmE0MDA1M2M0NDliNWZjZTkzMmYxYzlhNGQxZTNhMTBlZjI2MWFiMiIsInNlbWFudGljX29tbWxfcHJvZmlsZSI6Im9mZmljZS1tYXRoLXNlbWFudGljLXYyIiwic2VtYW50aWNfb21tbF9zaGEyNTYiOiIxZjMyN2Q3M2RkZGIzMWY1YWJjZmZiY2QwODNlMWJmOGIwNWEzMGY2ZGZkMDk2ZWFjZjdlYjljYTBlMTBhMzY4In1dLCJmb3JtdWxhcyI6W3siY2Fub25pY2FsX2xhdGV4IjoiXFx0YXUiLCJmb3JtdWxhX2lkIjoiRVEwMDEiLCJsYXRleF9zaGEyNTYiOiI1NWQxODIzNTQ1YjViNGMzY2JjNDJiNzg0YzVlODQ2MDVmZmJlOGU1OWQxZGVlOTc4MmNkODc3NDFlZWY5ZGMzIiwibW9kZSI6ImlubGluZSIsIm9tbWxfc2hhMjU2IjoiNjI3NThjYWJiNjU4Yjc3NjgxYmFhNjE0ZmE0MDA1M2M0NDliNWZjZTkzMmYxYzlhNGQxZTNhMTBlZjI2MWFiMiIsInNlbWFudGljX29tbWxfcHJvZmlsZSI6Im9mZmljZS1tYXRoLXNlbWFudGljLXYyIiwic2VtYW50aWNfb21tbF9zaGEyNTYiOiIxZjMyN2Q3M2RkZGIzMWY1YWJjZmZiY2QwODNlMWJmOGIwNWEzMGY2ZGZkMDk2ZWFjZjdlYjljYTBlMTBhMzY4In1dLCJraW5kIjoibmF0aXZlX29mZmljZV9tYXRoIiwicGxhY2Vob2xkZXJfbmFtZSI6Im1hdGg6MDAxIiwic2NoZW1hX3ZlcnNpb24iOiIxLjAifQ=="/>
@@ -3858,7 +3884,7 @@
       </mc:AlternateContent>
       <p:cxnSp>
         <p:nvCxnSpPr>
-          <p:cNvPr id="19" name="af-task-token-to-mapping-connector-01"/>
+          <p:cNvPr id="19" name="af-task-token-to-mapping-connector-01" descr="{&quot;arrow_spec_sha256&quot;:&quot;0e622d94a816f56e0b320bf8313af0f03574351ef5574c817c618b90f664ba5e&quot;,&quot;autofigure_element_id&quot;:&quot;task-token-to-mapping&quot;}"/>
           <p:cNvCxnSpPr/>
           <p:nvPr/>
         </p:nvCxnSpPr>
@@ -3874,6 +3900,7 @@
             <a:solidFill>
               <a:srgbClr val="777777"/>
             </a:solidFill>
+            <a:miter/>
             <a:tailEnd type="triangle" w="med" len="med"/>
           </a:ln>
           <a:effectLst/>
@@ -3895,7 +3922,7 @@
       </p:cxnSp>
       <p:sp>
         <p:nvSpPr>
-          <p:cNvPr id="20" name="af-task-mapping-rect-01"/>
+          <p:cNvPr id="20" name="af-task-mapping-rect-01" descr="{&quot;autofigure_element_id&quot;:&quot;task-mapping&quot;}"/>
           <p:cNvSpPr/>
           <p:nvPr/>
         </p:nvSpPr>
@@ -3936,12 +3963,13 @@
           <a:lstStyle/>
           <a:p>
             <a:pPr algn="ctr"/>
-          </a:p>
-        </p:txBody>
-      </p:sp>
-      <p:sp>
-        <p:nvSpPr>
-          <p:cNvPr id="21" name="af-task-mapping-label-text-01"/>
+            <a:endParaRPr/>
+          </a:p>
+        </p:txBody>
+      </p:sp>
+      <p:sp>
+        <p:nvSpPr>
+          <p:cNvPr id="21" name="af-task-mapping-label-text-01" descr="{&quot;autofigure_element_id&quot;:&quot;task-mapping-label&quot;}"/>
           <p:cNvSpPr txBox="1"/>
           <p:nvPr/>
         </p:nvSpPr>
@@ -3957,7 +3985,7 @@
           <a:effectLst/>
         </p:spPr>
         <p:txBody>
-          <a:bodyPr wrap="none" anchor="t" lIns="0" rIns="0" tIns="0" bIns="0">
+          <a:bodyPr wrap="none" lIns="0" tIns="0" rIns="0" bIns="0" anchor="t">
             <a:spAutoFit/>
           </a:bodyPr>
           <a:lstStyle/>
@@ -3975,8 +4003,8 @@
           </a:p>
         </p:txBody>
       </p:sp>
-      <mc:AlternateContent xmlns:mc="http://schemas.openxmlformats.org/markup-compatibility/2006">
-        <mc:Choice xmlns:a14="http://schemas.microsoft.com/office/drawing/2010/main" Requires="a14">
+      <mc:AlternateContent xmlns:mc="http://schemas.openxmlformats.org/markup-compatibility/2006" xmlns:a14="http://schemas.microsoft.com/office/drawing/2010/main">
+        <mc:Choice Requires="a14">
           <p:sp>
             <p:nvSpPr>
               <p:cNvPr id="22" name="math:002" descr="AI_AUTOFIGURE_NATIVE_MATH_V1:eyJjb250ZW50X3J1bnMiOlt7ImNhbm9uaWNhbF9sYXRleCI6ImZfe21hcH0iLCJmb3JtdWxhX2lkIjoiRVEwMDIiLCJraW5kIjoibWF0aCIsImxhdGV4X3NoYTI1NiI6IjU3MWIwZGZjYzU5NDUzMDFiMDU2Y2I1Mzc2YzZhYzQ1MDM5ODY0ZTYxYjU0OGQ2ZWM2NDhhNGQ2NzgxZTAyZmQiLCJtb2RlIjoiaW5saW5lIiwib21tbF9zaGEyNTYiOiIwYjY0N2UwMjhhZjI2MTk5NjIyNDYwZjhhNGFkYzNkN2I1M2U3MGMxZTRlM2RjYjcyN2IwZjlmOWMzODc3OGJjIiwic2VtYW50aWNfb21tbF9wcm9maWxlIjoib2ZmaWNlLW1hdGgtc2VtYW50aWMtdjIiLCJzZW1hbnRpY19vbW1sX3NoYTI1NiI6ImI4Yzg4NzY2ZWQ2NDRiZGVlYTJkZThkMTUyOWYyYzg5N2U5NzM4ODYyMTllOTI1ODBmODExZjAyOGVhNmRjYzcifV0sImZvcm11bGFzIjpbeyJjYW5vbmljYWxfbGF0ZXgiOiJmX3ttYXB9IiwiZm9ybXVsYV9pZCI6IkVRMDAyIiwibGF0ZXhfc2hhMjU2IjoiNTcxYjBkZmNjNTk0NTMwMWIwNTZjYjUzNzZjNmFjNDUwMzk4NjRlNjFiNTQ4ZDZlYzY0OGE0ZDY3ODFlMDJmZCIsIm1vZGUiOiJpbmxpbmUiLCJvbW1sX3NoYTI1NiI6IjBiNjQ3ZTAyOGFmMjYxOTk2MjI0NjBmOGE0YWRjM2Q3YjUzZTcwYzFlNGUzZGNiNzI3YjBmOWY5YzM4Nzc4YmMiLCJzZW1hbnRpY19vbW1sX3Byb2ZpbGUiOiJvZmZpY2UtbWF0aC1zZW1hbnRpYy12MiIsInNlbWFudGljX29tbWxfc2hhMjU2IjoiYjhjODg3NjZlZDY0NGJkZWVhMmRlOGQxNTI5ZjJjODk3ZTk3Mzg4NjIxOWU5MjU4MGY4MTFmMDI4ZWE2ZGNjNyJ9XSwia2luZCI6Im5hdGl2ZV9vZmZpY2VfbWF0aCIsInBsYWNlaG9sZGVyX25hbWUiOiJtYXRoOjAwMiIsInNjaGVtYV92ZXJzaW9uIjoiMS4wIn0="/>
@@ -3995,41 +4023,53 @@
               <a:effectLst/>
             </p:spPr>
             <p:txBody>
-              <a:bodyPr wrap="none" anchor="t" lIns="0" rIns="0" tIns="0" bIns="0">
+              <a:bodyPr wrap="none" lIns="0" tIns="0" rIns="0" bIns="0" anchor="t">
                 <a:spAutoFit/>
               </a:bodyPr>
               <a:lstStyle/>
               <a:p>
                 <a:pPr algn="l"/>
                 <a14:m>
-                  <m:oMath xmlns:m="http://schemas.openxmlformats.org/officeDocument/2006/math">
-                    <m:sSub>
-                      <m:e>
-                        <m:r>
-                          <a:rPr lang="en-US" dirty="0" sz="1500">
-                            <a:solidFill>
-                              <a:srgbClr val="111111"/>
-                            </a:solidFill>
-                            <a:latin typeface="Cambria Math"/>
-                          </a:rPr>
-                          <m:t>f</m:t>
-                        </m:r>
-                      </m:e>
-                      <m:sub>
-                        <m:r>
-                          <a:rPr lang="en-US" dirty="0" sz="1500">
-                            <a:solidFill>
-                              <a:srgbClr val="111111"/>
-                            </a:solidFill>
-                            <a:latin typeface="Cambria Math"/>
-                          </a:rPr>
-                          <m:t>map</m:t>
-                        </m:r>
-                      </m:sub>
-                    </m:sSub>
-                  </m:oMath>
+                  <m:oMathPara xmlns:m="http://schemas.openxmlformats.org/officeDocument/2006/math">
+                    <m:oMath>
+                      <m:sSub>
+                        <m:sSubPr>
+                          <m:ctrlPr>
+                            <a:rPr lang="en-US" sz="1500" dirty="0">
+                              <a:solidFill>
+                                <a:srgbClr val="111111"/>
+                              </a:solidFill>
+                              <a:latin typeface="Cambria Math"/>
+                            </a:rPr>
+                          </m:ctrlPr>
+                        </m:sSubPr>
+                        <m:e>
+                          <m:r>
+                            <a:rPr lang="en-US" sz="1500" dirty="0">
+                              <a:solidFill>
+                                <a:srgbClr val="111111"/>
+                              </a:solidFill>
+                              <a:latin typeface="Cambria Math"/>
+                            </a:rPr>
+                            <m:t>𝑓</m:t>
+                          </m:r>
+                        </m:e>
+                        <m:sub>
+                          <m:r>
+                            <a:rPr lang="en-US" sz="1500" dirty="0">
+                              <a:solidFill>
+                                <a:srgbClr val="111111"/>
+                              </a:solidFill>
+                              <a:latin typeface="Cambria Math"/>
+                            </a:rPr>
+                            <m:t>𝑚𝑎𝑝</m:t>
+                          </m:r>
+                        </m:sub>
+                      </m:sSub>
+                    </m:oMath>
+                  </m:oMathPara>
                 </a14:m>
-                <a:endParaRPr lang="en-US" dirty="0" sz="1500">
+                <a:endParaRPr lang="en-US" sz="1500" dirty="0">
                   <a:solidFill>
                     <a:srgbClr val="111111"/>
                   </a:solidFill>
@@ -4039,7 +4079,7 @@
             </p:txBody>
           </p:sp>
         </mc:Choice>
-        <mc:Fallback>
+        <mc:Fallback xmlns="">
           <p:sp>
             <p:nvSpPr>
               <p:cNvPr id="22" name="math:002" descr="AI_AUTOFIGURE_MATH_FALLBACK_ONLY_V1:eyJjb250ZW50X3J1bnMiOlt7ImNhbm9uaWNhbF9sYXRleCI6ImZfe21hcH0iLCJmb3JtdWxhX2lkIjoiRVEwMDIiLCJraW5kIjoibWF0aCIsImxhdGV4X3NoYTI1NiI6IjU3MWIwZGZjYzU5NDUzMDFiMDU2Y2I1Mzc2YzZhYzQ1MDM5ODY0ZTYxYjU0OGQ2ZWM2NDhhNGQ2NzgxZTAyZmQiLCJtb2RlIjoiaW5saW5lIiwib21tbF9zaGEyNTYiOiIwYjY0N2UwMjhhZjI2MTk5NjIyNDYwZjhhNGFkYzNkN2I1M2U3MGMxZTRlM2RjYjcyN2IwZjlmOWMzODc3OGJjIiwic2VtYW50aWNfb21tbF9wcm9maWxlIjoib2ZmaWNlLW1hdGgtc2VtYW50aWMtdjIiLCJzZW1hbnRpY19vbW1sX3NoYTI1NiI6ImI4Yzg4NzY2ZWQ2NDRiZGVlYTJkZThkMTUyOWYyYzg5N2U5NzM4ODYyMTllOTI1ODBmODExZjAyOGVhNmRjYzcifV0sImZvcm11bGFzIjpbeyJjYW5vbmljYWxfbGF0ZXgiOiJmX3ttYXB9IiwiZm9ybXVsYV9pZCI6IkVRMDAyIiwibGF0ZXhfc2hhMjU2IjoiNTcxYjBkZmNjNTk0NTMwMWIwNTZjYjUzNzZjNmFjNDUwMzk4NjRlNjFiNTQ4ZDZlYzY0OGE0ZDY3ODFlMDJmZCIsIm1vZGUiOiJpbmxpbmUiLCJvbW1sX3NoYTI1NiI6IjBiNjQ3ZTAyOGFmMjYxOTk2MjI0NjBmOGE0YWRjM2Q3YjUzZTcwYzFlNGUzZGNiNzI3YjBmOWY5YzM4Nzc4YmMiLCJzZW1hbnRpY19vbW1sX3Byb2ZpbGUiOiJvZmZpY2UtbWF0aC1zZW1hbnRpYy12MiIsInNlbWFudGljX29tbWxfc2hhMjU2IjoiYjhjODg3NjZlZDY0NGJkZWVhMmRlOGQxNTI5ZjJjODk3ZTk3Mzg4NjIxOWU5MjU4MGY4MTFmMDI4ZWE2ZGNjNyJ9XSwia2luZCI6Im5hdGl2ZV9vZmZpY2VfbWF0aCIsInBsYWNlaG9sZGVyX25hbWUiOiJtYXRoOjAwMiIsInNjaGVtYV92ZXJzaW9uIjoiMS4wIn0="/>
@@ -4084,7 +4124,7 @@
       </mc:AlternateContent>
       <p:cxnSp>
         <p:nvCxnSpPr>
-          <p:cNvPr id="23" name="af-task-token-to-allocator-connector-01"/>
+          <p:cNvPr id="23" name="af-task-token-to-allocator-connector-01" descr="{&quot;arrow_spec_sha256&quot;:&quot;0b0911019c760a13a025e9af217125adf868db0623f0efe9fda99e1ee37c43fb&quot;,&quot;autofigure_element_id&quot;:&quot;task-token-to-allocator&quot;}"/>
           <p:cNvCxnSpPr/>
           <p:nvPr/>
         </p:nvCxnSpPr>
@@ -4100,6 +4140,7 @@
             <a:solidFill>
               <a:srgbClr val="3567B7"/>
             </a:solidFill>
+            <a:miter/>
             <a:tailEnd type="triangle" w="med" len="med"/>
           </a:ln>
           <a:effectLst/>
@@ -4121,7 +4162,7 @@
       </p:cxnSp>
       <p:sp>
         <p:nvSpPr>
-          <p:cNvPr id="24" name="af-svg-rect-0006-rect-01"/>
+          <p:cNvPr id="24" name="af-svg-rect-0006-rect-01" descr="{&quot;autofigure_element_id&quot;:&quot;svg-rect-0006&quot;}"/>
           <p:cNvSpPr/>
           <p:nvPr/>
         </p:nvSpPr>
@@ -4162,12 +4203,13 @@
           <a:lstStyle/>
           <a:p>
             <a:pPr algn="ctr"/>
-          </a:p>
-        </p:txBody>
-      </p:sp>
-      <p:sp>
-        <p:nvSpPr>
-          <p:cNvPr id="25" name="af-svg-text-0008-text-01"/>
+            <a:endParaRPr/>
+          </a:p>
+        </p:txBody>
+      </p:sp>
+      <p:sp>
+        <p:nvSpPr>
+          <p:cNvPr id="25" name="af-svg-text-0008-text-01" descr="{&quot;autofigure_element_id&quot;:&quot;svg-text-0008&quot;}"/>
           <p:cNvSpPr txBox="1"/>
           <p:nvPr/>
         </p:nvSpPr>
@@ -4183,7 +4225,7 @@
           <a:effectLst/>
         </p:spPr>
         <p:txBody>
-          <a:bodyPr wrap="none" anchor="t" lIns="0" rIns="0" tIns="0" bIns="0">
+          <a:bodyPr wrap="none" lIns="0" tIns="0" rIns="0" bIns="0" anchor="t">
             <a:spAutoFit/>
           </a:bodyPr>
           <a:lstStyle/>
@@ -4203,7 +4245,7 @@
       </p:sp>
       <p:sp>
         <p:nvSpPr>
-          <p:cNvPr id="26" name="af-svg-text-0009-text-01"/>
+          <p:cNvPr id="26" name="af-svg-text-0009-text-01" descr="{&quot;autofigure_element_id&quot;:&quot;svg-text-0009&quot;}"/>
           <p:cNvSpPr txBox="1"/>
           <p:nvPr/>
         </p:nvSpPr>
@@ -4219,7 +4261,7 @@
           <a:effectLst/>
         </p:spPr>
         <p:txBody>
-          <a:bodyPr wrap="none" anchor="t" lIns="0" rIns="0" tIns="0" bIns="0">
+          <a:bodyPr wrap="none" lIns="0" tIns="0" rIns="0" bIns="0" anchor="t">
             <a:spAutoFit/>
           </a:bodyPr>
           <a:lstStyle/>
@@ -4239,7 +4281,7 @@
       </p:sp>
       <p:sp>
         <p:nvSpPr>
-          <p:cNvPr id="27" name="af-svg-rect-0007-rect-01"/>
+          <p:cNvPr id="27" name="af-svg-rect-0007-rect-01" descr="{&quot;autofigure_element_id&quot;:&quot;svg-rect-0007&quot;}"/>
           <p:cNvSpPr/>
           <p:nvPr/>
         </p:nvSpPr>
@@ -4280,12 +4322,13 @@
           <a:lstStyle/>
           <a:p>
             <a:pPr algn="ctr"/>
-          </a:p>
-        </p:txBody>
-      </p:sp>
-      <p:sp>
-        <p:nvSpPr>
-          <p:cNvPr id="28" name="af-svg-text-0010-text-01"/>
+            <a:endParaRPr/>
+          </a:p>
+        </p:txBody>
+      </p:sp>
+      <p:sp>
+        <p:nvSpPr>
+          <p:cNvPr id="28" name="af-svg-text-0010-text-01" descr="{&quot;autofigure_element_id&quot;:&quot;svg-text-0010&quot;}"/>
           <p:cNvSpPr txBox="1"/>
           <p:nvPr/>
         </p:nvSpPr>
@@ -4301,7 +4344,7 @@
           <a:effectLst/>
         </p:spPr>
         <p:txBody>
-          <a:bodyPr wrap="none" anchor="t" lIns="0" rIns="0" tIns="0" bIns="0">
+          <a:bodyPr wrap="none" lIns="0" tIns="0" rIns="0" bIns="0" anchor="t">
             <a:spAutoFit/>
           </a:bodyPr>
           <a:lstStyle/>
@@ -4321,7 +4364,7 @@
       </p:sp>
       <p:sp>
         <p:nvSpPr>
-          <p:cNvPr id="29" name="af-svg-text-0011-text-01"/>
+          <p:cNvPr id="29" name="af-svg-text-0011-text-01" descr="{&quot;autofigure_element_id&quot;:&quot;svg-text-0011&quot;}"/>
           <p:cNvSpPr txBox="1"/>
           <p:nvPr/>
         </p:nvSpPr>
@@ -4337,7 +4380,7 @@
           <a:effectLst/>
         </p:spPr>
         <p:txBody>
-          <a:bodyPr wrap="none" anchor="t" lIns="0" rIns="0" tIns="0" bIns="0">
+          <a:bodyPr wrap="none" lIns="0" tIns="0" rIns="0" bIns="0" anchor="t">
             <a:spAutoFit/>
           </a:bodyPr>
           <a:lstStyle/>
@@ -4357,7 +4400,7 @@
       </p:sp>
       <p:sp>
         <p:nvSpPr>
-          <p:cNvPr id="30" name="af-task-aware-modular-joint-panel-rect-01"/>
+          <p:cNvPr id="30" name="af-task-aware-modular-joint-panel-rect-01" descr="{&quot;autofigure_element_id&quot;:&quot;task-aware-modular-joint-panel&quot;}"/>
           <p:cNvSpPr/>
           <p:nvPr/>
         </p:nvSpPr>
@@ -4375,6 +4418,7 @@
               <a:srgbClr val="203A66"/>
             </a:solidFill>
             <a:prstDash val="sysDot"/>
+            <a:miter/>
           </a:ln>
           <a:effectLst/>
         </p:spPr>
@@ -4397,12 +4441,13 @@
           <a:lstStyle/>
           <a:p>
             <a:pPr algn="ctr"/>
-          </a:p>
-        </p:txBody>
-      </p:sp>
-      <p:sp>
-        <p:nvSpPr>
-          <p:cNvPr id="31" name="af-task-aware-behavior-panel-rect-01"/>
+            <a:endParaRPr/>
+          </a:p>
+        </p:txBody>
+      </p:sp>
+      <p:sp>
+        <p:nvSpPr>
+          <p:cNvPr id="31" name="af-task-aware-behavior-panel-rect-01" descr="{&quot;autofigure_element_id&quot;:&quot;task-aware-behavior-panel&quot;}"/>
           <p:cNvSpPr/>
           <p:nvPr/>
         </p:nvSpPr>
@@ -4420,6 +4465,7 @@
               <a:srgbClr val="203A66"/>
             </a:solidFill>
             <a:prstDash val="sysDot"/>
+            <a:miter/>
           </a:ln>
           <a:effectLst/>
         </p:spPr>
@@ -4442,12 +4488,13 @@
           <a:lstStyle/>
           <a:p>
             <a:pPr algn="ctr"/>
-          </a:p>
-        </p:txBody>
-      </p:sp>
-      <p:sp>
-        <p:nvSpPr>
-          <p:cNvPr id="32" name="af-svg-text-0012-text-01"/>
+            <a:endParaRPr/>
+          </a:p>
+        </p:txBody>
+      </p:sp>
+      <p:sp>
+        <p:nvSpPr>
+          <p:cNvPr id="32" name="af-svg-text-0012-text-01" descr="{&quot;autofigure_element_id&quot;:&quot;svg-text-0012&quot;}"/>
           <p:cNvSpPr txBox="1"/>
           <p:nvPr/>
         </p:nvSpPr>
@@ -4463,7 +4510,7 @@
           <a:effectLst/>
         </p:spPr>
         <p:txBody>
-          <a:bodyPr wrap="none" anchor="t" lIns="0" rIns="0" tIns="0" bIns="0">
+          <a:bodyPr wrap="none" lIns="0" tIns="0" rIns="0" bIns="0" anchor="t">
             <a:spAutoFit/>
           </a:bodyPr>
           <a:lstStyle/>
@@ -4483,7 +4530,7 @@
       </p:sp>
       <p:sp>
         <p:nvSpPr>
-          <p:cNvPr id="33" name="af-allocator-header-rect-01"/>
+          <p:cNvPr id="33" name="af-allocator-header-rect-01" descr="{&quot;autofigure_element_id&quot;:&quot;allocator-header&quot;}"/>
           <p:cNvSpPr/>
           <p:nvPr/>
         </p:nvSpPr>
@@ -4502,6 +4549,7 @@
             <a:solidFill>
               <a:srgbClr val="3F6FC4"/>
             </a:solidFill>
+            <a:miter/>
           </a:ln>
           <a:effectLst/>
         </p:spPr>
@@ -4524,12 +4572,13 @@
           <a:lstStyle/>
           <a:p>
             <a:pPr algn="ctr"/>
-          </a:p>
-        </p:txBody>
-      </p:sp>
-      <p:sp>
-        <p:nvSpPr>
-          <p:cNvPr id="34" name="af-svg-text-0013-text-01"/>
+            <a:endParaRPr/>
+          </a:p>
+        </p:txBody>
+      </p:sp>
+      <p:sp>
+        <p:nvSpPr>
+          <p:cNvPr id="34" name="af-svg-text-0013-text-01" descr="{&quot;autofigure_element_id&quot;:&quot;svg-text-0013&quot;}"/>
           <p:cNvSpPr txBox="1"/>
           <p:nvPr/>
         </p:nvSpPr>
@@ -4545,7 +4594,7 @@
           <a:effectLst/>
         </p:spPr>
         <p:txBody>
-          <a:bodyPr wrap="none" anchor="t" lIns="0" rIns="0" tIns="0" bIns="0">
+          <a:bodyPr wrap="none" lIns="0" tIns="0" rIns="0" bIns="0" anchor="t">
             <a:spAutoFit/>
           </a:bodyPr>
           <a:lstStyle/>
@@ -4565,7 +4614,7 @@
       </p:sp>
       <p:sp>
         <p:nvSpPr>
-          <p:cNvPr id="35" name="af-svg-polygon-0001-freeform-01"/>
+          <p:cNvPr id="35" name="af-svg-polygon-0001-freeform-01" descr="{&quot;autofigure_element_id&quot;:&quot;svg-polygon-0001&quot;}"/>
           <p:cNvSpPr/>
           <p:nvPr/>
         </p:nvSpPr>
@@ -4616,23 +4665,26 @@
         </p:spPr>
         <p:txBody>
           <a:bodyPr/>
-          <a:p/>
+          <a:lstStyle/>
+          <a:p>
+            <a:endParaRPr/>
+          </a:p>
         </p:txBody>
       </p:sp>
       <p:pic>
         <p:nvPicPr>
-          <p:cNvPr id="36" name="af-atomic-observation-atomic-raster-01" descr="image.png"/>
+          <p:cNvPr id="36" name="af-atomic-observation-atomic-raster-01" descr="{&quot;autofigure_element_id&quot;:&quot;atomic:observation&quot;}"/>
           <p:cNvPicPr>
             <a:picLocks noChangeAspect="1"/>
           </p:cNvPicPr>
           <p:nvPr>
             <p:custDataLst>
-              <p:tags r:id="rId3"/>
+              <p:tags r:id="rId1"/>
             </p:custDataLst>
           </p:nvPr>
         </p:nvPicPr>
         <p:blipFill>
-          <a:blip r:embed="rId2"/>
+          <a:blip r:embed="rId4"/>
           <a:stretch>
             <a:fillRect/>
           </a:stretch>
@@ -4649,7 +4701,7 @@
       </p:pic>
       <p:sp>
         <p:nvSpPr>
-          <p:cNvPr id="37" name="af-svg-text-0014-text-01"/>
+          <p:cNvPr id="37" name="af-svg-text-0014-text-01" descr="{&quot;autofigure_element_id&quot;:&quot;svg-text-0014&quot;}"/>
           <p:cNvSpPr txBox="1"/>
           <p:nvPr/>
         </p:nvSpPr>
@@ -4665,7 +4717,7 @@
           <a:effectLst/>
         </p:spPr>
         <p:txBody>
-          <a:bodyPr wrap="none" anchor="t" lIns="0" rIns="0" tIns="0" bIns="0">
+          <a:bodyPr wrap="none" lIns="0" tIns="0" rIns="0" bIns="0" anchor="t">
             <a:spAutoFit/>
           </a:bodyPr>
           <a:lstStyle/>
@@ -4685,7 +4737,7 @@
       </p:sp>
       <p:sp>
         <p:nvSpPr>
-          <p:cNvPr id="38" name="af-svg-text-0015-text-01"/>
+          <p:cNvPr id="38" name="af-svg-text-0015-text-01" descr="{&quot;autofigure_element_id&quot;:&quot;svg-text-0015&quot;}"/>
           <p:cNvSpPr txBox="1"/>
           <p:nvPr/>
         </p:nvSpPr>
@@ -4701,7 +4753,7 @@
           <a:effectLst/>
         </p:spPr>
         <p:txBody>
-          <a:bodyPr wrap="none" anchor="t" lIns="0" rIns="0" tIns="0" bIns="0">
+          <a:bodyPr wrap="none" lIns="0" tIns="0" rIns="0" bIns="0" anchor="t">
             <a:spAutoFit/>
           </a:bodyPr>
           <a:lstStyle/>
@@ -4721,7 +4773,7 @@
       </p:sp>
       <p:cxnSp>
         <p:nvCxnSpPr>
-          <p:cNvPr id="39" name="af-observation-to-mllm-connector-01"/>
+          <p:cNvPr id="39" name="af-observation-to-mllm-connector-01" descr="{&quot;arrow_spec_sha256&quot;:&quot;e77b5cb0f1f7264a9785b35ac5aa9f71999a3e1f6b8a30977b218e620bedf5b9&quot;,&quot;autofigure_element_id&quot;:&quot;observation-to-mllm&quot;}"/>
           <p:cNvCxnSpPr/>
           <p:nvPr/>
         </p:nvCxnSpPr>
@@ -4737,6 +4789,7 @@
             <a:solidFill>
               <a:srgbClr val="EF7D2B"/>
             </a:solidFill>
+            <a:round/>
             <a:tailEnd type="triangle" w="med" len="med"/>
           </a:ln>
           <a:effectLst/>
@@ -4758,7 +4811,7 @@
       </p:cxnSp>
       <p:cxnSp>
         <p:nvCxnSpPr>
-          <p:cNvPr id="40" name="af-observation-to-wm-connector-01"/>
+          <p:cNvPr id="40" name="af-observation-to-wm-connector-01" descr="{&quot;arrow_spec_sha256&quot;:&quot;fb017d6e6571dba11e24253416d46f6ca1f5f525586b7f3334ebf97f058a5f90&quot;,&quot;autofigure_element_id&quot;:&quot;observation-to-wm&quot;}"/>
           <p:cNvCxnSpPr/>
           <p:nvPr/>
         </p:nvCxnSpPr>
@@ -4774,6 +4827,7 @@
             <a:solidFill>
               <a:srgbClr val="3567B7"/>
             </a:solidFill>
+            <a:round/>
             <a:tailEnd type="triangle" w="med" len="med"/>
           </a:ln>
           <a:effectLst/>
@@ -4795,7 +4849,7 @@
       </p:cxnSp>
       <p:sp>
         <p:nvSpPr>
-          <p:cNvPr id="41" name="af-mllm-encoder-rect-01"/>
+          <p:cNvPr id="41" name="af-mllm-encoder-rect-01" descr="{&quot;autofigure_element_id&quot;:&quot;mllm-encoder&quot;}"/>
           <p:cNvSpPr/>
           <p:nvPr/>
         </p:nvSpPr>
@@ -4836,12 +4890,13 @@
           <a:lstStyle/>
           <a:p>
             <a:pPr algn="ctr"/>
-          </a:p>
-        </p:txBody>
-      </p:sp>
-      <p:sp>
-        <p:nvSpPr>
-          <p:cNvPr id="42" name="af-svg-text-0016-text-01"/>
+            <a:endParaRPr/>
+          </a:p>
+        </p:txBody>
+      </p:sp>
+      <p:sp>
+        <p:nvSpPr>
+          <p:cNvPr id="42" name="af-svg-text-0016-text-01" descr="{&quot;autofigure_element_id&quot;:&quot;svg-text-0016&quot;}"/>
           <p:cNvSpPr txBox="1"/>
           <p:nvPr/>
         </p:nvSpPr>
@@ -4857,7 +4912,7 @@
           <a:effectLst/>
         </p:spPr>
         <p:txBody>
-          <a:bodyPr wrap="none" anchor="t" lIns="0" rIns="0" tIns="0" bIns="0">
+          <a:bodyPr wrap="none" lIns="0" tIns="0" rIns="0" bIns="0" anchor="t">
             <a:spAutoFit/>
           </a:bodyPr>
           <a:lstStyle/>
@@ -4877,7 +4932,7 @@
       </p:sp>
       <p:sp>
         <p:nvSpPr>
-          <p:cNvPr id="43" name="af-svg-text-0017-text-01"/>
+          <p:cNvPr id="43" name="af-svg-text-0017-text-01" descr="{&quot;autofigure_element_id&quot;:&quot;svg-text-0017&quot;}"/>
           <p:cNvSpPr txBox="1"/>
           <p:nvPr/>
         </p:nvSpPr>
@@ -4893,7 +4948,7 @@
           <a:effectLst/>
         </p:spPr>
         <p:txBody>
-          <a:bodyPr wrap="none" anchor="t" lIns="0" rIns="0" tIns="0" bIns="0">
+          <a:bodyPr wrap="none" lIns="0" tIns="0" rIns="0" bIns="0" anchor="t">
             <a:spAutoFit/>
           </a:bodyPr>
           <a:lstStyle/>
@@ -4913,7 +4968,7 @@
       </p:sp>
       <p:sp>
         <p:nvSpPr>
-          <p:cNvPr id="44" name="af-wm-encoder-rect-01"/>
+          <p:cNvPr id="44" name="af-wm-encoder-rect-01" descr="{&quot;autofigure_element_id&quot;:&quot;wm-encoder&quot;}"/>
           <p:cNvSpPr/>
           <p:nvPr/>
         </p:nvSpPr>
@@ -4954,12 +5009,13 @@
           <a:lstStyle/>
           <a:p>
             <a:pPr algn="ctr"/>
-          </a:p>
-        </p:txBody>
-      </p:sp>
-      <p:sp>
-        <p:nvSpPr>
-          <p:cNvPr id="45" name="af-svg-text-0018-text-01"/>
+            <a:endParaRPr/>
+          </a:p>
+        </p:txBody>
+      </p:sp>
+      <p:sp>
+        <p:nvSpPr>
+          <p:cNvPr id="45" name="af-svg-text-0018-text-01" descr="{&quot;autofigure_element_id&quot;:&quot;svg-text-0018&quot;}"/>
           <p:cNvSpPr txBox="1"/>
           <p:nvPr/>
         </p:nvSpPr>
@@ -4975,7 +5031,7 @@
           <a:effectLst/>
         </p:spPr>
         <p:txBody>
-          <a:bodyPr wrap="none" anchor="t" lIns="0" rIns="0" tIns="0" bIns="0">
+          <a:bodyPr wrap="none" lIns="0" tIns="0" rIns="0" bIns="0" anchor="t">
             <a:spAutoFit/>
           </a:bodyPr>
           <a:lstStyle/>
@@ -4995,7 +5051,7 @@
       </p:sp>
       <p:sp>
         <p:nvSpPr>
-          <p:cNvPr id="46" name="af-svg-text-0019-text-01"/>
+          <p:cNvPr id="46" name="af-svg-text-0019-text-01" descr="{&quot;autofigure_element_id&quot;:&quot;svg-text-0019&quot;}"/>
           <p:cNvSpPr txBox="1"/>
           <p:nvPr/>
         </p:nvSpPr>
@@ -5011,7 +5067,7 @@
           <a:effectLst/>
         </p:spPr>
         <p:txBody>
-          <a:bodyPr wrap="none" anchor="t" lIns="0" rIns="0" tIns="0" bIns="0">
+          <a:bodyPr wrap="none" lIns="0" tIns="0" rIns="0" bIns="0" anchor="t">
             <a:spAutoFit/>
           </a:bodyPr>
           <a:lstStyle/>
@@ -5031,7 +5087,7 @@
       </p:sp>
       <p:cxnSp>
         <p:nvCxnSpPr>
-          <p:cNvPr id="47" name="af-svg-line-0005-connector-01"/>
+          <p:cNvPr id="47" name="af-svg-line-0005-connector-01" descr="{&quot;arrow_spec_sha256&quot;:&quot;b8bd873458522a8d3aeb74fd05c4b3823128c5368626c261cabf52676a9f2665&quot;,&quot;autofigure_element_id&quot;:&quot;svg-line-0005&quot;}"/>
           <p:cNvCxnSpPr/>
           <p:nvPr/>
         </p:nvCxnSpPr>
@@ -5047,6 +5103,7 @@
             <a:solidFill>
               <a:srgbClr val="EF7D2B"/>
             </a:solidFill>
+            <a:miter/>
             <a:tailEnd type="triangle" w="med" len="med"/>
           </a:ln>
           <a:effectLst/>
@@ -5068,7 +5125,7 @@
       </p:cxnSp>
       <p:cxnSp>
         <p:nvCxnSpPr>
-          <p:cNvPr id="48" name="af-svg-line-0006-connector-01"/>
+          <p:cNvPr id="48" name="af-svg-line-0006-connector-01" descr="{&quot;arrow_spec_sha256&quot;:&quot;4102cc03dac609b9ef4e042bf142374a67a1efd2785053fa59f9ab67997531e0&quot;,&quot;autofigure_element_id&quot;:&quot;svg-line-0006&quot;}"/>
           <p:cNvCxnSpPr/>
           <p:nvPr/>
         </p:nvCxnSpPr>
@@ -5084,6 +5141,7 @@
             <a:solidFill>
               <a:srgbClr val="3567B7"/>
             </a:solidFill>
+            <a:miter/>
             <a:tailEnd type="triangle" w="med" len="med"/>
           </a:ln>
           <a:effectLst/>
@@ -5105,7 +5163,7 @@
       </p:cxnSp>
       <p:sp>
         <p:nvSpPr>
-          <p:cNvPr id="49" name="af-e-v-vector-rect-01"/>
+          <p:cNvPr id="49" name="af-e-v-vector-rect-01" descr="{&quot;autofigure_element_id&quot;:&quot;e-v-vector&quot;}"/>
           <p:cNvSpPr/>
           <p:nvPr/>
         </p:nvSpPr>
@@ -5124,6 +5182,7 @@
             <a:solidFill>
               <a:srgbClr val="233A64"/>
             </a:solidFill>
+            <a:miter/>
           </a:ln>
           <a:effectLst/>
         </p:spPr>
@@ -5146,11 +5205,12 @@
           <a:lstStyle/>
           <a:p>
             <a:pPr algn="ctr"/>
-          </a:p>
-        </p:txBody>
-      </p:sp>
-      <mc:AlternateContent xmlns:mc="http://schemas.openxmlformats.org/markup-compatibility/2006">
-        <mc:Choice xmlns:a14="http://schemas.microsoft.com/office/drawing/2010/main" Requires="a14">
+            <a:endParaRPr/>
+          </a:p>
+        </p:txBody>
+      </p:sp>
+      <mc:AlternateContent xmlns:mc="http://schemas.openxmlformats.org/markup-compatibility/2006" xmlns:a14="http://schemas.microsoft.com/office/drawing/2010/main">
+        <mc:Choice Requires="a14">
           <p:sp>
             <p:nvSpPr>
               <p:cNvPr id="50" name="math:003" descr="AI_AUTOFIGURE_NATIVE_MATH_V1:eyJjb250ZW50X3J1bnMiOlt7ImNhbm9uaWNhbF9sYXRleCI6ImVfe3Z9IiwiZm9ybXVsYV9pZCI6IkVRMDAzIiwia2luZCI6Im1hdGgiLCJsYXRleF9zaGEyNTYiOiIyZWZkODE5ZTcyNTZiNTkwYTRmNTFkMTVkMWIzZjdmYzgwODhhMGE0Mzc3ZWQyZTExMWUwZmQ5NDAyNjc5YzhkIiwibW9kZSI6ImlubGluZSIsIm9tbWxfc2hhMjU2IjoiNjM1YTA1MmI0MjllMzI3Y2I5ZmZlNTI5MTI0YjJjOGRlMDBlYzlkMmRiZDI3ZjE1MWJmZTM4ZmIwZjhjNzc3MiIsInNlbWFudGljX29tbWxfcHJvZmlsZSI6Im9mZmljZS1tYXRoLXNlbWFudGljLXYyIiwic2VtYW50aWNfb21tbF9zaGEyNTYiOiIyZjRlZjJkZTQ0NjBlNTJiN2I5NjdlNWFiZjRmZGI5OTQ5NzIzYWVlNmNkMzc5MTlkNGNlOTY2NmVmZTAyN2E4In1dLCJmb3JtdWxhcyI6W3siY2Fub25pY2FsX2xhdGV4IjoiZV97dn0iLCJmb3JtdWxhX2lkIjoiRVEwMDMiLCJsYXRleF9zaGEyNTYiOiIyZWZkODE5ZTcyNTZiNTkwYTRmNTFkMTVkMWIzZjdmYzgwODhhMGE0Mzc3ZWQyZTExMWUwZmQ5NDAyNjc5YzhkIiwibW9kZSI6ImlubGluZSIsIm9tbWxfc2hhMjU2IjoiNjM1YTA1MmI0MjllMzI3Y2I5ZmZlNTI5MTI0YjJjOGRlMDBlYzlkMmRiZDI3ZjE1MWJmZTM4ZmIwZjhjNzc3MiIsInNlbWFudGljX29tbWxfcHJvZmlsZSI6Im9mZmljZS1tYXRoLXNlbWFudGljLXYyIiwic2VtYW50aWNfb21tbF9zaGEyNTYiOiIyZjRlZjJkZTQ0NjBlNTJiN2I5NjdlNWFiZjRmZGI5OTQ5NzIzYWVlNmNkMzc5MTlkNGNlOTY2NmVmZTAyN2E4In1dLCJraW5kIjoibmF0aXZlX29mZmljZV9tYXRoIiwicGxhY2Vob2xkZXJfbmFtZSI6Im1hdGg6MDAzIiwic2NoZW1hX3ZlcnNpb24iOiIxLjAifQ=="/>
@@ -5169,41 +5229,53 @@
               <a:effectLst/>
             </p:spPr>
             <p:txBody>
-              <a:bodyPr wrap="none" anchor="t" lIns="0" rIns="0" tIns="0" bIns="0">
+              <a:bodyPr wrap="none" lIns="0" tIns="0" rIns="0" bIns="0" anchor="t">
                 <a:spAutoFit/>
               </a:bodyPr>
               <a:lstStyle/>
               <a:p>
                 <a:pPr algn="ctr"/>
                 <a14:m>
-                  <m:oMath xmlns:m="http://schemas.openxmlformats.org/officeDocument/2006/math">
-                    <m:sSub>
-                      <m:e>
-                        <m:r>
-                          <a:rPr lang="en-US" dirty="0" sz="1425">
-                            <a:solidFill>
-                              <a:srgbClr val="111111"/>
-                            </a:solidFill>
-                            <a:latin typeface="Cambria Math"/>
-                          </a:rPr>
-                          <m:t>e</m:t>
-                        </m:r>
-                      </m:e>
-                      <m:sub>
-                        <m:r>
-                          <a:rPr lang="en-US" dirty="0" sz="1425">
-                            <a:solidFill>
-                              <a:srgbClr val="111111"/>
-                            </a:solidFill>
-                            <a:latin typeface="Cambria Math"/>
-                          </a:rPr>
-                          <m:t>v</m:t>
-                        </m:r>
-                      </m:sub>
-                    </m:sSub>
-                  </m:oMath>
+                  <m:oMathPara xmlns:m="http://schemas.openxmlformats.org/officeDocument/2006/math">
+                    <m:oMath>
+                      <m:sSub>
+                        <m:sSubPr>
+                          <m:ctrlPr>
+                            <a:rPr lang="en-US" sz="1425" dirty="0">
+                              <a:solidFill>
+                                <a:srgbClr val="111111"/>
+                              </a:solidFill>
+                              <a:latin typeface="Cambria Math"/>
+                            </a:rPr>
+                          </m:ctrlPr>
+                        </m:sSubPr>
+                        <m:e>
+                          <m:r>
+                            <a:rPr lang="en-US" sz="1425" dirty="0">
+                              <a:solidFill>
+                                <a:srgbClr val="111111"/>
+                              </a:solidFill>
+                              <a:latin typeface="Cambria Math"/>
+                            </a:rPr>
+                            <m:t>𝑒</m:t>
+                          </m:r>
+                        </m:e>
+                        <m:sub>
+                          <m:r>
+                            <a:rPr lang="en-US" sz="1425" dirty="0">
+                              <a:solidFill>
+                                <a:srgbClr val="111111"/>
+                              </a:solidFill>
+                              <a:latin typeface="Cambria Math"/>
+                            </a:rPr>
+                            <m:t>𝑣</m:t>
+                          </m:r>
+                        </m:sub>
+                      </m:sSub>
+                    </m:oMath>
+                  </m:oMathPara>
                 </a14:m>
-                <a:endParaRPr lang="en-US" dirty="0" sz="1425">
+                <a:endParaRPr lang="en-US" sz="1425" dirty="0">
                   <a:solidFill>
                     <a:srgbClr val="111111"/>
                   </a:solidFill>
@@ -5213,7 +5285,7 @@
             </p:txBody>
           </p:sp>
         </mc:Choice>
-        <mc:Fallback>
+        <mc:Fallback xmlns="">
           <p:sp>
             <p:nvSpPr>
               <p:cNvPr id="50" name="math:003" descr="AI_AUTOFIGURE_MATH_FALLBACK_ONLY_V1:eyJjb250ZW50X3J1bnMiOlt7ImNhbm9uaWNhbF9sYXRleCI6ImVfe3Z9IiwiZm9ybXVsYV9pZCI6IkVRMDAzIiwia2luZCI6Im1hdGgiLCJsYXRleF9zaGEyNTYiOiIyZWZkODE5ZTcyNTZiNTkwYTRmNTFkMTVkMWIzZjdmYzgwODhhMGE0Mzc3ZWQyZTExMWUwZmQ5NDAyNjc5YzhkIiwibW9kZSI6ImlubGluZSIsIm9tbWxfc2hhMjU2IjoiNjM1YTA1MmI0MjllMzI3Y2I5ZmZlNTI5MTI0YjJjOGRlMDBlYzlkMmRiZDI3ZjE1MWJmZTM4ZmIwZjhjNzc3MiIsInNlbWFudGljX29tbWxfcHJvZmlsZSI6Im9mZmljZS1tYXRoLXNlbWFudGljLXYyIiwic2VtYW50aWNfb21tbF9zaGEyNTYiOiIyZjRlZjJkZTQ0NjBlNTJiN2I5NjdlNWFiZjRmZGI5OTQ5NzIzYWVlNmNkMzc5MTlkNGNlOTY2NmVmZTAyN2E4In1dLCJmb3JtdWxhcyI6W3siY2Fub25pY2FsX2xhdGV4IjoiZV97dn0iLCJmb3JtdWxhX2lkIjoiRVEwMDMiLCJsYXRleF9zaGEyNTYiOiIyZWZkODE5ZTcyNTZiNTkwYTRmNTFkMTVkMWIzZjdmYzgwODhhMGE0Mzc3ZWQyZTExMWUwZmQ5NDAyNjc5YzhkIiwibW9kZSI6ImlubGluZSIsIm9tbWxfc2hhMjU2IjoiNjM1YTA1MmI0MjllMzI3Y2I5ZmZlNTI5MTI0YjJjOGRlMDBlYzlkMmRiZDI3ZjE1MWJmZTM4ZmIwZjhjNzc3MiIsInNlbWFudGljX29tbWxfcHJvZmlsZSI6Im9mZmljZS1tYXRoLXNlbWFudGljLXYyIiwic2VtYW50aWNfb21tbF9zaGEyNTYiOiIyZjRlZjJkZTQ0NjBlNTJiN2I5NjdlNWFiZjRmZGI5OTQ5NzIzYWVlNmNkMzc5MTlkNGNlOTY2NmVmZTAyN2E4In1dLCJraW5kIjoibmF0aXZlX29mZmljZV9tYXRoIiwicGxhY2Vob2xkZXJfbmFtZSI6Im1hdGg6MDAzIiwic2NoZW1hX3ZlcnNpb24iOiIxLjAifQ=="/>
@@ -5258,7 +5330,7 @@
       </mc:AlternateContent>
       <p:sp>
         <p:nvSpPr>
-          <p:cNvPr id="51" name="af-e-v-circle-1-ellipse-01"/>
+          <p:cNvPr id="51" name="af-e-v-circle-1-ellipse-01" descr="{&quot;autofigure_element_id&quot;:&quot;e-v-circle-1&quot;}"/>
           <p:cNvSpPr/>
           <p:nvPr/>
         </p:nvSpPr>
@@ -5297,12 +5369,13 @@
           <a:lstStyle/>
           <a:p>
             <a:pPr algn="ctr"/>
-          </a:p>
-        </p:txBody>
-      </p:sp>
-      <p:sp>
-        <p:nvSpPr>
-          <p:cNvPr id="52" name="af-e-v-circle-2-ellipse-01"/>
+            <a:endParaRPr/>
+          </a:p>
+        </p:txBody>
+      </p:sp>
+      <p:sp>
+        <p:nvSpPr>
+          <p:cNvPr id="52" name="af-e-v-circle-2-ellipse-01" descr="{&quot;autofigure_element_id&quot;:&quot;e-v-circle-2&quot;}"/>
           <p:cNvSpPr/>
           <p:nvPr/>
         </p:nvSpPr>
@@ -5341,12 +5414,13 @@
           <a:lstStyle/>
           <a:p>
             <a:pPr algn="ctr"/>
-          </a:p>
-        </p:txBody>
-      </p:sp>
-      <p:sp>
-        <p:nvSpPr>
-          <p:cNvPr id="53" name="af-e-v-circle-3-ellipse-01"/>
+            <a:endParaRPr/>
+          </a:p>
+        </p:txBody>
+      </p:sp>
+      <p:sp>
+        <p:nvSpPr>
+          <p:cNvPr id="53" name="af-e-v-circle-3-ellipse-01" descr="{&quot;autofigure_element_id&quot;:&quot;e-v-circle-3&quot;}"/>
           <p:cNvSpPr/>
           <p:nvPr/>
         </p:nvSpPr>
@@ -5385,12 +5459,13 @@
           <a:lstStyle/>
           <a:p>
             <a:pPr algn="ctr"/>
+            <a:endParaRPr/>
           </a:p>
         </p:txBody>
       </p:sp>
       <p:cxnSp>
         <p:nvCxnSpPr>
-          <p:cNvPr id="54" name="af-svg-line-0007-connector-01"/>
+          <p:cNvPr id="54" name="af-svg-line-0007-connector-01" descr="{&quot;arrow_spec_sha256&quot;:&quot;819d77e747a3a80b1055d65386f7cbe68c3b007c175df29cf453c3a9e561a3c5&quot;,&quot;autofigure_element_id&quot;:&quot;svg-line-0007&quot;}"/>
           <p:cNvCxnSpPr/>
           <p:nvPr/>
         </p:nvCxnSpPr>
@@ -5406,6 +5481,7 @@
             <a:solidFill>
               <a:srgbClr val="EF7D2B"/>
             </a:solidFill>
+            <a:miter/>
             <a:tailEnd type="triangle" w="med" len="med"/>
           </a:ln>
           <a:effectLst/>
@@ -5427,7 +5503,7 @@
       </p:cxnSp>
       <p:sp>
         <p:nvSpPr>
-          <p:cNvPr id="55" name="af-s-t-vector-rect-01"/>
+          <p:cNvPr id="55" name="af-s-t-vector-rect-01" descr="{&quot;autofigure_element_id&quot;:&quot;s-t-vector&quot;}"/>
           <p:cNvSpPr/>
           <p:nvPr/>
         </p:nvSpPr>
@@ -5446,6 +5522,7 @@
             <a:solidFill>
               <a:srgbClr val="233A64"/>
             </a:solidFill>
+            <a:miter/>
           </a:ln>
           <a:effectLst/>
         </p:spPr>
@@ -5468,11 +5545,12 @@
           <a:lstStyle/>
           <a:p>
             <a:pPr algn="ctr"/>
-          </a:p>
-        </p:txBody>
-      </p:sp>
-      <mc:AlternateContent xmlns:mc="http://schemas.openxmlformats.org/markup-compatibility/2006">
-        <mc:Choice xmlns:a14="http://schemas.microsoft.com/office/drawing/2010/main" Requires="a14">
+            <a:endParaRPr/>
+          </a:p>
+        </p:txBody>
+      </p:sp>
+      <mc:AlternateContent xmlns:mc="http://schemas.openxmlformats.org/markup-compatibility/2006" xmlns:a14="http://schemas.microsoft.com/office/drawing/2010/main">
+        <mc:Choice Requires="a14">
           <p:sp>
             <p:nvSpPr>
               <p:cNvPr id="56" name="math:004" descr="AI_AUTOFIGURE_NATIVE_MATH_V1:eyJjb250ZW50X3J1bnMiOlt7ImNhbm9uaWNhbF9sYXRleCI6InNfe3R9IiwiZm9ybXVsYV9pZCI6IkVRMDA0Iiwia2luZCI6Im1hdGgiLCJsYXRleF9zaGEyNTYiOiIwMDE3ZmQ1YjUxNmM2YTU5ZjUxZTM3MWJlZTBmMjQ5ODI4ZWIzZDhlOTNhYTc0NzM3Y2M4ZWYxNTY5YzM1ZTIyIiwibW9kZSI6ImlubGluZSIsIm9tbWxfc2hhMjU2IjoiMWJhZjE4MDU3OTA4OTQ0ZmQxZmFiYzgwMzBhN2RiMWFmMjY1MmUxOGQ1Y2U3YjlhMGJiMWU2MWMzYTU3ZTg3NyIsInNlbWFudGljX29tbWxfcHJvZmlsZSI6Im9mZmljZS1tYXRoLXNlbWFudGljLXYyIiwic2VtYW50aWNfb21tbF9zaGEyNTYiOiI2OWRhZTcyNmY2OTRlNTQ3MDhmYjQ2Y2IxZjRjYTM5NzhhODhjOWIxZmJmMDc2ZjE2MWIxODVlZThhNDdiYzBkIn1dLCJmb3JtdWxhcyI6W3siY2Fub25pY2FsX2xhdGV4Ijoic197dH0iLCJmb3JtdWxhX2lkIjoiRVEwMDQiLCJsYXRleF9zaGEyNTYiOiIwMDE3ZmQ1YjUxNmM2YTU5ZjUxZTM3MWJlZTBmMjQ5ODI4ZWIzZDhlOTNhYTc0NzM3Y2M4ZWYxNTY5YzM1ZTIyIiwibW9kZSI6ImlubGluZSIsIm9tbWxfc2hhMjU2IjoiMWJhZjE4MDU3OTA4OTQ0ZmQxZmFiYzgwMzBhN2RiMWFmMjY1MmUxOGQ1Y2U3YjlhMGJiMWU2MWMzYTU3ZTg3NyIsInNlbWFudGljX29tbWxfcHJvZmlsZSI6Im9mZmljZS1tYXRoLXNlbWFudGljLXYyIiwic2VtYW50aWNfb21tbF9zaGEyNTYiOiI2OWRhZTcyNmY2OTRlNTQ3MDhmYjQ2Y2IxZjRjYTM5NzhhODhjOWIxZmJmMDc2ZjE2MWIxODVlZThhNDdiYzBkIn1dLCJraW5kIjoibmF0aXZlX29mZmljZV9tYXRoIiwicGxhY2Vob2xkZXJfbmFtZSI6Im1hdGg6MDA0Iiwic2NoZW1hX3ZlcnNpb24iOiIxLjAifQ=="/>
@@ -5491,41 +5569,53 @@
               <a:effectLst/>
             </p:spPr>
             <p:txBody>
-              <a:bodyPr wrap="none" anchor="t" lIns="0" rIns="0" tIns="0" bIns="0">
+              <a:bodyPr wrap="none" lIns="0" tIns="0" rIns="0" bIns="0" anchor="t">
                 <a:spAutoFit/>
               </a:bodyPr>
               <a:lstStyle/>
               <a:p>
                 <a:pPr algn="ctr"/>
                 <a14:m>
-                  <m:oMath xmlns:m="http://schemas.openxmlformats.org/officeDocument/2006/math">
-                    <m:sSub>
-                      <m:e>
-                        <m:r>
-                          <a:rPr lang="en-US" dirty="0" sz="1350">
-                            <a:solidFill>
-                              <a:srgbClr val="111111"/>
-                            </a:solidFill>
-                            <a:latin typeface="Cambria Math"/>
-                          </a:rPr>
-                          <m:t>s</m:t>
-                        </m:r>
-                      </m:e>
-                      <m:sub>
-                        <m:r>
-                          <a:rPr lang="en-US" dirty="0" sz="1350">
-                            <a:solidFill>
-                              <a:srgbClr val="111111"/>
-                            </a:solidFill>
-                            <a:latin typeface="Cambria Math"/>
-                          </a:rPr>
-                          <m:t>t</m:t>
-                        </m:r>
-                      </m:sub>
-                    </m:sSub>
-                  </m:oMath>
+                  <m:oMathPara xmlns:m="http://schemas.openxmlformats.org/officeDocument/2006/math">
+                    <m:oMath>
+                      <m:sSub>
+                        <m:sSubPr>
+                          <m:ctrlPr>
+                            <a:rPr lang="en-US" sz="1350" dirty="0">
+                              <a:solidFill>
+                                <a:srgbClr val="111111"/>
+                              </a:solidFill>
+                              <a:latin typeface="Cambria Math"/>
+                            </a:rPr>
+                          </m:ctrlPr>
+                        </m:sSubPr>
+                        <m:e>
+                          <m:r>
+                            <a:rPr lang="en-US" sz="1350" dirty="0">
+                              <a:solidFill>
+                                <a:srgbClr val="111111"/>
+                              </a:solidFill>
+                              <a:latin typeface="Cambria Math"/>
+                            </a:rPr>
+                            <m:t>𝑠</m:t>
+                          </m:r>
+                        </m:e>
+                        <m:sub>
+                          <m:r>
+                            <a:rPr lang="en-US" sz="1350" dirty="0">
+                              <a:solidFill>
+                                <a:srgbClr val="111111"/>
+                              </a:solidFill>
+                              <a:latin typeface="Cambria Math"/>
+                            </a:rPr>
+                            <m:t>𝑡</m:t>
+                          </m:r>
+                        </m:sub>
+                      </m:sSub>
+                    </m:oMath>
+                  </m:oMathPara>
                 </a14:m>
-                <a:endParaRPr lang="en-US" dirty="0" sz="1350">
+                <a:endParaRPr lang="en-US" sz="1350" dirty="0">
                   <a:solidFill>
                     <a:srgbClr val="111111"/>
                   </a:solidFill>
@@ -5535,7 +5625,7 @@
             </p:txBody>
           </p:sp>
         </mc:Choice>
-        <mc:Fallback>
+        <mc:Fallback xmlns="">
           <p:sp>
             <p:nvSpPr>
               <p:cNvPr id="56" name="math:004" descr="AI_AUTOFIGURE_MATH_FALLBACK_ONLY_V1:eyJjb250ZW50X3J1bnMiOlt7ImNhbm9uaWNhbF9sYXRleCI6InNfe3R9IiwiZm9ybXVsYV9pZCI6IkVRMDA0Iiwia2luZCI6Im1hdGgiLCJsYXRleF9zaGEyNTYiOiIwMDE3ZmQ1YjUxNmM2YTU5ZjUxZTM3MWJlZTBmMjQ5ODI4ZWIzZDhlOTNhYTc0NzM3Y2M4ZWYxNTY5YzM1ZTIyIiwibW9kZSI6ImlubGluZSIsIm9tbWxfc2hhMjU2IjoiMWJhZjE4MDU3OTA4OTQ0ZmQxZmFiYzgwMzBhN2RiMWFmMjY1MmUxOGQ1Y2U3YjlhMGJiMWU2MWMzYTU3ZTg3NyIsInNlbWFudGljX29tbWxfcHJvZmlsZSI6Im9mZmljZS1tYXRoLXNlbWFudGljLXYyIiwic2VtYW50aWNfb21tbF9zaGEyNTYiOiI2OWRhZTcyNmY2OTRlNTQ3MDhmYjQ2Y2IxZjRjYTM5NzhhODhjOWIxZmJmMDc2ZjE2MWIxODVlZThhNDdiYzBkIn1dLCJmb3JtdWxhcyI6W3siY2Fub25pY2FsX2xhdGV4Ijoic197dH0iLCJmb3JtdWxhX2lkIjoiRVEwMDQiLCJsYXRleF9zaGEyNTYiOiIwMDE3ZmQ1YjUxNmM2YTU5ZjUxZTM3MWJlZTBmMjQ5ODI4ZWIzZDhlOTNhYTc0NzM3Y2M4ZWYxNTY5YzM1ZTIyIiwibW9kZSI6ImlubGluZSIsIm9tbWxfc2hhMjU2IjoiMWJhZjE4MDU3OTA4OTQ0ZmQxZmFiYzgwMzBhN2RiMWFmMjY1MmUxOGQ1Y2U3YjlhMGJiMWU2MWMzYTU3ZTg3NyIsInNlbWFudGljX29tbWxfcHJvZmlsZSI6Im9mZmljZS1tYXRoLXNlbWFudGljLXYyIiwic2VtYW50aWNfb21tbF9zaGEyNTYiOiI2OWRhZTcyNmY2OTRlNTQ3MDhmYjQ2Y2IxZjRjYTM5NzhhODhjOWIxZmJmMDc2ZjE2MWIxODVlZThhNDdiYzBkIn1dLCJraW5kIjoibmF0aXZlX29mZmljZV9tYXRoIiwicGxhY2Vob2xkZXJfbmFtZSI6Im1hdGg6MDA0Iiwic2NoZW1hX3ZlcnNpb24iOiIxLjAifQ=="/>
@@ -5580,7 +5670,7 @@
       </mc:AlternateContent>
       <p:sp>
         <p:nvSpPr>
-          <p:cNvPr id="57" name="af-s-t-circle-1-ellipse-01"/>
+          <p:cNvPr id="57" name="af-s-t-circle-1-ellipse-01" descr="{&quot;autofigure_element_id&quot;:&quot;s-t-circle-1&quot;}"/>
           <p:cNvSpPr/>
           <p:nvPr/>
         </p:nvSpPr>
@@ -5619,12 +5709,13 @@
           <a:lstStyle/>
           <a:p>
             <a:pPr algn="ctr"/>
-          </a:p>
-        </p:txBody>
-      </p:sp>
-      <p:sp>
-        <p:nvSpPr>
-          <p:cNvPr id="58" name="af-s-t-circle-2-ellipse-01"/>
+            <a:endParaRPr/>
+          </a:p>
+        </p:txBody>
+      </p:sp>
+      <p:sp>
+        <p:nvSpPr>
+          <p:cNvPr id="58" name="af-s-t-circle-2-ellipse-01" descr="{&quot;autofigure_element_id&quot;:&quot;s-t-circle-2&quot;}"/>
           <p:cNvSpPr/>
           <p:nvPr/>
         </p:nvSpPr>
@@ -5663,12 +5754,13 @@
           <a:lstStyle/>
           <a:p>
             <a:pPr algn="ctr"/>
-          </a:p>
-        </p:txBody>
-      </p:sp>
-      <p:sp>
-        <p:nvSpPr>
-          <p:cNvPr id="59" name="af-s-t-circle-3-ellipse-01"/>
+            <a:endParaRPr/>
+          </a:p>
+        </p:txBody>
+      </p:sp>
+      <p:sp>
+        <p:nvSpPr>
+          <p:cNvPr id="59" name="af-s-t-circle-3-ellipse-01" descr="{&quot;autofigure_element_id&quot;:&quot;s-t-circle-3&quot;}"/>
           <p:cNvSpPr/>
           <p:nvPr/>
         </p:nvSpPr>
@@ -5707,12 +5799,13 @@
           <a:lstStyle/>
           <a:p>
             <a:pPr algn="ctr"/>
+            <a:endParaRPr/>
           </a:p>
         </p:txBody>
       </p:sp>
       <p:cxnSp>
         <p:nvCxnSpPr>
-          <p:cNvPr id="60" name="af-svg-line-0008-connector-01"/>
+          <p:cNvPr id="60" name="af-svg-line-0008-connector-01" descr="{&quot;arrow_spec_sha256&quot;:&quot;58f6502c067459059e71bc2c87dc83203f9f1a1e7a6604a72234c35b0a95f945&quot;,&quot;autofigure_element_id&quot;:&quot;svg-line-0008&quot;}"/>
           <p:cNvCxnSpPr/>
           <p:nvPr/>
         </p:nvCxnSpPr>
@@ -5728,6 +5821,7 @@
             <a:solidFill>
               <a:srgbClr val="3567B7"/>
             </a:solidFill>
+            <a:miter/>
             <a:tailEnd type="triangle" w="med" len="med"/>
           </a:ln>
           <a:effectLst/>
@@ -5749,7 +5843,7 @@
       </p:cxnSp>
       <p:sp>
         <p:nvSpPr>
-          <p:cNvPr id="61" name="af-svg-rect-0016-rect-01"/>
+          <p:cNvPr id="61" name="af-svg-rect-0016-rect-01" descr="{&quot;autofigure_element_id&quot;:&quot;svg-rect-0016&quot;}"/>
           <p:cNvSpPr/>
           <p:nvPr/>
         </p:nvSpPr>
@@ -5770,6 +5864,7 @@
             <a:solidFill>
               <a:srgbClr val="233A64"/>
             </a:solidFill>
+            <a:miter/>
           </a:ln>
           <a:effectLst/>
         </p:spPr>
@@ -5792,12 +5887,13 @@
           <a:lstStyle/>
           <a:p>
             <a:pPr algn="ctr"/>
-          </a:p>
-        </p:txBody>
-      </p:sp>
-      <p:sp>
-        <p:nvSpPr>
-          <p:cNvPr id="62" name="af-svg-rect-0017-rect-01"/>
+            <a:endParaRPr/>
+          </a:p>
+        </p:txBody>
+      </p:sp>
+      <p:sp>
+        <p:nvSpPr>
+          <p:cNvPr id="62" name="af-svg-rect-0017-rect-01" descr="{&quot;autofigure_element_id&quot;:&quot;svg-rect-0017&quot;}"/>
           <p:cNvSpPr/>
           <p:nvPr/>
         </p:nvSpPr>
@@ -5836,12 +5932,13 @@
           <a:lstStyle/>
           <a:p>
             <a:pPr algn="ctr"/>
-          </a:p>
-        </p:txBody>
-      </p:sp>
-      <p:sp>
-        <p:nvSpPr>
-          <p:cNvPr id="63" name="af-svg-text-0022-text-01"/>
+            <a:endParaRPr/>
+          </a:p>
+        </p:txBody>
+      </p:sp>
+      <p:sp>
+        <p:nvSpPr>
+          <p:cNvPr id="63" name="af-svg-text-0022-text-01" descr="{&quot;autofigure_element_id&quot;:&quot;svg-text-0022&quot;}"/>
           <p:cNvSpPr txBox="1"/>
           <p:nvPr/>
         </p:nvSpPr>
@@ -5857,7 +5954,7 @@
           <a:effectLst/>
         </p:spPr>
         <p:txBody>
-          <a:bodyPr wrap="none" anchor="t" lIns="0" rIns="0" tIns="0" bIns="0">
+          <a:bodyPr wrap="none" lIns="0" tIns="0" rIns="0" bIns="0" anchor="t">
             <a:spAutoFit/>
           </a:bodyPr>
           <a:lstStyle/>
@@ -5877,7 +5974,7 @@
       </p:sp>
       <p:sp>
         <p:nvSpPr>
-          <p:cNvPr id="64" name="af-svg-rect-0018-rect-01"/>
+          <p:cNvPr id="64" name="af-svg-rect-0018-rect-01" descr="{&quot;autofigure_element_id&quot;:&quot;svg-rect-0018&quot;}"/>
           <p:cNvSpPr/>
           <p:nvPr/>
         </p:nvSpPr>
@@ -5916,12 +6013,13 @@
           <a:lstStyle/>
           <a:p>
             <a:pPr algn="ctr"/>
-          </a:p>
-        </p:txBody>
-      </p:sp>
-      <p:sp>
-        <p:nvSpPr>
-          <p:cNvPr id="65" name="af-svg-text-0023-text-01"/>
+            <a:endParaRPr/>
+          </a:p>
+        </p:txBody>
+      </p:sp>
+      <p:sp>
+        <p:nvSpPr>
+          <p:cNvPr id="65" name="af-svg-text-0023-text-01" descr="{&quot;autofigure_element_id&quot;:&quot;svg-text-0023&quot;}"/>
           <p:cNvSpPr txBox="1"/>
           <p:nvPr/>
         </p:nvSpPr>
@@ -5937,7 +6035,7 @@
           <a:effectLst/>
         </p:spPr>
         <p:txBody>
-          <a:bodyPr wrap="none" anchor="t" lIns="0" rIns="0" tIns="0" bIns="0">
+          <a:bodyPr wrap="none" lIns="0" tIns="0" rIns="0" bIns="0" anchor="t">
             <a:spAutoFit/>
           </a:bodyPr>
           <a:lstStyle/>
@@ -5957,7 +6055,7 @@
       </p:sp>
       <p:sp>
         <p:nvSpPr>
-          <p:cNvPr id="66" name="af-svg-rect-0019-rect-01"/>
+          <p:cNvPr id="66" name="af-expert-1-box-rect-01" descr="{&quot;autofigure_element_id&quot;:&quot;expert-1-box&quot;}"/>
           <p:cNvSpPr/>
           <p:nvPr/>
         </p:nvSpPr>
@@ -5976,6 +6074,7 @@
             <a:solidFill>
               <a:srgbClr val="888888"/>
             </a:solidFill>
+            <a:miter/>
           </a:ln>
           <a:effectLst/>
         </p:spPr>
@@ -5998,12 +6097,13 @@
           <a:lstStyle/>
           <a:p>
             <a:pPr algn="ctr"/>
-          </a:p>
-        </p:txBody>
-      </p:sp>
-      <p:sp>
-        <p:nvSpPr>
-          <p:cNvPr id="67" name="af-svg-rect-0020-rect-01"/>
+            <a:endParaRPr/>
+          </a:p>
+        </p:txBody>
+      </p:sp>
+      <p:sp>
+        <p:nvSpPr>
+          <p:cNvPr id="67" name="af-expert-1-sem-rect-01" descr="{&quot;autofigure_element_id&quot;:&quot;expert-1-sem&quot;}"/>
           <p:cNvSpPr/>
           <p:nvPr/>
         </p:nvSpPr>
@@ -6044,12 +6144,13 @@
           <a:lstStyle/>
           <a:p>
             <a:pPr algn="ctr"/>
-          </a:p>
-        </p:txBody>
-      </p:sp>
-      <p:sp>
-        <p:nvSpPr>
-          <p:cNvPr id="68" name="af-svg-rect-0021-rect-01"/>
+            <a:endParaRPr/>
+          </a:p>
+        </p:txBody>
+      </p:sp>
+      <p:sp>
+        <p:nvSpPr>
+          <p:cNvPr id="68" name="af-expert-1-dyn-rect-01" descr="{&quot;autofigure_element_id&quot;:&quot;expert-1-dyn&quot;}"/>
           <p:cNvSpPr/>
           <p:nvPr/>
         </p:nvSpPr>
@@ -6090,19 +6191,20 @@
           <a:lstStyle/>
           <a:p>
             <a:pPr algn="ctr"/>
-          </a:p>
-        </p:txBody>
-      </p:sp>
-      <p:sp>
-        <p:nvSpPr>
-          <p:cNvPr id="69" name="af-svg-text-0024-text-01"/>
+            <a:endParaRPr/>
+          </a:p>
+        </p:txBody>
+      </p:sp>
+      <p:sp>
+        <p:nvSpPr>
+          <p:cNvPr id="69" name="af-expert-1-sem-label-text-01" descr="{&quot;autofigure_element_id&quot;:&quot;expert-1-sem-label&quot;}"/>
           <p:cNvSpPr txBox="1"/>
           <p:nvPr/>
         </p:nvSpPr>
         <p:spPr>
           <a:xfrm rot="5400000">
-            <a:off x="5187696" y="2588419"/>
-            <a:ext cx="654558" cy="404812"/>
+            <a:off x="5110162" y="2595562"/>
+            <a:ext cx="781050" cy="390525"/>
           </a:xfrm>
           <a:prstGeom prst="rect">
             <a:avLst/>
@@ -6111,7 +6213,7 @@
           <a:effectLst/>
         </p:spPr>
         <p:txBody>
-          <a:bodyPr wrap="none" anchor="ctr" lIns="0" rIns="0" tIns="0" bIns="0">
+          <a:bodyPr wrap="none" lIns="0" tIns="0" rIns="0" bIns="0" anchor="ctr">
             <a:spAutoFit/>
           </a:bodyPr>
           <a:lstStyle/>
@@ -6131,14 +6233,14 @@
       </p:sp>
       <p:sp>
         <p:nvSpPr>
-          <p:cNvPr id="70" name="af-svg-text-0025-text-01"/>
+          <p:cNvPr id="70" name="af-expert-1-dyn-label-text-01" descr="{&quot;autofigure_element_id&quot;:&quot;expert-1-dyn-label&quot;}"/>
           <p:cNvSpPr txBox="1"/>
           <p:nvPr/>
         </p:nvSpPr>
         <p:spPr>
           <a:xfrm rot="5400000">
-            <a:off x="5215985" y="3674269"/>
-            <a:ext cx="597980" cy="404812"/>
+            <a:off x="5110162" y="3667125"/>
+            <a:ext cx="781050" cy="390525"/>
           </a:xfrm>
           <a:prstGeom prst="rect">
             <a:avLst/>
@@ -6147,7 +6249,7 @@
           <a:effectLst/>
         </p:spPr>
         <p:txBody>
-          <a:bodyPr wrap="none" anchor="ctr" lIns="0" rIns="0" tIns="0" bIns="0">
+          <a:bodyPr wrap="none" lIns="0" tIns="0" rIns="0" bIns="0" anchor="ctr">
             <a:spAutoFit/>
           </a:bodyPr>
           <a:lstStyle/>
@@ -6167,7 +6269,7 @@
       </p:sp>
       <p:sp>
         <p:nvSpPr>
-          <p:cNvPr id="71" name="af-svg-text-0026-text-01"/>
+          <p:cNvPr id="71" name="af-svg-text-0026-text-01" descr="{&quot;autofigure_element_id&quot;:&quot;svg-text-0026&quot;}"/>
           <p:cNvSpPr txBox="1"/>
           <p:nvPr/>
         </p:nvSpPr>
@@ -6183,7 +6285,7 @@
           <a:effectLst/>
         </p:spPr>
         <p:txBody>
-          <a:bodyPr wrap="none" anchor="t" lIns="0" rIns="0" tIns="0" bIns="0">
+          <a:bodyPr wrap="none" lIns="0" tIns="0" rIns="0" bIns="0" anchor="t">
             <a:spAutoFit/>
           </a:bodyPr>
           <a:lstStyle/>
@@ -6203,7 +6305,7 @@
       </p:sp>
       <p:sp>
         <p:nvSpPr>
-          <p:cNvPr id="72" name="af-svg-rect-0022-rect-01"/>
+          <p:cNvPr id="72" name="af-expert-2-box-rect-01" descr="{&quot;autofigure_element_id&quot;:&quot;expert-2-box&quot;}"/>
           <p:cNvSpPr/>
           <p:nvPr/>
         </p:nvSpPr>
@@ -6222,6 +6324,7 @@
             <a:solidFill>
               <a:srgbClr val="888888"/>
             </a:solidFill>
+            <a:miter/>
           </a:ln>
           <a:effectLst/>
         </p:spPr>
@@ -6244,12 +6347,13 @@
           <a:lstStyle/>
           <a:p>
             <a:pPr algn="ctr"/>
-          </a:p>
-        </p:txBody>
-      </p:sp>
-      <p:sp>
-        <p:nvSpPr>
-          <p:cNvPr id="73" name="af-svg-rect-0023-rect-01"/>
+            <a:endParaRPr/>
+          </a:p>
+        </p:txBody>
+      </p:sp>
+      <p:sp>
+        <p:nvSpPr>
+          <p:cNvPr id="73" name="af-expert-2-sem-rect-01" descr="{&quot;autofigure_element_id&quot;:&quot;expert-2-sem&quot;}"/>
           <p:cNvSpPr/>
           <p:nvPr/>
         </p:nvSpPr>
@@ -6290,12 +6394,13 @@
           <a:lstStyle/>
           <a:p>
             <a:pPr algn="ctr"/>
-          </a:p>
-        </p:txBody>
-      </p:sp>
-      <p:sp>
-        <p:nvSpPr>
-          <p:cNvPr id="74" name="af-svg-rect-0024-rect-01"/>
+            <a:endParaRPr/>
+          </a:p>
+        </p:txBody>
+      </p:sp>
+      <p:sp>
+        <p:nvSpPr>
+          <p:cNvPr id="74" name="af-expert-2-dyn-rect-01" descr="{&quot;autofigure_element_id&quot;:&quot;expert-2-dyn&quot;}"/>
           <p:cNvSpPr/>
           <p:nvPr/>
         </p:nvSpPr>
@@ -6336,19 +6441,20 @@
           <a:lstStyle/>
           <a:p>
             <a:pPr algn="ctr"/>
-          </a:p>
-        </p:txBody>
-      </p:sp>
-      <p:sp>
-        <p:nvSpPr>
-          <p:cNvPr id="75" name="af-svg-text-0027-text-01"/>
+            <a:endParaRPr/>
+          </a:p>
+        </p:txBody>
+      </p:sp>
+      <p:sp>
+        <p:nvSpPr>
+          <p:cNvPr id="75" name="af-expert-2-sem-label-text-01" descr="{&quot;autofigure_element_id&quot;:&quot;expert-2-sem-label&quot;}"/>
           <p:cNvSpPr txBox="1"/>
           <p:nvPr/>
         </p:nvSpPr>
         <p:spPr>
           <a:xfrm rot="5400000">
-            <a:off x="5911596" y="2588419"/>
-            <a:ext cx="654558" cy="404812"/>
+            <a:off x="5834062" y="2595562"/>
+            <a:ext cx="781050" cy="390525"/>
           </a:xfrm>
           <a:prstGeom prst="rect">
             <a:avLst/>
@@ -6357,7 +6463,7 @@
           <a:effectLst/>
         </p:spPr>
         <p:txBody>
-          <a:bodyPr wrap="none" anchor="ctr" lIns="0" rIns="0" tIns="0" bIns="0">
+          <a:bodyPr wrap="none" lIns="0" tIns="0" rIns="0" bIns="0" anchor="ctr">
             <a:spAutoFit/>
           </a:bodyPr>
           <a:lstStyle/>
@@ -6377,14 +6483,14 @@
       </p:sp>
       <p:sp>
         <p:nvSpPr>
-          <p:cNvPr id="76" name="af-svg-text-0028-text-01"/>
+          <p:cNvPr id="76" name="af-expert-2-dyn-label-text-01" descr="{&quot;autofigure_element_id&quot;:&quot;expert-2-dyn-label&quot;}"/>
           <p:cNvSpPr txBox="1"/>
           <p:nvPr/>
         </p:nvSpPr>
         <p:spPr>
           <a:xfrm rot="5400000">
-            <a:off x="5939885" y="3674269"/>
-            <a:ext cx="597980" cy="404812"/>
+            <a:off x="5834062" y="3667125"/>
+            <a:ext cx="781050" cy="390525"/>
           </a:xfrm>
           <a:prstGeom prst="rect">
             <a:avLst/>
@@ -6393,7 +6499,7 @@
           <a:effectLst/>
         </p:spPr>
         <p:txBody>
-          <a:bodyPr wrap="none" anchor="ctr" lIns="0" rIns="0" tIns="0" bIns="0">
+          <a:bodyPr wrap="none" lIns="0" tIns="0" rIns="0" bIns="0" anchor="ctr">
             <a:spAutoFit/>
           </a:bodyPr>
           <a:lstStyle/>
@@ -6413,7 +6519,7 @@
       </p:sp>
       <p:sp>
         <p:nvSpPr>
-          <p:cNvPr id="77" name="af-svg-text-0029-text-01"/>
+          <p:cNvPr id="77" name="af-svg-text-0029-text-01" descr="{&quot;autofigure_element_id&quot;:&quot;svg-text-0029&quot;}"/>
           <p:cNvSpPr txBox="1"/>
           <p:nvPr/>
         </p:nvSpPr>
@@ -6429,7 +6535,7 @@
           <a:effectLst/>
         </p:spPr>
         <p:txBody>
-          <a:bodyPr wrap="none" anchor="t" lIns="0" rIns="0" tIns="0" bIns="0">
+          <a:bodyPr wrap="none" lIns="0" tIns="0" rIns="0" bIns="0" anchor="t">
             <a:spAutoFit/>
           </a:bodyPr>
           <a:lstStyle/>
@@ -6449,7 +6555,7 @@
       </p:sp>
       <p:sp>
         <p:nvSpPr>
-          <p:cNvPr id="78" name="af-svg-rect-0025-rect-01"/>
+          <p:cNvPr id="78" name="af-expert-3-box-rect-01" descr="{&quot;autofigure_element_id&quot;:&quot;expert-3-box&quot;}"/>
           <p:cNvSpPr/>
           <p:nvPr/>
         </p:nvSpPr>
@@ -6468,6 +6574,7 @@
             <a:solidFill>
               <a:srgbClr val="888888"/>
             </a:solidFill>
+            <a:miter/>
           </a:ln>
           <a:effectLst/>
         </p:spPr>
@@ -6490,12 +6597,13 @@
           <a:lstStyle/>
           <a:p>
             <a:pPr algn="ctr"/>
-          </a:p>
-        </p:txBody>
-      </p:sp>
-      <p:sp>
-        <p:nvSpPr>
-          <p:cNvPr id="79" name="af-svg-rect-0026-rect-01"/>
+            <a:endParaRPr/>
+          </a:p>
+        </p:txBody>
+      </p:sp>
+      <p:sp>
+        <p:nvSpPr>
+          <p:cNvPr id="79" name="af-expert-3-sem-rect-01" descr="{&quot;autofigure_element_id&quot;:&quot;expert-3-sem&quot;}"/>
           <p:cNvSpPr/>
           <p:nvPr/>
         </p:nvSpPr>
@@ -6536,12 +6644,13 @@
           <a:lstStyle/>
           <a:p>
             <a:pPr algn="ctr"/>
-          </a:p>
-        </p:txBody>
-      </p:sp>
-      <p:sp>
-        <p:nvSpPr>
-          <p:cNvPr id="80" name="af-svg-rect-0027-rect-01"/>
+            <a:endParaRPr/>
+          </a:p>
+        </p:txBody>
+      </p:sp>
+      <p:sp>
+        <p:nvSpPr>
+          <p:cNvPr id="80" name="af-expert-3-dyn-rect-01" descr="{&quot;autofigure_element_id&quot;:&quot;expert-3-dyn&quot;}"/>
           <p:cNvSpPr/>
           <p:nvPr/>
         </p:nvSpPr>
@@ -6582,19 +6691,20 @@
           <a:lstStyle/>
           <a:p>
             <a:pPr algn="ctr"/>
-          </a:p>
-        </p:txBody>
-      </p:sp>
-      <p:sp>
-        <p:nvSpPr>
-          <p:cNvPr id="81" name="af-svg-text-0030-text-01"/>
+            <a:endParaRPr/>
+          </a:p>
+        </p:txBody>
+      </p:sp>
+      <p:sp>
+        <p:nvSpPr>
+          <p:cNvPr id="81" name="af-expert-3-sem-label-text-01" descr="{&quot;autofigure_element_id&quot;:&quot;expert-3-sem-label&quot;}"/>
           <p:cNvSpPr txBox="1"/>
           <p:nvPr/>
         </p:nvSpPr>
         <p:spPr>
           <a:xfrm rot="5400000">
-            <a:off x="6654546" y="2588419"/>
-            <a:ext cx="654558" cy="404812"/>
+            <a:off x="6577012" y="2595562"/>
+            <a:ext cx="781050" cy="390525"/>
           </a:xfrm>
           <a:prstGeom prst="rect">
             <a:avLst/>
@@ -6603,7 +6713,7 @@
           <a:effectLst/>
         </p:spPr>
         <p:txBody>
-          <a:bodyPr wrap="none" anchor="ctr" lIns="0" rIns="0" tIns="0" bIns="0">
+          <a:bodyPr wrap="none" lIns="0" tIns="0" rIns="0" bIns="0" anchor="ctr">
             <a:spAutoFit/>
           </a:bodyPr>
           <a:lstStyle/>
@@ -6623,14 +6733,14 @@
       </p:sp>
       <p:sp>
         <p:nvSpPr>
-          <p:cNvPr id="82" name="af-svg-text-0031-text-01"/>
+          <p:cNvPr id="82" name="af-expert-3-dyn-label-text-01" descr="{&quot;autofigure_element_id&quot;:&quot;expert-3-dyn-label&quot;}"/>
           <p:cNvSpPr txBox="1"/>
           <p:nvPr/>
         </p:nvSpPr>
         <p:spPr>
           <a:xfrm rot="5400000">
-            <a:off x="6682835" y="3674269"/>
-            <a:ext cx="597980" cy="404812"/>
+            <a:off x="6577012" y="3667125"/>
+            <a:ext cx="781050" cy="390525"/>
           </a:xfrm>
           <a:prstGeom prst="rect">
             <a:avLst/>
@@ -6639,7 +6749,7 @@
           <a:effectLst/>
         </p:spPr>
         <p:txBody>
-          <a:bodyPr wrap="none" anchor="ctr" lIns="0" rIns="0" tIns="0" bIns="0">
+          <a:bodyPr wrap="none" lIns="0" tIns="0" rIns="0" bIns="0" anchor="ctr">
             <a:spAutoFit/>
           </a:bodyPr>
           <a:lstStyle/>
@@ -6659,7 +6769,7 @@
       </p:sp>
       <p:sp>
         <p:nvSpPr>
-          <p:cNvPr id="83" name="af-svg-text-0032-text-01"/>
+          <p:cNvPr id="83" name="af-svg-text-0032-text-01" descr="{&quot;autofigure_element_id&quot;:&quot;svg-text-0032&quot;}"/>
           <p:cNvSpPr txBox="1"/>
           <p:nvPr/>
         </p:nvSpPr>
@@ -6675,7 +6785,7 @@
           <a:effectLst/>
         </p:spPr>
         <p:txBody>
-          <a:bodyPr wrap="none" anchor="t" lIns="0" rIns="0" tIns="0" bIns="0">
+          <a:bodyPr wrap="none" lIns="0" tIns="0" rIns="0" bIns="0" anchor="t">
             <a:spAutoFit/>
           </a:bodyPr>
           <a:lstStyle/>
@@ -6695,7 +6805,7 @@
       </p:sp>
       <p:sp>
         <p:nvSpPr>
-          <p:cNvPr id="84" name="af-svg-rect-0028-rect-01"/>
+          <p:cNvPr id="84" name="af-expert-4-box-rect-01" descr="{&quot;autofigure_element_id&quot;:&quot;expert-4-box&quot;}"/>
           <p:cNvSpPr/>
           <p:nvPr/>
         </p:nvSpPr>
@@ -6714,6 +6824,7 @@
             <a:solidFill>
               <a:srgbClr val="888888"/>
             </a:solidFill>
+            <a:miter/>
           </a:ln>
           <a:effectLst/>
         </p:spPr>
@@ -6736,12 +6847,13 @@
           <a:lstStyle/>
           <a:p>
             <a:pPr algn="ctr"/>
-          </a:p>
-        </p:txBody>
-      </p:sp>
-      <p:sp>
-        <p:nvSpPr>
-          <p:cNvPr id="85" name="af-svg-rect-0029-rect-01"/>
+            <a:endParaRPr/>
+          </a:p>
+        </p:txBody>
+      </p:sp>
+      <p:sp>
+        <p:nvSpPr>
+          <p:cNvPr id="85" name="af-expert-4-sem-rect-01" descr="{&quot;autofigure_element_id&quot;:&quot;expert-4-sem&quot;}"/>
           <p:cNvSpPr/>
           <p:nvPr/>
         </p:nvSpPr>
@@ -6782,12 +6894,13 @@
           <a:lstStyle/>
           <a:p>
             <a:pPr algn="ctr"/>
-          </a:p>
-        </p:txBody>
-      </p:sp>
-      <p:sp>
-        <p:nvSpPr>
-          <p:cNvPr id="86" name="af-svg-rect-0030-rect-01"/>
+            <a:endParaRPr/>
+          </a:p>
+        </p:txBody>
+      </p:sp>
+      <p:sp>
+        <p:nvSpPr>
+          <p:cNvPr id="86" name="af-expert-4-dyn-rect-01" descr="{&quot;autofigure_element_id&quot;:&quot;expert-4-dyn&quot;}"/>
           <p:cNvSpPr/>
           <p:nvPr/>
         </p:nvSpPr>
@@ -6828,19 +6941,20 @@
           <a:lstStyle/>
           <a:p>
             <a:pPr algn="ctr"/>
-          </a:p>
-        </p:txBody>
-      </p:sp>
-      <p:sp>
-        <p:nvSpPr>
-          <p:cNvPr id="87" name="af-svg-text-0033-text-01"/>
+            <a:endParaRPr/>
+          </a:p>
+        </p:txBody>
+      </p:sp>
+      <p:sp>
+        <p:nvSpPr>
+          <p:cNvPr id="87" name="af-expert-4-sem-label-text-01" descr="{&quot;autofigure_element_id&quot;:&quot;expert-4-sem-label&quot;}"/>
           <p:cNvSpPr txBox="1"/>
           <p:nvPr/>
         </p:nvSpPr>
         <p:spPr>
           <a:xfrm rot="5400000">
-            <a:off x="7559421" y="2588419"/>
-            <a:ext cx="654558" cy="404812"/>
+            <a:off x="7481888" y="2595562"/>
+            <a:ext cx="781050" cy="390525"/>
           </a:xfrm>
           <a:prstGeom prst="rect">
             <a:avLst/>
@@ -6849,7 +6963,7 @@
           <a:effectLst/>
         </p:spPr>
         <p:txBody>
-          <a:bodyPr wrap="none" anchor="ctr" lIns="0" rIns="0" tIns="0" bIns="0">
+          <a:bodyPr wrap="none" lIns="0" tIns="0" rIns="0" bIns="0" anchor="ctr">
             <a:spAutoFit/>
           </a:bodyPr>
           <a:lstStyle/>
@@ -6869,14 +6983,14 @@
       </p:sp>
       <p:sp>
         <p:nvSpPr>
-          <p:cNvPr id="88" name="af-svg-text-0034-text-01"/>
+          <p:cNvPr id="88" name="af-expert-4-dyn-label-text-01" descr="{&quot;autofigure_element_id&quot;:&quot;expert-4-dyn-label&quot;}"/>
           <p:cNvSpPr txBox="1"/>
           <p:nvPr/>
         </p:nvSpPr>
         <p:spPr>
           <a:xfrm rot="5400000">
-            <a:off x="7587710" y="3674269"/>
-            <a:ext cx="597980" cy="404812"/>
+            <a:off x="7481888" y="3667125"/>
+            <a:ext cx="781050" cy="390525"/>
           </a:xfrm>
           <a:prstGeom prst="rect">
             <a:avLst/>
@@ -6885,7 +6999,7 @@
           <a:effectLst/>
         </p:spPr>
         <p:txBody>
-          <a:bodyPr wrap="none" anchor="ctr" lIns="0" rIns="0" tIns="0" bIns="0">
+          <a:bodyPr wrap="none" lIns="0" tIns="0" rIns="0" bIns="0" anchor="ctr">
             <a:spAutoFit/>
           </a:bodyPr>
           <a:lstStyle/>
@@ -6905,7 +7019,7 @@
       </p:sp>
       <p:sp>
         <p:nvSpPr>
-          <p:cNvPr id="89" name="af-svg-text-0035-text-01"/>
+          <p:cNvPr id="89" name="af-svg-text-0035-text-01" descr="{&quot;autofigure_element_id&quot;:&quot;svg-text-0035&quot;}"/>
           <p:cNvSpPr txBox="1"/>
           <p:nvPr/>
         </p:nvSpPr>
@@ -6921,7 +7035,7 @@
           <a:effectLst/>
         </p:spPr>
         <p:txBody>
-          <a:bodyPr wrap="none" anchor="t" lIns="0" rIns="0" tIns="0" bIns="0">
+          <a:bodyPr wrap="none" lIns="0" tIns="0" rIns="0" bIns="0" anchor="t">
             <a:spAutoFit/>
           </a:bodyPr>
           <a:lstStyle/>
@@ -6941,7 +7055,7 @@
       </p:sp>
       <p:sp>
         <p:nvSpPr>
-          <p:cNvPr id="90" name="af-svg-text-0036-text-01"/>
+          <p:cNvPr id="90" name="af-svg-text-0036-text-01" descr="{&quot;autofigure_element_id&quot;:&quot;svg-text-0036&quot;}"/>
           <p:cNvSpPr txBox="1"/>
           <p:nvPr/>
         </p:nvSpPr>
@@ -6957,7 +7071,7 @@
           <a:effectLst/>
         </p:spPr>
         <p:txBody>
-          <a:bodyPr wrap="none" anchor="t" lIns="0" rIns="0" tIns="0" bIns="0">
+          <a:bodyPr wrap="none" lIns="0" tIns="0" rIns="0" bIns="0" anchor="t">
             <a:spAutoFit/>
           </a:bodyPr>
           <a:lstStyle/>
@@ -6975,9 +7089,132 @@
           </a:p>
         </p:txBody>
       </p:sp>
-      <p:sp>
-        <p:nvSpPr>
-          <p:cNvPr id="91" name="af-svg-path-0004-freeform-01"/>
+      <p:cxnSp>
+        <p:nvCxnSpPr>
+          <p:cNvPr id="91" name="af-allocator-task1-route-1-connector-01" descr="{&quot;arrow_spec_sha256&quot;:&quot;7ce5885d99dbaa2afd31303b6ad83f061f5926557d1d3d8cc13e30f44675baca&quot;,&quot;autofigure_element_id&quot;:&quot;allocator-task1-route-1&quot;}"/>
+          <p:cNvCxnSpPr>
+            <a:stCxn id="66" idx="3"/>
+            <a:endCxn id="72" idx="1"/>
+          </p:cNvCxnSpPr>
+          <p:nvPr/>
+        </p:nvCxnSpPr>
+        <p:spPr>
+          <a:xfrm>
+            <a:off x="5753100" y="3305175"/>
+            <a:ext cx="228600" cy="0"/>
+          </a:xfrm>
+          <a:prstGeom prst="line">
+            <a:avLst/>
+          </a:prstGeom>
+          <a:ln w="28575" cap="rnd">
+            <a:solidFill>
+              <a:srgbClr val="111111"/>
+            </a:solidFill>
+            <a:round/>
+            <a:tailEnd type="triangle" w="med" len="med"/>
+          </a:ln>
+          <a:effectLst/>
+        </p:spPr>
+        <p:style>
+          <a:lnRef idx="2">
+            <a:schemeClr val="accent1"/>
+          </a:lnRef>
+          <a:fillRef idx="0">
+            <a:schemeClr val="accent1"/>
+          </a:fillRef>
+          <a:effectRef idx="1">
+            <a:schemeClr val="accent1"/>
+          </a:effectRef>
+          <a:fontRef idx="minor">
+            <a:schemeClr val="tx1"/>
+          </a:fontRef>
+        </p:style>
+      </p:cxnSp>
+      <p:cxnSp>
+        <p:nvCxnSpPr>
+          <p:cNvPr id="92" name="af-allocator-task1-route-2-connector-01" descr="{&quot;arrow_spec_sha256&quot;:&quot;9b33aa468f667666c27c3f91653b3b5dba8f62735542d3b34107237ff51c1b8b&quot;,&quot;autofigure_element_id&quot;:&quot;allocator-task1-route-2&quot;}"/>
+          <p:cNvCxnSpPr>
+            <a:stCxn id="72" idx="3"/>
+            <a:endCxn id="78" idx="1"/>
+          </p:cNvCxnSpPr>
+          <p:nvPr/>
+        </p:nvCxnSpPr>
+        <p:spPr>
+          <a:xfrm>
+            <a:off x="6477000" y="3305175"/>
+            <a:ext cx="247650" cy="0"/>
+          </a:xfrm>
+          <a:prstGeom prst="line">
+            <a:avLst/>
+          </a:prstGeom>
+          <a:ln w="28575" cap="rnd">
+            <a:solidFill>
+              <a:srgbClr val="111111"/>
+            </a:solidFill>
+            <a:round/>
+            <a:tailEnd type="triangle" w="med" len="med"/>
+          </a:ln>
+          <a:effectLst/>
+        </p:spPr>
+        <p:style>
+          <a:lnRef idx="2">
+            <a:schemeClr val="accent1"/>
+          </a:lnRef>
+          <a:fillRef idx="0">
+            <a:schemeClr val="accent1"/>
+          </a:fillRef>
+          <a:effectRef idx="1">
+            <a:schemeClr val="accent1"/>
+          </a:effectRef>
+          <a:fontRef idx="minor">
+            <a:schemeClr val="tx1"/>
+          </a:fontRef>
+        </p:style>
+      </p:cxnSp>
+      <p:cxnSp>
+        <p:nvCxnSpPr>
+          <p:cNvPr id="93" name="af-allocator-task1-skip-edge-connector-01" descr="{&quot;arrow_spec_sha256&quot;:&quot;a0e87da98860bcb17b86a8afe1404a2eed978b2a840e2fe99187e7ad7403fdc5&quot;,&quot;autofigure_element_id&quot;:&quot;allocator-task1-skip-edge&quot;}"/>
+          <p:cNvCxnSpPr>
+            <a:stCxn id="78" idx="3"/>
+            <a:endCxn id="84" idx="1"/>
+          </p:cNvCxnSpPr>
+          <p:nvPr/>
+        </p:nvCxnSpPr>
+        <p:spPr>
+          <a:xfrm>
+            <a:off x="7219950" y="3305175"/>
+            <a:ext cx="409575" cy="0"/>
+          </a:xfrm>
+          <a:prstGeom prst="line">
+            <a:avLst/>
+          </a:prstGeom>
+          <a:ln w="28575" cap="rnd">
+            <a:solidFill>
+              <a:srgbClr val="111111"/>
+            </a:solidFill>
+            <a:round/>
+            <a:tailEnd type="triangle" w="med" len="med"/>
+          </a:ln>
+          <a:effectLst/>
+        </p:spPr>
+        <p:style>
+          <a:lnRef idx="2">
+            <a:schemeClr val="accent1"/>
+          </a:lnRef>
+          <a:fillRef idx="0">
+            <a:schemeClr val="accent1"/>
+          </a:fillRef>
+          <a:effectRef idx="1">
+            <a:schemeClr val="accent1"/>
+          </a:effectRef>
+          <a:fontRef idx="minor">
+            <a:schemeClr val="tx1"/>
+          </a:fontRef>
+        </p:style>
+      </p:cxnSp>
+      <p:sp>
+        <p:nvSpPr>
+          <p:cNvPr id="94" name="af-allocator-task1-propagation-freeform-01" descr="{&quot;autofigure_element_id&quot;:&quot;allocator-task1-propagation&quot;}"/>
           <p:cNvSpPr/>
           <p:nvPr/>
         </p:nvSpPr>
@@ -7036,16 +7273,20 @@
               <a:srgbClr val="2D5EA8"/>
             </a:solidFill>
             <a:prstDash val="dot"/>
+            <a:round/>
           </a:ln>
         </p:spPr>
         <p:txBody>
           <a:bodyPr/>
-          <a:p/>
-        </p:txBody>
-      </p:sp>
-      <p:sp>
-        <p:nvSpPr>
-          <p:cNvPr id="92" name="af-svg-path-0005-freeform-01"/>
+          <a:lstStyle/>
+          <a:p>
+            <a:endParaRPr/>
+          </a:p>
+        </p:txBody>
+      </p:sp>
+      <p:sp>
+        <p:nvSpPr>
+          <p:cNvPr id="95" name="af-allocator-task2-propagation-freeform-01" descr="{&quot;autofigure_element_id&quot;:&quot;allocator-task2-propagation&quot;}"/>
           <p:cNvSpPr/>
           <p:nvPr/>
         </p:nvSpPr>
@@ -7099,126 +7340,19 @@
               <a:srgbClr val="D20C0C"/>
             </a:solidFill>
             <a:prstDash val="dot"/>
+            <a:round/>
           </a:ln>
         </p:spPr>
         <p:txBody>
           <a:bodyPr/>
-          <a:p/>
-        </p:txBody>
-      </p:sp>
-      <p:cxnSp>
-        <p:nvCxnSpPr>
-          <p:cNvPr id="93" name="af-allocator-task1-route-1-connector-01"/>
-          <p:cNvCxnSpPr/>
-          <p:nvPr/>
-        </p:nvCxnSpPr>
-        <p:spPr>
-          <a:xfrm>
-            <a:off x="5772150" y="3009900"/>
-            <a:ext cx="152400" cy="209550"/>
-          </a:xfrm>
-          <a:prstGeom prst="line">
-            <a:avLst/>
-          </a:prstGeom>
-          <a:ln w="19050" cap="rnd">
-            <a:solidFill>
-              <a:srgbClr val="111111"/>
-            </a:solidFill>
-            <a:tailEnd type="triangle" w="med" len="med"/>
-          </a:ln>
-          <a:effectLst/>
-        </p:spPr>
-        <p:style>
-          <a:lnRef idx="2">
-            <a:schemeClr val="accent1"/>
-          </a:lnRef>
-          <a:fillRef idx="0">
-            <a:schemeClr val="accent1"/>
-          </a:fillRef>
-          <a:effectRef idx="1">
-            <a:schemeClr val="accent1"/>
-          </a:effectRef>
-          <a:fontRef idx="minor">
-            <a:schemeClr val="tx1"/>
-          </a:fontRef>
-        </p:style>
-      </p:cxnSp>
-      <p:cxnSp>
-        <p:nvCxnSpPr>
-          <p:cNvPr id="94" name="af-allocator-task1-route-2-connector-01"/>
-          <p:cNvCxnSpPr/>
-          <p:nvPr/>
-        </p:nvCxnSpPr>
-        <p:spPr>
-          <a:xfrm>
-            <a:off x="6515100" y="3028950"/>
-            <a:ext cx="152400" cy="171450"/>
-          </a:xfrm>
-          <a:prstGeom prst="line">
-            <a:avLst/>
-          </a:prstGeom>
-          <a:ln w="19050" cap="rnd">
-            <a:solidFill>
-              <a:srgbClr val="111111"/>
-            </a:solidFill>
-            <a:tailEnd type="triangle" w="med" len="med"/>
-          </a:ln>
-          <a:effectLst/>
-        </p:spPr>
-        <p:style>
-          <a:lnRef idx="2">
-            <a:schemeClr val="accent1"/>
-          </a:lnRef>
-          <a:fillRef idx="0">
-            <a:schemeClr val="accent1"/>
-          </a:fillRef>
-          <a:effectRef idx="1">
-            <a:schemeClr val="accent1"/>
-          </a:effectRef>
-          <a:fontRef idx="minor">
-            <a:schemeClr val="tx1"/>
-          </a:fontRef>
-        </p:style>
-      </p:cxnSp>
-      <p:cxnSp>
-        <p:nvCxnSpPr>
-          <p:cNvPr id="95" name="af-allocator-task1-skip-edge-connector-01"/>
-          <p:cNvCxnSpPr/>
-          <p:nvPr/>
-        </p:nvCxnSpPr>
-        <p:spPr>
-          <a:xfrm>
-            <a:off x="7258050" y="3886200"/>
-            <a:ext cx="314325" cy="28575"/>
-          </a:xfrm>
-          <a:prstGeom prst="line">
-            <a:avLst/>
-          </a:prstGeom>
-          <a:ln w="19050" cap="rnd">
-            <a:solidFill>
-              <a:srgbClr val="111111"/>
-            </a:solidFill>
-            <a:tailEnd type="triangle" w="med" len="med"/>
-          </a:ln>
-          <a:effectLst/>
-        </p:spPr>
-        <p:style>
-          <a:lnRef idx="2">
-            <a:schemeClr val="accent1"/>
-          </a:lnRef>
-          <a:fillRef idx="0">
-            <a:schemeClr val="accent1"/>
-          </a:fillRef>
-          <a:effectRef idx="1">
-            <a:schemeClr val="accent1"/>
-          </a:effectRef>
-          <a:fontRef idx="minor">
-            <a:schemeClr val="tx1"/>
-          </a:fontRef>
-        </p:style>
-      </p:cxnSp>
-      <mc:AlternateContent xmlns:mc="http://schemas.openxmlformats.org/markup-compatibility/2006">
-        <mc:Choice xmlns:a14="http://schemas.microsoft.com/office/drawing/2010/main" Requires="a14">
+          <a:lstStyle/>
+          <a:p>
+            <a:endParaRPr/>
+          </a:p>
+        </p:txBody>
+      </p:sp>
+      <mc:AlternateContent xmlns:mc="http://schemas.openxmlformats.org/markup-compatibility/2006" xmlns:a14="http://schemas.microsoft.com/office/drawing/2010/main">
+        <mc:Choice Requires="a14">
           <p:sp>
             <p:nvSpPr>
               <p:cNvPr id="96" name="math:005" descr="AI_AUTOFIGURE_NATIVE_MATH_V1:eyJjb250ZW50X3J1bnMiOlt7ImNhbm9uaWNhbF9sYXRleCI6Inpfe3R9IiwiZm9ybXVsYV9pZCI6IkVRMDA1Iiwia2luZCI6Im1hdGgiLCJsYXRleF9zaGEyNTYiOiI1MTFhZDkzYjNmYWU5ZDczZDU2MzY1NmZlYjNiZTY5M2Y0MjBjM2FkNDNmNjBkY2QzNWRiNjMxYWIwZTUwY2EzIiwibW9kZSI6ImlubGluZSIsIm9tbWxfc2hhMjU2IjoiOWNjMjA3NmY3N2U5ZDBlODdiOWE5Y2ZjYWFmZmRjNTBiNzU4ZDZiYmM1MTBjZWY4ZjNiYTU3NDhmODUyMmM1ZSIsInNlbWFudGljX29tbWxfcHJvZmlsZSI6Im9mZmljZS1tYXRoLXNlbWFudGljLXYyIiwic2VtYW50aWNfb21tbF9zaGEyNTYiOiI3MGQyYWI5NmM3NjkwMTQ0MjFhOGZjMTk5ZjQ0MzE0YjFhYWNlZjVkN2RhZGNiZjU2ZDI3MzJjMWJhMjU0MzI4In1dLCJmb3JtdWxhcyI6W3siY2Fub25pY2FsX2xhdGV4Ijoiel97dH0iLCJmb3JtdWxhX2lkIjoiRVEwMDUiLCJsYXRleF9zaGEyNTYiOiI1MTFhZDkzYjNmYWU5ZDczZDU2MzY1NmZlYjNiZTY5M2Y0MjBjM2FkNDNmNjBkY2QzNWRiNjMxYWIwZTUwY2EzIiwibW9kZSI6ImlubGluZSIsIm9tbWxfc2hhMjU2IjoiOWNjMjA3NmY3N2U5ZDBlODdiOWE5Y2ZjYWFmZmRjNTBiNzU4ZDZiYmM1MTBjZWY4ZjNiYTU3NDhmODUyMmM1ZSIsInNlbWFudGljX29tbWxfcHJvZmlsZSI6Im9mZmljZS1tYXRoLXNlbWFudGljLXYyIiwic2VtYW50aWNfb21tbF9zaGEyNTYiOiI3MGQyYWI5NmM3NjkwMTQ0MjFhOGZjMTk5ZjQ0MzE0YjFhYWNlZjVkN2RhZGNiZjU2ZDI3MzJjMWJhMjU0MzI4In1dLCJraW5kIjoibmF0aXZlX29mZmljZV9tYXRoIiwicGxhY2Vob2xkZXJfbmFtZSI6Im1hdGg6MDA1Iiwic2NoZW1hX3ZlcnNpb24iOiIxLjAifQ=="/>
@@ -7237,41 +7371,53 @@
               <a:effectLst/>
             </p:spPr>
             <p:txBody>
-              <a:bodyPr wrap="none" anchor="t" lIns="0" rIns="0" tIns="0" bIns="0">
+              <a:bodyPr wrap="none" lIns="0" tIns="0" rIns="0" bIns="0" anchor="t">
                 <a:spAutoFit/>
               </a:bodyPr>
               <a:lstStyle/>
               <a:p>
                 <a:pPr algn="ctr"/>
                 <a14:m>
-                  <m:oMath xmlns:m="http://schemas.openxmlformats.org/officeDocument/2006/math">
-                    <m:sSub>
-                      <m:e>
-                        <m:r>
-                          <a:rPr lang="en-US" dirty="0" sz="1350">
-                            <a:solidFill>
-                              <a:srgbClr val="111111"/>
-                            </a:solidFill>
-                            <a:latin typeface="Cambria Math"/>
-                          </a:rPr>
-                          <m:t>z</m:t>
-                        </m:r>
-                      </m:e>
-                      <m:sub>
-                        <m:r>
-                          <a:rPr lang="en-US" dirty="0" sz="1350">
-                            <a:solidFill>
-                              <a:srgbClr val="111111"/>
-                            </a:solidFill>
-                            <a:latin typeface="Cambria Math"/>
-                          </a:rPr>
-                          <m:t>t</m:t>
-                        </m:r>
-                      </m:sub>
-                    </m:sSub>
-                  </m:oMath>
+                  <m:oMathPara xmlns:m="http://schemas.openxmlformats.org/officeDocument/2006/math">
+                    <m:oMath>
+                      <m:sSub>
+                        <m:sSubPr>
+                          <m:ctrlPr>
+                            <a:rPr lang="en-US" sz="1350" dirty="0">
+                              <a:solidFill>
+                                <a:srgbClr val="111111"/>
+                              </a:solidFill>
+                              <a:latin typeface="Cambria Math"/>
+                            </a:rPr>
+                          </m:ctrlPr>
+                        </m:sSubPr>
+                        <m:e>
+                          <m:r>
+                            <a:rPr lang="en-US" sz="1350" dirty="0">
+                              <a:solidFill>
+                                <a:srgbClr val="111111"/>
+                              </a:solidFill>
+                              <a:latin typeface="Cambria Math"/>
+                            </a:rPr>
+                            <m:t>𝑧</m:t>
+                          </m:r>
+                        </m:e>
+                        <m:sub>
+                          <m:r>
+                            <a:rPr lang="en-US" sz="1350" dirty="0">
+                              <a:solidFill>
+                                <a:srgbClr val="111111"/>
+                              </a:solidFill>
+                              <a:latin typeface="Cambria Math"/>
+                            </a:rPr>
+                            <m:t>𝑡</m:t>
+                          </m:r>
+                        </m:sub>
+                      </m:sSub>
+                    </m:oMath>
+                  </m:oMathPara>
                 </a14:m>
-                <a:endParaRPr lang="en-US" dirty="0" sz="1350">
+                <a:endParaRPr lang="en-US" sz="1350" dirty="0">
                   <a:solidFill>
                     <a:srgbClr val="111111"/>
                   </a:solidFill>
@@ -7281,7 +7427,7 @@
             </p:txBody>
           </p:sp>
         </mc:Choice>
-        <mc:Fallback>
+        <mc:Fallback xmlns="">
           <p:sp>
             <p:nvSpPr>
               <p:cNvPr id="96" name="math:005" descr="AI_AUTOFIGURE_MATH_FALLBACK_ONLY_V1:eyJjb250ZW50X3J1bnMiOlt7ImNhbm9uaWNhbF9sYXRleCI6Inpfe3R9IiwiZm9ybXVsYV9pZCI6IkVRMDA1Iiwia2luZCI6Im1hdGgiLCJsYXRleF9zaGEyNTYiOiI1MTFhZDkzYjNmYWU5ZDczZDU2MzY1NmZlYjNiZTY5M2Y0MjBjM2FkNDNmNjBkY2QzNWRiNjMxYWIwZTUwY2EzIiwibW9kZSI6ImlubGluZSIsIm9tbWxfc2hhMjU2IjoiOWNjMjA3NmY3N2U5ZDBlODdiOWE5Y2ZjYWFmZmRjNTBiNzU4ZDZiYmM1MTBjZWY4ZjNiYTU3NDhmODUyMmM1ZSIsInNlbWFudGljX29tbWxfcHJvZmlsZSI6Im9mZmljZS1tYXRoLXNlbWFudGljLXYyIiwic2VtYW50aWNfb21tbF9zaGEyNTYiOiI3MGQyYWI5NmM3NjkwMTQ0MjFhOGZjMTk5ZjQ0MzE0YjFhYWNlZjVkN2RhZGNiZjU2ZDI3MzJjMWJhMjU0MzI4In1dLCJmb3JtdWxhcyI6W3siY2Fub25pY2FsX2xhdGV4Ijoiel97dH0iLCJmb3JtdWxhX2lkIjoiRVEwMDUiLCJsYXRleF9zaGEyNTYiOiI1MTFhZDkzYjNmYWU5ZDczZDU2MzY1NmZlYjNiZTY5M2Y0MjBjM2FkNDNmNjBkY2QzNWRiNjMxYWIwZTUwY2EzIiwibW9kZSI6ImlubGluZSIsIm9tbWxfc2hhMjU2IjoiOWNjMjA3NmY3N2U5ZDBlODdiOWE5Y2ZjYWFmZmRjNTBiNzU4ZDZiYmM1MTBjZWY4ZjNiYTU3NDhmODUyMmM1ZSIsInNlbWFudGljX29tbWxfcHJvZmlsZSI6Im9mZmljZS1tYXRoLXNlbWFudGljLXYyIiwic2VtYW50aWNfb21tbF9zaGEyNTYiOiI3MGQyYWI5NmM3NjkwMTQ0MjFhOGZjMTk5ZjQ0MzE0YjFhYWNlZjVkN2RhZGNiZjU2ZDI3MzJjMWJhMjU0MzI4In1dLCJraW5kIjoibmF0aXZlX29mZmljZV9tYXRoIiwicGxhY2Vob2xkZXJfbmFtZSI6Im1hdGg6MDA1Iiwic2NoZW1hX3ZlcnNpb24iOiIxLjAifQ=="/>
@@ -7326,7 +7472,7 @@
       </mc:AlternateContent>
       <p:sp>
         <p:nvSpPr>
-          <p:cNvPr id="97" name="af-svg-rect-0031-rect-01"/>
+          <p:cNvPr id="97" name="af-zt-top-box-rect-01" descr="{&quot;autofigure_element_id&quot;:&quot;zt-top-box&quot;}"/>
           <p:cNvSpPr/>
           <p:nvPr/>
         </p:nvSpPr>
@@ -7345,6 +7491,7 @@
             <a:solidFill>
               <a:srgbClr val="233A64"/>
             </a:solidFill>
+            <a:miter/>
           </a:ln>
           <a:effectLst/>
         </p:spPr>
@@ -7367,12 +7514,13 @@
           <a:lstStyle/>
           <a:p>
             <a:pPr algn="ctr"/>
-          </a:p>
-        </p:txBody>
-      </p:sp>
-      <p:sp>
-        <p:nvSpPr>
-          <p:cNvPr id="98" name="af-svg-circle-0012-ellipse-01"/>
+            <a:endParaRPr/>
+          </a:p>
+        </p:txBody>
+      </p:sp>
+      <p:sp>
+        <p:nvSpPr>
+          <p:cNvPr id="98" name="af-svg-circle-0012-ellipse-01" descr="{&quot;autofigure_element_id&quot;:&quot;svg-circle-0012&quot;}"/>
           <p:cNvSpPr/>
           <p:nvPr/>
         </p:nvSpPr>
@@ -7443,12 +7591,13 @@
           <a:lstStyle/>
           <a:p>
             <a:pPr algn="ctr"/>
-          </a:p>
-        </p:txBody>
-      </p:sp>
-      <p:sp>
-        <p:nvSpPr>
-          <p:cNvPr id="99" name="af-svg-circle-0013-ellipse-01"/>
+            <a:endParaRPr/>
+          </a:p>
+        </p:txBody>
+      </p:sp>
+      <p:sp>
+        <p:nvSpPr>
+          <p:cNvPr id="99" name="af-svg-circle-0013-ellipse-01" descr="{&quot;autofigure_element_id&quot;:&quot;svg-circle-0013&quot;}"/>
           <p:cNvSpPr/>
           <p:nvPr/>
         </p:nvSpPr>
@@ -7519,12 +7668,13 @@
           <a:lstStyle/>
           <a:p>
             <a:pPr algn="ctr"/>
-          </a:p>
-        </p:txBody>
-      </p:sp>
-      <p:sp>
-        <p:nvSpPr>
-          <p:cNvPr id="100" name="af-svg-circle-0014-ellipse-01"/>
+            <a:endParaRPr/>
+          </a:p>
+        </p:txBody>
+      </p:sp>
+      <p:sp>
+        <p:nvSpPr>
+          <p:cNvPr id="100" name="af-svg-circle-0014-ellipse-01" descr="{&quot;autofigure_element_id&quot;:&quot;svg-circle-0014&quot;}"/>
           <p:cNvSpPr/>
           <p:nvPr/>
         </p:nvSpPr>
@@ -7595,12 +7745,13 @@
           <a:lstStyle/>
           <a:p>
             <a:pPr algn="ctr"/>
-          </a:p>
-        </p:txBody>
-      </p:sp>
-      <p:sp>
-        <p:nvSpPr>
-          <p:cNvPr id="101" name="af-svg-rect-0032-rect-01"/>
+            <a:endParaRPr/>
+          </a:p>
+        </p:txBody>
+      </p:sp>
+      <p:sp>
+        <p:nvSpPr>
+          <p:cNvPr id="101" name="af-zt-bottom-box-rect-01" descr="{&quot;autofigure_element_id&quot;:&quot;zt-bottom-box&quot;}"/>
           <p:cNvSpPr/>
           <p:nvPr/>
         </p:nvSpPr>
@@ -7619,6 +7770,7 @@
             <a:solidFill>
               <a:srgbClr val="233A64"/>
             </a:solidFill>
+            <a:miter/>
           </a:ln>
           <a:effectLst/>
         </p:spPr>
@@ -7641,12 +7793,13 @@
           <a:lstStyle/>
           <a:p>
             <a:pPr algn="ctr"/>
-          </a:p>
-        </p:txBody>
-      </p:sp>
-      <p:sp>
-        <p:nvSpPr>
-          <p:cNvPr id="102" name="af-svg-circle-0015-ellipse-01"/>
+            <a:endParaRPr/>
+          </a:p>
+        </p:txBody>
+      </p:sp>
+      <p:sp>
+        <p:nvSpPr>
+          <p:cNvPr id="102" name="af-svg-circle-0015-ellipse-01" descr="{&quot;autofigure_element_id&quot;:&quot;svg-circle-0015&quot;}"/>
           <p:cNvSpPr/>
           <p:nvPr/>
         </p:nvSpPr>
@@ -7714,12 +7867,13 @@
           <a:lstStyle/>
           <a:p>
             <a:pPr algn="ctr"/>
-          </a:p>
-        </p:txBody>
-      </p:sp>
-      <p:sp>
-        <p:nvSpPr>
-          <p:cNvPr id="103" name="af-svg-circle-0016-ellipse-01"/>
+            <a:endParaRPr/>
+          </a:p>
+        </p:txBody>
+      </p:sp>
+      <p:sp>
+        <p:nvSpPr>
+          <p:cNvPr id="103" name="af-svg-circle-0016-ellipse-01" descr="{&quot;autofigure_element_id&quot;:&quot;svg-circle-0016&quot;}"/>
           <p:cNvSpPr/>
           <p:nvPr/>
         </p:nvSpPr>
@@ -7787,12 +7941,13 @@
           <a:lstStyle/>
           <a:p>
             <a:pPr algn="ctr"/>
-          </a:p>
-        </p:txBody>
-      </p:sp>
-      <p:sp>
-        <p:nvSpPr>
-          <p:cNvPr id="104" name="af-svg-circle-0017-ellipse-01"/>
+            <a:endParaRPr/>
+          </a:p>
+        </p:txBody>
+      </p:sp>
+      <p:sp>
+        <p:nvSpPr>
+          <p:cNvPr id="104" name="af-svg-circle-0017-ellipse-01" descr="{&quot;autofigure_element_id&quot;:&quot;svg-circle-0017&quot;}"/>
           <p:cNvSpPr/>
           <p:nvPr/>
         </p:nvSpPr>
@@ -7860,86 +8015,13 @@
           <a:lstStyle/>
           <a:p>
             <a:pPr algn="ctr"/>
-          </a:p>
-        </p:txBody>
-      </p:sp>
-      <p:cxnSp>
-        <p:nvCxnSpPr>
-          <p:cNvPr id="105" name="af-top-mixture-to-rollout-connector-01"/>
-          <p:cNvCxnSpPr/>
-          <p:nvPr/>
-        </p:nvCxnSpPr>
-        <p:spPr>
-          <a:xfrm>
-            <a:off x="9001125" y="2590800"/>
-            <a:ext cx="581025" cy="381000"/>
-          </a:xfrm>
-          <a:prstGeom prst="line">
-            <a:avLst/>
-          </a:prstGeom>
-          <a:ln w="17145" cap="rnd">
-            <a:solidFill>
-              <a:srgbClr val="8D6A00"/>
-            </a:solidFill>
-            <a:tailEnd type="triangle" w="lg" len="lg"/>
-          </a:ln>
-          <a:effectLst/>
-        </p:spPr>
-        <p:style>
-          <a:lnRef idx="2">
-            <a:schemeClr val="accent1"/>
-          </a:lnRef>
-          <a:fillRef idx="0">
-            <a:schemeClr val="accent1"/>
-          </a:fillRef>
-          <a:effectRef idx="1">
-            <a:schemeClr val="accent1"/>
-          </a:effectRef>
-          <a:fontRef idx="minor">
-            <a:schemeClr val="tx1"/>
-          </a:fontRef>
-        </p:style>
-      </p:cxnSp>
-      <p:cxnSp>
-        <p:nvCxnSpPr>
-          <p:cNvPr id="106" name="af-bottom-mixture-to-rollout-connector-01"/>
-          <p:cNvCxnSpPr/>
-          <p:nvPr/>
-        </p:nvCxnSpPr>
-        <p:spPr>
-          <a:xfrm flipV="1">
-            <a:off x="9001125" y="3076575"/>
-            <a:ext cx="571500" cy="904875"/>
-          </a:xfrm>
-          <a:prstGeom prst="line">
-            <a:avLst/>
-          </a:prstGeom>
-          <a:ln w="17145" cap="rnd">
-            <a:solidFill>
-              <a:srgbClr val="8D6A00"/>
-            </a:solidFill>
-            <a:tailEnd type="triangle" w="lg" len="lg"/>
-          </a:ln>
-          <a:effectLst/>
-        </p:spPr>
-        <p:style>
-          <a:lnRef idx="2">
-            <a:schemeClr val="accent1"/>
-          </a:lnRef>
-          <a:fillRef idx="0">
-            <a:schemeClr val="accent1"/>
-          </a:fillRef>
-          <a:effectRef idx="1">
-            <a:schemeClr val="accent1"/>
-          </a:effectRef>
-          <a:fontRef idx="minor">
-            <a:schemeClr val="tx1"/>
-          </a:fontRef>
-        </p:style>
-      </p:cxnSp>
-      <p:sp>
-        <p:nvSpPr>
-          <p:cNvPr id="107" name="af-task-conditioned-imagination-rect-01"/>
+            <a:endParaRPr/>
+          </a:p>
+        </p:txBody>
+      </p:sp>
+      <p:sp>
+        <p:nvSpPr>
+          <p:cNvPr id="105" name="af-task-conditioned-imagination-rect-01" descr="{&quot;autofigure_element_id&quot;:&quot;task-conditioned-imagination&quot;}"/>
           <p:cNvSpPr/>
           <p:nvPr/>
         </p:nvSpPr>
@@ -7960,6 +8042,7 @@
             <a:solidFill>
               <a:srgbClr val="223A63"/>
             </a:solidFill>
+            <a:miter/>
           </a:ln>
           <a:effectLst/>
         </p:spPr>
@@ -7982,12 +8065,13 @@
           <a:lstStyle/>
           <a:p>
             <a:pPr algn="ctr"/>
+            <a:endParaRPr/>
           </a:p>
         </p:txBody>
       </p:sp>
       <p:cxnSp>
         <p:nvCxnSpPr>
-          <p:cNvPr id="108" name="af-mapping-to-imagination-connector-01"/>
+          <p:cNvPr id="106" name="af-mapping-to-imagination-connector-01" descr="{&quot;arrow_spec_sha256&quot;:&quot;e434ce30d5201ca68c60c6b234c534af93b086cd24bb8bf9ab331cbdb9a2f9f4&quot;,&quot;autofigure_element_id&quot;:&quot;mapping-to-imagination&quot;}"/>
           <p:cNvCxnSpPr/>
           <p:nvPr/>
         </p:nvCxnSpPr>
@@ -8003,6 +8087,7 @@
             <a:solidFill>
               <a:srgbClr val="777777"/>
             </a:solidFill>
+            <a:round/>
             <a:tailEnd type="triangle" w="sm" len="sm"/>
           </a:ln>
           <a:effectLst/>
@@ -8024,7 +8109,7 @@
       </p:cxnSp>
       <p:sp>
         <p:nvSpPr>
-          <p:cNvPr id="109" name="af-svg-text-0038-text-01"/>
+          <p:cNvPr id="107" name="af-svg-text-0038-text-01" descr="{&quot;autofigure_element_id&quot;:&quot;svg-text-0038&quot;}"/>
           <p:cNvSpPr txBox="1"/>
           <p:nvPr/>
         </p:nvSpPr>
@@ -8040,7 +8125,7 @@
           <a:effectLst/>
         </p:spPr>
         <p:txBody>
-          <a:bodyPr wrap="none" anchor="t" lIns="0" rIns="0" tIns="0" bIns="0">
+          <a:bodyPr wrap="none" lIns="0" tIns="0" rIns="0" bIns="0" anchor="t">
             <a:spAutoFit/>
           </a:bodyPr>
           <a:lstStyle/>
@@ -8060,7 +8145,7 @@
       </p:sp>
       <p:sp>
         <p:nvSpPr>
-          <p:cNvPr id="110" name="af-svg-rect-0034-rect-01"/>
+          <p:cNvPr id="108" name="af-svg-rect-0034-rect-01" descr="{&quot;autofigure_element_id&quot;:&quot;svg-rect-0034&quot;}"/>
           <p:cNvSpPr/>
           <p:nvPr/>
         </p:nvSpPr>
@@ -8101,14 +8186,15 @@
           <a:lstStyle/>
           <a:p>
             <a:pPr algn="ctr"/>
-          </a:p>
-        </p:txBody>
-      </p:sp>
-      <mc:AlternateContent xmlns:mc="http://schemas.openxmlformats.org/markup-compatibility/2006">
-        <mc:Choice xmlns:a14="http://schemas.microsoft.com/office/drawing/2010/main" Requires="a14">
+            <a:endParaRPr/>
+          </a:p>
+        </p:txBody>
+      </p:sp>
+      <mc:AlternateContent xmlns:mc="http://schemas.openxmlformats.org/markup-compatibility/2006" xmlns:a14="http://schemas.microsoft.com/office/drawing/2010/main">
+        <mc:Choice Requires="a14">
           <p:sp>
             <p:nvSpPr>
-              <p:cNvPr id="111" name="math:006" descr="AI_AUTOFIGURE_NATIVE_MATH_V1:eyJjb250ZW50X3J1bnMiOlt7ImNhbm9uaWNhbF9sYXRleCI6Inpee1xcdGF1fV97dH0iLCJmb3JtdWxhX2lkIjoiRVEwMDYiLCJraW5kIjoibWF0aCIsImxhdGV4X3NoYTI1NiI6IjgxMmI1YjFjOGFmZDdhYzI0Nzc5YTQxYzhmMmE0ZDNiNzZlODAyYzNlNDk5NDc3MjdlM2Q4OTZhYmI3MmQ3ZjEiLCJtb2RlIjoiaW5saW5lIiwib21tbF9zaGEyNTYiOiIwYjA5Y2ZlY2EzYmZiNzFlMzRjMGY1ZmI2ZTY2NDUzZTMwMWFlZGI1Nzc5YmE1MTFhMGZiZDc0MDljMWZlN2M1Iiwic2VtYW50aWNfb21tbF9wcm9maWxlIjoib2ZmaWNlLW1hdGgtc2VtYW50aWMtdjIiLCJzZW1hbnRpY19vbW1sX3NoYTI1NiI6IjdiMDU0ZTcxNjkxNGEwYjY5OGE4N2NmZWM0NTQ3ZWYwYjY2NTA0YzFhYTU3YmI0NDkwN2Q0NGE0YzQ3NDgxZWQifV0sImZvcm11bGFzIjpbeyJjYW5vbmljYWxfbGF0ZXgiOiJ6XntcXHRhdX1fe3R9IiwiZm9ybXVsYV9pZCI6IkVRMDA2IiwibGF0ZXhfc2hhMjU2IjoiODEyYjViMWM4YWZkN2FjMjQ3NzlhNDFjOGYyYTRkM2I3NmU4MDJjM2U0OTk0NzcyN2UzZDg5NmFiYjcyZDdmMSIsIm1vZGUiOiJpbmxpbmUiLCJvbW1sX3NoYTI1NiI6IjBiMDljZmVjYTNiZmI3MWUzNGMwZjVmYjZlNjY0NTNlMzAxYWVkYjU3NzliYTUxMWEwZmJkNzQwOWMxZmU3YzUiLCJzZW1hbnRpY19vbW1sX3Byb2ZpbGUiOiJvZmZpY2UtbWF0aC1zZW1hbnRpYy12MiIsInNlbWFudGljX29tbWxfc2hhMjU2IjoiN2IwNTRlNzE2OTE0YTBiNjk4YTg3Y2ZlYzQ1NDdlZjBiNjY1MDRjMWFhNTdiYjQ0OTA3ZDQ0YTRjNDc0ODFlZCJ9XSwia2luZCI6Im5hdGl2ZV9vZmZpY2VfbWF0aCIsInBsYWNlaG9sZGVyX25hbWUiOiJtYXRoOjAwNiIsInNjaGVtYV92ZXJzaW9uIjoiMS4wIn0="/>
+              <p:cNvPr id="109" name="math:006" descr="AI_AUTOFIGURE_NATIVE_MATH_V1:eyJjb250ZW50X3J1bnMiOlt7ImNhbm9uaWNhbF9sYXRleCI6Inpee1xcdGF1fV97dH0iLCJmb3JtdWxhX2lkIjoiRVEwMDYiLCJraW5kIjoibWF0aCIsImxhdGV4X3NoYTI1NiI6IjgxMmI1YjFjOGFmZDdhYzI0Nzc5YTQxYzhmMmE0ZDNiNzZlODAyYzNlNDk5NDc3MjdlM2Q4OTZhYmI3MmQ3ZjEiLCJtb2RlIjoiaW5saW5lIiwib21tbF9zaGEyNTYiOiIwYjA5Y2ZlY2EzYmZiNzFlMzRjMGY1ZmI2ZTY2NDUzZTMwMWFlZGI1Nzc5YmE1MTFhMGZiZDc0MDljMWZlN2M1Iiwic2VtYW50aWNfb21tbF9wcm9maWxlIjoib2ZmaWNlLW1hdGgtc2VtYW50aWMtdjIiLCJzZW1hbnRpY19vbW1sX3NoYTI1NiI6IjdiMDU0ZTcxNjkxNGEwYjY5OGE4N2NmZWM0NTQ3ZWYwYjY2NTA0YzFhYTU3YmI0NDkwN2Q0NGE0YzQ3NDgxZWQifV0sImZvcm11bGFzIjpbeyJjYW5vbmljYWxfbGF0ZXgiOiJ6XntcXHRhdX1fe3R9IiwiZm9ybXVsYV9pZCI6IkVRMDA2IiwibGF0ZXhfc2hhMjU2IjoiODEyYjViMWM4YWZkN2FjMjQ3NzlhNDFjOGYyYTRkM2I3NmU4MDJjM2U0OTk0NzcyN2UzZDg5NmFiYjcyZDdmMSIsIm1vZGUiOiJpbmxpbmUiLCJvbW1sX3NoYTI1NiI6IjBiMDljZmVjYTNiZmI3MWUzNGMwZjVmYjZlNjY0NTNlMzAxYWVkYjU3NzliYTUxMWEwZmJkNzQwOWMxZmU3YzUiLCJzZW1hbnRpY19vbW1sX3Byb2ZpbGUiOiJvZmZpY2UtbWF0aC1zZW1hbnRpYy12MiIsInNlbWFudGljX29tbWxfc2hhMjU2IjoiN2IwNTRlNzE2OTE0YTBiNjk4YTg3Y2ZlYzQ1NDdlZjBiNjY1MDRjMWFhNTdiYjQ0OTA3ZDQ0YTRjNDc0ODFlZCJ9XSwia2luZCI6Im5hdGl2ZV9vZmZpY2VfbWF0aCIsInBsYWNlaG9sZGVyX25hbWUiOiJtYXRoOjAwNiIsInNjaGVtYV92ZXJzaW9uIjoiMS4wIn0="/>
               <p:cNvSpPr txBox="1"/>
               <p:nvPr/>
             </p:nvSpPr>
@@ -8124,52 +8210,64 @@
               <a:effectLst/>
             </p:spPr>
             <p:txBody>
-              <a:bodyPr wrap="none" anchor="t" lIns="0" rIns="0" tIns="0" bIns="0">
+              <a:bodyPr wrap="none" lIns="0" tIns="0" rIns="0" bIns="0" anchor="t">
                 <a:spAutoFit/>
               </a:bodyPr>
               <a:lstStyle/>
               <a:p>
                 <a:pPr algn="ctr"/>
                 <a14:m>
-                  <m:oMath xmlns:m="http://schemas.openxmlformats.org/officeDocument/2006/math">
-                    <m:sSubSup>
-                      <m:e>
-                        <m:r>
-                          <a:rPr lang="en-US" dirty="0" sz="1275">
-                            <a:solidFill>
-                              <a:srgbClr val="FFFFFF"/>
-                            </a:solidFill>
-                            <a:latin typeface="Cambria Math"/>
-                          </a:rPr>
-                          <m:t>z</m:t>
-                        </m:r>
-                      </m:e>
-                      <m:sub>
-                        <m:r>
-                          <a:rPr lang="en-US" dirty="0" sz="1275">
-                            <a:solidFill>
-                              <a:srgbClr val="FFFFFF"/>
-                            </a:solidFill>
-                            <a:latin typeface="Cambria Math"/>
-                          </a:rPr>
-                          <m:t>t</m:t>
-                        </m:r>
-                      </m:sub>
-                      <m:sup>
-                        <m:r>
-                          <a:rPr lang="en-US" dirty="0" sz="1275">
-                            <a:solidFill>
-                              <a:srgbClr val="FFFFFF"/>
-                            </a:solidFill>
-                            <a:latin typeface="Cambria Math"/>
-                          </a:rPr>
-                          <m:t>τ</m:t>
-                        </m:r>
-                      </m:sup>
-                    </m:sSubSup>
-                  </m:oMath>
+                  <m:oMathPara xmlns:m="http://schemas.openxmlformats.org/officeDocument/2006/math">
+                    <m:oMath>
+                      <m:sSubSup>
+                        <m:sSubSupPr>
+                          <m:ctrlPr>
+                            <a:rPr lang="en-US" sz="1275" dirty="0">
+                              <a:solidFill>
+                                <a:srgbClr val="FFFFFF"/>
+                              </a:solidFill>
+                              <a:latin typeface="Cambria Math"/>
+                            </a:rPr>
+                          </m:ctrlPr>
+                        </m:sSubSupPr>
+                        <m:e>
+                          <m:r>
+                            <a:rPr lang="en-US" sz="1275" dirty="0">
+                              <a:solidFill>
+                                <a:srgbClr val="FFFFFF"/>
+                              </a:solidFill>
+                              <a:latin typeface="Cambria Math"/>
+                            </a:rPr>
+                            <m:t>𝑧</m:t>
+                          </m:r>
+                        </m:e>
+                        <m:sub>
+                          <m:r>
+                            <a:rPr lang="en-US" sz="1275" dirty="0">
+                              <a:solidFill>
+                                <a:srgbClr val="FFFFFF"/>
+                              </a:solidFill>
+                              <a:latin typeface="Cambria Math"/>
+                            </a:rPr>
+                            <m:t>𝑡</m:t>
+                          </m:r>
+                        </m:sub>
+                        <m:sup>
+                          <m:r>
+                            <a:rPr lang="en-US" sz="1275" dirty="0">
+                              <a:solidFill>
+                                <a:srgbClr val="FFFFFF"/>
+                              </a:solidFill>
+                              <a:latin typeface="Cambria Math"/>
+                            </a:rPr>
+                            <m:t>𝜏</m:t>
+                          </m:r>
+                        </m:sup>
+                      </m:sSubSup>
+                    </m:oMath>
+                  </m:oMathPara>
                 </a14:m>
-                <a:endParaRPr lang="en-US" dirty="0" sz="1275">
+                <a:endParaRPr lang="en-US" sz="1275" dirty="0">
                   <a:solidFill>
                     <a:srgbClr val="FFFFFF"/>
                   </a:solidFill>
@@ -8179,10 +8277,10 @@
             </p:txBody>
           </p:sp>
         </mc:Choice>
-        <mc:Fallback>
+        <mc:Fallback xmlns="">
           <p:sp>
             <p:nvSpPr>
-              <p:cNvPr id="111" name="math:006" descr="AI_AUTOFIGURE_MATH_FALLBACK_ONLY_V1:eyJjb250ZW50X3J1bnMiOlt7ImNhbm9uaWNhbF9sYXRleCI6Inpee1xcdGF1fV97dH0iLCJmb3JtdWxhX2lkIjoiRVEwMDYiLCJraW5kIjoibWF0aCIsImxhdGV4X3NoYTI1NiI6IjgxMmI1YjFjOGFmZDdhYzI0Nzc5YTQxYzhmMmE0ZDNiNzZlODAyYzNlNDk5NDc3MjdlM2Q4OTZhYmI3MmQ3ZjEiLCJtb2RlIjoiaW5saW5lIiwib21tbF9zaGEyNTYiOiIwYjA5Y2ZlY2EzYmZiNzFlMzRjMGY1ZmI2ZTY2NDUzZTMwMWFlZGI1Nzc5YmE1MTFhMGZiZDc0MDljMWZlN2M1Iiwic2VtYW50aWNfb21tbF9wcm9maWxlIjoib2ZmaWNlLW1hdGgtc2VtYW50aWMtdjIiLCJzZW1hbnRpY19vbW1sX3NoYTI1NiI6IjdiMDU0ZTcxNjkxNGEwYjY5OGE4N2NmZWM0NTQ3ZWYwYjY2NTA0YzFhYTU3YmI0NDkwN2Q0NGE0YzQ3NDgxZWQifV0sImZvcm11bGFzIjpbeyJjYW5vbmljYWxfbGF0ZXgiOiJ6XntcXHRhdX1fe3R9IiwiZm9ybXVsYV9pZCI6IkVRMDA2IiwibGF0ZXhfc2hhMjU2IjoiODEyYjViMWM4YWZkN2FjMjQ3NzlhNDFjOGYyYTRkM2I3NmU4MDJjM2U0OTk0NzcyN2UzZDg5NmFiYjcyZDdmMSIsIm1vZGUiOiJpbmxpbmUiLCJvbW1sX3NoYTI1NiI6IjBiMDljZmVjYTNiZmI3MWUzNGMwZjVmYjZlNjY0NTNlMzAxYWVkYjU3NzliYTUxMWEwZmJkNzQwOWMxZmU3YzUiLCJzZW1hbnRpY19vbW1sX3Byb2ZpbGUiOiJvZmZpY2UtbWF0aC1zZW1hbnRpYy12MiIsInNlbWFudGljX29tbWxfc2hhMjU2IjoiN2IwNTRlNzE2OTE0YTBiNjk4YTg3Y2ZlYzQ1NDdlZjBiNjY1MDRjMWFhNTdiYjQ0OTA3ZDQ0YTRjNDc0ODFlZCJ9XSwia2luZCI6Im5hdGl2ZV9vZmZpY2VfbWF0aCIsInBsYWNlaG9sZGVyX25hbWUiOiJtYXRoOjAwNiIsInNjaGVtYV92ZXJzaW9uIjoiMS4wIn0="/>
+              <p:cNvPr id="109" name="math:006" descr="AI_AUTOFIGURE_MATH_FALLBACK_ONLY_V1:eyJjb250ZW50X3J1bnMiOlt7ImNhbm9uaWNhbF9sYXRleCI6Inpee1xcdGF1fV97dH0iLCJmb3JtdWxhX2lkIjoiRVEwMDYiLCJraW5kIjoibWF0aCIsImxhdGV4X3NoYTI1NiI6IjgxMmI1YjFjOGFmZDdhYzI0Nzc5YTQxYzhmMmE0ZDNiNzZlODAyYzNlNDk5NDc3MjdlM2Q4OTZhYmI3MmQ3ZjEiLCJtb2RlIjoiaW5saW5lIiwib21tbF9zaGEyNTYiOiIwYjA5Y2ZlY2EzYmZiNzFlMzRjMGY1ZmI2ZTY2NDUzZTMwMWFlZGI1Nzc5YmE1MTFhMGZiZDc0MDljMWZlN2M1Iiwic2VtYW50aWNfb21tbF9wcm9maWxlIjoib2ZmaWNlLW1hdGgtc2VtYW50aWMtdjIiLCJzZW1hbnRpY19vbW1sX3NoYTI1NiI6IjdiMDU0ZTcxNjkxNGEwYjY5OGE4N2NmZWM0NTQ3ZWYwYjY2NTA0YzFhYTU3YmI0NDkwN2Q0NGE0YzQ3NDgxZWQifV0sImZvcm11bGFzIjpbeyJjYW5vbmljYWxfbGF0ZXgiOiJ6XntcXHRhdX1fe3R9IiwiZm9ybXVsYV9pZCI6IkVRMDA2IiwibGF0ZXhfc2hhMjU2IjoiODEyYjViMWM4YWZkN2FjMjQ3NzlhNDFjOGYyYTRkM2I3NmU4MDJjM2U0OTk0NzcyN2UzZDg5NmFiYjcyZDdmMSIsIm1vZGUiOiJpbmxpbmUiLCJvbW1sX3NoYTI1NiI6IjBiMDljZmVjYTNiZmI3MWUzNGMwZjVmYjZlNjY0NTNlMzAxYWVkYjU3NzliYTUxMWEwZmJkNzQwOWMxZmU3YzUiLCJzZW1hbnRpY19vbW1sX3Byb2ZpbGUiOiJvZmZpY2UtbWF0aC1zZW1hbnRpYy12MiIsInNlbWFudGljX29tbWxfc2hhMjU2IjoiN2IwNTRlNzE2OTE0YTBiNjk4YTg3Y2ZlYzQ1NDdlZjBiNjY1MDRjMWFhNTdiYjQ0OTA3ZDQ0YTRjNDc0ODFlZCJ9XSwia2luZCI6Im5hdGl2ZV9vZmZpY2VfbWF0aCIsInBsYWNlaG9sZGVyX25hbWUiOiJtYXRoOjAwNiIsInNjaGVtYV92ZXJzaW9uIjoiMS4wIn0="/>
               <p:cNvSpPr txBox="1"/>
               <p:nvPr/>
             </p:nvSpPr>
@@ -8224,7 +8322,7 @@
       </mc:AlternateContent>
       <p:sp>
         <p:nvSpPr>
-          <p:cNvPr id="112" name="af-svg-rect-0035-rect-01"/>
+          <p:cNvPr id="110" name="af-svg-rect-0035-rect-01" descr="{&quot;autofigure_element_id&quot;:&quot;svg-rect-0035&quot;}"/>
           <p:cNvSpPr/>
           <p:nvPr/>
         </p:nvSpPr>
@@ -8265,14 +8363,15 @@
           <a:lstStyle/>
           <a:p>
             <a:pPr algn="ctr"/>
-          </a:p>
-        </p:txBody>
-      </p:sp>
-      <mc:AlternateContent xmlns:mc="http://schemas.openxmlformats.org/markup-compatibility/2006">
-        <mc:Choice xmlns:a14="http://schemas.microsoft.com/office/drawing/2010/main" Requires="a14">
+            <a:endParaRPr/>
+          </a:p>
+        </p:txBody>
+      </p:sp>
+      <mc:AlternateContent xmlns:mc="http://schemas.openxmlformats.org/markup-compatibility/2006" xmlns:a14="http://schemas.microsoft.com/office/drawing/2010/main">
+        <mc:Choice Requires="a14">
           <p:sp>
             <p:nvSpPr>
-              <p:cNvPr id="113" name="math:007" descr="AI_AUTOFIGURE_NATIVE_MATH_V1:eyJjb250ZW50X3J1bnMiOlt7ImNhbm9uaWNhbF9sYXRleCI6Inpee1xcdGF1fV97dCsxfSIsImZvcm11bGFfaWQiOiJFUTAwNyIsImtpbmQiOiJtYXRoIiwibGF0ZXhfc2hhMjU2IjoiMmM1ZTJlMzU3Mzg2MTFkZDE4YzEwNzBlZTQ2YjQ1MGU5YjE0ZGViZDFmYmU3ZDJlYzI0OWQ4OWMxZThmODU5MSIsIm1vZGUiOiJpbmxpbmUiLCJvbW1sX3NoYTI1NiI6IjY2YmY1ZjM0M2NjY2YwNTI1M2NjZGI5ODYxM2Y4NTFjZTYzMmVkOWNmMjBhMjE3MDc5MDUyYWE2NjRlYWQ3ZTkiLCJzZW1hbnRpY19vbW1sX3Byb2ZpbGUiOiJvZmZpY2UtbWF0aC1zZW1hbnRpYy12MiIsInNlbWFudGljX29tbWxfc2hhMjU2IjoiMjMzM2NjYjhkM2RjMTg3N2JiNDFkYzBkMmJlM2NmY2MxMjJjMGZjNDQyMzk3Mzk4YmI0MzlkMWMwNzdhMjY5OCJ9XSwiZm9ybXVsYXMiOlt7ImNhbm9uaWNhbF9sYXRleCI6Inpee1xcdGF1fV97dCsxfSIsImZvcm11bGFfaWQiOiJFUTAwNyIsImxhdGV4X3NoYTI1NiI6IjJjNWUyZTM1NzM4NjExZGQxOGMxMDcwZWU0NmI0NTBlOWIxNGRlYmQxZmJlN2QyZWMyNDlkODljMWU4Zjg1OTEiLCJtb2RlIjoiaW5saW5lIiwib21tbF9zaGEyNTYiOiI2NmJmNWYzNDNjY2NmMDUyNTNjY2RiOTg2MTNmODUxY2U2MzJlZDljZjIwYTIxNzA3OTA1MmFhNjY0ZWFkN2U5Iiwic2VtYW50aWNfb21tbF9wcm9maWxlIjoib2ZmaWNlLW1hdGgtc2VtYW50aWMtdjIiLCJzZW1hbnRpY19vbW1sX3NoYTI1NiI6IjIzMzNjY2I4ZDNkYzE4NzdiYjQxZGMwZDJiZTNjZmNjMTIyYzBmYzQ0MjM5NzM5OGJiNDM5ZDFjMDc3YTI2OTgifV0sImtpbmQiOiJuYXRpdmVfb2ZmaWNlX21hdGgiLCJwbGFjZWhvbGRlcl9uYW1lIjoibWF0aDowMDciLCJzY2hlbWFfdmVyc2lvbiI6IjEuMCJ9"/>
+              <p:cNvPr id="111" name="math:007" descr="AI_AUTOFIGURE_NATIVE_MATH_V1:eyJjb250ZW50X3J1bnMiOlt7ImNhbm9uaWNhbF9sYXRleCI6Inpee1xcdGF1fV97dCsxfSIsImZvcm11bGFfaWQiOiJFUTAwNyIsImtpbmQiOiJtYXRoIiwibGF0ZXhfc2hhMjU2IjoiMmM1ZTJlMzU3Mzg2MTFkZDE4YzEwNzBlZTQ2YjQ1MGU5YjE0ZGViZDFmYmU3ZDJlYzI0OWQ4OWMxZThmODU5MSIsIm1vZGUiOiJpbmxpbmUiLCJvbW1sX3NoYTI1NiI6IjY2YmY1ZjM0M2NjY2YwNTI1M2NjZGI5ODYxM2Y4NTFjZTYzMmVkOWNmMjBhMjE3MDc5MDUyYWE2NjRlYWQ3ZTkiLCJzZW1hbnRpY19vbW1sX3Byb2ZpbGUiOiJvZmZpY2UtbWF0aC1zZW1hbnRpYy12MiIsInNlbWFudGljX29tbWxfc2hhMjU2IjoiMjMzM2NjYjhkM2RjMTg3N2JiNDFkYzBkMmJlM2NmY2MxMjJjMGZjNDQyMzk3Mzk4YmI0MzlkMWMwNzdhMjY5OCJ9XSwiZm9ybXVsYXMiOlt7ImNhbm9uaWNhbF9sYXRleCI6Inpee1xcdGF1fV97dCsxfSIsImZvcm11bGFfaWQiOiJFUTAwNyIsImxhdGV4X3NoYTI1NiI6IjJjNWUyZTM1NzM4NjExZGQxOGMxMDcwZWU0NmI0NTBlOWIxNGRlYmQxZmJlN2QyZWMyNDlkODljMWU4Zjg1OTEiLCJtb2RlIjoiaW5saW5lIiwib21tbF9zaGEyNTYiOiI2NmJmNWYzNDNjY2NmMDUyNTNjY2RiOTg2MTNmODUxY2U2MzJlZDljZjIwYTIxNzA3OTA1MmFhNjY0ZWFkN2U5Iiwic2VtYW50aWNfb21tbF9wcm9maWxlIjoib2ZmaWNlLW1hdGgtc2VtYW50aWMtdjIiLCJzZW1hbnRpY19vbW1sX3NoYTI1NiI6IjIzMzNjY2I4ZDNkYzE4NzdiYjQxZGMwZDJiZTNjZmNjMTIyYzBmYzQ0MjM5NzM5OGJiNDM5ZDFjMDc3YTI2OTgifV0sImtpbmQiOiJuYXRpdmVfb2ZmaWNlX21hdGgiLCJwbGFjZWhvbGRlcl9uYW1lIjoibWF0aDowMDciLCJzY2hlbWFfdmVyc2lvbiI6IjEuMCJ9"/>
               <p:cNvSpPr txBox="1"/>
               <p:nvPr/>
             </p:nvSpPr>
@@ -8288,52 +8387,73 @@
               <a:effectLst/>
             </p:spPr>
             <p:txBody>
-              <a:bodyPr wrap="none" anchor="t" lIns="0" rIns="0" tIns="0" bIns="0">
+              <a:bodyPr wrap="none" lIns="0" tIns="0" rIns="0" bIns="0" anchor="t">
                 <a:spAutoFit/>
               </a:bodyPr>
               <a:lstStyle/>
               <a:p>
                 <a:pPr algn="ctr"/>
                 <a14:m>
-                  <m:oMath xmlns:m="http://schemas.openxmlformats.org/officeDocument/2006/math">
-                    <m:sSubSup>
-                      <m:e>
-                        <m:r>
-                          <a:rPr lang="en-US" dirty="0" sz="1275">
-                            <a:solidFill>
-                              <a:srgbClr val="FFFFFF"/>
-                            </a:solidFill>
-                            <a:latin typeface="Cambria Math"/>
-                          </a:rPr>
-                          <m:t>z</m:t>
-                        </m:r>
-                      </m:e>
-                      <m:sub>
-                        <m:r>
-                          <a:rPr lang="en-US" dirty="0" sz="1275">
-                            <a:solidFill>
-                              <a:srgbClr val="FFFFFF"/>
-                            </a:solidFill>
-                            <a:latin typeface="Cambria Math"/>
-                          </a:rPr>
-                          <m:t>t+1</m:t>
-                        </m:r>
-                      </m:sub>
-                      <m:sup>
-                        <m:r>
-                          <a:rPr lang="en-US" dirty="0" sz="1275">
-                            <a:solidFill>
-                              <a:srgbClr val="FFFFFF"/>
-                            </a:solidFill>
-                            <a:latin typeface="Cambria Math"/>
-                          </a:rPr>
-                          <m:t>τ</m:t>
-                        </m:r>
-                      </m:sup>
-                    </m:sSubSup>
-                  </m:oMath>
+                  <m:oMathPara xmlns:m="http://schemas.openxmlformats.org/officeDocument/2006/math">
+                    <m:oMath>
+                      <m:sSubSup>
+                        <m:sSubSupPr>
+                          <m:ctrlPr>
+                            <a:rPr lang="en-US" sz="1275" dirty="0">
+                              <a:solidFill>
+                                <a:srgbClr val="FFFFFF"/>
+                              </a:solidFill>
+                              <a:latin typeface="Cambria Math"/>
+                            </a:rPr>
+                          </m:ctrlPr>
+                        </m:sSubSupPr>
+                        <m:e>
+                          <m:r>
+                            <a:rPr lang="en-US" sz="1275" dirty="0">
+                              <a:solidFill>
+                                <a:srgbClr val="FFFFFF"/>
+                              </a:solidFill>
+                              <a:latin typeface="Cambria Math"/>
+                            </a:rPr>
+                            <m:t>𝑧</m:t>
+                          </m:r>
+                        </m:e>
+                        <m:sub>
+                          <m:r>
+                            <a:rPr lang="en-US" sz="1275" dirty="0">
+                              <a:solidFill>
+                                <a:srgbClr val="FFFFFF"/>
+                              </a:solidFill>
+                              <a:latin typeface="Cambria Math"/>
+                            </a:rPr>
+                            <m:t>𝑡</m:t>
+                          </m:r>
+                          <m:r>
+                            <a:rPr lang="en-US" sz="1275" dirty="0">
+                              <a:solidFill>
+                                <a:srgbClr val="FFFFFF"/>
+                              </a:solidFill>
+                              <a:latin typeface="Cambria Math"/>
+                            </a:rPr>
+                            <m:t>+1</m:t>
+                          </m:r>
+                        </m:sub>
+                        <m:sup>
+                          <m:r>
+                            <a:rPr lang="en-US" sz="1275" dirty="0">
+                              <a:solidFill>
+                                <a:srgbClr val="FFFFFF"/>
+                              </a:solidFill>
+                              <a:latin typeface="Cambria Math"/>
+                            </a:rPr>
+                            <m:t>𝜏</m:t>
+                          </m:r>
+                        </m:sup>
+                      </m:sSubSup>
+                    </m:oMath>
+                  </m:oMathPara>
                 </a14:m>
-                <a:endParaRPr lang="en-US" dirty="0" sz="1275">
+                <a:endParaRPr lang="en-US" sz="1275" dirty="0">
                   <a:solidFill>
                     <a:srgbClr val="FFFFFF"/>
                   </a:solidFill>
@@ -8343,10 +8463,10 @@
             </p:txBody>
           </p:sp>
         </mc:Choice>
-        <mc:Fallback>
+        <mc:Fallback xmlns="">
           <p:sp>
             <p:nvSpPr>
-              <p:cNvPr id="113" name="math:007" descr="AI_AUTOFIGURE_MATH_FALLBACK_ONLY_V1:eyJjb250ZW50X3J1bnMiOlt7ImNhbm9uaWNhbF9sYXRleCI6Inpee1xcdGF1fV97dCsxfSIsImZvcm11bGFfaWQiOiJFUTAwNyIsImtpbmQiOiJtYXRoIiwibGF0ZXhfc2hhMjU2IjoiMmM1ZTJlMzU3Mzg2MTFkZDE4YzEwNzBlZTQ2YjQ1MGU5YjE0ZGViZDFmYmU3ZDJlYzI0OWQ4OWMxZThmODU5MSIsIm1vZGUiOiJpbmxpbmUiLCJvbW1sX3NoYTI1NiI6IjY2YmY1ZjM0M2NjY2YwNTI1M2NjZGI5ODYxM2Y4NTFjZTYzMmVkOWNmMjBhMjE3MDc5MDUyYWE2NjRlYWQ3ZTkiLCJzZW1hbnRpY19vbW1sX3Byb2ZpbGUiOiJvZmZpY2UtbWF0aC1zZW1hbnRpYy12MiIsInNlbWFudGljX29tbWxfc2hhMjU2IjoiMjMzM2NjYjhkM2RjMTg3N2JiNDFkYzBkMmJlM2NmY2MxMjJjMGZjNDQyMzk3Mzk4YmI0MzlkMWMwNzdhMjY5OCJ9XSwiZm9ybXVsYXMiOlt7ImNhbm9uaWNhbF9sYXRleCI6Inpee1xcdGF1fV97dCsxfSIsImZvcm11bGFfaWQiOiJFUTAwNyIsImxhdGV4X3NoYTI1NiI6IjJjNWUyZTM1NzM4NjExZGQxOGMxMDcwZWU0NmI0NTBlOWIxNGRlYmQxZmJlN2QyZWMyNDlkODljMWU4Zjg1OTEiLCJtb2RlIjoiaW5saW5lIiwib21tbF9zaGEyNTYiOiI2NmJmNWYzNDNjY2NmMDUyNTNjY2RiOTg2MTNmODUxY2U2MzJlZDljZjIwYTIxNzA3OTA1MmFhNjY0ZWFkN2U5Iiwic2VtYW50aWNfb21tbF9wcm9maWxlIjoib2ZmaWNlLW1hdGgtc2VtYW50aWMtdjIiLCJzZW1hbnRpY19vbW1sX3NoYTI1NiI6IjIzMzNjY2I4ZDNkYzE4NzdiYjQxZGMwZDJiZTNjZmNjMTIyYzBmYzQ0MjM5NzM5OGJiNDM5ZDFjMDc3YTI2OTgifV0sImtpbmQiOiJuYXRpdmVfb2ZmaWNlX21hdGgiLCJwbGFjZWhvbGRlcl9uYW1lIjoibWF0aDowMDciLCJzY2hlbWFfdmVyc2lvbiI6IjEuMCJ9"/>
+              <p:cNvPr id="111" name="math:007" descr="AI_AUTOFIGURE_MATH_FALLBACK_ONLY_V1:eyJjb250ZW50X3J1bnMiOlt7ImNhbm9uaWNhbF9sYXRleCI6Inpee1xcdGF1fV97dCsxfSIsImZvcm11bGFfaWQiOiJFUTAwNyIsImtpbmQiOiJtYXRoIiwibGF0ZXhfc2hhMjU2IjoiMmM1ZTJlMzU3Mzg2MTFkZDE4YzEwNzBlZTQ2YjQ1MGU5YjE0ZGViZDFmYmU3ZDJlYzI0OWQ4OWMxZThmODU5MSIsIm1vZGUiOiJpbmxpbmUiLCJvbW1sX3NoYTI1NiI6IjY2YmY1ZjM0M2NjY2YwNTI1M2NjZGI5ODYxM2Y4NTFjZTYzMmVkOWNmMjBhMjE3MDc5MDUyYWE2NjRlYWQ3ZTkiLCJzZW1hbnRpY19vbW1sX3Byb2ZpbGUiOiJvZmZpY2UtbWF0aC1zZW1hbnRpYy12MiIsInNlbWFudGljX29tbWxfc2hhMjU2IjoiMjMzM2NjYjhkM2RjMTg3N2JiNDFkYzBkMmJlM2NmY2MxMjJjMGZjNDQyMzk3Mzk4YmI0MzlkMWMwNzdhMjY5OCJ9XSwiZm9ybXVsYXMiOlt7ImNhbm9uaWNhbF9sYXRleCI6Inpee1xcdGF1fV97dCsxfSIsImZvcm11bGFfaWQiOiJFUTAwNyIsImxhdGV4X3NoYTI1NiI6IjJjNWUyZTM1NzM4NjExZGQxOGMxMDcwZWU0NmI0NTBlOWIxNGRlYmQxZmJlN2QyZWMyNDlkODljMWU4Zjg1OTEiLCJtb2RlIjoiaW5saW5lIiwib21tbF9zaGEyNTYiOiI2NmJmNWYzNDNjY2NmMDUyNTNjY2RiOTg2MTNmODUxY2U2MzJlZDljZjIwYTIxNzA3OTA1MmFhNjY0ZWFkN2U5Iiwic2VtYW50aWNfb21tbF9wcm9maWxlIjoib2ZmaWNlLW1hdGgtc2VtYW50aWMtdjIiLCJzZW1hbnRpY19vbW1sX3NoYTI1NiI6IjIzMzNjY2I4ZDNkYzE4NzdiYjQxZGMwZDJiZTNjZmNjMTIyYzBmYzQ0MjM5NzM5OGJiNDM5ZDFjMDc3YTI2OTgifV0sImtpbmQiOiJuYXRpdmVfb2ZmaWNlX21hdGgiLCJwbGFjZWhvbGRlcl9uYW1lIjoibWF0aDowMDciLCJzY2hlbWFfdmVyc2lvbiI6IjEuMCJ9"/>
               <p:cNvSpPr txBox="1"/>
               <p:nvPr/>
             </p:nvSpPr>
@@ -8388,7 +8508,7 @@
       </mc:AlternateContent>
       <p:sp>
         <p:nvSpPr>
-          <p:cNvPr id="114" name="af-svg-rect-0036-rect-01"/>
+          <p:cNvPr id="112" name="af-svg-rect-0036-rect-01" descr="{&quot;autofigure_element_id&quot;:&quot;svg-rect-0036&quot;}"/>
           <p:cNvSpPr/>
           <p:nvPr/>
         </p:nvSpPr>
@@ -8429,14 +8549,15 @@
           <a:lstStyle/>
           <a:p>
             <a:pPr algn="ctr"/>
-          </a:p>
-        </p:txBody>
-      </p:sp>
-      <mc:AlternateContent xmlns:mc="http://schemas.openxmlformats.org/markup-compatibility/2006">
-        <mc:Choice xmlns:a14="http://schemas.microsoft.com/office/drawing/2010/main" Requires="a14">
+            <a:endParaRPr/>
+          </a:p>
+        </p:txBody>
+      </p:sp>
+      <mc:AlternateContent xmlns:mc="http://schemas.openxmlformats.org/markup-compatibility/2006" xmlns:a14="http://schemas.microsoft.com/office/drawing/2010/main">
+        <mc:Choice Requires="a14">
           <p:sp>
             <p:nvSpPr>
-              <p:cNvPr id="115" name="math:008" descr="AI_AUTOFIGURE_NATIVE_MATH_V1:eyJjb250ZW50X3J1bnMiOlt7ImNhbm9uaWNhbF9sYXRleCI6Inpee1xcdGF1fV97dCsyfSIsImZvcm11bGFfaWQiOiJFUTAwOCIsImtpbmQiOiJtYXRoIiwibGF0ZXhfc2hhMjU2IjoiZjE3MjkyMTZjNmIzNGI3ODc1N2JhN2I1NThmZTBlZjUzN2Q5YjM2ZTg1ZmY4NmE0ZTA0NjQ5ZmI5OTFmMWE0ZiIsIm1vZGUiOiJpbmxpbmUiLCJvbW1sX3NoYTI1NiI6IjU4YTU0YjQ2NDc2NGExYWVlOWMxNDQ1NTdjNjRhMjAxYjBjOGY5Zjk2MDE0ZjVlNDkwNmJhOTM4NDEzZjFmNDUiLCJzZW1hbnRpY19vbW1sX3Byb2ZpbGUiOiJvZmZpY2UtbWF0aC1zZW1hbnRpYy12MiIsInNlbWFudGljX29tbWxfc2hhMjU2IjoiMTc4YzVhMDM3MDY3NGFjYzc2NGI3OGYxNWExMGU0MmM5ZTNlZTRjZmZlY2Y5NjU5ZjgzMzViMjZlNzMyZmZmZSJ9XSwiZm9ybXVsYXMiOlt7ImNhbm9uaWNhbF9sYXRleCI6Inpee1xcdGF1fV97dCsyfSIsImZvcm11bGFfaWQiOiJFUTAwOCIsImxhdGV4X3NoYTI1NiI6ImYxNzI5MjE2YzZiMzRiNzg3NTdiYTdiNTU4ZmUwZWY1MzdkOWIzNmU4NWZmODZhNGUwNDY0OWZiOTkxZjFhNGYiLCJtb2RlIjoiaW5saW5lIiwib21tbF9zaGEyNTYiOiI1OGE1NGI0NjQ3NjRhMWFlZTljMTQ0NTU3YzY0YTIwMWIwYzhmOWY5NjAxNGY1ZTQ5MDZiYTkzODQxM2YxZjQ1Iiwic2VtYW50aWNfb21tbF9wcm9maWxlIjoib2ZmaWNlLW1hdGgtc2VtYW50aWMtdjIiLCJzZW1hbnRpY19vbW1sX3NoYTI1NiI6IjE3OGM1YTAzNzA2NzRhY2M3NjRiNzhmMTVhMTBlNDJjOWUzZWU0Y2ZmZWNmOTY1OWY4MzM1YjI2ZTczMmZmZmUifV0sImtpbmQiOiJuYXRpdmVfb2ZmaWNlX21hdGgiLCJwbGFjZWhvbGRlcl9uYW1lIjoibWF0aDowMDgiLCJzY2hlbWFfdmVyc2lvbiI6IjEuMCJ9"/>
+              <p:cNvPr id="113" name="math:008" descr="AI_AUTOFIGURE_NATIVE_MATH_V1:eyJjb250ZW50X3J1bnMiOlt7ImNhbm9uaWNhbF9sYXRleCI6Inpee1xcdGF1fV97dCsyfSIsImZvcm11bGFfaWQiOiJFUTAwOCIsImtpbmQiOiJtYXRoIiwibGF0ZXhfc2hhMjU2IjoiZjE3MjkyMTZjNmIzNGI3ODc1N2JhN2I1NThmZTBlZjUzN2Q5YjM2ZTg1ZmY4NmE0ZTA0NjQ5ZmI5OTFmMWE0ZiIsIm1vZGUiOiJpbmxpbmUiLCJvbW1sX3NoYTI1NiI6IjU4YTU0YjQ2NDc2NGExYWVlOWMxNDQ1NTdjNjRhMjAxYjBjOGY5Zjk2MDE0ZjVlNDkwNmJhOTM4NDEzZjFmNDUiLCJzZW1hbnRpY19vbW1sX3Byb2ZpbGUiOiJvZmZpY2UtbWF0aC1zZW1hbnRpYy12MiIsInNlbWFudGljX29tbWxfc2hhMjU2IjoiMTc4YzVhMDM3MDY3NGFjYzc2NGI3OGYxNWExMGU0MmM5ZTNlZTRjZmZlY2Y5NjU5ZjgzMzViMjZlNzMyZmZmZSJ9XSwiZm9ybXVsYXMiOlt7ImNhbm9uaWNhbF9sYXRleCI6Inpee1xcdGF1fV97dCsyfSIsImZvcm11bGFfaWQiOiJFUTAwOCIsImxhdGV4X3NoYTI1NiI6ImYxNzI5MjE2YzZiMzRiNzg3NTdiYTdiNTU4ZmUwZWY1MzdkOWIzNmU4NWZmODZhNGUwNDY0OWZiOTkxZjFhNGYiLCJtb2RlIjoiaW5saW5lIiwib21tbF9zaGEyNTYiOiI1OGE1NGI0NjQ3NjRhMWFlZTljMTQ0NTU3YzY0YTIwMWIwYzhmOWY5NjAxNGY1ZTQ5MDZiYTkzODQxM2YxZjQ1Iiwic2VtYW50aWNfb21tbF9wcm9maWxlIjoib2ZmaWNlLW1hdGgtc2VtYW50aWMtdjIiLCJzZW1hbnRpY19vbW1sX3NoYTI1NiI6IjE3OGM1YTAzNzA2NzRhY2M3NjRiNzhmMTVhMTBlNDJjOWUzZWU0Y2ZmZWNmOTY1OWY4MzM1YjI2ZTczMmZmZmUifV0sImtpbmQiOiJuYXRpdmVfb2ZmaWNlX21hdGgiLCJwbGFjZWhvbGRlcl9uYW1lIjoibWF0aDowMDgiLCJzY2hlbWFfdmVyc2lvbiI6IjEuMCJ9"/>
               <p:cNvSpPr txBox="1"/>
               <p:nvPr/>
             </p:nvSpPr>
@@ -8452,52 +8573,73 @@
               <a:effectLst/>
             </p:spPr>
             <p:txBody>
-              <a:bodyPr wrap="none" anchor="t" lIns="0" rIns="0" tIns="0" bIns="0">
+              <a:bodyPr wrap="none" lIns="0" tIns="0" rIns="0" bIns="0" anchor="t">
                 <a:spAutoFit/>
               </a:bodyPr>
               <a:lstStyle/>
               <a:p>
                 <a:pPr algn="ctr"/>
                 <a14:m>
-                  <m:oMath xmlns:m="http://schemas.openxmlformats.org/officeDocument/2006/math">
-                    <m:sSubSup>
-                      <m:e>
-                        <m:r>
-                          <a:rPr lang="en-US" dirty="0" sz="1275">
-                            <a:solidFill>
-                              <a:srgbClr val="FFFFFF"/>
-                            </a:solidFill>
-                            <a:latin typeface="Cambria Math"/>
-                          </a:rPr>
-                          <m:t>z</m:t>
-                        </m:r>
-                      </m:e>
-                      <m:sub>
-                        <m:r>
-                          <a:rPr lang="en-US" dirty="0" sz="1275">
-                            <a:solidFill>
-                              <a:srgbClr val="FFFFFF"/>
-                            </a:solidFill>
-                            <a:latin typeface="Cambria Math"/>
-                          </a:rPr>
-                          <m:t>t+2</m:t>
-                        </m:r>
-                      </m:sub>
-                      <m:sup>
-                        <m:r>
-                          <a:rPr lang="en-US" dirty="0" sz="1275">
-                            <a:solidFill>
-                              <a:srgbClr val="FFFFFF"/>
-                            </a:solidFill>
-                            <a:latin typeface="Cambria Math"/>
-                          </a:rPr>
-                          <m:t>τ</m:t>
-                        </m:r>
-                      </m:sup>
-                    </m:sSubSup>
-                  </m:oMath>
+                  <m:oMathPara xmlns:m="http://schemas.openxmlformats.org/officeDocument/2006/math">
+                    <m:oMath>
+                      <m:sSubSup>
+                        <m:sSubSupPr>
+                          <m:ctrlPr>
+                            <a:rPr lang="en-US" sz="1275" dirty="0">
+                              <a:solidFill>
+                                <a:srgbClr val="FFFFFF"/>
+                              </a:solidFill>
+                              <a:latin typeface="Cambria Math"/>
+                            </a:rPr>
+                          </m:ctrlPr>
+                        </m:sSubSupPr>
+                        <m:e>
+                          <m:r>
+                            <a:rPr lang="en-US" sz="1275" dirty="0">
+                              <a:solidFill>
+                                <a:srgbClr val="FFFFFF"/>
+                              </a:solidFill>
+                              <a:latin typeface="Cambria Math"/>
+                            </a:rPr>
+                            <m:t>𝑧</m:t>
+                          </m:r>
+                        </m:e>
+                        <m:sub>
+                          <m:r>
+                            <a:rPr lang="en-US" sz="1275" dirty="0">
+                              <a:solidFill>
+                                <a:srgbClr val="FFFFFF"/>
+                              </a:solidFill>
+                              <a:latin typeface="Cambria Math"/>
+                            </a:rPr>
+                            <m:t>𝑡</m:t>
+                          </m:r>
+                          <m:r>
+                            <a:rPr lang="en-US" sz="1275" dirty="0">
+                              <a:solidFill>
+                                <a:srgbClr val="FFFFFF"/>
+                              </a:solidFill>
+                              <a:latin typeface="Cambria Math"/>
+                            </a:rPr>
+                            <m:t>+2</m:t>
+                          </m:r>
+                        </m:sub>
+                        <m:sup>
+                          <m:r>
+                            <a:rPr lang="en-US" sz="1275" dirty="0">
+                              <a:solidFill>
+                                <a:srgbClr val="FFFFFF"/>
+                              </a:solidFill>
+                              <a:latin typeface="Cambria Math"/>
+                            </a:rPr>
+                            <m:t>𝜏</m:t>
+                          </m:r>
+                        </m:sup>
+                      </m:sSubSup>
+                    </m:oMath>
+                  </m:oMathPara>
                 </a14:m>
-                <a:endParaRPr lang="en-US" dirty="0" sz="1275">
+                <a:endParaRPr lang="en-US" sz="1275" dirty="0">
                   <a:solidFill>
                     <a:srgbClr val="FFFFFF"/>
                   </a:solidFill>
@@ -8507,10 +8649,10 @@
             </p:txBody>
           </p:sp>
         </mc:Choice>
-        <mc:Fallback>
+        <mc:Fallback xmlns="">
           <p:sp>
             <p:nvSpPr>
-              <p:cNvPr id="115" name="math:008" descr="AI_AUTOFIGURE_MATH_FALLBACK_ONLY_V1:eyJjb250ZW50X3J1bnMiOlt7ImNhbm9uaWNhbF9sYXRleCI6Inpee1xcdGF1fV97dCsyfSIsImZvcm11bGFfaWQiOiJFUTAwOCIsImtpbmQiOiJtYXRoIiwibGF0ZXhfc2hhMjU2IjoiZjE3MjkyMTZjNmIzNGI3ODc1N2JhN2I1NThmZTBlZjUzN2Q5YjM2ZTg1ZmY4NmE0ZTA0NjQ5ZmI5OTFmMWE0ZiIsIm1vZGUiOiJpbmxpbmUiLCJvbW1sX3NoYTI1NiI6IjU4YTU0YjQ2NDc2NGExYWVlOWMxNDQ1NTdjNjRhMjAxYjBjOGY5Zjk2MDE0ZjVlNDkwNmJhOTM4NDEzZjFmNDUiLCJzZW1hbnRpY19vbW1sX3Byb2ZpbGUiOiJvZmZpY2UtbWF0aC1zZW1hbnRpYy12MiIsInNlbWFudGljX29tbWxfc2hhMjU2IjoiMTc4YzVhMDM3MDY3NGFjYzc2NGI3OGYxNWExMGU0MmM5ZTNlZTRjZmZlY2Y5NjU5ZjgzMzViMjZlNzMyZmZmZSJ9XSwiZm9ybXVsYXMiOlt7ImNhbm9uaWNhbF9sYXRleCI6Inpee1xcdGF1fV97dCsyfSIsImZvcm11bGFfaWQiOiJFUTAwOCIsImxhdGV4X3NoYTI1NiI6ImYxNzI5MjE2YzZiMzRiNzg3NTdiYTdiNTU4ZmUwZWY1MzdkOWIzNmU4NWZmODZhNGUwNDY0OWZiOTkxZjFhNGYiLCJtb2RlIjoiaW5saW5lIiwib21tbF9zaGEyNTYiOiI1OGE1NGI0NjQ3NjRhMWFlZTljMTQ0NTU3YzY0YTIwMWIwYzhmOWY5NjAxNGY1ZTQ5MDZiYTkzODQxM2YxZjQ1Iiwic2VtYW50aWNfb21tbF9wcm9maWxlIjoib2ZmaWNlLW1hdGgtc2VtYW50aWMtdjIiLCJzZW1hbnRpY19vbW1sX3NoYTI1NiI6IjE3OGM1YTAzNzA2NzRhY2M3NjRiNzhmMTVhMTBlNDJjOWUzZWU0Y2ZmZWNmOTY1OWY4MzM1YjI2ZTczMmZmZmUifV0sImtpbmQiOiJuYXRpdmVfb2ZmaWNlX21hdGgiLCJwbGFjZWhvbGRlcl9uYW1lIjoibWF0aDowMDgiLCJzY2hlbWFfdmVyc2lvbiI6IjEuMCJ9"/>
+              <p:cNvPr id="113" name="math:008" descr="AI_AUTOFIGURE_MATH_FALLBACK_ONLY_V1:eyJjb250ZW50X3J1bnMiOlt7ImNhbm9uaWNhbF9sYXRleCI6Inpee1xcdGF1fV97dCsyfSIsImZvcm11bGFfaWQiOiJFUTAwOCIsImtpbmQiOiJtYXRoIiwibGF0ZXhfc2hhMjU2IjoiZjE3MjkyMTZjNmIzNGI3ODc1N2JhN2I1NThmZTBlZjUzN2Q5YjM2ZTg1ZmY4NmE0ZTA0NjQ5ZmI5OTFmMWE0ZiIsIm1vZGUiOiJpbmxpbmUiLCJvbW1sX3NoYTI1NiI6IjU4YTU0YjQ2NDc2NGExYWVlOWMxNDQ1NTdjNjRhMjAxYjBjOGY5Zjk2MDE0ZjVlNDkwNmJhOTM4NDEzZjFmNDUiLCJzZW1hbnRpY19vbW1sX3Byb2ZpbGUiOiJvZmZpY2UtbWF0aC1zZW1hbnRpYy12MiIsInNlbWFudGljX29tbWxfc2hhMjU2IjoiMTc4YzVhMDM3MDY3NGFjYzc2NGI3OGYxNWExMGU0MmM5ZTNlZTRjZmZlY2Y5NjU5ZjgzMzViMjZlNzMyZmZmZSJ9XSwiZm9ybXVsYXMiOlt7ImNhbm9uaWNhbF9sYXRleCI6Inpee1xcdGF1fV97dCsyfSIsImZvcm11bGFfaWQiOiJFUTAwOCIsImxhdGV4X3NoYTI1NiI6ImYxNzI5MjE2YzZiMzRiNzg3NTdiYTdiNTU4ZmUwZWY1MzdkOWIzNmU4NWZmODZhNGUwNDY0OWZiOTkxZjFhNGYiLCJtb2RlIjoiaW5saW5lIiwib21tbF9zaGEyNTYiOiI1OGE1NGI0NjQ3NjRhMWFlZTljMTQ0NTU3YzY0YTIwMWIwYzhmOWY5NjAxNGY1ZTQ5MDZiYTkzODQxM2YxZjQ1Iiwic2VtYW50aWNfb21tbF9wcm9maWxlIjoib2ZmaWNlLW1hdGgtc2VtYW50aWMtdjIiLCJzZW1hbnRpY19vbW1sX3NoYTI1NiI6IjE3OGM1YTAzNzA2NzRhY2M3NjRiNzhmMTVhMTBlNDJjOWUzZWU0Y2ZmZWNmOTY1OWY4MzM1YjI2ZTczMmZmZmUifV0sImtpbmQiOiJuYXRpdmVfb2ZmaWNlX21hdGgiLCJwbGFjZWhvbGRlcl9uYW1lIjoibWF0aDowMDgiLCJzY2hlbWFfdmVyc2lvbiI6IjEuMCJ9"/>
               <p:cNvSpPr txBox="1"/>
               <p:nvPr/>
             </p:nvSpPr>
@@ -8552,7 +8694,7 @@
       </mc:AlternateContent>
       <p:sp>
         <p:nvSpPr>
-          <p:cNvPr id="116" name="af-svg-rect-0037-rect-01"/>
+          <p:cNvPr id="114" name="af-svg-rect-0037-rect-01" descr="{&quot;autofigure_element_id&quot;:&quot;svg-rect-0037&quot;}"/>
           <p:cNvSpPr/>
           <p:nvPr/>
         </p:nvSpPr>
@@ -8593,14 +8735,15 @@
           <a:lstStyle/>
           <a:p>
             <a:pPr algn="ctr"/>
-          </a:p>
-        </p:txBody>
-      </p:sp>
-      <mc:AlternateContent xmlns:mc="http://schemas.openxmlformats.org/markup-compatibility/2006">
-        <mc:Choice xmlns:a14="http://schemas.microsoft.com/office/drawing/2010/main" Requires="a14">
+            <a:endParaRPr/>
+          </a:p>
+        </p:txBody>
+      </p:sp>
+      <mc:AlternateContent xmlns:mc="http://schemas.openxmlformats.org/markup-compatibility/2006" xmlns:a14="http://schemas.microsoft.com/office/drawing/2010/main">
+        <mc:Choice Requires="a14">
           <p:sp>
             <p:nvSpPr>
-              <p:cNvPr id="117" name="math:009" descr="AI_AUTOFIGURE_NATIVE_MATH_V1:eyJjb250ZW50X3J1bnMiOlt7ImNhbm9uaWNhbF9sYXRleCI6Inpee1xcdGF1fV97dCtofSIsImZvcm11bGFfaWQiOiJFUTAwOSIsImtpbmQiOiJtYXRoIiwibGF0ZXhfc2hhMjU2IjoiMTQ0MmExOTZjN2U5OWJhNTk2OTVjZTY3YzMyNTcyMjgzYjAyZmZlYjg4NDZhMDIxOTY0MDdiY2JiMjQzZjJkYSIsIm1vZGUiOiJpbmxpbmUiLCJvbW1sX3NoYTI1NiI6IjFkMGY2MzMyZDYwMTgwZTEwZTI4MDg1NDA1YmI5ZDc0Y2E2Mzg2NDllNmExOTBiOGE2Mjc1MzZmZmMxMjU4NzEiLCJzZW1hbnRpY19vbW1sX3Byb2ZpbGUiOiJvZmZpY2UtbWF0aC1zZW1hbnRpYy12MiIsInNlbWFudGljX29tbWxfc2hhMjU2IjoiMDM1YjgxMTU3MDY0NWY2YWY4ZGZhYTViMGM3Yzk4N2I2N2E3YmE0OWUxOGE4NWU5MDRjMzhiY2RjODViYWRlOCJ9XSwiZm9ybXVsYXMiOlt7ImNhbm9uaWNhbF9sYXRleCI6Inpee1xcdGF1fV97dCtofSIsImZvcm11bGFfaWQiOiJFUTAwOSIsImxhdGV4X3NoYTI1NiI6IjE0NDJhMTk2YzdlOTliYTU5Njk1Y2U2N2MzMjU3MjI4M2IwMmZmZWI4ODQ2YTAyMTk2NDA3YmNiYjI0M2YyZGEiLCJtb2RlIjoiaW5saW5lIiwib21tbF9zaGEyNTYiOiIxZDBmNjMzMmQ2MDE4MGUxMGUyODA4NTQwNWJiOWQ3NGNhNjM4NjQ5ZTZhMTkwYjhhNjI3NTM2ZmZjMTI1ODcxIiwic2VtYW50aWNfb21tbF9wcm9maWxlIjoib2ZmaWNlLW1hdGgtc2VtYW50aWMtdjIiLCJzZW1hbnRpY19vbW1sX3NoYTI1NiI6IjAzNWI4MTE1NzA2NDVmNmFmOGRmYWE1YjBjN2M5ODdiNjdhN2JhNDllMThhODVlOTA0YzM4YmNkYzg1YmFkZTgifV0sImtpbmQiOiJuYXRpdmVfb2ZmaWNlX21hdGgiLCJwbGFjZWhvbGRlcl9uYW1lIjoibWF0aDowMDkiLCJzY2hlbWFfdmVyc2lvbiI6IjEuMCJ9"/>
+              <p:cNvPr id="115" name="math:009" descr="AI_AUTOFIGURE_NATIVE_MATH_V1:eyJjb250ZW50X3J1bnMiOlt7ImNhbm9uaWNhbF9sYXRleCI6Inpee1xcdGF1fV97dCtofSIsImZvcm11bGFfaWQiOiJFUTAwOSIsImtpbmQiOiJtYXRoIiwibGF0ZXhfc2hhMjU2IjoiMTQ0MmExOTZjN2U5OWJhNTk2OTVjZTY3YzMyNTcyMjgzYjAyZmZlYjg4NDZhMDIxOTY0MDdiY2JiMjQzZjJkYSIsIm1vZGUiOiJpbmxpbmUiLCJvbW1sX3NoYTI1NiI6IjFkMGY2MzMyZDYwMTgwZTEwZTI4MDg1NDA1YmI5ZDc0Y2E2Mzg2NDllNmExOTBiOGE2Mjc1MzZmZmMxMjU4NzEiLCJzZW1hbnRpY19vbW1sX3Byb2ZpbGUiOiJvZmZpY2UtbWF0aC1zZW1hbnRpYy12MiIsInNlbWFudGljX29tbWxfc2hhMjU2IjoiMDM1YjgxMTU3MDY0NWY2YWY4ZGZhYTViMGM3Yzk4N2I2N2E3YmE0OWUxOGE4NWU5MDRjMzhiY2RjODViYWRlOCJ9XSwiZm9ybXVsYXMiOlt7ImNhbm9uaWNhbF9sYXRleCI6Inpee1xcdGF1fV97dCtofSIsImZvcm11bGFfaWQiOiJFUTAwOSIsImxhdGV4X3NoYTI1NiI6IjE0NDJhMTk2YzdlOTliYTU5Njk1Y2U2N2MzMjU3MjI4M2IwMmZmZWI4ODQ2YTAyMTk2NDA3YmNiYjI0M2YyZGEiLCJtb2RlIjoiaW5saW5lIiwib21tbF9zaGEyNTYiOiIxZDBmNjMzMmQ2MDE4MGUxMGUyODA4NTQwNWJiOWQ3NGNhNjM4NjQ5ZTZhMTkwYjhhNjI3NTM2ZmZjMTI1ODcxIiwic2VtYW50aWNfb21tbF9wcm9maWxlIjoib2ZmaWNlLW1hdGgtc2VtYW50aWMtdjIiLCJzZW1hbnRpY19vbW1sX3NoYTI1NiI6IjAzNWI4MTE1NzA2NDVmNmFmOGRmYWE1YjBjN2M5ODdiNjdhN2JhNDllMThhODVlOTA0YzM4YmNkYzg1YmFkZTgifV0sImtpbmQiOiJuYXRpdmVfb2ZmaWNlX21hdGgiLCJwbGFjZWhvbGRlcl9uYW1lIjoibWF0aDowMDkiLCJzY2hlbWFfdmVyc2lvbiI6IjEuMCJ9"/>
               <p:cNvSpPr txBox="1"/>
               <p:nvPr/>
             </p:nvSpPr>
@@ -8616,52 +8759,82 @@
               <a:effectLst/>
             </p:spPr>
             <p:txBody>
-              <a:bodyPr wrap="none" anchor="t" lIns="0" rIns="0" tIns="0" bIns="0">
+              <a:bodyPr wrap="none" lIns="0" tIns="0" rIns="0" bIns="0" anchor="t">
                 <a:spAutoFit/>
               </a:bodyPr>
               <a:lstStyle/>
               <a:p>
                 <a:pPr algn="ctr"/>
                 <a14:m>
-                  <m:oMath xmlns:m="http://schemas.openxmlformats.org/officeDocument/2006/math">
-                    <m:sSubSup>
-                      <m:e>
-                        <m:r>
-                          <a:rPr lang="en-US" dirty="0" sz="1275">
-                            <a:solidFill>
-                              <a:srgbClr val="FFFFFF"/>
-                            </a:solidFill>
-                            <a:latin typeface="Cambria Math"/>
-                          </a:rPr>
-                          <m:t>z</m:t>
-                        </m:r>
-                      </m:e>
-                      <m:sub>
-                        <m:r>
-                          <a:rPr lang="en-US" dirty="0" sz="1275">
-                            <a:solidFill>
-                              <a:srgbClr val="FFFFFF"/>
-                            </a:solidFill>
-                            <a:latin typeface="Cambria Math"/>
-                          </a:rPr>
-                          <m:t>t+h</m:t>
-                        </m:r>
-                      </m:sub>
-                      <m:sup>
-                        <m:r>
-                          <a:rPr lang="en-US" dirty="0" sz="1275">
-                            <a:solidFill>
-                              <a:srgbClr val="FFFFFF"/>
-                            </a:solidFill>
-                            <a:latin typeface="Cambria Math"/>
-                          </a:rPr>
-                          <m:t>τ</m:t>
-                        </m:r>
-                      </m:sup>
-                    </m:sSubSup>
-                  </m:oMath>
+                  <m:oMathPara xmlns:m="http://schemas.openxmlformats.org/officeDocument/2006/math">
+                    <m:oMath>
+                      <m:sSubSup>
+                        <m:sSubSupPr>
+                          <m:ctrlPr>
+                            <a:rPr lang="en-US" sz="1275" dirty="0">
+                              <a:solidFill>
+                                <a:srgbClr val="FFFFFF"/>
+                              </a:solidFill>
+                              <a:latin typeface="Cambria Math"/>
+                            </a:rPr>
+                          </m:ctrlPr>
+                        </m:sSubSupPr>
+                        <m:e>
+                          <m:r>
+                            <a:rPr lang="en-US" sz="1275" dirty="0">
+                              <a:solidFill>
+                                <a:srgbClr val="FFFFFF"/>
+                              </a:solidFill>
+                              <a:latin typeface="Cambria Math"/>
+                            </a:rPr>
+                            <m:t>𝑧</m:t>
+                          </m:r>
+                        </m:e>
+                        <m:sub>
+                          <m:r>
+                            <a:rPr lang="en-US" sz="1275" dirty="0">
+                              <a:solidFill>
+                                <a:srgbClr val="FFFFFF"/>
+                              </a:solidFill>
+                              <a:latin typeface="Cambria Math"/>
+                            </a:rPr>
+                            <m:t>𝑡</m:t>
+                          </m:r>
+                          <m:r>
+                            <a:rPr lang="en-US" sz="1275" dirty="0">
+                              <a:solidFill>
+                                <a:srgbClr val="FFFFFF"/>
+                              </a:solidFill>
+                              <a:latin typeface="Cambria Math"/>
+                            </a:rPr>
+                            <m:t>+</m:t>
+                          </m:r>
+                          <m:r>
+                            <a:rPr lang="en-US" sz="1275" dirty="0">
+                              <a:solidFill>
+                                <a:srgbClr val="FFFFFF"/>
+                              </a:solidFill>
+                              <a:latin typeface="Cambria Math"/>
+                            </a:rPr>
+                            <m:t>ℎ</m:t>
+                          </m:r>
+                        </m:sub>
+                        <m:sup>
+                          <m:r>
+                            <a:rPr lang="en-US" sz="1275" dirty="0">
+                              <a:solidFill>
+                                <a:srgbClr val="FFFFFF"/>
+                              </a:solidFill>
+                              <a:latin typeface="Cambria Math"/>
+                            </a:rPr>
+                            <m:t>𝜏</m:t>
+                          </m:r>
+                        </m:sup>
+                      </m:sSubSup>
+                    </m:oMath>
+                  </m:oMathPara>
                 </a14:m>
-                <a:endParaRPr lang="en-US" dirty="0" sz="1275">
+                <a:endParaRPr lang="en-US" sz="1275" dirty="0">
                   <a:solidFill>
                     <a:srgbClr val="FFFFFF"/>
                   </a:solidFill>
@@ -8671,10 +8844,10 @@
             </p:txBody>
           </p:sp>
         </mc:Choice>
-        <mc:Fallback>
+        <mc:Fallback xmlns="">
           <p:sp>
             <p:nvSpPr>
-              <p:cNvPr id="117" name="math:009" descr="AI_AUTOFIGURE_MATH_FALLBACK_ONLY_V1:eyJjb250ZW50X3J1bnMiOlt7ImNhbm9uaWNhbF9sYXRleCI6Inpee1xcdGF1fV97dCtofSIsImZvcm11bGFfaWQiOiJFUTAwOSIsImtpbmQiOiJtYXRoIiwibGF0ZXhfc2hhMjU2IjoiMTQ0MmExOTZjN2U5OWJhNTk2OTVjZTY3YzMyNTcyMjgzYjAyZmZlYjg4NDZhMDIxOTY0MDdiY2JiMjQzZjJkYSIsIm1vZGUiOiJpbmxpbmUiLCJvbW1sX3NoYTI1NiI6IjFkMGY2MzMyZDYwMTgwZTEwZTI4MDg1NDA1YmI5ZDc0Y2E2Mzg2NDllNmExOTBiOGE2Mjc1MzZmZmMxMjU4NzEiLCJzZW1hbnRpY19vbW1sX3Byb2ZpbGUiOiJvZmZpY2UtbWF0aC1zZW1hbnRpYy12MiIsInNlbWFudGljX29tbWxfc2hhMjU2IjoiMDM1YjgxMTU3MDY0NWY2YWY4ZGZhYTViMGM3Yzk4N2I2N2E3YmE0OWUxOGE4NWU5MDRjMzhiY2RjODViYWRlOCJ9XSwiZm9ybXVsYXMiOlt7ImNhbm9uaWNhbF9sYXRleCI6Inpee1xcdGF1fV97dCtofSIsImZvcm11bGFfaWQiOiJFUTAwOSIsImxhdGV4X3NoYTI1NiI6IjE0NDJhMTk2YzdlOTliYTU5Njk1Y2U2N2MzMjU3MjI4M2IwMmZmZWI4ODQ2YTAyMTk2NDA3YmNiYjI0M2YyZGEiLCJtb2RlIjoiaW5saW5lIiwib21tbF9zaGEyNTYiOiIxZDBmNjMzMmQ2MDE4MGUxMGUyODA4NTQwNWJiOWQ3NGNhNjM4NjQ5ZTZhMTkwYjhhNjI3NTM2ZmZjMTI1ODcxIiwic2VtYW50aWNfb21tbF9wcm9maWxlIjoib2ZmaWNlLW1hdGgtc2VtYW50aWMtdjIiLCJzZW1hbnRpY19vbW1sX3NoYTI1NiI6IjAzNWI4MTE1NzA2NDVmNmFmOGRmYWE1YjBjN2M5ODdiNjdhN2JhNDllMThhODVlOTA0YzM4YmNkYzg1YmFkZTgifV0sImtpbmQiOiJuYXRpdmVfb2ZmaWNlX21hdGgiLCJwbGFjZWhvbGRlcl9uYW1lIjoibWF0aDowMDkiLCJzY2hlbWFfdmVyc2lvbiI6IjEuMCJ9"/>
+              <p:cNvPr id="115" name="math:009" descr="AI_AUTOFIGURE_MATH_FALLBACK_ONLY_V1:eyJjb250ZW50X3J1bnMiOlt7ImNhbm9uaWNhbF9sYXRleCI6Inpee1xcdGF1fV97dCtofSIsImZvcm11bGFfaWQiOiJFUTAwOSIsImtpbmQiOiJtYXRoIiwibGF0ZXhfc2hhMjU2IjoiMTQ0MmExOTZjN2U5OWJhNTk2OTVjZTY3YzMyNTcyMjgzYjAyZmZlYjg4NDZhMDIxOTY0MDdiY2JiMjQzZjJkYSIsIm1vZGUiOiJpbmxpbmUiLCJvbW1sX3NoYTI1NiI6IjFkMGY2MzMyZDYwMTgwZTEwZTI4MDg1NDA1YmI5ZDc0Y2E2Mzg2NDllNmExOTBiOGE2Mjc1MzZmZmMxMjU4NzEiLCJzZW1hbnRpY19vbW1sX3Byb2ZpbGUiOiJvZmZpY2UtbWF0aC1zZW1hbnRpYy12MiIsInNlbWFudGljX29tbWxfc2hhMjU2IjoiMDM1YjgxMTU3MDY0NWY2YWY4ZGZhYTViMGM3Yzk4N2I2N2E3YmE0OWUxOGE4NWU5MDRjMzhiY2RjODViYWRlOCJ9XSwiZm9ybXVsYXMiOlt7ImNhbm9uaWNhbF9sYXRleCI6Inpee1xcdGF1fV97dCtofSIsImZvcm11bGFfaWQiOiJFUTAwOSIsImxhdGV4X3NoYTI1NiI6IjE0NDJhMTk2YzdlOTliYTU5Njk1Y2U2N2MzMjU3MjI4M2IwMmZmZWI4ODQ2YTAyMTk2NDA3YmNiYjI0M2YyZGEiLCJtb2RlIjoiaW5saW5lIiwib21tbF9zaGEyNTYiOiIxZDBmNjMzMmQ2MDE4MGUxMGUyODA4NTQwNWJiOWQ3NGNhNjM4NjQ5ZTZhMTkwYjhhNjI3NTM2ZmZjMTI1ODcxIiwic2VtYW50aWNfb21tbF9wcm9maWxlIjoib2ZmaWNlLW1hdGgtc2VtYW50aWMtdjIiLCJzZW1hbnRpY19vbW1sX3NoYTI1NiI6IjAzNWI4MTE1NzA2NDVmNmFmOGRmYWE1YjBjN2M5ODdiNjdhN2JhNDllMThhODVlOTA0YzM4YmNkYzg1YmFkZTgifV0sImtpbmQiOiJuYXRpdmVfb2ZmaWNlX21hdGgiLCJwbGFjZWhvbGRlcl9uYW1lIjoibWF0aDowMDkiLCJzY2hlbWFfdmVyc2lvbiI6IjEuMCJ9"/>
               <p:cNvSpPr txBox="1"/>
               <p:nvPr/>
             </p:nvSpPr>
@@ -8716,7 +8889,7 @@
       </mc:AlternateContent>
       <p:cxnSp>
         <p:nvCxnSpPr>
-          <p:cNvPr id="118" name="af-imagination-z0-to-z1-connector-01"/>
+          <p:cNvPr id="116" name="af-imagination-z0-to-z1-connector-01" descr="{&quot;arrow_spec_sha256&quot;:&quot;6f292081bb19a8a24da3897134ba1d8bdfa858e7c460029541fcf2f8a2f58121&quot;,&quot;autofigure_element_id&quot;:&quot;imagination-z0-to-z1&quot;}"/>
           <p:cNvCxnSpPr/>
           <p:nvPr/>
         </p:nvCxnSpPr>
@@ -8732,6 +8905,7 @@
             <a:solidFill>
               <a:srgbClr val="8D6A00"/>
             </a:solidFill>
+            <a:miter/>
             <a:tailEnd type="triangle" w="lg" len="lg"/>
           </a:ln>
           <a:effectLst/>
@@ -8753,7 +8927,7 @@
       </p:cxnSp>
       <p:cxnSp>
         <p:nvCxnSpPr>
-          <p:cNvPr id="119" name="af-imagination-z1-to-z2-connector-01"/>
+          <p:cNvPr id="117" name="af-imagination-z1-to-z2-connector-01" descr="{&quot;arrow_spec_sha256&quot;:&quot;b98502b475d301c5aa06f2d020f89683faea83d6c1c841f7e635406b202e095c&quot;,&quot;autofigure_element_id&quot;:&quot;imagination-z1-to-z2&quot;}"/>
           <p:cNvCxnSpPr/>
           <p:nvPr/>
         </p:nvCxnSpPr>
@@ -8769,6 +8943,7 @@
             <a:solidFill>
               <a:srgbClr val="8D6A00"/>
             </a:solidFill>
+            <a:miter/>
             <a:tailEnd type="triangle" w="lg" len="lg"/>
           </a:ln>
           <a:effectLst/>
@@ -8790,7 +8965,7 @@
       </p:cxnSp>
       <p:cxnSp>
         <p:nvCxnSpPr>
-          <p:cNvPr id="120" name="af-imagination-z2-to-zh-connector-01"/>
+          <p:cNvPr id="118" name="af-imagination-z2-to-zh-connector-01" descr="{&quot;arrow_spec_sha256&quot;:&quot;31bda7afbb77866311d8fe0e5eccde04bc9d2b630d2444ee39a13bc3c615dcf7&quot;,&quot;autofigure_element_id&quot;:&quot;imagination-z2-to-zh&quot;}"/>
           <p:cNvCxnSpPr/>
           <p:nvPr/>
         </p:nvCxnSpPr>
@@ -8806,6 +8981,7 @@
             <a:solidFill>
               <a:srgbClr val="8D6A00"/>
             </a:solidFill>
+            <a:miter/>
             <a:tailEnd type="triangle" w="lg" len="lg"/>
           </a:ln>
           <a:effectLst/>
@@ -8827,7 +9003,7 @@
       </p:cxnSp>
       <p:sp>
         <p:nvSpPr>
-          <p:cNvPr id="121" name="af-svg-text-0043-text-01"/>
+          <p:cNvPr id="119" name="af-svg-text-0043-text-01" descr="{&quot;autofigure_element_id&quot;:&quot;svg-text-0043&quot;}"/>
           <p:cNvSpPr txBox="1"/>
           <p:nvPr/>
         </p:nvSpPr>
@@ -8843,7 +9019,7 @@
           <a:effectLst/>
         </p:spPr>
         <p:txBody>
-          <a:bodyPr wrap="none" anchor="t" lIns="0" rIns="0" tIns="0" bIns="0">
+          <a:bodyPr wrap="none" lIns="0" tIns="0" rIns="0" bIns="0" anchor="t">
             <a:spAutoFit/>
           </a:bodyPr>
           <a:lstStyle/>
@@ -8863,7 +9039,7 @@
       </p:sp>
       <p:cxnSp>
         <p:nvCxnSpPr>
-          <p:cNvPr id="122" name="af-imagination-z0-to-r0-connector-01"/>
+          <p:cNvPr id="120" name="af-imagination-z0-to-r0-connector-01" descr="{&quot;arrow_spec_sha256&quot;:&quot;bd46d0a393e40140c06220c4df446bd51bc440f14f01fb66bc5feca8ba04def8&quot;,&quot;autofigure_element_id&quot;:&quot;imagination-z0-to-r0&quot;}"/>
           <p:cNvCxnSpPr/>
           <p:nvPr/>
         </p:nvCxnSpPr>
@@ -8879,6 +9055,7 @@
             <a:solidFill>
               <a:srgbClr val="8D6A00"/>
             </a:solidFill>
+            <a:miter/>
             <a:tailEnd type="triangle" w="lg" len="lg"/>
           </a:ln>
           <a:effectLst/>
@@ -8900,7 +9077,7 @@
       </p:cxnSp>
       <p:cxnSp>
         <p:nvCxnSpPr>
-          <p:cNvPr id="123" name="af-imagination-z1-to-r1-connector-01"/>
+          <p:cNvPr id="121" name="af-imagination-z1-to-r1-connector-01" descr="{&quot;arrow_spec_sha256&quot;:&quot;7ea82a10537668d9d202e4010618380c100260404a3a8a83da8949c066d74e49&quot;,&quot;autofigure_element_id&quot;:&quot;imagination-z1-to-r1&quot;}"/>
           <p:cNvCxnSpPr/>
           <p:nvPr/>
         </p:nvCxnSpPr>
@@ -8916,6 +9093,7 @@
             <a:solidFill>
               <a:srgbClr val="8D6A00"/>
             </a:solidFill>
+            <a:miter/>
             <a:tailEnd type="triangle" w="lg" len="lg"/>
           </a:ln>
           <a:effectLst/>
@@ -8937,7 +9115,7 @@
       </p:cxnSp>
       <p:cxnSp>
         <p:nvCxnSpPr>
-          <p:cNvPr id="124" name="af-imagination-z2-to-r2-connector-01"/>
+          <p:cNvPr id="122" name="af-imagination-z2-to-r2-connector-01" descr="{&quot;arrow_spec_sha256&quot;:&quot;e1575498b0e7ddf1858f332561e6e11ca589e3c604b9b4db8ba06374e411d3b4&quot;,&quot;autofigure_element_id&quot;:&quot;imagination-z2-to-r2&quot;}"/>
           <p:cNvCxnSpPr/>
           <p:nvPr/>
         </p:nvCxnSpPr>
@@ -8953,6 +9131,7 @@
             <a:solidFill>
               <a:srgbClr val="8D6A00"/>
             </a:solidFill>
+            <a:miter/>
             <a:tailEnd type="triangle" w="lg" len="lg"/>
           </a:ln>
           <a:effectLst/>
@@ -8974,7 +9153,7 @@
       </p:cxnSp>
       <p:sp>
         <p:nvSpPr>
-          <p:cNvPr id="125" name="af-svg-circle-0018-ellipse-01"/>
+          <p:cNvPr id="123" name="af-svg-circle-0018-ellipse-01" descr="{&quot;autofigure_element_id&quot;:&quot;svg-circle-0018&quot;}"/>
           <p:cNvSpPr/>
           <p:nvPr/>
         </p:nvSpPr>
@@ -9013,12 +9192,13 @@
           <a:lstStyle/>
           <a:p>
             <a:pPr algn="ctr"/>
-          </a:p>
-        </p:txBody>
-      </p:sp>
-      <p:sp>
-        <p:nvSpPr>
-          <p:cNvPr id="126" name="af-svg-circle-0019-ellipse-01"/>
+            <a:endParaRPr/>
+          </a:p>
+        </p:txBody>
+      </p:sp>
+      <p:sp>
+        <p:nvSpPr>
+          <p:cNvPr id="124" name="af-svg-circle-0019-ellipse-01" descr="{&quot;autofigure_element_id&quot;:&quot;svg-circle-0019&quot;}"/>
           <p:cNvSpPr/>
           <p:nvPr/>
         </p:nvSpPr>
@@ -9057,12 +9237,13 @@
           <a:lstStyle/>
           <a:p>
             <a:pPr algn="ctr"/>
-          </a:p>
-        </p:txBody>
-      </p:sp>
-      <p:sp>
-        <p:nvSpPr>
-          <p:cNvPr id="127" name="af-svg-circle-0020-ellipse-01"/>
+            <a:endParaRPr/>
+          </a:p>
+        </p:txBody>
+      </p:sp>
+      <p:sp>
+        <p:nvSpPr>
+          <p:cNvPr id="125" name="af-svg-circle-0020-ellipse-01" descr="{&quot;autofigure_element_id&quot;:&quot;svg-circle-0020&quot;}"/>
           <p:cNvSpPr/>
           <p:nvPr/>
         </p:nvSpPr>
@@ -9101,14 +9282,15 @@
           <a:lstStyle/>
           <a:p>
             <a:pPr algn="ctr"/>
-          </a:p>
-        </p:txBody>
-      </p:sp>
-      <mc:AlternateContent xmlns:mc="http://schemas.openxmlformats.org/markup-compatibility/2006">
-        <mc:Choice xmlns:a14="http://schemas.microsoft.com/office/drawing/2010/main" Requires="a14">
+            <a:endParaRPr/>
+          </a:p>
+        </p:txBody>
+      </p:sp>
+      <mc:AlternateContent xmlns:mc="http://schemas.openxmlformats.org/markup-compatibility/2006" xmlns:a14="http://schemas.microsoft.com/office/drawing/2010/main">
+        <mc:Choice Requires="a14">
           <p:sp>
             <p:nvSpPr>
-              <p:cNvPr id="128" name="math:010" descr="AI_AUTOFIGURE_NATIVE_MATH_V1:eyJjb250ZW50X3J1bnMiOlt7ImNhbm9uaWNhbF9sYXRleCI6InJfe3R9IiwiZm9ybXVsYV9pZCI6IkVRMDEwIiwia2luZCI6Im1hdGgiLCJsYXRleF9zaGEyNTYiOiI1YTFlMDA1ZTIwZWQ3NDgxZDU1YmNlODQwNzVhN2NhYzMxOTNkYTI0NDYxYjYzMDE5NzM4OWJlMTkxMmUwZWVhIiwibW9kZSI6ImlubGluZSIsIm9tbWxfc2hhMjU2IjoiMDJhYmViNjg3YzViYzMyOTZiZTYxOWM5NjY5YzQzZDExZDBjN2UyZmVjNmM2NDIyZmQyM2RmOWZjMjQ0MmRhOCIsInNlbWFudGljX29tbWxfcHJvZmlsZSI6Im9mZmljZS1tYXRoLXNlbWFudGljLXYyIiwic2VtYW50aWNfb21tbF9zaGEyNTYiOiI3NzM1OWY2MmNhZDNkODE2MGY5YmQxNTE3ZjkxNjdmNTcxODdlM2EyOTE2N2E2ZmQ1MzEyMmFkMjczYmZiODJlIn1dLCJmb3JtdWxhcyI6W3siY2Fub25pY2FsX2xhdGV4Ijoicl97dH0iLCJmb3JtdWxhX2lkIjoiRVEwMTAiLCJsYXRleF9zaGEyNTYiOiI1YTFlMDA1ZTIwZWQ3NDgxZDU1YmNlODQwNzVhN2NhYzMxOTNkYTI0NDYxYjYzMDE5NzM4OWJlMTkxMmUwZWVhIiwibW9kZSI6ImlubGluZSIsIm9tbWxfc2hhMjU2IjoiMDJhYmViNjg3YzViYzMyOTZiZTYxOWM5NjY5YzQzZDExZDBjN2UyZmVjNmM2NDIyZmQyM2RmOWZjMjQ0MmRhOCIsInNlbWFudGljX29tbWxfcHJvZmlsZSI6Im9mZmljZS1tYXRoLXNlbWFudGljLXYyIiwic2VtYW50aWNfb21tbF9zaGEyNTYiOiI3NzM1OWY2MmNhZDNkODE2MGY5YmQxNTE3ZjkxNjdmNTcxODdlM2EyOTE2N2E2ZmQ1MzEyMmFkMjczYmZiODJlIn1dLCJraW5kIjoibmF0aXZlX29mZmljZV9tYXRoIiwicGxhY2Vob2xkZXJfbmFtZSI6Im1hdGg6MDEwIiwic2NoZW1hX3ZlcnNpb24iOiIxLjAifQ=="/>
+              <p:cNvPr id="126" name="math:010" descr="AI_AUTOFIGURE_NATIVE_MATH_V1:eyJjb250ZW50X3J1bnMiOlt7ImNhbm9uaWNhbF9sYXRleCI6InJfe3R9IiwiZm9ybXVsYV9pZCI6IkVRMDEwIiwia2luZCI6Im1hdGgiLCJsYXRleF9zaGEyNTYiOiI1YTFlMDA1ZTIwZWQ3NDgxZDU1YmNlODQwNzVhN2NhYzMxOTNkYTI0NDYxYjYzMDE5NzM4OWJlMTkxMmUwZWVhIiwibW9kZSI6ImlubGluZSIsIm9tbWxfc2hhMjU2IjoiMDJhYmViNjg3YzViYzMyOTZiZTYxOWM5NjY5YzQzZDExZDBjN2UyZmVjNmM2NDIyZmQyM2RmOWZjMjQ0MmRhOCIsInNlbWFudGljX29tbWxfcHJvZmlsZSI6Im9mZmljZS1tYXRoLXNlbWFudGljLXYyIiwic2VtYW50aWNfb21tbF9zaGEyNTYiOiI3NzM1OWY2MmNhZDNkODE2MGY5YmQxNTE3ZjkxNjdmNTcxODdlM2EyOTE2N2E2ZmQ1MzEyMmFkMjczYmZiODJlIn1dLCJmb3JtdWxhcyI6W3siY2Fub25pY2FsX2xhdGV4Ijoicl97dH0iLCJmb3JtdWxhX2lkIjoiRVEwMTAiLCJsYXRleF9zaGEyNTYiOiI1YTFlMDA1ZTIwZWQ3NDgxZDU1YmNlODQwNzVhN2NhYzMxOTNkYTI0NDYxYjYzMDE5NzM4OWJlMTkxMmUwZWVhIiwibW9kZSI6ImlubGluZSIsIm9tbWxfc2hhMjU2IjoiMDJhYmViNjg3YzViYzMyOTZiZTYxOWM5NjY5YzQzZDExZDBjN2UyZmVjNmM2NDIyZmQyM2RmOWZjMjQ0MmRhOCIsInNlbWFudGljX29tbWxfcHJvZmlsZSI6Im9mZmljZS1tYXRoLXNlbWFudGljLXYyIiwic2VtYW50aWNfb21tbF9zaGEyNTYiOiI3NzM1OWY2MmNhZDNkODE2MGY5YmQxNTE3ZjkxNjdmNTcxODdlM2EyOTE2N2E2ZmQ1MzEyMmFkMjczYmZiODJlIn1dLCJraW5kIjoibmF0aXZlX29mZmljZV9tYXRoIiwicGxhY2Vob2xkZXJfbmFtZSI6Im1hdGg6MDEwIiwic2NoZW1hX3ZlcnNpb24iOiIxLjAifQ=="/>
               <p:cNvSpPr txBox="1"/>
               <p:nvPr/>
             </p:nvSpPr>
@@ -9124,41 +9306,53 @@
               <a:effectLst/>
             </p:spPr>
             <p:txBody>
-              <a:bodyPr wrap="none" anchor="t" lIns="0" rIns="0" tIns="0" bIns="0">
+              <a:bodyPr wrap="none" lIns="0" tIns="0" rIns="0" bIns="0" anchor="t">
                 <a:spAutoFit/>
               </a:bodyPr>
               <a:lstStyle/>
               <a:p>
                 <a:pPr algn="ctr"/>
                 <a14:m>
-                  <m:oMath xmlns:m="http://schemas.openxmlformats.org/officeDocument/2006/math">
-                    <m:sSub>
-                      <m:e>
-                        <m:r>
-                          <a:rPr lang="en-US" dirty="0" sz="1275">
-                            <a:solidFill>
-                              <a:srgbClr val="FFFFFF"/>
-                            </a:solidFill>
-                            <a:latin typeface="Cambria Math"/>
-                          </a:rPr>
-                          <m:t>r</m:t>
-                        </m:r>
-                      </m:e>
-                      <m:sub>
-                        <m:r>
-                          <a:rPr lang="en-US" dirty="0" sz="1275">
-                            <a:solidFill>
-                              <a:srgbClr val="FFFFFF"/>
-                            </a:solidFill>
-                            <a:latin typeface="Cambria Math"/>
-                          </a:rPr>
-                          <m:t>t</m:t>
-                        </m:r>
-                      </m:sub>
-                    </m:sSub>
-                  </m:oMath>
+                  <m:oMathPara xmlns:m="http://schemas.openxmlformats.org/officeDocument/2006/math">
+                    <m:oMath>
+                      <m:sSub>
+                        <m:sSubPr>
+                          <m:ctrlPr>
+                            <a:rPr lang="en-US" sz="1275" dirty="0">
+                              <a:solidFill>
+                                <a:srgbClr val="FFFFFF"/>
+                              </a:solidFill>
+                              <a:latin typeface="Cambria Math"/>
+                            </a:rPr>
+                          </m:ctrlPr>
+                        </m:sSubPr>
+                        <m:e>
+                          <m:r>
+                            <a:rPr lang="en-US" sz="1275" dirty="0">
+                              <a:solidFill>
+                                <a:srgbClr val="FFFFFF"/>
+                              </a:solidFill>
+                              <a:latin typeface="Cambria Math"/>
+                            </a:rPr>
+                            <m:t>𝑟</m:t>
+                          </m:r>
+                        </m:e>
+                        <m:sub>
+                          <m:r>
+                            <a:rPr lang="en-US" sz="1275" dirty="0">
+                              <a:solidFill>
+                                <a:srgbClr val="FFFFFF"/>
+                              </a:solidFill>
+                              <a:latin typeface="Cambria Math"/>
+                            </a:rPr>
+                            <m:t>𝑡</m:t>
+                          </m:r>
+                        </m:sub>
+                      </m:sSub>
+                    </m:oMath>
+                  </m:oMathPara>
                 </a14:m>
-                <a:endParaRPr lang="en-US" dirty="0" sz="1275">
+                <a:endParaRPr lang="en-US" sz="1275" dirty="0">
                   <a:solidFill>
                     <a:srgbClr val="FFFFFF"/>
                   </a:solidFill>
@@ -9168,10 +9362,10 @@
             </p:txBody>
           </p:sp>
         </mc:Choice>
-        <mc:Fallback>
+        <mc:Fallback xmlns="">
           <p:sp>
             <p:nvSpPr>
-              <p:cNvPr id="128" name="math:010" descr="AI_AUTOFIGURE_MATH_FALLBACK_ONLY_V1:eyJjb250ZW50X3J1bnMiOlt7ImNhbm9uaWNhbF9sYXRleCI6InJfe3R9IiwiZm9ybXVsYV9pZCI6IkVRMDEwIiwia2luZCI6Im1hdGgiLCJsYXRleF9zaGEyNTYiOiI1YTFlMDA1ZTIwZWQ3NDgxZDU1YmNlODQwNzVhN2NhYzMxOTNkYTI0NDYxYjYzMDE5NzM4OWJlMTkxMmUwZWVhIiwibW9kZSI6ImlubGluZSIsIm9tbWxfc2hhMjU2IjoiMDJhYmViNjg3YzViYzMyOTZiZTYxOWM5NjY5YzQzZDExZDBjN2UyZmVjNmM2NDIyZmQyM2RmOWZjMjQ0MmRhOCIsInNlbWFudGljX29tbWxfcHJvZmlsZSI6Im9mZmljZS1tYXRoLXNlbWFudGljLXYyIiwic2VtYW50aWNfb21tbF9zaGEyNTYiOiI3NzM1OWY2MmNhZDNkODE2MGY5YmQxNTE3ZjkxNjdmNTcxODdlM2EyOTE2N2E2ZmQ1MzEyMmFkMjczYmZiODJlIn1dLCJmb3JtdWxhcyI6W3siY2Fub25pY2FsX2xhdGV4Ijoicl97dH0iLCJmb3JtdWxhX2lkIjoiRVEwMTAiLCJsYXRleF9zaGEyNTYiOiI1YTFlMDA1ZTIwZWQ3NDgxZDU1YmNlODQwNzVhN2NhYzMxOTNkYTI0NDYxYjYzMDE5NzM4OWJlMTkxMmUwZWVhIiwibW9kZSI6ImlubGluZSIsIm9tbWxfc2hhMjU2IjoiMDJhYmViNjg3YzViYzMyOTZiZTYxOWM5NjY5YzQzZDExZDBjN2UyZmVjNmM2NDIyZmQyM2RmOWZjMjQ0MmRhOCIsInNlbWFudGljX29tbWxfcHJvZmlsZSI6Im9mZmljZS1tYXRoLXNlbWFudGljLXYyIiwic2VtYW50aWNfb21tbF9zaGEyNTYiOiI3NzM1OWY2MmNhZDNkODE2MGY5YmQxNTE3ZjkxNjdmNTcxODdlM2EyOTE2N2E2ZmQ1MzEyMmFkMjczYmZiODJlIn1dLCJraW5kIjoibmF0aXZlX29mZmljZV9tYXRoIiwicGxhY2Vob2xkZXJfbmFtZSI6Im1hdGg6MDEwIiwic2NoZW1hX3ZlcnNpb24iOiIxLjAifQ=="/>
+              <p:cNvPr id="126" name="math:010" descr="AI_AUTOFIGURE_MATH_FALLBACK_ONLY_V1:eyJjb250ZW50X3J1bnMiOlt7ImNhbm9uaWNhbF9sYXRleCI6InJfe3R9IiwiZm9ybXVsYV9pZCI6IkVRMDEwIiwia2luZCI6Im1hdGgiLCJsYXRleF9zaGEyNTYiOiI1YTFlMDA1ZTIwZWQ3NDgxZDU1YmNlODQwNzVhN2NhYzMxOTNkYTI0NDYxYjYzMDE5NzM4OWJlMTkxMmUwZWVhIiwibW9kZSI6ImlubGluZSIsIm9tbWxfc2hhMjU2IjoiMDJhYmViNjg3YzViYzMyOTZiZTYxOWM5NjY5YzQzZDExZDBjN2UyZmVjNmM2NDIyZmQyM2RmOWZjMjQ0MmRhOCIsInNlbWFudGljX29tbWxfcHJvZmlsZSI6Im9mZmljZS1tYXRoLXNlbWFudGljLXYyIiwic2VtYW50aWNfb21tbF9zaGEyNTYiOiI3NzM1OWY2MmNhZDNkODE2MGY5YmQxNTE3ZjkxNjdmNTcxODdlM2EyOTE2N2E2ZmQ1MzEyMmFkMjczYmZiODJlIn1dLCJmb3JtdWxhcyI6W3siY2Fub25pY2FsX2xhdGV4Ijoicl97dH0iLCJmb3JtdWxhX2lkIjoiRVEwMTAiLCJsYXRleF9zaGEyNTYiOiI1YTFlMDA1ZTIwZWQ3NDgxZDU1YmNlODQwNzVhN2NhYzMxOTNkYTI0NDYxYjYzMDE5NzM4OWJlMTkxMmUwZWVhIiwibW9kZSI6ImlubGluZSIsIm9tbWxfc2hhMjU2IjoiMDJhYmViNjg3YzViYzMyOTZiZTYxOWM5NjY5YzQzZDExZDBjN2UyZmVjNmM2NDIyZmQyM2RmOWZjMjQ0MmRhOCIsInNlbWFudGljX29tbWxfcHJvZmlsZSI6Im9mZmljZS1tYXRoLXNlbWFudGljLXYyIiwic2VtYW50aWNfb21tbF9zaGEyNTYiOiI3NzM1OWY2MmNhZDNkODE2MGY5YmQxNTE3ZjkxNjdmNTcxODdlM2EyOTE2N2E2ZmQ1MzEyMmFkMjczYmZiODJlIn1dLCJraW5kIjoibmF0aXZlX29mZmljZV9tYXRoIiwicGxhY2Vob2xkZXJfbmFtZSI6Im1hdGg6MDEwIiwic2NoZW1hX3ZlcnNpb24iOiIxLjAifQ=="/>
               <p:cNvSpPr txBox="1"/>
               <p:nvPr/>
             </p:nvSpPr>
@@ -9211,11 +9405,11 @@
           </p:sp>
         </mc:Fallback>
       </mc:AlternateContent>
-      <mc:AlternateContent xmlns:mc="http://schemas.openxmlformats.org/markup-compatibility/2006">
-        <mc:Choice xmlns:a14="http://schemas.microsoft.com/office/drawing/2010/main" Requires="a14">
+      <mc:AlternateContent xmlns:mc="http://schemas.openxmlformats.org/markup-compatibility/2006" xmlns:a14="http://schemas.microsoft.com/office/drawing/2010/main">
+        <mc:Choice Requires="a14">
           <p:sp>
             <p:nvSpPr>
-              <p:cNvPr id="129" name="math:011" descr="AI_AUTOFIGURE_NATIVE_MATH_V1:eyJjb250ZW50X3J1bnMiOlt7ImNhbm9uaWNhbF9sYXRleCI6InJfe3QrMX0iLCJmb3JtdWxhX2lkIjoiRVEwMTEiLCJraW5kIjoibWF0aCIsImxhdGV4X3NoYTI1NiI6ImM1ZDA3NDRiNjJjYTM4ZGQ1MDgwMGUyN2Y0MjAwMTVjYTdiMWM3ZTJlM2E5M2M4OTFkYjhlYzU1YTc3MTBiMzEiLCJtb2RlIjoiaW5saW5lIiwib21tbF9zaGEyNTYiOiJlY2NiNGI3MzliOTVkNWI2MmIwNmIzOGI1YjQ5N2E2YjkyOWZlYzUzMmQ1NTdiNmRlN2NjNTM5OTVkMmNmNDZkIiwic2VtYW50aWNfb21tbF9wcm9maWxlIjoib2ZmaWNlLW1hdGgtc2VtYW50aWMtdjIiLCJzZW1hbnRpY19vbW1sX3NoYTI1NiI6ImQwYWY1NTkxZWM4Y2Q5ZDgzYzA4ZDRhMmYxMzk0NDNkNDUxODc3MGRkODQxZmQ2YTIzYjY5Zjk1N2UwYTIxY2IifV0sImZvcm11bGFzIjpbeyJjYW5vbmljYWxfbGF0ZXgiOiJyX3t0KzF9IiwiZm9ybXVsYV9pZCI6IkVRMDExIiwibGF0ZXhfc2hhMjU2IjoiYzVkMDc0NGI2MmNhMzhkZDUwODAwZTI3ZjQyMDAxNWNhN2IxYzdlMmUzYTkzYzg5MWRiOGVjNTVhNzcxMGIzMSIsIm1vZGUiOiJpbmxpbmUiLCJvbW1sX3NoYTI1NiI6ImVjY2I0YjczOWI5NWQ1YjYyYjA2YjM4YjViNDk3YTZiOTI5ZmVjNTMyZDU1N2I2ZGU3Y2M1Mzk5NWQyY2Y0NmQiLCJzZW1hbnRpY19vbW1sX3Byb2ZpbGUiOiJvZmZpY2UtbWF0aC1zZW1hbnRpYy12MiIsInNlbWFudGljX29tbWxfc2hhMjU2IjoiZDBhZjU1OTFlYzhjZDlkODNjMDhkNGEyZjEzOTQ0M2Q0NTE4NzcwZGQ4NDFmZDZhMjNiNjlmOTU3ZTBhMjFjYiJ9XSwia2luZCI6Im5hdGl2ZV9vZmZpY2VfbWF0aCIsInBsYWNlaG9sZGVyX25hbWUiOiJtYXRoOjAxMSIsInNjaGVtYV92ZXJzaW9uIjoiMS4wIn0="/>
+              <p:cNvPr id="127" name="math:011" descr="AI_AUTOFIGURE_NATIVE_MATH_V1:eyJjb250ZW50X3J1bnMiOlt7ImNhbm9uaWNhbF9sYXRleCI6InJfe3QrMX0iLCJmb3JtdWxhX2lkIjoiRVEwMTEiLCJraW5kIjoibWF0aCIsImxhdGV4X3NoYTI1NiI6ImM1ZDA3NDRiNjJjYTM4ZGQ1MDgwMGUyN2Y0MjAwMTVjYTdiMWM3ZTJlM2E5M2M4OTFkYjhlYzU1YTc3MTBiMzEiLCJtb2RlIjoiaW5saW5lIiwib21tbF9zaGEyNTYiOiJlY2NiNGI3MzliOTVkNWI2MmIwNmIzOGI1YjQ5N2E2YjkyOWZlYzUzMmQ1NTdiNmRlN2NjNTM5OTVkMmNmNDZkIiwic2VtYW50aWNfb21tbF9wcm9maWxlIjoib2ZmaWNlLW1hdGgtc2VtYW50aWMtdjIiLCJzZW1hbnRpY19vbW1sX3NoYTI1NiI6ImQwYWY1NTkxZWM4Y2Q5ZDgzYzA4ZDRhMmYxMzk0NDNkNDUxODc3MGRkODQxZmQ2YTIzYjY5Zjk1N2UwYTIxY2IifV0sImZvcm11bGFzIjpbeyJjYW5vbmljYWxfbGF0ZXgiOiJyX3t0KzF9IiwiZm9ybXVsYV9pZCI6IkVRMDExIiwibGF0ZXhfc2hhMjU2IjoiYzVkMDc0NGI2MmNhMzhkZDUwODAwZTI3ZjQyMDAxNWNhN2IxYzdlMmUzYTkzYzg5MWRiOGVjNTVhNzcxMGIzMSIsIm1vZGUiOiJpbmxpbmUiLCJvbW1sX3NoYTI1NiI6ImVjY2I0YjczOWI5NWQ1YjYyYjA2YjM4YjViNDk3YTZiOTI5ZmVjNTMyZDU1N2I2ZGU3Y2M1Mzk5NWQyY2Y0NmQiLCJzZW1hbnRpY19vbW1sX3Byb2ZpbGUiOiJvZmZpY2UtbWF0aC1zZW1hbnRpYy12MiIsInNlbWFudGljX29tbWxfc2hhMjU2IjoiZDBhZjU1OTFlYzhjZDlkODNjMDhkNGEyZjEzOTQ0M2Q0NTE4NzcwZGQ4NDFmZDZhMjNiNjlmOTU3ZTBhMjFjYiJ9XSwia2luZCI6Im5hdGl2ZV9vZmZpY2VfbWF0aCIsInBsYWNlaG9sZGVyX25hbWUiOiJtYXRoOjAxMSIsInNjaGVtYV92ZXJzaW9uIjoiMS4wIn0="/>
               <p:cNvSpPr txBox="1"/>
               <p:nvPr/>
             </p:nvSpPr>
@@ -9231,41 +9425,62 @@
               <a:effectLst/>
             </p:spPr>
             <p:txBody>
-              <a:bodyPr wrap="none" anchor="t" lIns="0" rIns="0" tIns="0" bIns="0">
+              <a:bodyPr wrap="none" lIns="0" tIns="0" rIns="0" bIns="0" anchor="t">
                 <a:spAutoFit/>
               </a:bodyPr>
               <a:lstStyle/>
               <a:p>
                 <a:pPr algn="ctr"/>
                 <a14:m>
-                  <m:oMath xmlns:m="http://schemas.openxmlformats.org/officeDocument/2006/math">
-                    <m:sSub>
-                      <m:e>
-                        <m:r>
-                          <a:rPr lang="en-US" dirty="0" sz="1275">
-                            <a:solidFill>
-                              <a:srgbClr val="FFFFFF"/>
-                            </a:solidFill>
-                            <a:latin typeface="Cambria Math"/>
-                          </a:rPr>
-                          <m:t>r</m:t>
-                        </m:r>
-                      </m:e>
-                      <m:sub>
-                        <m:r>
-                          <a:rPr lang="en-US" dirty="0" sz="1275">
-                            <a:solidFill>
-                              <a:srgbClr val="FFFFFF"/>
-                            </a:solidFill>
-                            <a:latin typeface="Cambria Math"/>
-                          </a:rPr>
-                          <m:t>t+1</m:t>
-                        </m:r>
-                      </m:sub>
-                    </m:sSub>
-                  </m:oMath>
+                  <m:oMathPara xmlns:m="http://schemas.openxmlformats.org/officeDocument/2006/math">
+                    <m:oMath>
+                      <m:sSub>
+                        <m:sSubPr>
+                          <m:ctrlPr>
+                            <a:rPr lang="en-US" sz="1275" dirty="0">
+                              <a:solidFill>
+                                <a:srgbClr val="FFFFFF"/>
+                              </a:solidFill>
+                              <a:latin typeface="Cambria Math"/>
+                            </a:rPr>
+                          </m:ctrlPr>
+                        </m:sSubPr>
+                        <m:e>
+                          <m:r>
+                            <a:rPr lang="en-US" sz="1275" dirty="0">
+                              <a:solidFill>
+                                <a:srgbClr val="FFFFFF"/>
+                              </a:solidFill>
+                              <a:latin typeface="Cambria Math"/>
+                            </a:rPr>
+                            <m:t>𝑟</m:t>
+                          </m:r>
+                        </m:e>
+                        <m:sub>
+                          <m:r>
+                            <a:rPr lang="en-US" sz="1275" dirty="0">
+                              <a:solidFill>
+                                <a:srgbClr val="FFFFFF"/>
+                              </a:solidFill>
+                              <a:latin typeface="Cambria Math"/>
+                            </a:rPr>
+                            <m:t>𝑡</m:t>
+                          </m:r>
+                          <m:r>
+                            <a:rPr lang="en-US" sz="1275" dirty="0">
+                              <a:solidFill>
+                                <a:srgbClr val="FFFFFF"/>
+                              </a:solidFill>
+                              <a:latin typeface="Cambria Math"/>
+                            </a:rPr>
+                            <m:t>+1</m:t>
+                          </m:r>
+                        </m:sub>
+                      </m:sSub>
+                    </m:oMath>
+                  </m:oMathPara>
                 </a14:m>
-                <a:endParaRPr lang="en-US" dirty="0" sz="1275">
+                <a:endParaRPr lang="en-US" sz="1275" dirty="0">
                   <a:solidFill>
                     <a:srgbClr val="FFFFFF"/>
                   </a:solidFill>
@@ -9275,10 +9490,10 @@
             </p:txBody>
           </p:sp>
         </mc:Choice>
-        <mc:Fallback>
+        <mc:Fallback xmlns="">
           <p:sp>
             <p:nvSpPr>
-              <p:cNvPr id="129" name="math:011" descr="AI_AUTOFIGURE_MATH_FALLBACK_ONLY_V1:eyJjb250ZW50X3J1bnMiOlt7ImNhbm9uaWNhbF9sYXRleCI6InJfe3QrMX0iLCJmb3JtdWxhX2lkIjoiRVEwMTEiLCJraW5kIjoibWF0aCIsImxhdGV4X3NoYTI1NiI6ImM1ZDA3NDRiNjJjYTM4ZGQ1MDgwMGUyN2Y0MjAwMTVjYTdiMWM3ZTJlM2E5M2M4OTFkYjhlYzU1YTc3MTBiMzEiLCJtb2RlIjoiaW5saW5lIiwib21tbF9zaGEyNTYiOiJlY2NiNGI3MzliOTVkNWI2MmIwNmIzOGI1YjQ5N2E2YjkyOWZlYzUzMmQ1NTdiNmRlN2NjNTM5OTVkMmNmNDZkIiwic2VtYW50aWNfb21tbF9wcm9maWxlIjoib2ZmaWNlLW1hdGgtc2VtYW50aWMtdjIiLCJzZW1hbnRpY19vbW1sX3NoYTI1NiI6ImQwYWY1NTkxZWM4Y2Q5ZDgzYzA4ZDRhMmYxMzk0NDNkNDUxODc3MGRkODQxZmQ2YTIzYjY5Zjk1N2UwYTIxY2IifV0sImZvcm11bGFzIjpbeyJjYW5vbmljYWxfbGF0ZXgiOiJyX3t0KzF9IiwiZm9ybXVsYV9pZCI6IkVRMDExIiwibGF0ZXhfc2hhMjU2IjoiYzVkMDc0NGI2MmNhMzhkZDUwODAwZTI3ZjQyMDAxNWNhN2IxYzdlMmUzYTkzYzg5MWRiOGVjNTVhNzcxMGIzMSIsIm1vZGUiOiJpbmxpbmUiLCJvbW1sX3NoYTI1NiI6ImVjY2I0YjczOWI5NWQ1YjYyYjA2YjM4YjViNDk3YTZiOTI5ZmVjNTMyZDU1N2I2ZGU3Y2M1Mzk5NWQyY2Y0NmQiLCJzZW1hbnRpY19vbW1sX3Byb2ZpbGUiOiJvZmZpY2UtbWF0aC1zZW1hbnRpYy12MiIsInNlbWFudGljX29tbWxfc2hhMjU2IjoiZDBhZjU1OTFlYzhjZDlkODNjMDhkNGEyZjEzOTQ0M2Q0NTE4NzcwZGQ4NDFmZDZhMjNiNjlmOTU3ZTBhMjFjYiJ9XSwia2luZCI6Im5hdGl2ZV9vZmZpY2VfbWF0aCIsInBsYWNlaG9sZGVyX25hbWUiOiJtYXRoOjAxMSIsInNjaGVtYV92ZXJzaW9uIjoiMS4wIn0="/>
+              <p:cNvPr id="127" name="math:011" descr="AI_AUTOFIGURE_MATH_FALLBACK_ONLY_V1:eyJjb250ZW50X3J1bnMiOlt7ImNhbm9uaWNhbF9sYXRleCI6InJfe3QrMX0iLCJmb3JtdWxhX2lkIjoiRVEwMTEiLCJraW5kIjoibWF0aCIsImxhdGV4X3NoYTI1NiI6ImM1ZDA3NDRiNjJjYTM4ZGQ1MDgwMGUyN2Y0MjAwMTVjYTdiMWM3ZTJlM2E5M2M4OTFkYjhlYzU1YTc3MTBiMzEiLCJtb2RlIjoiaW5saW5lIiwib21tbF9zaGEyNTYiOiJlY2NiNGI3MzliOTVkNWI2MmIwNmIzOGI1YjQ5N2E2YjkyOWZlYzUzMmQ1NTdiNmRlN2NjNTM5OTVkMmNmNDZkIiwic2VtYW50aWNfb21tbF9wcm9maWxlIjoib2ZmaWNlLW1hdGgtc2VtYW50aWMtdjIiLCJzZW1hbnRpY19vbW1sX3NoYTI1NiI6ImQwYWY1NTkxZWM4Y2Q5ZDgzYzA4ZDRhMmYxMzk0NDNkNDUxODc3MGRkODQxZmQ2YTIzYjY5Zjk1N2UwYTIxY2IifV0sImZvcm11bGFzIjpbeyJjYW5vbmljYWxfbGF0ZXgiOiJyX3t0KzF9IiwiZm9ybXVsYV9pZCI6IkVRMDExIiwibGF0ZXhfc2hhMjU2IjoiYzVkMDc0NGI2MmNhMzhkZDUwODAwZTI3ZjQyMDAxNWNhN2IxYzdlMmUzYTkzYzg5MWRiOGVjNTVhNzcxMGIzMSIsIm1vZGUiOiJpbmxpbmUiLCJvbW1sX3NoYTI1NiI6ImVjY2I0YjczOWI5NWQ1YjYyYjA2YjM4YjViNDk3YTZiOTI5ZmVjNTMyZDU1N2I2ZGU3Y2M1Mzk5NWQyY2Y0NmQiLCJzZW1hbnRpY19vbW1sX3Byb2ZpbGUiOiJvZmZpY2UtbWF0aC1zZW1hbnRpYy12MiIsInNlbWFudGljX29tbWxfc2hhMjU2IjoiZDBhZjU1OTFlYzhjZDlkODNjMDhkNGEyZjEzOTQ0M2Q0NTE4NzcwZGQ4NDFmZDZhMjNiNjlmOTU3ZTBhMjFjYiJ9XSwia2luZCI6Im5hdGl2ZV9vZmZpY2VfbWF0aCIsInBsYWNlaG9sZGVyX25hbWUiOiJtYXRoOjAxMSIsInNjaGVtYV92ZXJzaW9uIjoiMS4wIn0="/>
               <p:cNvSpPr txBox="1"/>
               <p:nvPr/>
             </p:nvSpPr>
@@ -9318,11 +9533,11 @@
           </p:sp>
         </mc:Fallback>
       </mc:AlternateContent>
-      <mc:AlternateContent xmlns:mc="http://schemas.openxmlformats.org/markup-compatibility/2006">
-        <mc:Choice xmlns:a14="http://schemas.microsoft.com/office/drawing/2010/main" Requires="a14">
+      <mc:AlternateContent xmlns:mc="http://schemas.openxmlformats.org/markup-compatibility/2006" xmlns:a14="http://schemas.microsoft.com/office/drawing/2010/main">
+        <mc:Choice Requires="a14">
           <p:sp>
             <p:nvSpPr>
-              <p:cNvPr id="130" name="math:012" descr="AI_AUTOFIGURE_NATIVE_MATH_V1:eyJjb250ZW50X3J1bnMiOlt7ImNhbm9uaWNhbF9sYXRleCI6InJfe3QrMn0iLCJmb3JtdWxhX2lkIjoiRVEwMTIiLCJraW5kIjoibWF0aCIsImxhdGV4X3NoYTI1NiI6IjgyOTM1MTI4YTcxYzJiYWQ5ZGI1NTU3OGUwOWNiMmUwMjA4ODRjZDQyNDlmYmUwZTIyMTBmZGY5NThhYTFmZGYiLCJtb2RlIjoiaW5saW5lIiwib21tbF9zaGEyNTYiOiJmZDdjNmJjOTUyNjFhOGU1OTg0NmQ1ZGJjYTU0OGRlNTIyMzQ2NDllMTJkYjE5N2MxMTE4NTM1YjRhMDVkNWU0Iiwic2VtYW50aWNfb21tbF9wcm9maWxlIjoib2ZmaWNlLW1hdGgtc2VtYW50aWMtdjIiLCJzZW1hbnRpY19vbW1sX3NoYTI1NiI6ImE1MjM0OTZiOTI1NmNkODU1NDQxOTlhMzY0OGExMzY5YWJjYTI2YjdiYWIyYmI0YTM1YTI5NTM1YWQzNDI3ZTYifV0sImZvcm11bGFzIjpbeyJjYW5vbmljYWxfbGF0ZXgiOiJyX3t0KzJ9IiwiZm9ybXVsYV9pZCI6IkVRMDEyIiwibGF0ZXhfc2hhMjU2IjoiODI5MzUxMjhhNzFjMmJhZDlkYjU1NTc4ZTA5Y2IyZTAyMDg4NGNkNDI0OWZiZTBlMjIxMGZkZjk1OGFhMWZkZiIsIm1vZGUiOiJpbmxpbmUiLCJvbW1sX3NoYTI1NiI6ImZkN2M2YmM5NTI2MWE4ZTU5ODQ2ZDVkYmNhNTQ4ZGU1MjIzNDY0OWUxMmRiMTk3YzExMTg1MzViNGEwNWQ1ZTQiLCJzZW1hbnRpY19vbW1sX3Byb2ZpbGUiOiJvZmZpY2UtbWF0aC1zZW1hbnRpYy12MiIsInNlbWFudGljX29tbWxfc2hhMjU2IjoiYTUyMzQ5NmI5MjU2Y2Q4NTU0NDE5OWEzNjQ4YTEzNjlhYmNhMjZiN2JhYjJiYjRhMzVhMjk1MzVhZDM0MjdlNiJ9XSwia2luZCI6Im5hdGl2ZV9vZmZpY2VfbWF0aCIsInBsYWNlaG9sZGVyX25hbWUiOiJtYXRoOjAxMiIsInNjaGVtYV92ZXJzaW9uIjoiMS4wIn0="/>
+              <p:cNvPr id="128" name="math:012" descr="AI_AUTOFIGURE_NATIVE_MATH_V1:eyJjb250ZW50X3J1bnMiOlt7ImNhbm9uaWNhbF9sYXRleCI6InJfe3QrMn0iLCJmb3JtdWxhX2lkIjoiRVEwMTIiLCJraW5kIjoibWF0aCIsImxhdGV4X3NoYTI1NiI6IjgyOTM1MTI4YTcxYzJiYWQ5ZGI1NTU3OGUwOWNiMmUwMjA4ODRjZDQyNDlmYmUwZTIyMTBmZGY5NThhYTFmZGYiLCJtb2RlIjoiaW5saW5lIiwib21tbF9zaGEyNTYiOiJmZDdjNmJjOTUyNjFhOGU1OTg0NmQ1ZGJjYTU0OGRlNTIyMzQ2NDllMTJkYjE5N2MxMTE4NTM1YjRhMDVkNWU0Iiwic2VtYW50aWNfb21tbF9wcm9maWxlIjoib2ZmaWNlLW1hdGgtc2VtYW50aWMtdjIiLCJzZW1hbnRpY19vbW1sX3NoYTI1NiI6ImE1MjM0OTZiOTI1NmNkODU1NDQxOTlhMzY0OGExMzY5YWJjYTI2YjdiYWIyYmI0YTM1YTI5NTM1YWQzNDI3ZTYifV0sImZvcm11bGFzIjpbeyJjYW5vbmljYWxfbGF0ZXgiOiJyX3t0KzJ9IiwiZm9ybXVsYV9pZCI6IkVRMDEyIiwibGF0ZXhfc2hhMjU2IjoiODI5MzUxMjhhNzFjMmJhZDlkYjU1NTc4ZTA5Y2IyZTAyMDg4NGNkNDI0OWZiZTBlMjIxMGZkZjk1OGFhMWZkZiIsIm1vZGUiOiJpbmxpbmUiLCJvbW1sX3NoYTI1NiI6ImZkN2M2YmM5NTI2MWE4ZTU5ODQ2ZDVkYmNhNTQ4ZGU1MjIzNDY0OWUxMmRiMTk3YzExMTg1MzViNGEwNWQ1ZTQiLCJzZW1hbnRpY19vbW1sX3Byb2ZpbGUiOiJvZmZpY2UtbWF0aC1zZW1hbnRpYy12MiIsInNlbWFudGljX29tbWxfc2hhMjU2IjoiYTUyMzQ5NmI5MjU2Y2Q4NTU0NDE5OWEzNjQ4YTEzNjlhYmNhMjZiN2JhYjJiYjRhMzVhMjk1MzVhZDM0MjdlNiJ9XSwia2luZCI6Im5hdGl2ZV9vZmZpY2VfbWF0aCIsInBsYWNlaG9sZGVyX25hbWUiOiJtYXRoOjAxMiIsInNjaGVtYV92ZXJzaW9uIjoiMS4wIn0="/>
               <p:cNvSpPr txBox="1"/>
               <p:nvPr/>
             </p:nvSpPr>
@@ -9338,41 +9553,62 @@
               <a:effectLst/>
             </p:spPr>
             <p:txBody>
-              <a:bodyPr wrap="none" anchor="t" lIns="0" rIns="0" tIns="0" bIns="0">
+              <a:bodyPr wrap="none" lIns="0" tIns="0" rIns="0" bIns="0" anchor="t">
                 <a:spAutoFit/>
               </a:bodyPr>
               <a:lstStyle/>
               <a:p>
                 <a:pPr algn="ctr"/>
                 <a14:m>
-                  <m:oMath xmlns:m="http://schemas.openxmlformats.org/officeDocument/2006/math">
-                    <m:sSub>
-                      <m:e>
-                        <m:r>
-                          <a:rPr lang="en-US" dirty="0" sz="1275">
-                            <a:solidFill>
-                              <a:srgbClr val="FFFFFF"/>
-                            </a:solidFill>
-                            <a:latin typeface="Cambria Math"/>
-                          </a:rPr>
-                          <m:t>r</m:t>
-                        </m:r>
-                      </m:e>
-                      <m:sub>
-                        <m:r>
-                          <a:rPr lang="en-US" dirty="0" sz="1275">
-                            <a:solidFill>
-                              <a:srgbClr val="FFFFFF"/>
-                            </a:solidFill>
-                            <a:latin typeface="Cambria Math"/>
-                          </a:rPr>
-                          <m:t>t+2</m:t>
-                        </m:r>
-                      </m:sub>
-                    </m:sSub>
-                  </m:oMath>
+                  <m:oMathPara xmlns:m="http://schemas.openxmlformats.org/officeDocument/2006/math">
+                    <m:oMath>
+                      <m:sSub>
+                        <m:sSubPr>
+                          <m:ctrlPr>
+                            <a:rPr lang="en-US" sz="1275" dirty="0">
+                              <a:solidFill>
+                                <a:srgbClr val="FFFFFF"/>
+                              </a:solidFill>
+                              <a:latin typeface="Cambria Math"/>
+                            </a:rPr>
+                          </m:ctrlPr>
+                        </m:sSubPr>
+                        <m:e>
+                          <m:r>
+                            <a:rPr lang="en-US" sz="1275" dirty="0">
+                              <a:solidFill>
+                                <a:srgbClr val="FFFFFF"/>
+                              </a:solidFill>
+                              <a:latin typeface="Cambria Math"/>
+                            </a:rPr>
+                            <m:t>𝑟</m:t>
+                          </m:r>
+                        </m:e>
+                        <m:sub>
+                          <m:r>
+                            <a:rPr lang="en-US" sz="1275" dirty="0">
+                              <a:solidFill>
+                                <a:srgbClr val="FFFFFF"/>
+                              </a:solidFill>
+                              <a:latin typeface="Cambria Math"/>
+                            </a:rPr>
+                            <m:t>𝑡</m:t>
+                          </m:r>
+                          <m:r>
+                            <a:rPr lang="en-US" sz="1275" dirty="0">
+                              <a:solidFill>
+                                <a:srgbClr val="FFFFFF"/>
+                              </a:solidFill>
+                              <a:latin typeface="Cambria Math"/>
+                            </a:rPr>
+                            <m:t>+2</m:t>
+                          </m:r>
+                        </m:sub>
+                      </m:sSub>
+                    </m:oMath>
+                  </m:oMathPara>
                 </a14:m>
-                <a:endParaRPr lang="en-US" dirty="0" sz="1275">
+                <a:endParaRPr lang="en-US" sz="1275" dirty="0">
                   <a:solidFill>
                     <a:srgbClr val="FFFFFF"/>
                   </a:solidFill>
@@ -9382,10 +9618,10 @@
             </p:txBody>
           </p:sp>
         </mc:Choice>
-        <mc:Fallback>
+        <mc:Fallback xmlns="">
           <p:sp>
             <p:nvSpPr>
-              <p:cNvPr id="130" name="math:012" descr="AI_AUTOFIGURE_MATH_FALLBACK_ONLY_V1:eyJjb250ZW50X3J1bnMiOlt7ImNhbm9uaWNhbF9sYXRleCI6InJfe3QrMn0iLCJmb3JtdWxhX2lkIjoiRVEwMTIiLCJraW5kIjoibWF0aCIsImxhdGV4X3NoYTI1NiI6IjgyOTM1MTI4YTcxYzJiYWQ5ZGI1NTU3OGUwOWNiMmUwMjA4ODRjZDQyNDlmYmUwZTIyMTBmZGY5NThhYTFmZGYiLCJtb2RlIjoiaW5saW5lIiwib21tbF9zaGEyNTYiOiJmZDdjNmJjOTUyNjFhOGU1OTg0NmQ1ZGJjYTU0OGRlNTIyMzQ2NDllMTJkYjE5N2MxMTE4NTM1YjRhMDVkNWU0Iiwic2VtYW50aWNfb21tbF9wcm9maWxlIjoib2ZmaWNlLW1hdGgtc2VtYW50aWMtdjIiLCJzZW1hbnRpY19vbW1sX3NoYTI1NiI6ImE1MjM0OTZiOTI1NmNkODU1NDQxOTlhMzY0OGExMzY5YWJjYTI2YjdiYWIyYmI0YTM1YTI5NTM1YWQzNDI3ZTYifV0sImZvcm11bGFzIjpbeyJjYW5vbmljYWxfbGF0ZXgiOiJyX3t0KzJ9IiwiZm9ybXVsYV9pZCI6IkVRMDEyIiwibGF0ZXhfc2hhMjU2IjoiODI5MzUxMjhhNzFjMmJhZDlkYjU1NTc4ZTA5Y2IyZTAyMDg4NGNkNDI0OWZiZTBlMjIxMGZkZjk1OGFhMWZkZiIsIm1vZGUiOiJpbmxpbmUiLCJvbW1sX3NoYTI1NiI6ImZkN2M2YmM5NTI2MWE4ZTU5ODQ2ZDVkYmNhNTQ4ZGU1MjIzNDY0OWUxMmRiMTk3YzExMTg1MzViNGEwNWQ1ZTQiLCJzZW1hbnRpY19vbW1sX3Byb2ZpbGUiOiJvZmZpY2UtbWF0aC1zZW1hbnRpYy12MiIsInNlbWFudGljX29tbWxfc2hhMjU2IjoiYTUyMzQ5NmI5MjU2Y2Q4NTU0NDE5OWEzNjQ4YTEzNjlhYmNhMjZiN2JhYjJiYjRhMzVhMjk1MzVhZDM0MjdlNiJ9XSwia2luZCI6Im5hdGl2ZV9vZmZpY2VfbWF0aCIsInBsYWNlaG9sZGVyX25hbWUiOiJtYXRoOjAxMiIsInNjaGVtYV92ZXJzaW9uIjoiMS4wIn0="/>
+              <p:cNvPr id="128" name="math:012" descr="AI_AUTOFIGURE_MATH_FALLBACK_ONLY_V1:eyJjb250ZW50X3J1bnMiOlt7ImNhbm9uaWNhbF9sYXRleCI6InJfe3QrMn0iLCJmb3JtdWxhX2lkIjoiRVEwMTIiLCJraW5kIjoibWF0aCIsImxhdGV4X3NoYTI1NiI6IjgyOTM1MTI4YTcxYzJiYWQ5ZGI1NTU3OGUwOWNiMmUwMjA4ODRjZDQyNDlmYmUwZTIyMTBmZGY5NThhYTFmZGYiLCJtb2RlIjoiaW5saW5lIiwib21tbF9zaGEyNTYiOiJmZDdjNmJjOTUyNjFhOGU1OTg0NmQ1ZGJjYTU0OGRlNTIyMzQ2NDllMTJkYjE5N2MxMTE4NTM1YjRhMDVkNWU0Iiwic2VtYW50aWNfb21tbF9wcm9maWxlIjoib2ZmaWNlLW1hdGgtc2VtYW50aWMtdjIiLCJzZW1hbnRpY19vbW1sX3NoYTI1NiI6ImE1MjM0OTZiOTI1NmNkODU1NDQxOTlhMzY0OGExMzY5YWJjYTI2YjdiYWIyYmI0YTM1YTI5NTM1YWQzNDI3ZTYifV0sImZvcm11bGFzIjpbeyJjYW5vbmljYWxfbGF0ZXgiOiJyX3t0KzJ9IiwiZm9ybXVsYV9pZCI6IkVRMDEyIiwibGF0ZXhfc2hhMjU2IjoiODI5MzUxMjhhNzFjMmJhZDlkYjU1NTc4ZTA5Y2IyZTAyMDg4NGNkNDI0OWZiZTBlMjIxMGZkZjk1OGFhMWZkZiIsIm1vZGUiOiJpbmxpbmUiLCJvbW1sX3NoYTI1NiI6ImZkN2M2YmM5NTI2MWE4ZTU5ODQ2ZDVkYmNhNTQ4ZGU1MjIzNDY0OWUxMmRiMTk3YzExMTg1MzViNGEwNWQ1ZTQiLCJzZW1hbnRpY19vbW1sX3Byb2ZpbGUiOiJvZmZpY2UtbWF0aC1zZW1hbnRpYy12MiIsInNlbWFudGljX29tbWxfc2hhMjU2IjoiYTUyMzQ5NmI5MjU2Y2Q4NTU0NDE5OWEzNjQ4YTEzNjlhYmNhMjZiN2JhYjJiYjRhMzVhMjk1MzVhZDM0MjdlNiJ9XSwia2luZCI6Im5hdGl2ZV9vZmZpY2VfbWF0aCIsInBsYWNlaG9sZGVyX25hbWUiOiJtYXRoOjAxMiIsInNjaGVtYV92ZXJzaW9uIjoiMS4wIn0="/>
               <p:cNvSpPr txBox="1"/>
               <p:nvPr/>
             </p:nvSpPr>
@@ -9427,7 +9663,7 @@
       </mc:AlternateContent>
       <p:sp>
         <p:nvSpPr>
-          <p:cNvPr id="131" name="af-svg-path-0012-freeform-01"/>
+          <p:cNvPr id="129" name="af-svg-path-0007-freeform-01" descr="{&quot;autofigure_element_id&quot;:&quot;svg-path-0007&quot;}"/>
           <p:cNvSpPr/>
           <p:nvPr/>
         </p:nvSpPr>
@@ -9467,16 +9703,20 @@
             <a:solidFill>
               <a:srgbClr val="786F3B"/>
             </a:solidFill>
+            <a:round/>
           </a:ln>
         </p:spPr>
         <p:txBody>
           <a:bodyPr/>
-          <a:p/>
-        </p:txBody>
-      </p:sp>
-      <p:sp>
-        <p:nvSpPr>
-          <p:cNvPr id="132" name="af-svg-path-0013-freeform-01"/>
+          <a:lstStyle/>
+          <a:p>
+            <a:endParaRPr/>
+          </a:p>
+        </p:txBody>
+      </p:sp>
+      <p:sp>
+        <p:nvSpPr>
+          <p:cNvPr id="130" name="af-svg-path-0008-freeform-01" descr="{&quot;autofigure_element_id&quot;:&quot;svg-path-0008&quot;}"/>
           <p:cNvSpPr/>
           <p:nvPr/>
         </p:nvSpPr>
@@ -9514,16 +9754,20 @@
             <a:solidFill>
               <a:srgbClr val="786F3B"/>
             </a:solidFill>
+            <a:round/>
           </a:ln>
         </p:spPr>
         <p:txBody>
           <a:bodyPr/>
-          <a:p/>
-        </p:txBody>
-      </p:sp>
-      <p:sp>
-        <p:nvSpPr>
-          <p:cNvPr id="133" name="af-svg-path-0014-freeform-01"/>
+          <a:lstStyle/>
+          <a:p>
+            <a:endParaRPr/>
+          </a:p>
+        </p:txBody>
+      </p:sp>
+      <p:sp>
+        <p:nvSpPr>
+          <p:cNvPr id="131" name="af-svg-path-0009-freeform-01" descr="{&quot;autofigure_element_id&quot;:&quot;svg-path-0009&quot;}"/>
           <p:cNvSpPr/>
           <p:nvPr/>
         </p:nvSpPr>
@@ -9561,16 +9805,20 @@
             <a:solidFill>
               <a:srgbClr val="786F3B"/>
             </a:solidFill>
+            <a:round/>
           </a:ln>
         </p:spPr>
         <p:txBody>
           <a:bodyPr/>
-          <a:p/>
+          <a:lstStyle/>
+          <a:p>
+            <a:endParaRPr/>
+          </a:p>
         </p:txBody>
       </p:sp>
       <p:cxnSp>
         <p:nvCxnSpPr>
-          <p:cNvPr id="134" name="af-svg-line-0015-line-01"/>
+          <p:cNvPr id="132" name="af-svg-line-0018-line-01" descr="{&quot;autofigure_element_id&quot;:&quot;svg-line-0018&quot;}"/>
           <p:cNvCxnSpPr/>
           <p:nvPr/>
         </p:nvCxnSpPr>
@@ -9586,6 +9834,7 @@
             <a:solidFill>
               <a:srgbClr val="786F3B"/>
             </a:solidFill>
+            <a:miter/>
           </a:ln>
           <a:effectLst/>
         </p:spPr>
@@ -9606,7 +9855,7 @@
       </p:cxnSp>
       <p:cxnSp>
         <p:nvCxnSpPr>
-          <p:cNvPr id="135" name="af-svg-line-0016-line-01"/>
+          <p:cNvPr id="133" name="af-svg-line-0019-line-01" descr="{&quot;autofigure_element_id&quot;:&quot;svg-line-0019&quot;}"/>
           <p:cNvCxnSpPr/>
           <p:nvPr/>
         </p:nvCxnSpPr>
@@ -9622,6 +9871,7 @@
             <a:solidFill>
               <a:srgbClr val="786F3B"/>
             </a:solidFill>
+            <a:miter/>
           </a:ln>
           <a:effectLst/>
         </p:spPr>
@@ -9642,7 +9892,7 @@
       </p:cxnSp>
       <p:sp>
         <p:nvSpPr>
-          <p:cNvPr id="136" name="af-svg-text-0047-text-01"/>
+          <p:cNvPr id="134" name="af-svg-text-0047-text-01" descr="{&quot;autofigure_element_id&quot;:&quot;svg-text-0047&quot;}"/>
           <p:cNvSpPr txBox="1"/>
           <p:nvPr/>
         </p:nvSpPr>
@@ -9658,7 +9908,7 @@
           <a:effectLst/>
         </p:spPr>
         <p:txBody>
-          <a:bodyPr wrap="none" anchor="t" lIns="0" rIns="0" tIns="0" bIns="0">
+          <a:bodyPr wrap="none" lIns="0" tIns="0" rIns="0" bIns="0" anchor="t">
             <a:spAutoFit/>
           </a:bodyPr>
           <a:lstStyle/>
@@ -9678,7 +9928,7 @@
       </p:sp>
       <p:sp>
         <p:nvSpPr>
-          <p:cNvPr id="137" name="af-svg-text-0048-text-01"/>
+          <p:cNvPr id="135" name="af-svg-text-0048-text-01" descr="{&quot;autofigure_element_id&quot;:&quot;svg-text-0048&quot;}"/>
           <p:cNvSpPr txBox="1"/>
           <p:nvPr/>
         </p:nvSpPr>
@@ -9694,7 +9944,7 @@
           <a:effectLst/>
         </p:spPr>
         <p:txBody>
-          <a:bodyPr wrap="none" anchor="t" lIns="0" rIns="0" tIns="0" bIns="0">
+          <a:bodyPr wrap="none" lIns="0" tIns="0" rIns="0" bIns="0" anchor="t">
             <a:spAutoFit/>
           </a:bodyPr>
           <a:lstStyle/>
@@ -9714,7 +9964,7 @@
       </p:sp>
       <p:sp>
         <p:nvSpPr>
-          <p:cNvPr id="138" name="af-rollout-panel-rect-01"/>
+          <p:cNvPr id="136" name="af-rollout-panel-rect-01" descr="{&quot;autofigure_element_id&quot;:&quot;rollout-panel&quot;}"/>
           <p:cNvSpPr/>
           <p:nvPr/>
         </p:nvSpPr>
@@ -9735,6 +9985,7 @@
             <a:solidFill>
               <a:srgbClr val="223A63"/>
             </a:solidFill>
+            <a:miter/>
           </a:ln>
           <a:effectLst/>
         </p:spPr>
@@ -9757,12 +10008,89 @@
           <a:lstStyle/>
           <a:p>
             <a:pPr algn="ctr"/>
-          </a:p>
-        </p:txBody>
-      </p:sp>
-      <p:sp>
-        <p:nvSpPr>
-          <p:cNvPr id="139" name="af-svg-rect-0039-rect-01"/>
+            <a:endParaRPr/>
+          </a:p>
+        </p:txBody>
+      </p:sp>
+      <p:cxnSp>
+        <p:nvCxnSpPr>
+          <p:cNvPr id="137" name="af-top-mixture-to-rollout-connector-01" descr="{&quot;arrow_spec_sha256&quot;:&quot;5881f48cdd110cc4b80e99cbb45140ae190a6861364a49828dc946d53d691d11&quot;,&quot;autofigure_element_id&quot;:&quot;top-mixture-to-rollout&quot;}"/>
+          <p:cNvCxnSpPr/>
+          <p:nvPr/>
+        </p:nvCxnSpPr>
+        <p:spPr>
+          <a:xfrm>
+            <a:off x="8982075" y="2581275"/>
+            <a:ext cx="628650" cy="409575"/>
+          </a:xfrm>
+          <a:prstGeom prst="line">
+            <a:avLst/>
+          </a:prstGeom>
+          <a:ln w="17145" cap="rnd">
+            <a:solidFill>
+              <a:srgbClr val="7E6000"/>
+            </a:solidFill>
+            <a:round/>
+            <a:tailEnd type="triangle" w="lg" len="lg"/>
+          </a:ln>
+          <a:effectLst/>
+        </p:spPr>
+        <p:style>
+          <a:lnRef idx="2">
+            <a:schemeClr val="accent1"/>
+          </a:lnRef>
+          <a:fillRef idx="0">
+            <a:schemeClr val="accent1"/>
+          </a:fillRef>
+          <a:effectRef idx="1">
+            <a:schemeClr val="accent1"/>
+          </a:effectRef>
+          <a:fontRef idx="minor">
+            <a:schemeClr val="tx1"/>
+          </a:fontRef>
+        </p:style>
+      </p:cxnSp>
+      <p:cxnSp>
+        <p:nvCxnSpPr>
+          <p:cNvPr id="138" name="af-bottom-mixture-to-rollout-connector-01" descr="{&quot;arrow_spec_sha256&quot;:&quot;e536e05fecf30ac93a485a08261e29839530807578421d4202cb7658cbbdb9c1&quot;,&quot;autofigure_element_id&quot;:&quot;bottom-mixture-to-rollout&quot;}"/>
+          <p:cNvCxnSpPr/>
+          <p:nvPr/>
+        </p:nvCxnSpPr>
+        <p:spPr>
+          <a:xfrm flipV="1">
+            <a:off x="8982075" y="3105150"/>
+            <a:ext cx="628650" cy="847725"/>
+          </a:xfrm>
+          <a:prstGeom prst="line">
+            <a:avLst/>
+          </a:prstGeom>
+          <a:ln w="17145" cap="rnd">
+            <a:solidFill>
+              <a:srgbClr val="7E6000"/>
+            </a:solidFill>
+            <a:round/>
+            <a:tailEnd type="triangle" w="lg" len="lg"/>
+          </a:ln>
+          <a:effectLst/>
+        </p:spPr>
+        <p:style>
+          <a:lnRef idx="2">
+            <a:schemeClr val="accent1"/>
+          </a:lnRef>
+          <a:fillRef idx="0">
+            <a:schemeClr val="accent1"/>
+          </a:fillRef>
+          <a:effectRef idx="1">
+            <a:schemeClr val="accent1"/>
+          </a:effectRef>
+          <a:fontRef idx="minor">
+            <a:schemeClr val="tx1"/>
+          </a:fontRef>
+        </p:style>
+      </p:cxnSp>
+      <p:sp>
+        <p:nvSpPr>
+          <p:cNvPr id="139" name="af-rollout-z0-rect-01" descr="{&quot;autofigure_element_id&quot;:&quot;rollout-z0&quot;}"/>
           <p:cNvSpPr/>
           <p:nvPr/>
         </p:nvSpPr>
@@ -9803,11 +10131,12 @@
           <a:lstStyle/>
           <a:p>
             <a:pPr algn="ctr"/>
-          </a:p>
-        </p:txBody>
-      </p:sp>
-      <mc:AlternateContent xmlns:mc="http://schemas.openxmlformats.org/markup-compatibility/2006">
-        <mc:Choice xmlns:a14="http://schemas.microsoft.com/office/drawing/2010/main" Requires="a14">
+            <a:endParaRPr/>
+          </a:p>
+        </p:txBody>
+      </p:sp>
+      <mc:AlternateContent xmlns:mc="http://schemas.openxmlformats.org/markup-compatibility/2006" xmlns:a14="http://schemas.microsoft.com/office/drawing/2010/main">
+        <mc:Choice Requires="a14">
           <p:sp>
             <p:nvSpPr>
               <p:cNvPr id="140" name="math:013" descr="AI_AUTOFIGURE_NATIVE_MATH_V1:eyJjb250ZW50X3J1bnMiOlt7ImNhbm9uaWNhbF9sYXRleCI6Inpfe3R9IiwiZm9ybXVsYV9pZCI6IkVRMDEzIiwia2luZCI6Im1hdGgiLCJsYXRleF9zaGEyNTYiOiI1MTFhZDkzYjNmYWU5ZDczZDU2MzY1NmZlYjNiZTY5M2Y0MjBjM2FkNDNmNjBkY2QzNWRiNjMxYWIwZTUwY2EzIiwibW9kZSI6ImlubGluZSIsIm9tbWxfc2hhMjU2IjoiOWNjMjA3NmY3N2U5ZDBlODdiOWE5Y2ZjYWFmZmRjNTBiNzU4ZDZiYmM1MTBjZWY4ZjNiYTU3NDhmODUyMmM1ZSIsInNlbWFudGljX29tbWxfcHJvZmlsZSI6Im9mZmljZS1tYXRoLXNlbWFudGljLXYyIiwic2VtYW50aWNfb21tbF9zaGEyNTYiOiI3MGQyYWI5NmM3NjkwMTQ0MjFhOGZjMTk5ZjQ0MzE0YjFhYWNlZjVkN2RhZGNiZjU2ZDI3MzJjMWJhMjU0MzI4In1dLCJmb3JtdWxhcyI6W3siY2Fub25pY2FsX2xhdGV4Ijoiel97dH0iLCJmb3JtdWxhX2lkIjoiRVEwMTMiLCJsYXRleF9zaGEyNTYiOiI1MTFhZDkzYjNmYWU5ZDczZDU2MzY1NmZlYjNiZTY5M2Y0MjBjM2FkNDNmNjBkY2QzNWRiNjMxYWIwZTUwY2EzIiwibW9kZSI6ImlubGluZSIsIm9tbWxfc2hhMjU2IjoiOWNjMjA3NmY3N2U5ZDBlODdiOWE5Y2ZjYWFmZmRjNTBiNzU4ZDZiYmM1MTBjZWY4ZjNiYTU3NDhmODUyMmM1ZSIsInNlbWFudGljX29tbWxfcHJvZmlsZSI6Im9mZmljZS1tYXRoLXNlbWFudGljLXYyIiwic2VtYW50aWNfb21tbF9zaGEyNTYiOiI3MGQyYWI5NmM3NjkwMTQ0MjFhOGZjMTk5ZjQ0MzE0YjFhYWNlZjVkN2RhZGNiZjU2ZDI3MzJjMWJhMjU0MzI4In1dLCJraW5kIjoibmF0aXZlX29mZmljZV9tYXRoIiwicGxhY2Vob2xkZXJfbmFtZSI6Im1hdGg6MDEzIiwic2NoZW1hX3ZlcnNpb24iOiIxLjAifQ=="/>
@@ -9826,41 +10155,53 @@
               <a:effectLst/>
             </p:spPr>
             <p:txBody>
-              <a:bodyPr wrap="none" anchor="t" lIns="0" rIns="0" tIns="0" bIns="0">
+              <a:bodyPr wrap="none" lIns="0" tIns="0" rIns="0" bIns="0" anchor="t">
                 <a:spAutoFit/>
               </a:bodyPr>
               <a:lstStyle/>
               <a:p>
                 <a:pPr algn="ctr"/>
                 <a14:m>
-                  <m:oMath xmlns:m="http://schemas.openxmlformats.org/officeDocument/2006/math">
-                    <m:sSub>
-                      <m:e>
-                        <m:r>
-                          <a:rPr lang="en-US" dirty="0" sz="1275">
-                            <a:solidFill>
-                              <a:srgbClr val="FFFFFF"/>
-                            </a:solidFill>
-                            <a:latin typeface="Cambria Math"/>
-                          </a:rPr>
-                          <m:t>z</m:t>
-                        </m:r>
-                      </m:e>
-                      <m:sub>
-                        <m:r>
-                          <a:rPr lang="en-US" dirty="0" sz="1275">
-                            <a:solidFill>
-                              <a:srgbClr val="FFFFFF"/>
-                            </a:solidFill>
-                            <a:latin typeface="Cambria Math"/>
-                          </a:rPr>
-                          <m:t>t</m:t>
-                        </m:r>
-                      </m:sub>
-                    </m:sSub>
-                  </m:oMath>
+                  <m:oMathPara xmlns:m="http://schemas.openxmlformats.org/officeDocument/2006/math">
+                    <m:oMath>
+                      <m:sSub>
+                        <m:sSubPr>
+                          <m:ctrlPr>
+                            <a:rPr lang="en-US" sz="1275" dirty="0">
+                              <a:solidFill>
+                                <a:srgbClr val="FFFFFF"/>
+                              </a:solidFill>
+                              <a:latin typeface="Cambria Math"/>
+                            </a:rPr>
+                          </m:ctrlPr>
+                        </m:sSubPr>
+                        <m:e>
+                          <m:r>
+                            <a:rPr lang="en-US" sz="1275" dirty="0">
+                              <a:solidFill>
+                                <a:srgbClr val="FFFFFF"/>
+                              </a:solidFill>
+                              <a:latin typeface="Cambria Math"/>
+                            </a:rPr>
+                            <m:t>𝑧</m:t>
+                          </m:r>
+                        </m:e>
+                        <m:sub>
+                          <m:r>
+                            <a:rPr lang="en-US" sz="1275" dirty="0">
+                              <a:solidFill>
+                                <a:srgbClr val="FFFFFF"/>
+                              </a:solidFill>
+                              <a:latin typeface="Cambria Math"/>
+                            </a:rPr>
+                            <m:t>𝑡</m:t>
+                          </m:r>
+                        </m:sub>
+                      </m:sSub>
+                    </m:oMath>
+                  </m:oMathPara>
                 </a14:m>
-                <a:endParaRPr lang="en-US" dirty="0" sz="1275">
+                <a:endParaRPr lang="en-US" sz="1275" dirty="0">
                   <a:solidFill>
                     <a:srgbClr val="FFFFFF"/>
                   </a:solidFill>
@@ -9870,7 +10211,7 @@
             </p:txBody>
           </p:sp>
         </mc:Choice>
-        <mc:Fallback>
+        <mc:Fallback xmlns="">
           <p:sp>
             <p:nvSpPr>
               <p:cNvPr id="140" name="math:013" descr="AI_AUTOFIGURE_MATH_FALLBACK_ONLY_V1:eyJjb250ZW50X3J1bnMiOlt7ImNhbm9uaWNhbF9sYXRleCI6Inpfe3R9IiwiZm9ybXVsYV9pZCI6IkVRMDEzIiwia2luZCI6Im1hdGgiLCJsYXRleF9zaGEyNTYiOiI1MTFhZDkzYjNmYWU5ZDczZDU2MzY1NmZlYjNiZTY5M2Y0MjBjM2FkNDNmNjBkY2QzNWRiNjMxYWIwZTUwY2EzIiwibW9kZSI6ImlubGluZSIsIm9tbWxfc2hhMjU2IjoiOWNjMjA3NmY3N2U5ZDBlODdiOWE5Y2ZjYWFmZmRjNTBiNzU4ZDZiYmM1MTBjZWY4ZjNiYTU3NDhmODUyMmM1ZSIsInNlbWFudGljX29tbWxfcHJvZmlsZSI6Im9mZmljZS1tYXRoLXNlbWFudGljLXYyIiwic2VtYW50aWNfb21tbF9zaGEyNTYiOiI3MGQyYWI5NmM3NjkwMTQ0MjFhOGZjMTk5ZjQ0MzE0YjFhYWNlZjVkN2RhZGNiZjU2ZDI3MzJjMWJhMjU0MzI4In1dLCJmb3JtdWxhcyI6W3siY2Fub25pY2FsX2xhdGV4Ijoiel97dH0iLCJmb3JtdWxhX2lkIjoiRVEwMTMiLCJsYXRleF9zaGEyNTYiOiI1MTFhZDkzYjNmYWU5ZDczZDU2MzY1NmZlYjNiZTY5M2Y0MjBjM2FkNDNmNjBkY2QzNWRiNjMxYWIwZTUwY2EzIiwibW9kZSI6ImlubGluZSIsIm9tbWxfc2hhMjU2IjoiOWNjMjA3NmY3N2U5ZDBlODdiOWE5Y2ZjYWFmZmRjNTBiNzU4ZDZiYmM1MTBjZWY4ZjNiYTU3NDhmODUyMmM1ZSIsInNlbWFudGljX29tbWxfcHJvZmlsZSI6Im9mZmljZS1tYXRoLXNlbWFudGljLXYyIiwic2VtYW50aWNfb21tbF9zaGEyNTYiOiI3MGQyYWI5NmM3NjkwMTQ0MjFhOGZjMTk5ZjQ0MzE0YjFhYWNlZjVkN2RhZGNiZjU2ZDI3MzJjMWJhMjU0MzI4In1dLCJraW5kIjoibmF0aXZlX29mZmljZV9tYXRoIiwicGxhY2Vob2xkZXJfbmFtZSI6Im1hdGg6MDEzIiwic2NoZW1hX3ZlcnNpb24iOiIxLjAifQ=="/>
@@ -9915,7 +10256,7 @@
       </mc:AlternateContent>
       <p:sp>
         <p:nvSpPr>
-          <p:cNvPr id="141" name="af-svg-rect-0040-rect-01"/>
+          <p:cNvPr id="141" name="af-svg-rect-0040-rect-01" descr="{&quot;autofigure_element_id&quot;:&quot;svg-rect-0040&quot;}"/>
           <p:cNvSpPr/>
           <p:nvPr/>
         </p:nvSpPr>
@@ -9956,11 +10297,12 @@
           <a:lstStyle/>
           <a:p>
             <a:pPr algn="ctr"/>
-          </a:p>
-        </p:txBody>
-      </p:sp>
-      <mc:AlternateContent xmlns:mc="http://schemas.openxmlformats.org/markup-compatibility/2006">
-        <mc:Choice xmlns:a14="http://schemas.microsoft.com/office/drawing/2010/main" Requires="a14">
+            <a:endParaRPr/>
+          </a:p>
+        </p:txBody>
+      </p:sp>
+      <mc:AlternateContent xmlns:mc="http://schemas.openxmlformats.org/markup-compatibility/2006" xmlns:a14="http://schemas.microsoft.com/office/drawing/2010/main">
+        <mc:Choice Requires="a14">
           <p:sp>
             <p:nvSpPr>
               <p:cNvPr id="142" name="math:014" descr="AI_AUTOFIGURE_NATIVE_MATH_V1:eyJjb250ZW50X3J1bnMiOlt7ImNhbm9uaWNhbF9sYXRleCI6Inpfe3QrMX0iLCJmb3JtdWxhX2lkIjoiRVEwMTQiLCJraW5kIjoibWF0aCIsImxhdGV4X3NoYTI1NiI6IjhlNWQwMDAwYWJiOWNmMDc3M2U3OGZiNTMwMjc1MjMwYjhlZGZiOGNkOTYyYjMyNjM1ZGRlN2NjMjg0NjkwOTEiLCJtb2RlIjoiaW5saW5lIiwib21tbF9zaGEyNTYiOiJhOTVmOTI4NDdlYzgwMmEyMzkyZDQ5YWYwYTZlMTU3NzMxZTdkYzdjMjM4YzEwMGI2ZTlhZDY2NDVhMjhmZTQyIiwic2VtYW50aWNfb21tbF9wcm9maWxlIjoib2ZmaWNlLW1hdGgtc2VtYW50aWMtdjIiLCJzZW1hbnRpY19vbW1sX3NoYTI1NiI6IjY5OTJiMGQ0ODlkYWEyM2Y3ZWViMjgxMjc3NjIyNGU5NDRhNjc1MjQxNGNjYmQ5ZTIzYjQ0OTMyODM3ZjMzZTYifV0sImZvcm11bGFzIjpbeyJjYW5vbmljYWxfbGF0ZXgiOiJ6X3t0KzF9IiwiZm9ybXVsYV9pZCI6IkVRMDE0IiwibGF0ZXhfc2hhMjU2IjoiOGU1ZDAwMDBhYmI5Y2YwNzczZTc4ZmI1MzAyNzUyMzBiOGVkZmI4Y2Q5NjJiMzI2MzVkZGU3Y2MyODQ2OTA5MSIsIm1vZGUiOiJpbmxpbmUiLCJvbW1sX3NoYTI1NiI6ImE5NWY5Mjg0N2VjODAyYTIzOTJkNDlhZjBhNmUxNTc3MzFlN2RjN2MyMzhjMTAwYjZlOWFkNjY0NWEyOGZlNDIiLCJzZW1hbnRpY19vbW1sX3Byb2ZpbGUiOiJvZmZpY2UtbWF0aC1zZW1hbnRpYy12MiIsInNlbWFudGljX29tbWxfc2hhMjU2IjoiNjk5MmIwZDQ4OWRhYTIzZjdlZWIyODEyNzc2MjI0ZTk0NGE2NzUyNDE0Y2NiZDllMjNiNDQ5MzI4MzdmMzNlNiJ9XSwia2luZCI6Im5hdGl2ZV9vZmZpY2VfbWF0aCIsInBsYWNlaG9sZGVyX25hbWUiOiJtYXRoOjAxNCIsInNjaGVtYV92ZXJzaW9uIjoiMS4wIn0="/>
@@ -9979,41 +10321,62 @@
               <a:effectLst/>
             </p:spPr>
             <p:txBody>
-              <a:bodyPr wrap="none" anchor="t" lIns="0" rIns="0" tIns="0" bIns="0">
+              <a:bodyPr wrap="none" lIns="0" tIns="0" rIns="0" bIns="0" anchor="t">
                 <a:spAutoFit/>
               </a:bodyPr>
               <a:lstStyle/>
               <a:p>
                 <a:pPr algn="ctr"/>
                 <a14:m>
-                  <m:oMath xmlns:m="http://schemas.openxmlformats.org/officeDocument/2006/math">
-                    <m:sSub>
-                      <m:e>
-                        <m:r>
-                          <a:rPr lang="en-US" dirty="0" sz="1275">
-                            <a:solidFill>
-                              <a:srgbClr val="FFFFFF"/>
-                            </a:solidFill>
-                            <a:latin typeface="Cambria Math"/>
-                          </a:rPr>
-                          <m:t>z</m:t>
-                        </m:r>
-                      </m:e>
-                      <m:sub>
-                        <m:r>
-                          <a:rPr lang="en-US" dirty="0" sz="1275">
-                            <a:solidFill>
-                              <a:srgbClr val="FFFFFF"/>
-                            </a:solidFill>
-                            <a:latin typeface="Cambria Math"/>
-                          </a:rPr>
-                          <m:t>t+1</m:t>
-                        </m:r>
-                      </m:sub>
-                    </m:sSub>
-                  </m:oMath>
+                  <m:oMathPara xmlns:m="http://schemas.openxmlformats.org/officeDocument/2006/math">
+                    <m:oMath>
+                      <m:sSub>
+                        <m:sSubPr>
+                          <m:ctrlPr>
+                            <a:rPr lang="en-US" sz="1275" dirty="0">
+                              <a:solidFill>
+                                <a:srgbClr val="FFFFFF"/>
+                              </a:solidFill>
+                              <a:latin typeface="Cambria Math"/>
+                            </a:rPr>
+                          </m:ctrlPr>
+                        </m:sSubPr>
+                        <m:e>
+                          <m:r>
+                            <a:rPr lang="en-US" sz="1275" dirty="0">
+                              <a:solidFill>
+                                <a:srgbClr val="FFFFFF"/>
+                              </a:solidFill>
+                              <a:latin typeface="Cambria Math"/>
+                            </a:rPr>
+                            <m:t>𝑧</m:t>
+                          </m:r>
+                        </m:e>
+                        <m:sub>
+                          <m:r>
+                            <a:rPr lang="en-US" sz="1275" dirty="0">
+                              <a:solidFill>
+                                <a:srgbClr val="FFFFFF"/>
+                              </a:solidFill>
+                              <a:latin typeface="Cambria Math"/>
+                            </a:rPr>
+                            <m:t>𝑡</m:t>
+                          </m:r>
+                          <m:r>
+                            <a:rPr lang="en-US" sz="1275" dirty="0">
+                              <a:solidFill>
+                                <a:srgbClr val="FFFFFF"/>
+                              </a:solidFill>
+                              <a:latin typeface="Cambria Math"/>
+                            </a:rPr>
+                            <m:t>+1</m:t>
+                          </m:r>
+                        </m:sub>
+                      </m:sSub>
+                    </m:oMath>
+                  </m:oMathPara>
                 </a14:m>
-                <a:endParaRPr lang="en-US" dirty="0" sz="1275">
+                <a:endParaRPr lang="en-US" sz="1275" dirty="0">
                   <a:solidFill>
                     <a:srgbClr val="FFFFFF"/>
                   </a:solidFill>
@@ -10023,7 +10386,7 @@
             </p:txBody>
           </p:sp>
         </mc:Choice>
-        <mc:Fallback>
+        <mc:Fallback xmlns="">
           <p:sp>
             <p:nvSpPr>
               <p:cNvPr id="142" name="math:014" descr="AI_AUTOFIGURE_MATH_FALLBACK_ONLY_V1:eyJjb250ZW50X3J1bnMiOlt7ImNhbm9uaWNhbF9sYXRleCI6Inpfe3QrMX0iLCJmb3JtdWxhX2lkIjoiRVEwMTQiLCJraW5kIjoibWF0aCIsImxhdGV4X3NoYTI1NiI6IjhlNWQwMDAwYWJiOWNmMDc3M2U3OGZiNTMwMjc1MjMwYjhlZGZiOGNkOTYyYjMyNjM1ZGRlN2NjMjg0NjkwOTEiLCJtb2RlIjoiaW5saW5lIiwib21tbF9zaGEyNTYiOiJhOTVmOTI4NDdlYzgwMmEyMzkyZDQ5YWYwYTZlMTU3NzMxZTdkYzdjMjM4YzEwMGI2ZTlhZDY2NDVhMjhmZTQyIiwic2VtYW50aWNfb21tbF9wcm9maWxlIjoib2ZmaWNlLW1hdGgtc2VtYW50aWMtdjIiLCJzZW1hbnRpY19vbW1sX3NoYTI1NiI6IjY5OTJiMGQ0ODlkYWEyM2Y3ZWViMjgxMjc3NjIyNGU5NDRhNjc1MjQxNGNjYmQ5ZTIzYjQ0OTMyODM3ZjMzZTYifV0sImZvcm11bGFzIjpbeyJjYW5vbmljYWxfbGF0ZXgiOiJ6X3t0KzF9IiwiZm9ybXVsYV9pZCI6IkVRMDE0IiwibGF0ZXhfc2hhMjU2IjoiOGU1ZDAwMDBhYmI5Y2YwNzczZTc4ZmI1MzAyNzUyMzBiOGVkZmI4Y2Q5NjJiMzI2MzVkZGU3Y2MyODQ2OTA5MSIsIm1vZGUiOiJpbmxpbmUiLCJvbW1sX3NoYTI1NiI6ImE5NWY5Mjg0N2VjODAyYTIzOTJkNDlhZjBhNmUxNTc3MzFlN2RjN2MyMzhjMTAwYjZlOWFkNjY0NWEyOGZlNDIiLCJzZW1hbnRpY19vbW1sX3Byb2ZpbGUiOiJvZmZpY2UtbWF0aC1zZW1hbnRpYy12MiIsInNlbWFudGljX29tbWxfc2hhMjU2IjoiNjk5MmIwZDQ4OWRhYTIzZjdlZWIyODEyNzc2MjI0ZTk0NGE2NzUyNDE0Y2NiZDllMjNiNDQ5MzI4MzdmMzNlNiJ9XSwia2luZCI6Im5hdGl2ZV9vZmZpY2VfbWF0aCIsInBsYWNlaG9sZGVyX25hbWUiOiJtYXRoOjAxNCIsInNjaGVtYV92ZXJzaW9uIjoiMS4wIn0="/>
@@ -10068,7 +10431,7 @@
       </mc:AlternateContent>
       <p:sp>
         <p:nvSpPr>
-          <p:cNvPr id="143" name="af-svg-rect-0041-rect-01"/>
+          <p:cNvPr id="143" name="af-svg-rect-0041-rect-01" descr="{&quot;autofigure_element_id&quot;:&quot;svg-rect-0041&quot;}"/>
           <p:cNvSpPr/>
           <p:nvPr/>
         </p:nvSpPr>
@@ -10109,11 +10472,12 @@
           <a:lstStyle/>
           <a:p>
             <a:pPr algn="ctr"/>
-          </a:p>
-        </p:txBody>
-      </p:sp>
-      <mc:AlternateContent xmlns:mc="http://schemas.openxmlformats.org/markup-compatibility/2006">
-        <mc:Choice xmlns:a14="http://schemas.microsoft.com/office/drawing/2010/main" Requires="a14">
+            <a:endParaRPr/>
+          </a:p>
+        </p:txBody>
+      </p:sp>
+      <mc:AlternateContent xmlns:mc="http://schemas.openxmlformats.org/markup-compatibility/2006" xmlns:a14="http://schemas.microsoft.com/office/drawing/2010/main">
+        <mc:Choice Requires="a14">
           <p:sp>
             <p:nvSpPr>
               <p:cNvPr id="144" name="math:015" descr="AI_AUTOFIGURE_NATIVE_MATH_V1:eyJjb250ZW50X3J1bnMiOlt7ImNhbm9uaWNhbF9sYXRleCI6Inpfe3QrMn0iLCJmb3JtdWxhX2lkIjoiRVEwMTUiLCJraW5kIjoibWF0aCIsImxhdGV4X3NoYTI1NiI6ImVkN2EzM2FmMDZiOTY1M2Y4Mzk2MmMyN2IyMGRkOWI4NDZjYjJlZTBlMDAzMDY1MGNhMTQ0MzZiMzg5NzA5M2EiLCJtb2RlIjoiaW5saW5lIiwib21tbF9zaGEyNTYiOiI2NDc0MzYwMTY3NzVjMGViNTYwYWIzNjYzNDJjNjUxZTVkY2ZhMzBkZWE3ZjU3NTcyNDMxZDEzNjNlYmI3ZDBkIiwic2VtYW50aWNfb21tbF9wcm9maWxlIjoib2ZmaWNlLW1hdGgtc2VtYW50aWMtdjIiLCJzZW1hbnRpY19vbW1sX3NoYTI1NiI6ImE1ZTA0ZjFhNzZiNzc4MjQ5NzY0MzBlYzg4MmNmOGNjMWE4ZTk5YmYzN2FlYTFlMWVlNWI3ODA5MmM4ZTQ4MTMifV0sImZvcm11bGFzIjpbeyJjYW5vbmljYWxfbGF0ZXgiOiJ6X3t0KzJ9IiwiZm9ybXVsYV9pZCI6IkVRMDE1IiwibGF0ZXhfc2hhMjU2IjoiZWQ3YTMzYWYwNmI5NjUzZjgzOTYyYzI3YjIwZGQ5Yjg0NmNiMmVlMGUwMDMwNjUwY2ExNDQzNmIzODk3MDkzYSIsIm1vZGUiOiJpbmxpbmUiLCJvbW1sX3NoYTI1NiI6IjY0NzQzNjAxNjc3NWMwZWI1NjBhYjM2NjM0MmM2NTFlNWRjZmEzMGRlYTdmNTc1NzI0MzFkMTM2M2ViYjdkMGQiLCJzZW1hbnRpY19vbW1sX3Byb2ZpbGUiOiJvZmZpY2UtbWF0aC1zZW1hbnRpYy12MiIsInNlbWFudGljX29tbWxfc2hhMjU2IjoiYTVlMDRmMWE3NmI3NzgyNDk3NjQzMGVjODgyY2Y4Y2MxYThlOTliZjM3YWVhMWUxZWU1Yjc4MDkyYzhlNDgxMyJ9XSwia2luZCI6Im5hdGl2ZV9vZmZpY2VfbWF0aCIsInBsYWNlaG9sZGVyX25hbWUiOiJtYXRoOjAxNSIsInNjaGVtYV92ZXJzaW9uIjoiMS4wIn0="/>
@@ -10132,41 +10496,62 @@
               <a:effectLst/>
             </p:spPr>
             <p:txBody>
-              <a:bodyPr wrap="none" anchor="t" lIns="0" rIns="0" tIns="0" bIns="0">
+              <a:bodyPr wrap="none" lIns="0" tIns="0" rIns="0" bIns="0" anchor="t">
                 <a:spAutoFit/>
               </a:bodyPr>
               <a:lstStyle/>
               <a:p>
                 <a:pPr algn="ctr"/>
                 <a14:m>
-                  <m:oMath xmlns:m="http://schemas.openxmlformats.org/officeDocument/2006/math">
-                    <m:sSub>
-                      <m:e>
-                        <m:r>
-                          <a:rPr lang="en-US" dirty="0" sz="1275">
-                            <a:solidFill>
-                              <a:srgbClr val="FFFFFF"/>
-                            </a:solidFill>
-                            <a:latin typeface="Cambria Math"/>
-                          </a:rPr>
-                          <m:t>z</m:t>
-                        </m:r>
-                      </m:e>
-                      <m:sub>
-                        <m:r>
-                          <a:rPr lang="en-US" dirty="0" sz="1275">
-                            <a:solidFill>
-                              <a:srgbClr val="FFFFFF"/>
-                            </a:solidFill>
-                            <a:latin typeface="Cambria Math"/>
-                          </a:rPr>
-                          <m:t>t+2</m:t>
-                        </m:r>
-                      </m:sub>
-                    </m:sSub>
-                  </m:oMath>
+                  <m:oMathPara xmlns:m="http://schemas.openxmlformats.org/officeDocument/2006/math">
+                    <m:oMath>
+                      <m:sSub>
+                        <m:sSubPr>
+                          <m:ctrlPr>
+                            <a:rPr lang="en-US" sz="1275" dirty="0">
+                              <a:solidFill>
+                                <a:srgbClr val="FFFFFF"/>
+                              </a:solidFill>
+                              <a:latin typeface="Cambria Math"/>
+                            </a:rPr>
+                          </m:ctrlPr>
+                        </m:sSubPr>
+                        <m:e>
+                          <m:r>
+                            <a:rPr lang="en-US" sz="1275" dirty="0">
+                              <a:solidFill>
+                                <a:srgbClr val="FFFFFF"/>
+                              </a:solidFill>
+                              <a:latin typeface="Cambria Math"/>
+                            </a:rPr>
+                            <m:t>𝑧</m:t>
+                          </m:r>
+                        </m:e>
+                        <m:sub>
+                          <m:r>
+                            <a:rPr lang="en-US" sz="1275" dirty="0">
+                              <a:solidFill>
+                                <a:srgbClr val="FFFFFF"/>
+                              </a:solidFill>
+                              <a:latin typeface="Cambria Math"/>
+                            </a:rPr>
+                            <m:t>𝑡</m:t>
+                          </m:r>
+                          <m:r>
+                            <a:rPr lang="en-US" sz="1275" dirty="0">
+                              <a:solidFill>
+                                <a:srgbClr val="FFFFFF"/>
+                              </a:solidFill>
+                              <a:latin typeface="Cambria Math"/>
+                            </a:rPr>
+                            <m:t>+2</m:t>
+                          </m:r>
+                        </m:sub>
+                      </m:sSub>
+                    </m:oMath>
+                  </m:oMathPara>
                 </a14:m>
-                <a:endParaRPr lang="en-US" dirty="0" sz="1275">
+                <a:endParaRPr lang="en-US" sz="1275" dirty="0">
                   <a:solidFill>
                     <a:srgbClr val="FFFFFF"/>
                   </a:solidFill>
@@ -10176,7 +10561,7 @@
             </p:txBody>
           </p:sp>
         </mc:Choice>
-        <mc:Fallback>
+        <mc:Fallback xmlns="">
           <p:sp>
             <p:nvSpPr>
               <p:cNvPr id="144" name="math:015" descr="AI_AUTOFIGURE_MATH_FALLBACK_ONLY_V1:eyJjb250ZW50X3J1bnMiOlt7ImNhbm9uaWNhbF9sYXRleCI6Inpfe3QrMn0iLCJmb3JtdWxhX2lkIjoiRVEwMTUiLCJraW5kIjoibWF0aCIsImxhdGV4X3NoYTI1NiI6ImVkN2EzM2FmMDZiOTY1M2Y4Mzk2MmMyN2IyMGRkOWI4NDZjYjJlZTBlMDAzMDY1MGNhMTQ0MzZiMzg5NzA5M2EiLCJtb2RlIjoiaW5saW5lIiwib21tbF9zaGEyNTYiOiI2NDc0MzYwMTY3NzVjMGViNTYwYWIzNjYzNDJjNjUxZTVkY2ZhMzBkZWE3ZjU3NTcyNDMxZDEzNjNlYmI3ZDBkIiwic2VtYW50aWNfb21tbF9wcm9maWxlIjoib2ZmaWNlLW1hdGgtc2VtYW50aWMtdjIiLCJzZW1hbnRpY19vbW1sX3NoYTI1NiI6ImE1ZTA0ZjFhNzZiNzc4MjQ5NzY0MzBlYzg4MmNmOGNjMWE4ZTk5YmYzN2FlYTFlMWVlNWI3ODA5MmM4ZTQ4MTMifV0sImZvcm11bGFzIjpbeyJjYW5vbmljYWxfbGF0ZXgiOiJ6X3t0KzJ9IiwiZm9ybXVsYV9pZCI6IkVRMDE1IiwibGF0ZXhfc2hhMjU2IjoiZWQ3YTMzYWYwNmI5NjUzZjgzOTYyYzI3YjIwZGQ5Yjg0NmNiMmVlMGUwMDMwNjUwY2ExNDQzNmIzODk3MDkzYSIsIm1vZGUiOiJpbmxpbmUiLCJvbW1sX3NoYTI1NiI6IjY0NzQzNjAxNjc3NWMwZWI1NjBhYjM2NjM0MmM2NTFlNWRjZmEzMGRlYTdmNTc1NzI0MzFkMTM2M2ViYjdkMGQiLCJzZW1hbnRpY19vbW1sX3Byb2ZpbGUiOiJvZmZpY2UtbWF0aC1zZW1hbnRpYy12MiIsInNlbWFudGljX29tbWxfc2hhMjU2IjoiYTVlMDRmMWE3NmI3NzgyNDk3NjQzMGVjODgyY2Y4Y2MxYThlOTliZjM3YWVhMWUxZWU1Yjc4MDkyYzhlNDgxMyJ9XSwia2luZCI6Im5hdGl2ZV9vZmZpY2VfbWF0aCIsInBsYWNlaG9sZGVyX25hbWUiOiJtYXRoOjAxNSIsInNjaGVtYV92ZXJzaW9uIjoiMS4wIn0="/>
@@ -10221,7 +10606,7 @@
       </mc:AlternateContent>
       <p:sp>
         <p:nvSpPr>
-          <p:cNvPr id="145" name="af-svg-rect-0042-rect-01"/>
+          <p:cNvPr id="145" name="af-svg-rect-0042-rect-01" descr="{&quot;autofigure_element_id&quot;:&quot;svg-rect-0042&quot;}"/>
           <p:cNvSpPr/>
           <p:nvPr/>
         </p:nvSpPr>
@@ -10262,11 +10647,12 @@
           <a:lstStyle/>
           <a:p>
             <a:pPr algn="ctr"/>
-          </a:p>
-        </p:txBody>
-      </p:sp>
-      <mc:AlternateContent xmlns:mc="http://schemas.openxmlformats.org/markup-compatibility/2006">
-        <mc:Choice xmlns:a14="http://schemas.microsoft.com/office/drawing/2010/main" Requires="a14">
+            <a:endParaRPr/>
+          </a:p>
+        </p:txBody>
+      </p:sp>
+      <mc:AlternateContent xmlns:mc="http://schemas.openxmlformats.org/markup-compatibility/2006" xmlns:a14="http://schemas.microsoft.com/office/drawing/2010/main">
+        <mc:Choice Requires="a14">
           <p:sp>
             <p:nvSpPr>
               <p:cNvPr id="146" name="math:016" descr="AI_AUTOFIGURE_NATIVE_MATH_V1:eyJjb250ZW50X3J1bnMiOlt7ImNhbm9uaWNhbF9sYXRleCI6Inpfe3QraH0iLCJmb3JtdWxhX2lkIjoiRVEwMTYiLCJraW5kIjoibWF0aCIsImxhdGV4X3NoYTI1NiI6IjA0ZWYyNTM3NWI3NzI4NDJjNzhlMjkxMGQwZWIyZTkzMTUwZTkzNmRlNGJlMjZiNDI4YTk5MGQwMWZiNDU2ZTAiLCJtb2RlIjoiaW5saW5lIiwib21tbF9zaGEyNTYiOiI2MTJkY2M3MzFjMWJmOWMzNDhmOWQxYmIwNWI5NDVjYzEwNzBlNDVkMzI0ZDJlODVlNDRiNTNkZTIwZjdmZjE0Iiwic2VtYW50aWNfb21tbF9wcm9maWxlIjoib2ZmaWNlLW1hdGgtc2VtYW50aWMtdjIiLCJzZW1hbnRpY19vbW1sX3NoYTI1NiI6IjgxYWM2YzQxYWZmNmFiZWM1NWJhOWFkMzRiNTdkM2U4MDZjYzY0YzUzMjEyYzRkODQ0ZDE5YzgyYjRiZjU0NDAifV0sImZvcm11bGFzIjpbeyJjYW5vbmljYWxfbGF0ZXgiOiJ6X3t0K2h9IiwiZm9ybXVsYV9pZCI6IkVRMDE2IiwibGF0ZXhfc2hhMjU2IjoiMDRlZjI1Mzc1Yjc3Mjg0MmM3OGUyOTEwZDBlYjJlOTMxNTBlOTM2ZGU0YmUyNmI0MjhhOTkwZDAxZmI0NTZlMCIsIm1vZGUiOiJpbmxpbmUiLCJvbW1sX3NoYTI1NiI6IjYxMmRjYzczMWMxYmY5YzM0OGY5ZDFiYjA1Yjk0NWNjMTA3MGU0NWQzMjRkMmU4NWU0NGI1M2RlMjBmN2ZmMTQiLCJzZW1hbnRpY19vbW1sX3Byb2ZpbGUiOiJvZmZpY2UtbWF0aC1zZW1hbnRpYy12MiIsInNlbWFudGljX29tbWxfc2hhMjU2IjoiODFhYzZjNDFhZmY2YWJlYzU1YmE5YWQzNGI1N2QzZTgwNmNjNjRjNTMyMTJjNGQ4NDRkMTljODJiNGJmNTQ0MCJ9XSwia2luZCI6Im5hdGl2ZV9vZmZpY2VfbWF0aCIsInBsYWNlaG9sZGVyX25hbWUiOiJtYXRoOjAxNiIsInNjaGVtYV92ZXJzaW9uIjoiMS4wIn0="/>
@@ -10285,41 +10671,71 @@
               <a:effectLst/>
             </p:spPr>
             <p:txBody>
-              <a:bodyPr wrap="none" anchor="t" lIns="0" rIns="0" tIns="0" bIns="0">
+              <a:bodyPr wrap="none" lIns="0" tIns="0" rIns="0" bIns="0" anchor="t">
                 <a:spAutoFit/>
               </a:bodyPr>
               <a:lstStyle/>
               <a:p>
                 <a:pPr algn="ctr"/>
                 <a14:m>
-                  <m:oMath xmlns:m="http://schemas.openxmlformats.org/officeDocument/2006/math">
-                    <m:sSub>
-                      <m:e>
-                        <m:r>
-                          <a:rPr lang="en-US" dirty="0" sz="1275">
-                            <a:solidFill>
-                              <a:srgbClr val="FFFFFF"/>
-                            </a:solidFill>
-                            <a:latin typeface="Cambria Math"/>
-                          </a:rPr>
-                          <m:t>z</m:t>
-                        </m:r>
-                      </m:e>
-                      <m:sub>
-                        <m:r>
-                          <a:rPr lang="en-US" dirty="0" sz="1275">
-                            <a:solidFill>
-                              <a:srgbClr val="FFFFFF"/>
-                            </a:solidFill>
-                            <a:latin typeface="Cambria Math"/>
-                          </a:rPr>
-                          <m:t>t+h</m:t>
-                        </m:r>
-                      </m:sub>
-                    </m:sSub>
-                  </m:oMath>
+                  <m:oMathPara xmlns:m="http://schemas.openxmlformats.org/officeDocument/2006/math">
+                    <m:oMath>
+                      <m:sSub>
+                        <m:sSubPr>
+                          <m:ctrlPr>
+                            <a:rPr lang="en-US" sz="1275" dirty="0">
+                              <a:solidFill>
+                                <a:srgbClr val="FFFFFF"/>
+                              </a:solidFill>
+                              <a:latin typeface="Cambria Math"/>
+                            </a:rPr>
+                          </m:ctrlPr>
+                        </m:sSubPr>
+                        <m:e>
+                          <m:r>
+                            <a:rPr lang="en-US" sz="1275" dirty="0">
+                              <a:solidFill>
+                                <a:srgbClr val="FFFFFF"/>
+                              </a:solidFill>
+                              <a:latin typeface="Cambria Math"/>
+                            </a:rPr>
+                            <m:t>𝑧</m:t>
+                          </m:r>
+                        </m:e>
+                        <m:sub>
+                          <m:r>
+                            <a:rPr lang="en-US" sz="1275" dirty="0">
+                              <a:solidFill>
+                                <a:srgbClr val="FFFFFF"/>
+                              </a:solidFill>
+                              <a:latin typeface="Cambria Math"/>
+                            </a:rPr>
+                            <m:t>𝑡</m:t>
+                          </m:r>
+                          <m:r>
+                            <a:rPr lang="en-US" sz="1275" dirty="0">
+                              <a:solidFill>
+                                <a:srgbClr val="FFFFFF"/>
+                              </a:solidFill>
+                              <a:latin typeface="Cambria Math"/>
+                            </a:rPr>
+                            <m:t>+</m:t>
+                          </m:r>
+                          <m:r>
+                            <a:rPr lang="en-US" sz="1275" dirty="0">
+                              <a:solidFill>
+                                <a:srgbClr val="FFFFFF"/>
+                              </a:solidFill>
+                              <a:latin typeface="Cambria Math"/>
+                            </a:rPr>
+                            <m:t>ℎ</m:t>
+                          </m:r>
+                        </m:sub>
+                      </m:sSub>
+                    </m:oMath>
+                  </m:oMathPara>
                 </a14:m>
-                <a:endParaRPr lang="en-US" dirty="0" sz="1275">
+                <a:endParaRPr lang="en-US" sz="1275" dirty="0">
                   <a:solidFill>
                     <a:srgbClr val="FFFFFF"/>
                   </a:solidFill>
@@ -10329,7 +10745,7 @@
             </p:txBody>
           </p:sp>
         </mc:Choice>
-        <mc:Fallback>
+        <mc:Fallback xmlns="">
           <p:sp>
             <p:nvSpPr>
               <p:cNvPr id="146" name="math:016" descr="AI_AUTOFIGURE_MATH_FALLBACK_ONLY_V1:eyJjb250ZW50X3J1bnMiOlt7ImNhbm9uaWNhbF9sYXRleCI6Inpfe3QraH0iLCJmb3JtdWxhX2lkIjoiRVEwMTYiLCJraW5kIjoibWF0aCIsImxhdGV4X3NoYTI1NiI6IjA0ZWYyNTM3NWI3NzI4NDJjNzhlMjkxMGQwZWIyZTkzMTUwZTkzNmRlNGJlMjZiNDI4YTk5MGQwMWZiNDU2ZTAiLCJtb2RlIjoiaW5saW5lIiwib21tbF9zaGEyNTYiOiI2MTJkY2M3MzFjMWJmOWMzNDhmOWQxYmIwNWI5NDVjYzEwNzBlNDVkMzI0ZDJlODVlNDRiNTNkZTIwZjdmZjE0Iiwic2VtYW50aWNfb21tbF9wcm9maWxlIjoib2ZmaWNlLW1hdGgtc2VtYW50aWMtdjIiLCJzZW1hbnRpY19vbW1sX3NoYTI1NiI6IjgxYWM2YzQxYWZmNmFiZWM1NWJhOWFkMzRiNTdkM2U4MDZjYzY0YzUzMjEyYzRkODQ0ZDE5YzgyYjRiZjU0NDAifV0sImZvcm11bGFzIjpbeyJjYW5vbmljYWxfbGF0ZXgiOiJ6X3t0K2h9IiwiZm9ybXVsYV9pZCI6IkVRMDE2IiwibGF0ZXhfc2hhMjU2IjoiMDRlZjI1Mzc1Yjc3Mjg0MmM3OGUyOTEwZDBlYjJlOTMxNTBlOTM2ZGU0YmUyNmI0MjhhOTkwZDAxZmI0NTZlMCIsIm1vZGUiOiJpbmxpbmUiLCJvbW1sX3NoYTI1NiI6IjYxMmRjYzczMWMxYmY5YzM0OGY5ZDFiYjA1Yjk0NWNjMTA3MGU0NWQzMjRkMmU4NWU0NGI1M2RlMjBmN2ZmMTQiLCJzZW1hbnRpY19vbW1sX3Byb2ZpbGUiOiJvZmZpY2UtbWF0aC1zZW1hbnRpYy12MiIsInNlbWFudGljX29tbWxfc2hhMjU2IjoiODFhYzZjNDFhZmY2YWJlYzU1YmE5YWQzNGI1N2QzZTgwNmNjNjRjNTMyMTJjNGQ4NDRkMTljODJiNGJmNTQ0MCJ9XSwia2luZCI6Im5hdGl2ZV9vZmZpY2VfbWF0aCIsInBsYWNlaG9sZGVyX25hbWUiOiJtYXRoOjAxNiIsInNjaGVtYV92ZXJzaW9uIjoiMS4wIn0="/>
@@ -10374,7 +10790,7 @@
       </mc:AlternateContent>
       <p:cxnSp>
         <p:nvCxnSpPr>
-          <p:cNvPr id="147" name="af-rollout-z0-to-z1-connector-01"/>
+          <p:cNvPr id="147" name="af-rollout-z0-to-z1-connector-01" descr="{&quot;arrow_spec_sha256&quot;:&quot;d1a5f07f3cb17e67ce8e74dc066b2de1cd04ad4906479c204069ab83eb3b81a3&quot;,&quot;autofigure_element_id&quot;:&quot;rollout-z0-to-z1&quot;}"/>
           <p:cNvCxnSpPr/>
           <p:nvPr/>
         </p:nvCxnSpPr>
@@ -10390,6 +10806,7 @@
             <a:solidFill>
               <a:srgbClr val="8D6A00"/>
             </a:solidFill>
+            <a:miter/>
             <a:tailEnd type="triangle" w="lg" len="lg"/>
           </a:ln>
           <a:effectLst/>
@@ -10411,7 +10828,7 @@
       </p:cxnSp>
       <p:cxnSp>
         <p:nvCxnSpPr>
-          <p:cNvPr id="148" name="af-rollout-z1-to-z2-connector-01"/>
+          <p:cNvPr id="148" name="af-rollout-z1-to-z2-connector-01" descr="{&quot;arrow_spec_sha256&quot;:&quot;1d874e6ae1a8727aa06825fcfa5e3dd60617e3a9e75529c6a5c1b92d21f25d23&quot;,&quot;autofigure_element_id&quot;:&quot;rollout-z1-to-z2&quot;}"/>
           <p:cNvCxnSpPr/>
           <p:nvPr/>
         </p:nvCxnSpPr>
@@ -10427,6 +10844,7 @@
             <a:solidFill>
               <a:srgbClr val="8D6A00"/>
             </a:solidFill>
+            <a:miter/>
             <a:tailEnd type="triangle" w="lg" len="lg"/>
           </a:ln>
           <a:effectLst/>
@@ -10448,7 +10866,7 @@
       </p:cxnSp>
       <p:cxnSp>
         <p:nvCxnSpPr>
-          <p:cNvPr id="149" name="af-rollout-z2-to-zh-connector-01"/>
+          <p:cNvPr id="149" name="af-rollout-z2-to-zh-connector-01" descr="{&quot;arrow_spec_sha256&quot;:&quot;102d2ed58c81ddb0afbe37cb239dc14ad65a02ee846c3a8a65c0d9b9d6ec2e50&quot;,&quot;autofigure_element_id&quot;:&quot;rollout-z2-to-zh&quot;}"/>
           <p:cNvCxnSpPr/>
           <p:nvPr/>
         </p:nvCxnSpPr>
@@ -10464,6 +10882,7 @@
             <a:solidFill>
               <a:srgbClr val="8D6A00"/>
             </a:solidFill>
+            <a:miter/>
             <a:tailEnd type="triangle" w="lg" len="lg"/>
           </a:ln>
           <a:effectLst/>
@@ -10485,7 +10904,7 @@
       </p:cxnSp>
       <p:sp>
         <p:nvSpPr>
-          <p:cNvPr id="150" name="af-svg-text-0053-text-01"/>
+          <p:cNvPr id="150" name="af-svg-text-0053-text-01" descr="{&quot;autofigure_element_id&quot;:&quot;svg-text-0053&quot;}"/>
           <p:cNvSpPr txBox="1"/>
           <p:nvPr/>
         </p:nvSpPr>
@@ -10501,7 +10920,7 @@
           <a:effectLst/>
         </p:spPr>
         <p:txBody>
-          <a:bodyPr wrap="none" anchor="t" lIns="0" rIns="0" tIns="0" bIns="0">
+          <a:bodyPr wrap="none" lIns="0" tIns="0" rIns="0" bIns="0" anchor="t">
             <a:spAutoFit/>
           </a:bodyPr>
           <a:lstStyle/>
@@ -10521,7 +10940,7 @@
       </p:sp>
       <p:sp>
         <p:nvSpPr>
-          <p:cNvPr id="151" name="af-svg-circle-0021-ellipse-01"/>
+          <p:cNvPr id="151" name="af-svg-circle-0021-ellipse-01" descr="{&quot;autofigure_element_id&quot;:&quot;svg-circle-0021&quot;}"/>
           <p:cNvSpPr/>
           <p:nvPr/>
         </p:nvSpPr>
@@ -10560,11 +10979,12 @@
           <a:lstStyle/>
           <a:p>
             <a:pPr algn="ctr"/>
-          </a:p>
-        </p:txBody>
-      </p:sp>
-      <mc:AlternateContent xmlns:mc="http://schemas.openxmlformats.org/markup-compatibility/2006">
-        <mc:Choice xmlns:a14="http://schemas.microsoft.com/office/drawing/2010/main" Requires="a14">
+            <a:endParaRPr/>
+          </a:p>
+        </p:txBody>
+      </p:sp>
+      <mc:AlternateContent xmlns:mc="http://schemas.openxmlformats.org/markup-compatibility/2006" xmlns:a14="http://schemas.microsoft.com/office/drawing/2010/main">
+        <mc:Choice Requires="a14">
           <p:sp>
             <p:nvSpPr>
               <p:cNvPr id="152" name="math:017" descr="AI_AUTOFIGURE_NATIVE_MATH_V1:eyJjb250ZW50X3J1bnMiOlt7ImNhbm9uaWNhbF9sYXRleCI6IlxccGkiLCJmb3JtdWxhX2lkIjoiRVEwMTciLCJraW5kIjoibWF0aCIsImxhdGV4X3NoYTI1NiI6ImYxY2YwNDA5M2QwOGI2ZGMwZDU4YTg3Mzk2NDA1Y2I5MDkzYTIyZTllZDYyYTk1YmI5NWVkNDZlNWRhOTcwOTciLCJtb2RlIjoiaW5saW5lIiwib21tbF9zaGEyNTYiOiI4MGIzNzkwZWVkMDMxOWQ1MWJmZDZkZDA4MmQ2YTU3YTNjOTllNjU4Njc3MTA3ZDQyMTYyN2MxZjc0OGY3NjU5Iiwic2VtYW50aWNfb21tbF9wcm9maWxlIjoib2ZmaWNlLW1hdGgtc2VtYW50aWMtdjIiLCJzZW1hbnRpY19vbW1sX3NoYTI1NiI6ImU4OWQxNDFjNDBjNmI1MjM0M2IwNjM4ZWY3ZjUyODE2ZTg0ODU4NWY2MjU1MWFhYzMwNThjZWQwNGY3NjllYjYifV0sImZvcm11bGFzIjpbeyJjYW5vbmljYWxfbGF0ZXgiOiJcXHBpIiwiZm9ybXVsYV9pZCI6IkVRMDE3IiwibGF0ZXhfc2hhMjU2IjoiZjFjZjA0MDkzZDA4YjZkYzBkNThhODczOTY0MDVjYjkwOTNhMjJlOWVkNjJhOTViYjk1ZWQ0NmU1ZGE5NzA5NyIsIm1vZGUiOiJpbmxpbmUiLCJvbW1sX3NoYTI1NiI6IjgwYjM3OTBlZWQwMzE5ZDUxYmZkNmRkMDgyZDZhNTdhM2M5OWU2NTg2NzcxMDdkNDIxNjI3YzFmNzQ4Zjc2NTkiLCJzZW1hbnRpY19vbW1sX3Byb2ZpbGUiOiJvZmZpY2UtbWF0aC1zZW1hbnRpYy12MiIsInNlbWFudGljX29tbWxfc2hhMjU2IjoiZTg5ZDE0MWM0MGM2YjUyMzQzYjA2MzhlZjdmNTI4MTZlODQ4NTg1ZjYyNTUxYWFjMzA1OGNlZDA0Zjc2OWViNiJ9XSwia2luZCI6Im5hdGl2ZV9vZmZpY2VfbWF0aCIsInBsYWNlaG9sZGVyX25hbWUiOiJtYXRoOjAxNyIsInNjaGVtYV92ZXJzaW9uIjoiMS4wIn0="/>
@@ -10583,26 +11003,28 @@
               <a:effectLst/>
             </p:spPr>
             <p:txBody>
-              <a:bodyPr wrap="none" anchor="t" lIns="0" rIns="0" tIns="0" bIns="0">
+              <a:bodyPr wrap="none" lIns="0" tIns="0" rIns="0" bIns="0" anchor="t">
                 <a:spAutoFit/>
               </a:bodyPr>
               <a:lstStyle/>
               <a:p>
                 <a:pPr algn="ctr"/>
                 <a14:m>
-                  <m:oMath xmlns:m="http://schemas.openxmlformats.org/officeDocument/2006/math">
-                    <m:r>
-                      <a:rPr lang="en-US" dirty="0" sz="1350">
-                        <a:solidFill>
-                          <a:srgbClr val="FFFFFF"/>
-                        </a:solidFill>
-                        <a:latin typeface="Cambria Math"/>
-                      </a:rPr>
-                      <m:t>π</m:t>
-                    </m:r>
-                  </m:oMath>
+                  <m:oMathPara xmlns:m="http://schemas.openxmlformats.org/officeDocument/2006/math">
+                    <m:oMath>
+                      <m:r>
+                        <a:rPr lang="en-US" sz="1350" dirty="0">
+                          <a:solidFill>
+                            <a:srgbClr val="FFFFFF"/>
+                          </a:solidFill>
+                          <a:latin typeface="Cambria Math"/>
+                        </a:rPr>
+                        <m:t>𝜋</m:t>
+                      </m:r>
+                    </m:oMath>
+                  </m:oMathPara>
                 </a14:m>
-                <a:endParaRPr lang="en-US" dirty="0" sz="1350">
+                <a:endParaRPr lang="en-US" sz="1350" dirty="0">
                   <a:solidFill>
                     <a:srgbClr val="FFFFFF"/>
                   </a:solidFill>
@@ -10612,7 +11034,7 @@
             </p:txBody>
           </p:sp>
         </mc:Choice>
-        <mc:Fallback>
+        <mc:Fallback xmlns="">
           <p:sp>
             <p:nvSpPr>
               <p:cNvPr id="152" name="math:017" descr="AI_AUTOFIGURE_MATH_FALLBACK_ONLY_V1:eyJjb250ZW50X3J1bnMiOlt7ImNhbm9uaWNhbF9sYXRleCI6IlxccGkiLCJmb3JtdWxhX2lkIjoiRVEwMTciLCJraW5kIjoibWF0aCIsImxhdGV4X3NoYTI1NiI6ImYxY2YwNDA5M2QwOGI2ZGMwZDU4YTg3Mzk2NDA1Y2I5MDkzYTIyZTllZDYyYTk1YmI5NWVkNDZlNWRhOTcwOTciLCJtb2RlIjoiaW5saW5lIiwib21tbF9zaGEyNTYiOiI4MGIzNzkwZWVkMDMxOWQ1MWJmZDZkZDA4MmQ2YTU3YTNjOTllNjU4Njc3MTA3ZDQyMTYyN2MxZjc0OGY3NjU5Iiwic2VtYW50aWNfb21tbF9wcm9maWxlIjoib2ZmaWNlLW1hdGgtc2VtYW50aWMtdjIiLCJzZW1hbnRpY19vbW1sX3NoYTI1NiI6ImU4OWQxNDFjNDBjNmI1MjM0M2IwNjM4ZWY3ZjUyODE2ZTg0ODU4NWY2MjU1MWFhYzMwNThjZWQwNGY3NjllYjYifV0sImZvcm11bGFzIjpbeyJjYW5vbmljYWxfbGF0ZXgiOiJcXHBpIiwiZm9ybXVsYV9pZCI6IkVRMDE3IiwibGF0ZXhfc2hhMjU2IjoiZjFjZjA0MDkzZDA4YjZkYzBkNThhODczOTY0MDVjYjkwOTNhMjJlOWVkNjJhOTViYjk1ZWQ0NmU1ZGE5NzA5NyIsIm1vZGUiOiJpbmxpbmUiLCJvbW1sX3NoYTI1NiI6IjgwYjM3OTBlZWQwMzE5ZDUxYmZkNmRkMDgyZDZhNTdhM2M5OWU2NTg2NzcxMDdkNDIxNjI3YzFmNzQ4Zjc2NTkiLCJzZW1hbnRpY19vbW1sX3Byb2ZpbGUiOiJvZmZpY2UtbWF0aC1zZW1hbnRpYy12MiIsInNlbWFudGljX29tbWxfc2hhMjU2IjoiZTg5ZDE0MWM0MGM2YjUyMzQzYjA2MzhlZjdmNTI4MTZlODQ4NTg1ZjYyNTUxYWFjMzA1OGNlZDA0Zjc2OWViNiJ9XSwia2luZCI6Im5hdGl2ZV9vZmZpY2VfbWF0aCIsInBsYWNlaG9sZGVyX25hbWUiOiJtYXRoOjAxNyIsInNjaGVtYV92ZXJzaW9uIjoiMS4wIn0="/>
@@ -10657,7 +11079,7 @@
       </mc:AlternateContent>
       <p:sp>
         <p:nvSpPr>
-          <p:cNvPr id="153" name="af-svg-circle-0022-ellipse-01"/>
+          <p:cNvPr id="153" name="af-svg-circle-0022-ellipse-01" descr="{&quot;autofigure_element_id&quot;:&quot;svg-circle-0022&quot;}"/>
           <p:cNvSpPr/>
           <p:nvPr/>
         </p:nvSpPr>
@@ -10696,11 +11118,12 @@
           <a:lstStyle/>
           <a:p>
             <a:pPr algn="ctr"/>
-          </a:p>
-        </p:txBody>
-      </p:sp>
-      <mc:AlternateContent xmlns:mc="http://schemas.openxmlformats.org/markup-compatibility/2006">
-        <mc:Choice xmlns:a14="http://schemas.microsoft.com/office/drawing/2010/main" Requires="a14">
+            <a:endParaRPr/>
+          </a:p>
+        </p:txBody>
+      </p:sp>
+      <mc:AlternateContent xmlns:mc="http://schemas.openxmlformats.org/markup-compatibility/2006" xmlns:a14="http://schemas.microsoft.com/office/drawing/2010/main">
+        <mc:Choice Requires="a14">
           <p:sp>
             <p:nvSpPr>
               <p:cNvPr id="154" name="math:018" descr="AI_AUTOFIGURE_NATIVE_MATH_V1:eyJjb250ZW50X3J1bnMiOlt7ImNhbm9uaWNhbF9sYXRleCI6IlxccGkiLCJmb3JtdWxhX2lkIjoiRVEwMTgiLCJraW5kIjoibWF0aCIsImxhdGV4X3NoYTI1NiI6ImYxY2YwNDA5M2QwOGI2ZGMwZDU4YTg3Mzk2NDA1Y2I5MDkzYTIyZTllZDYyYTk1YmI5NWVkNDZlNWRhOTcwOTciLCJtb2RlIjoiaW5saW5lIiwib21tbF9zaGEyNTYiOiI4MGIzNzkwZWVkMDMxOWQ1MWJmZDZkZDA4MmQ2YTU3YTNjOTllNjU4Njc3MTA3ZDQyMTYyN2MxZjc0OGY3NjU5Iiwic2VtYW50aWNfb21tbF9wcm9maWxlIjoib2ZmaWNlLW1hdGgtc2VtYW50aWMtdjIiLCJzZW1hbnRpY19vbW1sX3NoYTI1NiI6ImU4OWQxNDFjNDBjNmI1MjM0M2IwNjM4ZWY3ZjUyODE2ZTg0ODU4NWY2MjU1MWFhYzMwNThjZWQwNGY3NjllYjYifV0sImZvcm11bGFzIjpbeyJjYW5vbmljYWxfbGF0ZXgiOiJcXHBpIiwiZm9ybXVsYV9pZCI6IkVRMDE4IiwibGF0ZXhfc2hhMjU2IjoiZjFjZjA0MDkzZDA4YjZkYzBkNThhODczOTY0MDVjYjkwOTNhMjJlOWVkNjJhOTViYjk1ZWQ0NmU1ZGE5NzA5NyIsIm1vZGUiOiJpbmxpbmUiLCJvbW1sX3NoYTI1NiI6IjgwYjM3OTBlZWQwMzE5ZDUxYmZkNmRkMDgyZDZhNTdhM2M5OWU2NTg2NzcxMDdkNDIxNjI3YzFmNzQ4Zjc2NTkiLCJzZW1hbnRpY19vbW1sX3Byb2ZpbGUiOiJvZmZpY2UtbWF0aC1zZW1hbnRpYy12MiIsInNlbWFudGljX29tbWxfc2hhMjU2IjoiZTg5ZDE0MWM0MGM2YjUyMzQzYjA2MzhlZjdmNTI4MTZlODQ4NTg1ZjYyNTUxYWFjMzA1OGNlZDA0Zjc2OWViNiJ9XSwia2luZCI6Im5hdGl2ZV9vZmZpY2VfbWF0aCIsInBsYWNlaG9sZGVyX25hbWUiOiJtYXRoOjAxOCIsInNjaGVtYV92ZXJzaW9uIjoiMS4wIn0="/>
@@ -10719,26 +11142,28 @@
               <a:effectLst/>
             </p:spPr>
             <p:txBody>
-              <a:bodyPr wrap="none" anchor="t" lIns="0" rIns="0" tIns="0" bIns="0">
+              <a:bodyPr wrap="none" lIns="0" tIns="0" rIns="0" bIns="0" anchor="t">
                 <a:spAutoFit/>
               </a:bodyPr>
               <a:lstStyle/>
               <a:p>
                 <a:pPr algn="ctr"/>
                 <a14:m>
-                  <m:oMath xmlns:m="http://schemas.openxmlformats.org/officeDocument/2006/math">
-                    <m:r>
-                      <a:rPr lang="en-US" dirty="0" sz="1350">
-                        <a:solidFill>
-                          <a:srgbClr val="FFFFFF"/>
-                        </a:solidFill>
-                        <a:latin typeface="Cambria Math"/>
-                      </a:rPr>
-                      <m:t>π</m:t>
-                    </m:r>
-                  </m:oMath>
+                  <m:oMathPara xmlns:m="http://schemas.openxmlformats.org/officeDocument/2006/math">
+                    <m:oMath>
+                      <m:r>
+                        <a:rPr lang="en-US" sz="1350" dirty="0">
+                          <a:solidFill>
+                            <a:srgbClr val="FFFFFF"/>
+                          </a:solidFill>
+                          <a:latin typeface="Cambria Math"/>
+                        </a:rPr>
+                        <m:t>𝜋</m:t>
+                      </m:r>
+                    </m:oMath>
+                  </m:oMathPara>
                 </a14:m>
-                <a:endParaRPr lang="en-US" dirty="0" sz="1350">
+                <a:endParaRPr lang="en-US" sz="1350" dirty="0">
                   <a:solidFill>
                     <a:srgbClr val="FFFFFF"/>
                   </a:solidFill>
@@ -10748,7 +11173,7 @@
             </p:txBody>
           </p:sp>
         </mc:Choice>
-        <mc:Fallback>
+        <mc:Fallback xmlns="">
           <p:sp>
             <p:nvSpPr>
               <p:cNvPr id="154" name="math:018" descr="AI_AUTOFIGURE_MATH_FALLBACK_ONLY_V1:eyJjb250ZW50X3J1bnMiOlt7ImNhbm9uaWNhbF9sYXRleCI6IlxccGkiLCJmb3JtdWxhX2lkIjoiRVEwMTgiLCJraW5kIjoibWF0aCIsImxhdGV4X3NoYTI1NiI6ImYxY2YwNDA5M2QwOGI2ZGMwZDU4YTg3Mzk2NDA1Y2I5MDkzYTIyZTllZDYyYTk1YmI5NWVkNDZlNWRhOTcwOTciLCJtb2RlIjoiaW5saW5lIiwib21tbF9zaGEyNTYiOiI4MGIzNzkwZWVkMDMxOWQ1MWJmZDZkZDA4MmQ2YTU3YTNjOTllNjU4Njc3MTA3ZDQyMTYyN2MxZjc0OGY3NjU5Iiwic2VtYW50aWNfb21tbF9wcm9maWxlIjoib2ZmaWNlLW1hdGgtc2VtYW50aWMtdjIiLCJzZW1hbnRpY19vbW1sX3NoYTI1NiI6ImU4OWQxNDFjNDBjNmI1MjM0M2IwNjM4ZWY3ZjUyODE2ZTg0ODU4NWY2MjU1MWFhYzMwNThjZWQwNGY3NjllYjYifV0sImZvcm11bGFzIjpbeyJjYW5vbmljYWxfbGF0ZXgiOiJcXHBpIiwiZm9ybXVsYV9pZCI6IkVRMDE4IiwibGF0ZXhfc2hhMjU2IjoiZjFjZjA0MDkzZDA4YjZkYzBkNThhODczOTY0MDVjYjkwOTNhMjJlOWVkNjJhOTViYjk1ZWQ0NmU1ZGE5NzA5NyIsIm1vZGUiOiJpbmxpbmUiLCJvbW1sX3NoYTI1NiI6IjgwYjM3OTBlZWQwMzE5ZDUxYmZkNmRkMDgyZDZhNTdhM2M5OWU2NTg2NzcxMDdkNDIxNjI3YzFmNzQ4Zjc2NTkiLCJzZW1hbnRpY19vbW1sX3Byb2ZpbGUiOiJvZmZpY2UtbWF0aC1zZW1hbnRpYy12MiIsInNlbWFudGljX29tbWxfc2hhMjU2IjoiZTg5ZDE0MWM0MGM2YjUyMzQzYjA2MzhlZjdmNTI4MTZlODQ4NTg1ZjYyNTUxYWFjMzA1OGNlZDA0Zjc2OWViNiJ9XSwia2luZCI6Im5hdGl2ZV9vZmZpY2VfbWF0aCIsInBsYWNlaG9sZGVyX25hbWUiOiJtYXRoOjAxOCIsInNjaGVtYV92ZXJzaW9uIjoiMS4wIn0="/>
@@ -10793,7 +11218,7 @@
       </mc:AlternateContent>
       <p:sp>
         <p:nvSpPr>
-          <p:cNvPr id="155" name="af-svg-circle-0023-ellipse-01"/>
+          <p:cNvPr id="155" name="af-svg-circle-0023-ellipse-01" descr="{&quot;autofigure_element_id&quot;:&quot;svg-circle-0023&quot;}"/>
           <p:cNvSpPr/>
           <p:nvPr/>
         </p:nvSpPr>
@@ -10832,11 +11257,12 @@
           <a:lstStyle/>
           <a:p>
             <a:pPr algn="ctr"/>
-          </a:p>
-        </p:txBody>
-      </p:sp>
-      <mc:AlternateContent xmlns:mc="http://schemas.openxmlformats.org/markup-compatibility/2006">
-        <mc:Choice xmlns:a14="http://schemas.microsoft.com/office/drawing/2010/main" Requires="a14">
+            <a:endParaRPr/>
+          </a:p>
+        </p:txBody>
+      </p:sp>
+      <mc:AlternateContent xmlns:mc="http://schemas.openxmlformats.org/markup-compatibility/2006" xmlns:a14="http://schemas.microsoft.com/office/drawing/2010/main">
+        <mc:Choice Requires="a14">
           <p:sp>
             <p:nvSpPr>
               <p:cNvPr id="156" name="math:019" descr="AI_AUTOFIGURE_NATIVE_MATH_V1:eyJjb250ZW50X3J1bnMiOlt7ImNhbm9uaWNhbF9sYXRleCI6IlxccGkiLCJmb3JtdWxhX2lkIjoiRVEwMTkiLCJraW5kIjoibWF0aCIsImxhdGV4X3NoYTI1NiI6ImYxY2YwNDA5M2QwOGI2ZGMwZDU4YTg3Mzk2NDA1Y2I5MDkzYTIyZTllZDYyYTk1YmI5NWVkNDZlNWRhOTcwOTciLCJtb2RlIjoiaW5saW5lIiwib21tbF9zaGEyNTYiOiI4MGIzNzkwZWVkMDMxOWQ1MWJmZDZkZDA4MmQ2YTU3YTNjOTllNjU4Njc3MTA3ZDQyMTYyN2MxZjc0OGY3NjU5Iiwic2VtYW50aWNfb21tbF9wcm9maWxlIjoib2ZmaWNlLW1hdGgtc2VtYW50aWMtdjIiLCJzZW1hbnRpY19vbW1sX3NoYTI1NiI6ImU4OWQxNDFjNDBjNmI1MjM0M2IwNjM4ZWY3ZjUyODE2ZTg0ODU4NWY2MjU1MWFhYzMwNThjZWQwNGY3NjllYjYifV0sImZvcm11bGFzIjpbeyJjYW5vbmljYWxfbGF0ZXgiOiJcXHBpIiwiZm9ybXVsYV9pZCI6IkVRMDE5IiwibGF0ZXhfc2hhMjU2IjoiZjFjZjA0MDkzZDA4YjZkYzBkNThhODczOTY0MDVjYjkwOTNhMjJlOWVkNjJhOTViYjk1ZWQ0NmU1ZGE5NzA5NyIsIm1vZGUiOiJpbmxpbmUiLCJvbW1sX3NoYTI1NiI6IjgwYjM3OTBlZWQwMzE5ZDUxYmZkNmRkMDgyZDZhNTdhM2M5OWU2NTg2NzcxMDdkNDIxNjI3YzFmNzQ4Zjc2NTkiLCJzZW1hbnRpY19vbW1sX3Byb2ZpbGUiOiJvZmZpY2UtbWF0aC1zZW1hbnRpYy12MiIsInNlbWFudGljX29tbWxfc2hhMjU2IjoiZTg5ZDE0MWM0MGM2YjUyMzQzYjA2MzhlZjdmNTI4MTZlODQ4NTg1ZjYyNTUxYWFjMzA1OGNlZDA0Zjc2OWViNiJ9XSwia2luZCI6Im5hdGl2ZV9vZmZpY2VfbWF0aCIsInBsYWNlaG9sZGVyX25hbWUiOiJtYXRoOjAxOSIsInNjaGVtYV92ZXJzaW9uIjoiMS4wIn0="/>
@@ -10855,26 +11281,28 @@
               <a:effectLst/>
             </p:spPr>
             <p:txBody>
-              <a:bodyPr wrap="none" anchor="t" lIns="0" rIns="0" tIns="0" bIns="0">
+              <a:bodyPr wrap="none" lIns="0" tIns="0" rIns="0" bIns="0" anchor="t">
                 <a:spAutoFit/>
               </a:bodyPr>
               <a:lstStyle/>
               <a:p>
                 <a:pPr algn="ctr"/>
                 <a14:m>
-                  <m:oMath xmlns:m="http://schemas.openxmlformats.org/officeDocument/2006/math">
-                    <m:r>
-                      <a:rPr lang="en-US" dirty="0" sz="1350">
-                        <a:solidFill>
-                          <a:srgbClr val="FFFFFF"/>
-                        </a:solidFill>
-                        <a:latin typeface="Cambria Math"/>
-                      </a:rPr>
-                      <m:t>π</m:t>
-                    </m:r>
-                  </m:oMath>
+                  <m:oMathPara xmlns:m="http://schemas.openxmlformats.org/officeDocument/2006/math">
+                    <m:oMath>
+                      <m:r>
+                        <a:rPr lang="en-US" sz="1350" dirty="0">
+                          <a:solidFill>
+                            <a:srgbClr val="FFFFFF"/>
+                          </a:solidFill>
+                          <a:latin typeface="Cambria Math"/>
+                        </a:rPr>
+                        <m:t>𝜋</m:t>
+                      </m:r>
+                    </m:oMath>
+                  </m:oMathPara>
                 </a14:m>
-                <a:endParaRPr lang="en-US" dirty="0" sz="1350">
+                <a:endParaRPr lang="en-US" sz="1350" dirty="0">
                   <a:solidFill>
                     <a:srgbClr val="FFFFFF"/>
                   </a:solidFill>
@@ -10884,7 +11312,7 @@
             </p:txBody>
           </p:sp>
         </mc:Choice>
-        <mc:Fallback>
+        <mc:Fallback xmlns="">
           <p:sp>
             <p:nvSpPr>
               <p:cNvPr id="156" name="math:019" descr="AI_AUTOFIGURE_MATH_FALLBACK_ONLY_V1:eyJjb250ZW50X3J1bnMiOlt7ImNhbm9uaWNhbF9sYXRleCI6IlxccGkiLCJmb3JtdWxhX2lkIjoiRVEwMTkiLCJraW5kIjoibWF0aCIsImxhdGV4X3NoYTI1NiI6ImYxY2YwNDA5M2QwOGI2ZGMwZDU4YTg3Mzk2NDA1Y2I5MDkzYTIyZTllZDYyYTk1YmI5NWVkNDZlNWRhOTcwOTciLCJtb2RlIjoiaW5saW5lIiwib21tbF9zaGEyNTYiOiI4MGIzNzkwZWVkMDMxOWQ1MWJmZDZkZDA4MmQ2YTU3YTNjOTllNjU4Njc3MTA3ZDQyMTYyN2MxZjc0OGY3NjU5Iiwic2VtYW50aWNfb21tbF9wcm9maWxlIjoib2ZmaWNlLW1hdGgtc2VtYW50aWMtdjIiLCJzZW1hbnRpY19vbW1sX3NoYTI1NiI6ImU4OWQxNDFjNDBjNmI1MjM0M2IwNjM4ZWY3ZjUyODE2ZTg0ODU4NWY2MjU1MWFhYzMwNThjZWQwNGY3NjllYjYifV0sImZvcm11bGFzIjpbeyJjYW5vbmljYWxfbGF0ZXgiOiJcXHBpIiwiZm9ybXVsYV9pZCI6IkVRMDE5IiwibGF0ZXhfc2hhMjU2IjoiZjFjZjA0MDkzZDA4YjZkYzBkNThhODczOTY0MDVjYjkwOTNhMjJlOWVkNjJhOTViYjk1ZWQ0NmU1ZGE5NzA5NyIsIm1vZGUiOiJpbmxpbmUiLCJvbW1sX3NoYTI1NiI6IjgwYjM3OTBlZWQwMzE5ZDUxYmZkNmRkMDgyZDZhNTdhM2M5OWU2NTg2NzcxMDdkNDIxNjI3YzFmNzQ4Zjc2NTkiLCJzZW1hbnRpY19vbW1sX3Byb2ZpbGUiOiJvZmZpY2UtbWF0aC1zZW1hbnRpYy12MiIsInNlbWFudGljX29tbWxfc2hhMjU2IjoiZTg5ZDE0MWM0MGM2YjUyMzQzYjA2MzhlZjdmNTI4MTZlODQ4NTg1ZjYyNTUxYWFjMzA1OGNlZDA0Zjc2OWViNiJ9XSwia2luZCI6Im5hdGl2ZV9vZmZpY2VfbWF0aCIsInBsYWNlaG9sZGVyX25hbWUiOiJtYXRoOjAxOSIsInNjaGVtYV92ZXJzaW9uIjoiMS4wIn0="/>
@@ -10929,7 +11357,7 @@
       </mc:AlternateContent>
       <p:sp>
         <p:nvSpPr>
-          <p:cNvPr id="157" name="af-svg-circle-0024-ellipse-01"/>
+          <p:cNvPr id="157" name="af-svg-circle-0024-ellipse-01" descr="{&quot;autofigure_element_id&quot;:&quot;svg-circle-0024&quot;}"/>
           <p:cNvSpPr/>
           <p:nvPr/>
         </p:nvSpPr>
@@ -10968,11 +11396,12 @@
           <a:lstStyle/>
           <a:p>
             <a:pPr algn="ctr"/>
-          </a:p>
-        </p:txBody>
-      </p:sp>
-      <mc:AlternateContent xmlns:mc="http://schemas.openxmlformats.org/markup-compatibility/2006">
-        <mc:Choice xmlns:a14="http://schemas.microsoft.com/office/drawing/2010/main" Requires="a14">
+            <a:endParaRPr/>
+          </a:p>
+        </p:txBody>
+      </p:sp>
+      <mc:AlternateContent xmlns:mc="http://schemas.openxmlformats.org/markup-compatibility/2006" xmlns:a14="http://schemas.microsoft.com/office/drawing/2010/main">
+        <mc:Choice Requires="a14">
           <p:sp>
             <p:nvSpPr>
               <p:cNvPr id="158" name="math:020" descr="AI_AUTOFIGURE_NATIVE_MATH_V1:eyJjb250ZW50X3J1bnMiOlt7ImNhbm9uaWNhbF9sYXRleCI6ImFfe3R9IiwiZm9ybXVsYV9pZCI6IkVRMDIwIiwia2luZCI6Im1hdGgiLCJsYXRleF9zaGEyNTYiOiJiMjM2YTRmNjc5MDRhMDkzYjk2N2E2NTYxMjY2OTM2Yjc1MDczMTAwMjc5YjZjZGRkYzhlMTc3Nzc2ZDVmZDdlIiwibW9kZSI6ImlubGluZSIsIm9tbWxfc2hhMjU2IjoiOTRjNWE5YzNlOGZiOWY5NmRhOWFiZDJkYTJiMTA4ZDdlNzUyNDU2YzJkYzZlNDJiNzlmZDZmYTAwNGRmNmMzYyIsInNlbWFudGljX29tbWxfcHJvZmlsZSI6Im9mZmljZS1tYXRoLXNlbWFudGljLXYyIiwic2VtYW50aWNfb21tbF9zaGEyNTYiOiI1OGYyMTBlMTVmNzM4YjY1YTk3MmYyODI4MTFjYTllMjBkODE0MWU4ZTk2N2JjYWE4NGRkN2VlZTBlZmU4MzFhIn1dLCJmb3JtdWxhcyI6W3siY2Fub25pY2FsX2xhdGV4IjoiYV97dH0iLCJmb3JtdWxhX2lkIjoiRVEwMjAiLCJsYXRleF9zaGEyNTYiOiJiMjM2YTRmNjc5MDRhMDkzYjk2N2E2NTYxMjY2OTM2Yjc1MDczMTAwMjc5YjZjZGRkYzhlMTc3Nzc2ZDVmZDdlIiwibW9kZSI6ImlubGluZSIsIm9tbWxfc2hhMjU2IjoiOTRjNWE5YzNlOGZiOWY5NmRhOWFiZDJkYTJiMTA4ZDdlNzUyNDU2YzJkYzZlNDJiNzlmZDZmYTAwNGRmNmMzYyIsInNlbWFudGljX29tbWxfcHJvZmlsZSI6Im9mZmljZS1tYXRoLXNlbWFudGljLXYyIiwic2VtYW50aWNfb21tbF9zaGEyNTYiOiI1OGYyMTBlMTVmNzM4YjY1YTk3MmYyODI4MTFjYTllMjBkODE0MWU4ZTk2N2JjYWE4NGRkN2VlZTBlZmU4MzFhIn1dLCJraW5kIjoibmF0aXZlX29mZmljZV9tYXRoIiwicGxhY2Vob2xkZXJfbmFtZSI6Im1hdGg6MDIwIiwic2NoZW1hX3ZlcnNpb24iOiIxLjAifQ=="/>
@@ -10991,41 +11420,53 @@
               <a:effectLst/>
             </p:spPr>
             <p:txBody>
-              <a:bodyPr wrap="none" anchor="t" lIns="0" rIns="0" tIns="0" bIns="0">
+              <a:bodyPr wrap="none" lIns="0" tIns="0" rIns="0" bIns="0" anchor="t">
                 <a:spAutoFit/>
               </a:bodyPr>
               <a:lstStyle/>
               <a:p>
                 <a:pPr algn="ctr"/>
                 <a14:m>
-                  <m:oMath xmlns:m="http://schemas.openxmlformats.org/officeDocument/2006/math">
-                    <m:sSub>
-                      <m:e>
-                        <m:r>
-                          <a:rPr lang="en-US" dirty="0" sz="1200">
-                            <a:solidFill>
-                              <a:srgbClr val="FFFFFF"/>
-                            </a:solidFill>
-                            <a:latin typeface="Cambria Math"/>
-                          </a:rPr>
-                          <m:t>a</m:t>
-                        </m:r>
-                      </m:e>
-                      <m:sub>
-                        <m:r>
-                          <a:rPr lang="en-US" dirty="0" sz="1200">
-                            <a:solidFill>
-                              <a:srgbClr val="FFFFFF"/>
-                            </a:solidFill>
-                            <a:latin typeface="Cambria Math"/>
-                          </a:rPr>
-                          <m:t>t</m:t>
-                        </m:r>
-                      </m:sub>
-                    </m:sSub>
-                  </m:oMath>
+                  <m:oMathPara xmlns:m="http://schemas.openxmlformats.org/officeDocument/2006/math">
+                    <m:oMath>
+                      <m:sSub>
+                        <m:sSubPr>
+                          <m:ctrlPr>
+                            <a:rPr lang="en-US" sz="1200" dirty="0">
+                              <a:solidFill>
+                                <a:srgbClr val="FFFFFF"/>
+                              </a:solidFill>
+                              <a:latin typeface="Cambria Math"/>
+                            </a:rPr>
+                          </m:ctrlPr>
+                        </m:sSubPr>
+                        <m:e>
+                          <m:r>
+                            <a:rPr lang="en-US" sz="1200" dirty="0">
+                              <a:solidFill>
+                                <a:srgbClr val="FFFFFF"/>
+                              </a:solidFill>
+                              <a:latin typeface="Cambria Math"/>
+                            </a:rPr>
+                            <m:t>𝑎</m:t>
+                          </m:r>
+                        </m:e>
+                        <m:sub>
+                          <m:r>
+                            <a:rPr lang="en-US" sz="1200" dirty="0">
+                              <a:solidFill>
+                                <a:srgbClr val="FFFFFF"/>
+                              </a:solidFill>
+                              <a:latin typeface="Cambria Math"/>
+                            </a:rPr>
+                            <m:t>𝑡</m:t>
+                          </m:r>
+                        </m:sub>
+                      </m:sSub>
+                    </m:oMath>
+                  </m:oMathPara>
                 </a14:m>
-                <a:endParaRPr lang="en-US" dirty="0" sz="1200">
+                <a:endParaRPr lang="en-US" sz="1200" dirty="0">
                   <a:solidFill>
                     <a:srgbClr val="FFFFFF"/>
                   </a:solidFill>
@@ -11035,7 +11476,7 @@
             </p:txBody>
           </p:sp>
         </mc:Choice>
-        <mc:Fallback>
+        <mc:Fallback xmlns="">
           <p:sp>
             <p:nvSpPr>
               <p:cNvPr id="158" name="math:020" descr="AI_AUTOFIGURE_MATH_FALLBACK_ONLY_V1:eyJjb250ZW50X3J1bnMiOlt7ImNhbm9uaWNhbF9sYXRleCI6ImFfe3R9IiwiZm9ybXVsYV9pZCI6IkVRMDIwIiwia2luZCI6Im1hdGgiLCJsYXRleF9zaGEyNTYiOiJiMjM2YTRmNjc5MDRhMDkzYjk2N2E2NTYxMjY2OTM2Yjc1MDczMTAwMjc5YjZjZGRkYzhlMTc3Nzc2ZDVmZDdlIiwibW9kZSI6ImlubGluZSIsIm9tbWxfc2hhMjU2IjoiOTRjNWE5YzNlOGZiOWY5NmRhOWFiZDJkYTJiMTA4ZDdlNzUyNDU2YzJkYzZlNDJiNzlmZDZmYTAwNGRmNmMzYyIsInNlbWFudGljX29tbWxfcHJvZmlsZSI6Im9mZmljZS1tYXRoLXNlbWFudGljLXYyIiwic2VtYW50aWNfb21tbF9zaGEyNTYiOiI1OGYyMTBlMTVmNzM4YjY1YTk3MmYyODI4MTFjYTllMjBkODE0MWU4ZTk2N2JjYWE4NGRkN2VlZTBlZmU4MzFhIn1dLCJmb3JtdWxhcyI6W3siY2Fub25pY2FsX2xhdGV4IjoiYV97dH0iLCJmb3JtdWxhX2lkIjoiRVEwMjAiLCJsYXRleF9zaGEyNTYiOiJiMjM2YTRmNjc5MDRhMDkzYjk2N2E2NTYxMjY2OTM2Yjc1MDczMTAwMjc5YjZjZGRkYzhlMTc3Nzc2ZDVmZDdlIiwibW9kZSI6ImlubGluZSIsIm9tbWxfc2hhMjU2IjoiOTRjNWE5YzNlOGZiOWY5NmRhOWFiZDJkYTJiMTA4ZDdlNzUyNDU2YzJkYzZlNDJiNzlmZDZmYTAwNGRmNmMzYyIsInNlbWFudGljX29tbWxfcHJvZmlsZSI6Im9mZmljZS1tYXRoLXNlbWFudGljLXYyIiwic2VtYW50aWNfb21tbF9zaGEyNTYiOiI1OGYyMTBlMTVmNzM4YjY1YTk3MmYyODI4MTFjYTllMjBkODE0MWU4ZTk2N2JjYWE4NGRkN2VlZTBlZmU4MzFhIn1dLCJraW5kIjoibmF0aXZlX29mZmljZV9tYXRoIiwicGxhY2Vob2xkZXJfbmFtZSI6Im1hdGg6MDIwIiwic2NoZW1hX3ZlcnNpb24iOiIxLjAifQ=="/>
@@ -11080,7 +11521,7 @@
       </mc:AlternateContent>
       <p:sp>
         <p:nvSpPr>
-          <p:cNvPr id="159" name="af-svg-circle-0025-ellipse-01"/>
+          <p:cNvPr id="159" name="af-svg-circle-0025-ellipse-01" descr="{&quot;autofigure_element_id&quot;:&quot;svg-circle-0025&quot;}"/>
           <p:cNvSpPr/>
           <p:nvPr/>
         </p:nvSpPr>
@@ -11119,11 +11560,12 @@
           <a:lstStyle/>
           <a:p>
             <a:pPr algn="ctr"/>
-          </a:p>
-        </p:txBody>
-      </p:sp>
-      <mc:AlternateContent xmlns:mc="http://schemas.openxmlformats.org/markup-compatibility/2006">
-        <mc:Choice xmlns:a14="http://schemas.microsoft.com/office/drawing/2010/main" Requires="a14">
+            <a:endParaRPr/>
+          </a:p>
+        </p:txBody>
+      </p:sp>
+      <mc:AlternateContent xmlns:mc="http://schemas.openxmlformats.org/markup-compatibility/2006" xmlns:a14="http://schemas.microsoft.com/office/drawing/2010/main">
+        <mc:Choice Requires="a14">
           <p:sp>
             <p:nvSpPr>
               <p:cNvPr id="160" name="math:021" descr="AI_AUTOFIGURE_NATIVE_MATH_V1:eyJjb250ZW50X3J1bnMiOlt7ImNhbm9uaWNhbF9sYXRleCI6ImFfe3QrMX0iLCJmb3JtdWxhX2lkIjoiRVEwMjEiLCJraW5kIjoibWF0aCIsImxhdGV4X3NoYTI1NiI6ImNkNTFlODVhMWRhMGJkNjU2MGEzOGU0NTVmNWIzMDNkYjcxNzUzMzc3NmRhZTFjZjU0NGM0ZTEwOGJmM2VhZWEiLCJtb2RlIjoiaW5saW5lIiwib21tbF9zaGEyNTYiOiJiYzc2NzNhNjFlZDE1OTBkYmJjNzQzYzMzNjI2NWU0Zjk4ZTYzOGZhMGE3NzMxZjRlMzk2MmE3NDdmNmY1MmYwIiwic2VtYW50aWNfb21tbF9wcm9maWxlIjoib2ZmaWNlLW1hdGgtc2VtYW50aWMtdjIiLCJzZW1hbnRpY19vbW1sX3NoYTI1NiI6IjM1ZmU0NTJiNDQ4ZWY4MTUxMWJlOTA3ZjVlZWRjOWM1YjYwMWMzN2U2NTVmY2ZmNDY3ZmQ5NzFiYWM4ZTllZTEifV0sImZvcm11bGFzIjpbeyJjYW5vbmljYWxfbGF0ZXgiOiJhX3t0KzF9IiwiZm9ybXVsYV9pZCI6IkVRMDIxIiwibGF0ZXhfc2hhMjU2IjoiY2Q1MWU4NWExZGEwYmQ2NTYwYTM4ZTQ1NWY1YjMwM2RiNzE3NTMzNzc2ZGFlMWNmNTQ0YzRlMTA4YmYzZWFlYSIsIm1vZGUiOiJpbmxpbmUiLCJvbW1sX3NoYTI1NiI6ImJjNzY3M2E2MWVkMTU5MGRiYmM3NDNjMzM2MjY1ZTRmOThlNjM4ZmEwYTc3MzFmNGUzOTYyYTc0N2Y2ZjUyZjAiLCJzZW1hbnRpY19vbW1sX3Byb2ZpbGUiOiJvZmZpY2UtbWF0aC1zZW1hbnRpYy12MiIsInNlbWFudGljX29tbWxfc2hhMjU2IjoiMzVmZTQ1MmI0NDhlZjgxNTExYmU5MDdmNWVlZGM5YzViNjAxYzM3ZTY1NWZjZmY0NjdmZDk3MWJhYzhlOWVlMSJ9XSwia2luZCI6Im5hdGl2ZV9vZmZpY2VfbWF0aCIsInBsYWNlaG9sZGVyX25hbWUiOiJtYXRoOjAyMSIsInNjaGVtYV92ZXJzaW9uIjoiMS4wIn0="/>
@@ -11142,41 +11584,62 @@
               <a:effectLst/>
             </p:spPr>
             <p:txBody>
-              <a:bodyPr wrap="none" anchor="t" lIns="0" rIns="0" tIns="0" bIns="0">
+              <a:bodyPr wrap="none" lIns="0" tIns="0" rIns="0" bIns="0" anchor="t">
                 <a:spAutoFit/>
               </a:bodyPr>
               <a:lstStyle/>
               <a:p>
                 <a:pPr algn="ctr"/>
                 <a14:m>
-                  <m:oMath xmlns:m="http://schemas.openxmlformats.org/officeDocument/2006/math">
-                    <m:sSub>
-                      <m:e>
-                        <m:r>
-                          <a:rPr lang="en-US" dirty="0" sz="1200">
-                            <a:solidFill>
-                              <a:srgbClr val="FFFFFF"/>
-                            </a:solidFill>
-                            <a:latin typeface="Cambria Math"/>
-                          </a:rPr>
-                          <m:t>a</m:t>
-                        </m:r>
-                      </m:e>
-                      <m:sub>
-                        <m:r>
-                          <a:rPr lang="en-US" dirty="0" sz="1200">
-                            <a:solidFill>
-                              <a:srgbClr val="FFFFFF"/>
-                            </a:solidFill>
-                            <a:latin typeface="Cambria Math"/>
-                          </a:rPr>
-                          <m:t>t+1</m:t>
-                        </m:r>
-                      </m:sub>
-                    </m:sSub>
-                  </m:oMath>
+                  <m:oMathPara xmlns:m="http://schemas.openxmlformats.org/officeDocument/2006/math">
+                    <m:oMath>
+                      <m:sSub>
+                        <m:sSubPr>
+                          <m:ctrlPr>
+                            <a:rPr lang="en-US" sz="1200" dirty="0">
+                              <a:solidFill>
+                                <a:srgbClr val="FFFFFF"/>
+                              </a:solidFill>
+                              <a:latin typeface="Cambria Math"/>
+                            </a:rPr>
+                          </m:ctrlPr>
+                        </m:sSubPr>
+                        <m:e>
+                          <m:r>
+                            <a:rPr lang="en-US" sz="1200" dirty="0">
+                              <a:solidFill>
+                                <a:srgbClr val="FFFFFF"/>
+                              </a:solidFill>
+                              <a:latin typeface="Cambria Math"/>
+                            </a:rPr>
+                            <m:t>𝑎</m:t>
+                          </m:r>
+                        </m:e>
+                        <m:sub>
+                          <m:r>
+                            <a:rPr lang="en-US" sz="1200" dirty="0">
+                              <a:solidFill>
+                                <a:srgbClr val="FFFFFF"/>
+                              </a:solidFill>
+                              <a:latin typeface="Cambria Math"/>
+                            </a:rPr>
+                            <m:t>𝑡</m:t>
+                          </m:r>
+                          <m:r>
+                            <a:rPr lang="en-US" sz="1200" dirty="0">
+                              <a:solidFill>
+                                <a:srgbClr val="FFFFFF"/>
+                              </a:solidFill>
+                              <a:latin typeface="Cambria Math"/>
+                            </a:rPr>
+                            <m:t>+1</m:t>
+                          </m:r>
+                        </m:sub>
+                      </m:sSub>
+                    </m:oMath>
+                  </m:oMathPara>
                 </a14:m>
-                <a:endParaRPr lang="en-US" dirty="0" sz="1200">
+                <a:endParaRPr lang="en-US" sz="1200" dirty="0">
                   <a:solidFill>
                     <a:srgbClr val="FFFFFF"/>
                   </a:solidFill>
@@ -11186,7 +11649,7 @@
             </p:txBody>
           </p:sp>
         </mc:Choice>
-        <mc:Fallback>
+        <mc:Fallback xmlns="">
           <p:sp>
             <p:nvSpPr>
               <p:cNvPr id="160" name="math:021" descr="AI_AUTOFIGURE_MATH_FALLBACK_ONLY_V1:eyJjb250ZW50X3J1bnMiOlt7ImNhbm9uaWNhbF9sYXRleCI6ImFfe3QrMX0iLCJmb3JtdWxhX2lkIjoiRVEwMjEiLCJraW5kIjoibWF0aCIsImxhdGV4X3NoYTI1NiI6ImNkNTFlODVhMWRhMGJkNjU2MGEzOGU0NTVmNWIzMDNkYjcxNzUzMzc3NmRhZTFjZjU0NGM0ZTEwOGJmM2VhZWEiLCJtb2RlIjoiaW5saW5lIiwib21tbF9zaGEyNTYiOiJiYzc2NzNhNjFlZDE1OTBkYmJjNzQzYzMzNjI2NWU0Zjk4ZTYzOGZhMGE3NzMxZjRlMzk2MmE3NDdmNmY1MmYwIiwic2VtYW50aWNfb21tbF9wcm9maWxlIjoib2ZmaWNlLW1hdGgtc2VtYW50aWMtdjIiLCJzZW1hbnRpY19vbW1sX3NoYTI1NiI6IjM1ZmU0NTJiNDQ4ZWY4MTUxMWJlOTA3ZjVlZWRjOWM1YjYwMWMzN2U2NTVmY2ZmNDY3ZmQ5NzFiYWM4ZTllZTEifV0sImZvcm11bGFzIjpbeyJjYW5vbmljYWxfbGF0ZXgiOiJhX3t0KzF9IiwiZm9ybXVsYV9pZCI6IkVRMDIxIiwibGF0ZXhfc2hhMjU2IjoiY2Q1MWU4NWExZGEwYmQ2NTYwYTM4ZTQ1NWY1YjMwM2RiNzE3NTMzNzc2ZGFlMWNmNTQ0YzRlMTA4YmYzZWFlYSIsIm1vZGUiOiJpbmxpbmUiLCJvbW1sX3NoYTI1NiI6ImJjNzY3M2E2MWVkMTU5MGRiYmM3NDNjMzM2MjY1ZTRmOThlNjM4ZmEwYTc3MzFmNGUzOTYyYTc0N2Y2ZjUyZjAiLCJzZW1hbnRpY19vbW1sX3Byb2ZpbGUiOiJvZmZpY2UtbWF0aC1zZW1hbnRpYy12MiIsInNlbWFudGljX29tbWxfc2hhMjU2IjoiMzVmZTQ1MmI0NDhlZjgxNTExYmU5MDdmNWVlZGM5YzViNjAxYzM3ZTY1NWZjZmY0NjdmZDk3MWJhYzhlOWVlMSJ9XSwia2luZCI6Im5hdGl2ZV9vZmZpY2VfbWF0aCIsInBsYWNlaG9sZGVyX25hbWUiOiJtYXRoOjAyMSIsInNjaGVtYV92ZXJzaW9uIjoiMS4wIn0="/>
@@ -11231,7 +11694,7 @@
       </mc:AlternateContent>
       <p:sp>
         <p:nvSpPr>
-          <p:cNvPr id="161" name="af-svg-circle-0026-ellipse-01"/>
+          <p:cNvPr id="161" name="af-svg-circle-0026-ellipse-01" descr="{&quot;autofigure_element_id&quot;:&quot;svg-circle-0026&quot;}"/>
           <p:cNvSpPr/>
           <p:nvPr/>
         </p:nvSpPr>
@@ -11270,11 +11733,12 @@
           <a:lstStyle/>
           <a:p>
             <a:pPr algn="ctr"/>
-          </a:p>
-        </p:txBody>
-      </p:sp>
-      <mc:AlternateContent xmlns:mc="http://schemas.openxmlformats.org/markup-compatibility/2006">
-        <mc:Choice xmlns:a14="http://schemas.microsoft.com/office/drawing/2010/main" Requires="a14">
+            <a:endParaRPr/>
+          </a:p>
+        </p:txBody>
+      </p:sp>
+      <mc:AlternateContent xmlns:mc="http://schemas.openxmlformats.org/markup-compatibility/2006" xmlns:a14="http://schemas.microsoft.com/office/drawing/2010/main">
+        <mc:Choice Requires="a14">
           <p:sp>
             <p:nvSpPr>
               <p:cNvPr id="162" name="math:022" descr="AI_AUTOFIGURE_NATIVE_MATH_V1:eyJjb250ZW50X3J1bnMiOlt7ImNhbm9uaWNhbF9sYXRleCI6ImFfe3QrMn0iLCJmb3JtdWxhX2lkIjoiRVEwMjIiLCJraW5kIjoibWF0aCIsImxhdGV4X3NoYTI1NiI6ImZkYWYzMzQzZjgxNjEyYjY0OWZlNDcyZDc0Mzk4M2U2YTBmMTI4MzdiOGZmY2M4NjUwMTVhNjZkYWU0Zjc2YjQiLCJtb2RlIjoiaW5saW5lIiwib21tbF9zaGEyNTYiOiI4MWRjMWE4MmFlNGVmY2JmMDYxYmYzM2E2NmNjZmE4OGNkOTg5NzQzZjM2NjExMzhmZWRiYmU1OTNlZjJjOTVlIiwic2VtYW50aWNfb21tbF9wcm9maWxlIjoib2ZmaWNlLW1hdGgtc2VtYW50aWMtdjIiLCJzZW1hbnRpY19vbW1sX3NoYTI1NiI6ImYzNmQyNDY3MzZjNjAyNjZkODBmMWI0MGY3ODU1MTk0NDgzNjE4ZjcyYWM1ZjlmMWJhZTg5YTQwZGZjYmM3MWIifV0sImZvcm11bGFzIjpbeyJjYW5vbmljYWxfbGF0ZXgiOiJhX3t0KzJ9IiwiZm9ybXVsYV9pZCI6IkVRMDIyIiwibGF0ZXhfc2hhMjU2IjoiZmRhZjMzNDNmODE2MTJiNjQ5ZmU0NzJkNzQzOTgzZTZhMGYxMjgzN2I4ZmZjYzg2NTAxNWE2NmRhZTRmNzZiNCIsIm1vZGUiOiJpbmxpbmUiLCJvbW1sX3NoYTI1NiI6IjgxZGMxYTgyYWU0ZWZjYmYwNjFiZjMzYTY2Y2NmYTg4Y2Q5ODk3NDNmMzY2MTEzOGZlZGJiZTU5M2VmMmM5NWUiLCJzZW1hbnRpY19vbW1sX3Byb2ZpbGUiOiJvZmZpY2UtbWF0aC1zZW1hbnRpYy12MiIsInNlbWFudGljX29tbWxfc2hhMjU2IjoiZjM2ZDI0NjczNmM2MDI2NmQ4MGYxYjQwZjc4NTUxOTQ0ODM2MThmNzJhYzVmOWYxYmFlODlhNDBkZmNiYzcxYiJ9XSwia2luZCI6Im5hdGl2ZV9vZmZpY2VfbWF0aCIsInBsYWNlaG9sZGVyX25hbWUiOiJtYXRoOjAyMiIsInNjaGVtYV92ZXJzaW9uIjoiMS4wIn0="/>
@@ -11293,41 +11757,62 @@
               <a:effectLst/>
             </p:spPr>
             <p:txBody>
-              <a:bodyPr wrap="none" anchor="t" lIns="0" rIns="0" tIns="0" bIns="0">
+              <a:bodyPr wrap="none" lIns="0" tIns="0" rIns="0" bIns="0" anchor="t">
                 <a:spAutoFit/>
               </a:bodyPr>
               <a:lstStyle/>
               <a:p>
                 <a:pPr algn="ctr"/>
                 <a14:m>
-                  <m:oMath xmlns:m="http://schemas.openxmlformats.org/officeDocument/2006/math">
-                    <m:sSub>
-                      <m:e>
-                        <m:r>
-                          <a:rPr lang="en-US" dirty="0" sz="1200">
-                            <a:solidFill>
-                              <a:srgbClr val="FFFFFF"/>
-                            </a:solidFill>
-                            <a:latin typeface="Cambria Math"/>
-                          </a:rPr>
-                          <m:t>a</m:t>
-                        </m:r>
-                      </m:e>
-                      <m:sub>
-                        <m:r>
-                          <a:rPr lang="en-US" dirty="0" sz="1200">
-                            <a:solidFill>
-                              <a:srgbClr val="FFFFFF"/>
-                            </a:solidFill>
-                            <a:latin typeface="Cambria Math"/>
-                          </a:rPr>
-                          <m:t>t+2</m:t>
-                        </m:r>
-                      </m:sub>
-                    </m:sSub>
-                  </m:oMath>
+                  <m:oMathPara xmlns:m="http://schemas.openxmlformats.org/officeDocument/2006/math">
+                    <m:oMath>
+                      <m:sSub>
+                        <m:sSubPr>
+                          <m:ctrlPr>
+                            <a:rPr lang="en-US" sz="1200" dirty="0">
+                              <a:solidFill>
+                                <a:srgbClr val="FFFFFF"/>
+                              </a:solidFill>
+                              <a:latin typeface="Cambria Math"/>
+                            </a:rPr>
+                          </m:ctrlPr>
+                        </m:sSubPr>
+                        <m:e>
+                          <m:r>
+                            <a:rPr lang="en-US" sz="1200" dirty="0">
+                              <a:solidFill>
+                                <a:srgbClr val="FFFFFF"/>
+                              </a:solidFill>
+                              <a:latin typeface="Cambria Math"/>
+                            </a:rPr>
+                            <m:t>𝑎</m:t>
+                          </m:r>
+                        </m:e>
+                        <m:sub>
+                          <m:r>
+                            <a:rPr lang="en-US" sz="1200" dirty="0">
+                              <a:solidFill>
+                                <a:srgbClr val="FFFFFF"/>
+                              </a:solidFill>
+                              <a:latin typeface="Cambria Math"/>
+                            </a:rPr>
+                            <m:t>𝑡</m:t>
+                          </m:r>
+                          <m:r>
+                            <a:rPr lang="en-US" sz="1200" dirty="0">
+                              <a:solidFill>
+                                <a:srgbClr val="FFFFFF"/>
+                              </a:solidFill>
+                              <a:latin typeface="Cambria Math"/>
+                            </a:rPr>
+                            <m:t>+2</m:t>
+                          </m:r>
+                        </m:sub>
+                      </m:sSub>
+                    </m:oMath>
+                  </m:oMathPara>
                 </a14:m>
-                <a:endParaRPr lang="en-US" dirty="0" sz="1200">
+                <a:endParaRPr lang="en-US" sz="1200" dirty="0">
                   <a:solidFill>
                     <a:srgbClr val="FFFFFF"/>
                   </a:solidFill>
@@ -11337,7 +11822,7 @@
             </p:txBody>
           </p:sp>
         </mc:Choice>
-        <mc:Fallback>
+        <mc:Fallback xmlns="">
           <p:sp>
             <p:nvSpPr>
               <p:cNvPr id="162" name="math:022" descr="AI_AUTOFIGURE_MATH_FALLBACK_ONLY_V1:eyJjb250ZW50X3J1bnMiOlt7ImNhbm9uaWNhbF9sYXRleCI6ImFfe3QrMn0iLCJmb3JtdWxhX2lkIjoiRVEwMjIiLCJraW5kIjoibWF0aCIsImxhdGV4X3NoYTI1NiI6ImZkYWYzMzQzZjgxNjEyYjY0OWZlNDcyZDc0Mzk4M2U2YTBmMTI4MzdiOGZmY2M4NjUwMTVhNjZkYWU0Zjc2YjQiLCJtb2RlIjoiaW5saW5lIiwib21tbF9zaGEyNTYiOiI4MWRjMWE4MmFlNGVmY2JmMDYxYmYzM2E2NmNjZmE4OGNkOTg5NzQzZjM2NjExMzhmZWRiYmU1OTNlZjJjOTVlIiwic2VtYW50aWNfb21tbF9wcm9maWxlIjoib2ZmaWNlLW1hdGgtc2VtYW50aWMtdjIiLCJzZW1hbnRpY19vbW1sX3NoYTI1NiI6ImYzNmQyNDY3MzZjNjAyNjZkODBmMWI0MGY3ODU1MTk0NDgzNjE4ZjcyYWM1ZjlmMWJhZTg5YTQwZGZjYmM3MWIifV0sImZvcm11bGFzIjpbeyJjYW5vbmljYWxfbGF0ZXgiOiJhX3t0KzJ9IiwiZm9ybXVsYV9pZCI6IkVRMDIyIiwibGF0ZXhfc2hhMjU2IjoiZmRhZjMzNDNmODE2MTJiNjQ5ZmU0NzJkNzQzOTgzZTZhMGYxMjgzN2I4ZmZjYzg2NTAxNWE2NmRhZTRmNzZiNCIsIm1vZGUiOiJpbmxpbmUiLCJvbW1sX3NoYTI1NiI6IjgxZGMxYTgyYWU0ZWZjYmYwNjFiZjMzYTY2Y2NmYTg4Y2Q5ODk3NDNmMzY2MTEzOGZlZGJiZTU5M2VmMmM5NWUiLCJzZW1hbnRpY19vbW1sX3Byb2ZpbGUiOiJvZmZpY2UtbWF0aC1zZW1hbnRpYy12MiIsInNlbWFudGljX29tbWxfc2hhMjU2IjoiZjM2ZDI0NjczNmM2MDI2NmQ4MGYxYjQwZjc4NTUxOTQ0ODM2MThmNzJhYzVmOWYxYmFlODlhNDBkZmNiYzcxYiJ9XSwia2luZCI6Im5hdGl2ZV9vZmZpY2VfbWF0aCIsInBsYWNlaG9sZGVyX25hbWUiOiJtYXRoOjAyMiIsInNjaGVtYV92ZXJzaW9uIjoiMS4wIn0="/>
@@ -11382,7 +11867,7 @@
       </mc:AlternateContent>
       <p:cxnSp>
         <p:nvCxnSpPr>
-          <p:cNvPr id="163" name="af-rollout-z0-to-pi0-connector-01"/>
+          <p:cNvPr id="163" name="af-rollout-z0-to-pi0-connector-01" descr="{&quot;arrow_spec_sha256&quot;:&quot;238d0344a94722e589f4e06a528942f6b31a02283fa4a8ecd5ed1486c661776d&quot;,&quot;autofigure_element_id&quot;:&quot;rollout-z0-to-pi0&quot;}"/>
           <p:cNvCxnSpPr/>
           <p:nvPr/>
         </p:nvCxnSpPr>
@@ -11398,6 +11883,7 @@
             <a:solidFill>
               <a:srgbClr val="8D6A00"/>
             </a:solidFill>
+            <a:miter/>
             <a:tailEnd type="triangle" w="lg" len="lg"/>
           </a:ln>
           <a:effectLst/>
@@ -11419,7 +11905,7 @@
       </p:cxnSp>
       <p:cxnSp>
         <p:nvCxnSpPr>
-          <p:cNvPr id="164" name="af-rollout-z1-to-pi1-connector-01"/>
+          <p:cNvPr id="164" name="af-rollout-z1-to-pi1-connector-01" descr="{&quot;arrow_spec_sha256&quot;:&quot;4909f873bfe0ce899a57af621f97142719c55da514ab83fda9b48999aa22cb18&quot;,&quot;autofigure_element_id&quot;:&quot;rollout-z1-to-pi1&quot;}"/>
           <p:cNvCxnSpPr/>
           <p:nvPr/>
         </p:nvCxnSpPr>
@@ -11435,6 +11921,7 @@
             <a:solidFill>
               <a:srgbClr val="8D6A00"/>
             </a:solidFill>
+            <a:miter/>
             <a:tailEnd type="triangle" w="lg" len="lg"/>
           </a:ln>
           <a:effectLst/>
@@ -11456,7 +11943,7 @@
       </p:cxnSp>
       <p:cxnSp>
         <p:nvCxnSpPr>
-          <p:cNvPr id="165" name="af-rollout-z2-to-pi2-connector-01"/>
+          <p:cNvPr id="165" name="af-rollout-z2-to-pi2-connector-01" descr="{&quot;arrow_spec_sha256&quot;:&quot;d5c6ec89a5cec71643cfef7cf1c05689a35b1c949b4be2bb5498c4b8b98457cb&quot;,&quot;autofigure_element_id&quot;:&quot;rollout-z2-to-pi2&quot;}"/>
           <p:cNvCxnSpPr/>
           <p:nvPr/>
         </p:nvCxnSpPr>
@@ -11472,6 +11959,7 @@
             <a:solidFill>
               <a:srgbClr val="8D6A00"/>
             </a:solidFill>
+            <a:miter/>
             <a:tailEnd type="triangle" w="lg" len="lg"/>
           </a:ln>
           <a:effectLst/>
@@ -11493,7 +11981,7 @@
       </p:cxnSp>
       <p:sp>
         <p:nvSpPr>
-          <p:cNvPr id="166" name="af-rollout-pi0-to-a0-freeform-arrow-01"/>
+          <p:cNvPr id="166" name="af-rollout-pi0-to-a0-freeform-arrow-01" descr="{&quot;arrow_spec_sha256&quot;:&quot;d128b0ec0db850d0bc4bfb521ffe10e5a648b6fc6f0c2349cdb8ce01de442529&quot;,&quot;autofigure_element_id&quot;:&quot;rollout-pi0-to-a0&quot;}"/>
           <p:cNvSpPr/>
           <p:nvPr/>
         </p:nvSpPr>
@@ -11526,17 +12014,21 @@
             <a:solidFill>
               <a:srgbClr val="8D6A00"/>
             </a:solidFill>
+            <a:round/>
             <a:tailEnd type="triangle" w="lg" len="lg"/>
           </a:ln>
         </p:spPr>
         <p:txBody>
           <a:bodyPr/>
-          <a:p/>
-        </p:txBody>
-      </p:sp>
-      <p:sp>
-        <p:nvSpPr>
-          <p:cNvPr id="167" name="af-rollout-pi1-to-a1-freeform-arrow-01"/>
+          <a:lstStyle/>
+          <a:p>
+            <a:endParaRPr/>
+          </a:p>
+        </p:txBody>
+      </p:sp>
+      <p:sp>
+        <p:nvSpPr>
+          <p:cNvPr id="167" name="af-rollout-pi1-to-a1-freeform-arrow-01" descr="{&quot;arrow_spec_sha256&quot;:&quot;e5c84023bb2b7e22fe2a01605c629437ec3a6d42d0a051168ccc0d7c21e9ed00&quot;,&quot;autofigure_element_id&quot;:&quot;rollout-pi1-to-a1&quot;}"/>
           <p:cNvSpPr/>
           <p:nvPr/>
         </p:nvSpPr>
@@ -11569,17 +12061,21 @@
             <a:solidFill>
               <a:srgbClr val="8D6A00"/>
             </a:solidFill>
+            <a:round/>
             <a:tailEnd type="triangle" w="lg" len="lg"/>
           </a:ln>
         </p:spPr>
         <p:txBody>
           <a:bodyPr/>
-          <a:p/>
-        </p:txBody>
-      </p:sp>
-      <p:sp>
-        <p:nvSpPr>
-          <p:cNvPr id="168" name="af-rollout-pi2-to-a2-freeform-arrow-01"/>
+          <a:lstStyle/>
+          <a:p>
+            <a:endParaRPr/>
+          </a:p>
+        </p:txBody>
+      </p:sp>
+      <p:sp>
+        <p:nvSpPr>
+          <p:cNvPr id="168" name="af-rollout-pi2-to-a2-freeform-arrow-01" descr="{&quot;arrow_spec_sha256&quot;:&quot;2ae440e720b4e12891b533a52cc09ddc5751aaf68e589388a7847ce3fcfe2d72&quot;,&quot;autofigure_element_id&quot;:&quot;rollout-pi2-to-a2&quot;}"/>
           <p:cNvSpPr/>
           <p:nvPr/>
         </p:nvSpPr>
@@ -11612,17 +12108,21 @@
             <a:solidFill>
               <a:srgbClr val="8D6A00"/>
             </a:solidFill>
+            <a:round/>
             <a:tailEnd type="triangle" w="lg" len="lg"/>
           </a:ln>
         </p:spPr>
         <p:txBody>
           <a:bodyPr/>
-          <a:p/>
-        </p:txBody>
-      </p:sp>
-      <p:sp>
-        <p:nvSpPr>
-          <p:cNvPr id="169" name="af-rollout-a0-to-z1-freeform-arrow-01"/>
+          <a:lstStyle/>
+          <a:p>
+            <a:endParaRPr/>
+          </a:p>
+        </p:txBody>
+      </p:sp>
+      <p:sp>
+        <p:nvSpPr>
+          <p:cNvPr id="169" name="af-rollout-a0-to-z1-freeform-arrow-01" descr="{&quot;arrow_spec_sha256&quot;:&quot;98b21d2221dbca3367203d1afc575120b16c4a1b7000b07809cdee584a09c4d4&quot;,&quot;autofigure_element_id&quot;:&quot;rollout-a0-to-z1&quot;}"/>
           <p:cNvSpPr/>
           <p:nvPr/>
         </p:nvSpPr>
@@ -11655,17 +12155,21 @@
             <a:solidFill>
               <a:srgbClr val="8D6A00"/>
             </a:solidFill>
+            <a:round/>
             <a:tailEnd type="triangle" w="lg" len="lg"/>
           </a:ln>
         </p:spPr>
         <p:txBody>
           <a:bodyPr/>
-          <a:p/>
-        </p:txBody>
-      </p:sp>
-      <p:sp>
-        <p:nvSpPr>
-          <p:cNvPr id="170" name="af-rollout-a1-to-z2-freeform-arrow-01"/>
+          <a:lstStyle/>
+          <a:p>
+            <a:endParaRPr/>
+          </a:p>
+        </p:txBody>
+      </p:sp>
+      <p:sp>
+        <p:nvSpPr>
+          <p:cNvPr id="170" name="af-rollout-a1-to-z2-freeform-arrow-01" descr="{&quot;arrow_spec_sha256&quot;:&quot;69bc2d6bb77f8c0ced268e25f729096b4f718cd0fc95721a183d1827c3f6ab4c&quot;,&quot;autofigure_element_id&quot;:&quot;rollout-a1-to-z2&quot;}"/>
           <p:cNvSpPr/>
           <p:nvPr/>
         </p:nvSpPr>
@@ -11698,17 +12202,21 @@
             <a:solidFill>
               <a:srgbClr val="8D6A00"/>
             </a:solidFill>
+            <a:round/>
             <a:tailEnd type="triangle" w="lg" len="lg"/>
           </a:ln>
         </p:spPr>
         <p:txBody>
           <a:bodyPr/>
-          <a:p/>
-        </p:txBody>
-      </p:sp>
-      <p:sp>
-        <p:nvSpPr>
-          <p:cNvPr id="171" name="af-rollout-a2-to-next-freeform-arrow-01"/>
+          <a:lstStyle/>
+          <a:p>
+            <a:endParaRPr/>
+          </a:p>
+        </p:txBody>
+      </p:sp>
+      <p:sp>
+        <p:nvSpPr>
+          <p:cNvPr id="171" name="af-rollout-a2-to-next-freeform-arrow-01" descr="{&quot;arrow_spec_sha256&quot;:&quot;a172f3b5c98fa8df35257ebff60dc684df6aec5450996e0c66ae5d068f240091&quot;,&quot;autofigure_element_id&quot;:&quot;rollout-a2-to-next&quot;}"/>
           <p:cNvSpPr/>
           <p:nvPr/>
         </p:nvSpPr>
@@ -11741,17 +12249,21 @@
             <a:solidFill>
               <a:srgbClr val="8D6A00"/>
             </a:solidFill>
+            <a:round/>
             <a:tailEnd type="triangle" w="lg" len="lg"/>
           </a:ln>
         </p:spPr>
         <p:txBody>
           <a:bodyPr/>
-          <a:p/>
+          <a:lstStyle/>
+          <a:p>
+            <a:endParaRPr/>
+          </a:p>
         </p:txBody>
       </p:sp>
       <p:cxnSp>
         <p:nvCxnSpPr>
-          <p:cNvPr id="172" name="af-rollout-z0-to-r0-connector-01"/>
+          <p:cNvPr id="172" name="af-rollout-z0-to-r0-connector-01" descr="{&quot;arrow_spec_sha256&quot;:&quot;341e4ffb79cdb3e574b6772a73a731a8718f0d162bd955cb29d8afb79c23b88b&quot;,&quot;autofigure_element_id&quot;:&quot;rollout-z0-to-r0&quot;}"/>
           <p:cNvCxnSpPr/>
           <p:nvPr/>
         </p:nvCxnSpPr>
@@ -11767,6 +12279,7 @@
             <a:solidFill>
               <a:srgbClr val="8D6A00"/>
             </a:solidFill>
+            <a:miter/>
             <a:tailEnd type="triangle" w="lg" len="lg"/>
           </a:ln>
           <a:effectLst/>
@@ -11788,7 +12301,7 @@
       </p:cxnSp>
       <p:cxnSp>
         <p:nvCxnSpPr>
-          <p:cNvPr id="173" name="af-rollout-z1-to-r1-connector-01"/>
+          <p:cNvPr id="173" name="af-rollout-z1-to-r1-connector-01" descr="{&quot;arrow_spec_sha256&quot;:&quot;02b69bbc1ac76551d3913b9f22215c69dfa6012e215d7efb32d3aab12b491dae&quot;,&quot;autofigure_element_id&quot;:&quot;rollout-z1-to-r1&quot;}"/>
           <p:cNvCxnSpPr/>
           <p:nvPr/>
         </p:nvCxnSpPr>
@@ -11804,6 +12317,7 @@
             <a:solidFill>
               <a:srgbClr val="8D6A00"/>
             </a:solidFill>
+            <a:miter/>
             <a:tailEnd type="triangle" w="lg" len="lg"/>
           </a:ln>
           <a:effectLst/>
@@ -11825,7 +12339,7 @@
       </p:cxnSp>
       <p:cxnSp>
         <p:nvCxnSpPr>
-          <p:cNvPr id="174" name="af-rollout-z2-to-r2-connector-01"/>
+          <p:cNvPr id="174" name="af-rollout-z2-to-r2-connector-01" descr="{&quot;arrow_spec_sha256&quot;:&quot;68887e2e8ad34e7397ea919fb5350f48cbbdcf636a87482402d634a7e331a7de&quot;,&quot;autofigure_element_id&quot;:&quot;rollout-z2-to-r2&quot;}"/>
           <p:cNvCxnSpPr/>
           <p:nvPr/>
         </p:nvCxnSpPr>
@@ -11841,6 +12355,7 @@
             <a:solidFill>
               <a:srgbClr val="8D6A00"/>
             </a:solidFill>
+            <a:miter/>
             <a:tailEnd type="triangle" w="lg" len="lg"/>
           </a:ln>
           <a:effectLst/>
@@ -11862,7 +12377,7 @@
       </p:cxnSp>
       <p:sp>
         <p:nvSpPr>
-          <p:cNvPr id="175" name="af-svg-text-0060-text-01"/>
+          <p:cNvPr id="175" name="af-svg-text-0060-text-01" descr="{&quot;autofigure_element_id&quot;:&quot;svg-text-0060&quot;}"/>
           <p:cNvSpPr txBox="1"/>
           <p:nvPr/>
         </p:nvSpPr>
@@ -11878,7 +12393,7 @@
           <a:effectLst/>
         </p:spPr>
         <p:txBody>
-          <a:bodyPr wrap="none" anchor="t" lIns="0" rIns="0" tIns="0" bIns="0">
+          <a:bodyPr wrap="none" lIns="0" tIns="0" rIns="0" bIns="0" anchor="t">
             <a:spAutoFit/>
           </a:bodyPr>
           <a:lstStyle/>
@@ -11898,7 +12413,7 @@
       </p:sp>
       <p:sp>
         <p:nvSpPr>
-          <p:cNvPr id="176" name="af-svg-text-0061-text-01"/>
+          <p:cNvPr id="176" name="af-svg-text-0061-text-01" descr="{&quot;autofigure_element_id&quot;:&quot;svg-text-0061&quot;}"/>
           <p:cNvSpPr txBox="1"/>
           <p:nvPr/>
         </p:nvSpPr>
@@ -11914,7 +12429,7 @@
           <a:effectLst/>
         </p:spPr>
         <p:txBody>
-          <a:bodyPr wrap="none" anchor="t" lIns="0" rIns="0" tIns="0" bIns="0">
+          <a:bodyPr wrap="none" lIns="0" tIns="0" rIns="0" bIns="0" anchor="t">
             <a:spAutoFit/>
           </a:bodyPr>
           <a:lstStyle/>
@@ -11934,7 +12449,7 @@
       </p:sp>
       <p:sp>
         <p:nvSpPr>
-          <p:cNvPr id="177" name="af-joint-optimization-rect-01"/>
+          <p:cNvPr id="177" name="af-joint-optimization-rect-01" descr="{&quot;autofigure_element_id&quot;:&quot;joint-optimization&quot;}"/>
           <p:cNvSpPr/>
           <p:nvPr/>
         </p:nvSpPr>
@@ -11954,6 +12469,7 @@
               <a:srgbClr val="233A64"/>
             </a:solidFill>
             <a:prstDash val="sysDot"/>
+            <a:miter/>
           </a:ln>
           <a:effectLst/>
         </p:spPr>
@@ -11976,12 +12492,13 @@
           <a:lstStyle/>
           <a:p>
             <a:pPr algn="ctr"/>
-          </a:p>
-        </p:txBody>
-      </p:sp>
-      <p:sp>
-        <p:nvSpPr>
-          <p:cNvPr id="178" name="af-svg-text-0062-text-01"/>
+            <a:endParaRPr/>
+          </a:p>
+        </p:txBody>
+      </p:sp>
+      <p:sp>
+        <p:nvSpPr>
+          <p:cNvPr id="178" name="af-svg-text-0062-text-01" descr="{&quot;autofigure_element_id&quot;:&quot;svg-text-0062&quot;}"/>
           <p:cNvSpPr txBox="1"/>
           <p:nvPr/>
         </p:nvSpPr>
@@ -11997,7 +12514,7 @@
           <a:effectLst/>
         </p:spPr>
         <p:txBody>
-          <a:bodyPr wrap="none" anchor="t" lIns="0" rIns="0" tIns="0" bIns="0">
+          <a:bodyPr wrap="none" lIns="0" tIns="0" rIns="0" bIns="0" anchor="t">
             <a:spAutoFit/>
           </a:bodyPr>
           <a:lstStyle/>
@@ -12017,7 +12534,7 @@
       </p:sp>
       <p:sp>
         <p:nvSpPr>
-          <p:cNvPr id="179" name="af-joint-feedback-to-modular-panel-freeform-arrow-01"/>
+          <p:cNvPr id="179" name="af-joint-feedback-to-modular-panel-freeform-arrow-01" descr="{&quot;arrow_spec_sha256&quot;:&quot;60a1776466129858fed3dede40c344d5a4e5b9f0aaf98e1b061d03730a8b16cd&quot;,&quot;autofigure_element_id&quot;:&quot;joint-feedback-to-modular-panel&quot;}"/>
           <p:cNvSpPr/>
           <p:nvPr/>
         </p:nvSpPr>
@@ -12056,17 +12573,21 @@
             <a:solidFill>
               <a:srgbClr val="D87478"/>
             </a:solidFill>
+            <a:round/>
             <a:tailEnd type="triangle" w="sm" len="sm"/>
           </a:ln>
         </p:spPr>
         <p:txBody>
           <a:bodyPr/>
-          <a:p/>
-        </p:txBody>
-      </p:sp>
-      <p:sp>
-        <p:nvSpPr>
-          <p:cNvPr id="180" name="af-footer-reward-action-rect-01"/>
+          <a:lstStyle/>
+          <a:p>
+            <a:endParaRPr/>
+          </a:p>
+        </p:txBody>
+      </p:sp>
+      <p:sp>
+        <p:nvSpPr>
+          <p:cNvPr id="180" name="af-footer-reward-action-rect-01" descr="{&quot;autofigure_element_id&quot;:&quot;footer-reward-action&quot;}"/>
           <p:cNvSpPr/>
           <p:nvPr/>
         </p:nvSpPr>
@@ -12087,6 +12608,7 @@
             <a:solidFill>
               <a:srgbClr val="233A64"/>
             </a:solidFill>
+            <a:miter/>
           </a:ln>
           <a:effectLst/>
         </p:spPr>
@@ -12109,12 +12631,13 @@
           <a:lstStyle/>
           <a:p>
             <a:pPr algn="ctr"/>
-          </a:p>
-        </p:txBody>
-      </p:sp>
-      <p:sp>
-        <p:nvSpPr>
-          <p:cNvPr id="181" name="af-svg-path-0022-freeform-01"/>
+            <a:endParaRPr/>
+          </a:p>
+        </p:txBody>
+      </p:sp>
+      <p:sp>
+        <p:nvSpPr>
+          <p:cNvPr id="181" name="af-svg-path-0019-freeform-01" descr="{&quot;autofigure_element_id&quot;:&quot;svg-path-0019&quot;}"/>
           <p:cNvSpPr/>
           <p:nvPr/>
         </p:nvSpPr>
@@ -12154,16 +12677,20 @@
             <a:solidFill>
               <a:srgbClr val="7B6D33"/>
             </a:solidFill>
+            <a:round/>
           </a:ln>
         </p:spPr>
         <p:txBody>
           <a:bodyPr/>
-          <a:p/>
-        </p:txBody>
-      </p:sp>
-      <p:sp>
-        <p:nvSpPr>
-          <p:cNvPr id="182" name="af-svg-path-0023-freeform-01"/>
+          <a:lstStyle/>
+          <a:p>
+            <a:endParaRPr/>
+          </a:p>
+        </p:txBody>
+      </p:sp>
+      <p:sp>
+        <p:nvSpPr>
+          <p:cNvPr id="182" name="af-svg-path-0020-freeform-01" descr="{&quot;autofigure_element_id&quot;:&quot;svg-path-0020&quot;}"/>
           <p:cNvSpPr/>
           <p:nvPr/>
         </p:nvSpPr>
@@ -12201,16 +12728,20 @@
             <a:solidFill>
               <a:srgbClr val="7B6D33"/>
             </a:solidFill>
+            <a:round/>
           </a:ln>
         </p:spPr>
         <p:txBody>
           <a:bodyPr/>
-          <a:p/>
-        </p:txBody>
-      </p:sp>
-      <p:sp>
-        <p:nvSpPr>
-          <p:cNvPr id="183" name="af-svg-path-0024-freeform-01"/>
+          <a:lstStyle/>
+          <a:p>
+            <a:endParaRPr/>
+          </a:p>
+        </p:txBody>
+      </p:sp>
+      <p:sp>
+        <p:nvSpPr>
+          <p:cNvPr id="183" name="af-svg-path-0021-freeform-01" descr="{&quot;autofigure_element_id&quot;:&quot;svg-path-0021&quot;}"/>
           <p:cNvSpPr/>
           <p:nvPr/>
         </p:nvSpPr>
@@ -12248,16 +12779,20 @@
             <a:solidFill>
               <a:srgbClr val="7B6D33"/>
             </a:solidFill>
+            <a:round/>
           </a:ln>
         </p:spPr>
         <p:txBody>
           <a:bodyPr/>
-          <a:p/>
+          <a:lstStyle/>
+          <a:p>
+            <a:endParaRPr/>
+          </a:p>
         </p:txBody>
       </p:sp>
       <p:cxnSp>
         <p:nvCxnSpPr>
-          <p:cNvPr id="184" name="af-svg-line-0026-line-01"/>
+          <p:cNvPr id="184" name="af-svg-line-0029-line-01" descr="{&quot;autofigure_element_id&quot;:&quot;svg-line-0029&quot;}"/>
           <p:cNvCxnSpPr/>
           <p:nvPr/>
         </p:nvCxnSpPr>
@@ -12273,6 +12808,7 @@
             <a:solidFill>
               <a:srgbClr val="7B6D33"/>
             </a:solidFill>
+            <a:miter/>
           </a:ln>
           <a:effectLst/>
         </p:spPr>
@@ -12293,7 +12829,7 @@
       </p:cxnSp>
       <p:cxnSp>
         <p:nvCxnSpPr>
-          <p:cNvPr id="185" name="af-svg-line-0027-line-01"/>
+          <p:cNvPr id="185" name="af-svg-line-0030-line-01" descr="{&quot;autofigure_element_id&quot;:&quot;svg-line-0030&quot;}"/>
           <p:cNvCxnSpPr/>
           <p:nvPr/>
         </p:nvCxnSpPr>
@@ -12309,6 +12845,7 @@
             <a:solidFill>
               <a:srgbClr val="7B6D33"/>
             </a:solidFill>
+            <a:miter/>
           </a:ln>
           <a:effectLst/>
         </p:spPr>
@@ -12329,7 +12866,7 @@
       </p:cxnSp>
       <p:sp>
         <p:nvSpPr>
-          <p:cNvPr id="186" name="af-svg-text-0063-text-01"/>
+          <p:cNvPr id="186" name="af-svg-text-0063-text-01" descr="{&quot;autofigure_element_id&quot;:&quot;svg-text-0063&quot;}"/>
           <p:cNvSpPr txBox="1"/>
           <p:nvPr/>
         </p:nvSpPr>
@@ -12345,7 +12882,7 @@
           <a:effectLst/>
         </p:spPr>
         <p:txBody>
-          <a:bodyPr wrap="none" anchor="t" lIns="0" rIns="0" tIns="0" bIns="0">
+          <a:bodyPr wrap="none" lIns="0" tIns="0" rIns="0" bIns="0" anchor="t">
             <a:spAutoFit/>
           </a:bodyPr>
           <a:lstStyle/>
@@ -12365,7 +12902,7 @@
       </p:sp>
       <p:sp>
         <p:nvSpPr>
-          <p:cNvPr id="187" name="af-svg-circle-0027-ellipse-01"/>
+          <p:cNvPr id="187" name="af-svg-circle-0027-ellipse-01" descr="{&quot;autofigure_element_id&quot;:&quot;svg-circle-0027&quot;}"/>
           <p:cNvSpPr/>
           <p:nvPr/>
         </p:nvSpPr>
@@ -12382,6 +12919,7 @@
             <a:solidFill>
               <a:srgbClr val="5C8C39"/>
             </a:solidFill>
+            <a:miter/>
           </a:ln>
           <a:effectLst/>
         </p:spPr>
@@ -12404,12 +12942,13 @@
           <a:lstStyle/>
           <a:p>
             <a:pPr algn="ctr"/>
-          </a:p>
-        </p:txBody>
-      </p:sp>
-      <p:sp>
-        <p:nvSpPr>
-          <p:cNvPr id="188" name="af-svg-path-0025-freeform-01"/>
+            <a:endParaRPr/>
+          </a:p>
+        </p:txBody>
+      </p:sp>
+      <p:sp>
+        <p:nvSpPr>
+          <p:cNvPr id="188" name="af-svg-path-0022-freeform-01" descr="{&quot;autofigure_element_id&quot;:&quot;svg-path-0022&quot;}"/>
           <p:cNvSpPr/>
           <p:nvPr/>
         </p:nvSpPr>
@@ -12446,16 +12985,20 @@
             <a:solidFill>
               <a:srgbClr val="5C8C39"/>
             </a:solidFill>
+            <a:round/>
           </a:ln>
         </p:spPr>
         <p:txBody>
           <a:bodyPr/>
-          <a:p/>
-        </p:txBody>
-      </p:sp>
-      <p:sp>
-        <p:nvSpPr>
-          <p:cNvPr id="189" name="af-svg-path-0026-freeform-01"/>
+          <a:lstStyle/>
+          <a:p>
+            <a:endParaRPr/>
+          </a:p>
+        </p:txBody>
+      </p:sp>
+      <p:sp>
+        <p:nvSpPr>
+          <p:cNvPr id="189" name="af-svg-path-0023-freeform-01" descr="{&quot;autofigure_element_id&quot;:&quot;svg-path-0023&quot;}"/>
           <p:cNvSpPr/>
           <p:nvPr/>
         </p:nvSpPr>
@@ -12492,16 +13035,20 @@
             <a:solidFill>
               <a:srgbClr val="5C8C39"/>
             </a:solidFill>
+            <a:round/>
           </a:ln>
         </p:spPr>
         <p:txBody>
           <a:bodyPr/>
-          <a:p/>
+          <a:lstStyle/>
+          <a:p>
+            <a:endParaRPr/>
+          </a:p>
         </p:txBody>
       </p:sp>
       <p:cxnSp>
         <p:nvCxnSpPr>
-          <p:cNvPr id="190" name="af-svg-line-0028-line-01"/>
+          <p:cNvPr id="190" name="af-svg-line-0031-line-01" descr="{&quot;autofigure_element_id&quot;:&quot;svg-line-0031&quot;}"/>
           <p:cNvCxnSpPr/>
           <p:nvPr/>
         </p:nvCxnSpPr>
@@ -12517,6 +13064,7 @@
             <a:solidFill>
               <a:srgbClr val="5C8C39"/>
             </a:solidFill>
+            <a:miter/>
           </a:ln>
           <a:effectLst/>
         </p:spPr>
@@ -12537,7 +13085,7 @@
       </p:cxnSp>
       <p:sp>
         <p:nvSpPr>
-          <p:cNvPr id="191" name="af-svg-text-0064-text-01"/>
+          <p:cNvPr id="191" name="af-svg-text-0064-text-01" descr="{&quot;autofigure_element_id&quot;:&quot;svg-text-0064&quot;}"/>
           <p:cNvSpPr txBox="1"/>
           <p:nvPr/>
         </p:nvSpPr>
@@ -12553,7 +13101,7 @@
           <a:effectLst/>
         </p:spPr>
         <p:txBody>
-          <a:bodyPr wrap="none" anchor="t" lIns="0" rIns="0" tIns="0" bIns="0">
+          <a:bodyPr wrap="none" lIns="0" tIns="0" rIns="0" bIns="0" anchor="t">
             <a:spAutoFit/>
           </a:bodyPr>
           <a:lstStyle/>
@@ -12573,7 +13121,7 @@
       </p:sp>
       <p:cxnSp>
         <p:nvCxnSpPr>
-          <p:cNvPr id="192" name="af-reward-to-joint-optimization-connector-01"/>
+          <p:cNvPr id="192" name="af-reward-to-joint-optimization-connector-01" descr="{&quot;arrow_spec_sha256&quot;:&quot;674ca2d9cd549e9d63934d59cb528be4ea671cd7423da01cf4bfa11082da8cbc&quot;,&quot;autofigure_element_id&quot;:&quot;reward-to-joint-optimization&quot;}"/>
           <p:cNvCxnSpPr/>
           <p:nvPr/>
         </p:nvCxnSpPr>
@@ -12589,6 +13137,7 @@
             <a:solidFill>
               <a:srgbClr val="D87478"/>
             </a:solidFill>
+            <a:miter/>
             <a:tailEnd type="triangle" w="sm" len="sm"/>
           </a:ln>
           <a:effectLst/>
@@ -12610,7 +13159,7 @@
       </p:cxnSp>
       <p:cxnSp>
         <p:nvCxnSpPr>
-          <p:cNvPr id="193" name="af-behavior-to-reward-connector-01"/>
+          <p:cNvPr id="193" name="af-behavior-to-reward-connector-01" descr="{&quot;arrow_spec_sha256&quot;:&quot;04c614fb8fc96b58ea65a2aded9171b531d28c5b1095d72b05b361a079a9e1ff&quot;,&quot;autofigure_element_id&quot;:&quot;behavior-to-reward&quot;}"/>
           <p:cNvCxnSpPr/>
           <p:nvPr/>
         </p:nvCxnSpPr>
@@ -12626,6 +13175,7 @@
             <a:solidFill>
               <a:srgbClr val="D87478"/>
             </a:solidFill>
+            <a:round/>
             <a:tailEnd type="triangle" w="sm" len="sm"/>
           </a:ln>
           <a:effectLst/>
@@ -12647,7 +13197,7 @@
       </p:cxnSp>
       <p:cxnSp>
         <p:nvCxnSpPr>
-          <p:cNvPr id="194" name="af-interaction-arrow-connector-01"/>
+          <p:cNvPr id="194" name="af-interaction-arrow-connector-01" descr="{&quot;arrow_spec_sha256&quot;:&quot;0ae65380ed47d731ccb7e09beff2d08b2fff388727e4f9815357d6a5054a55d9&quot;,&quot;autofigure_element_id&quot;:&quot;interaction-arrow&quot;}"/>
           <p:cNvCxnSpPr/>
           <p:nvPr/>
         </p:nvCxnSpPr>
@@ -12663,6 +13213,7 @@
             <a:solidFill>
               <a:srgbClr val="777777"/>
             </a:solidFill>
+            <a:miter/>
             <a:headEnd type="triangle" w="med" len="med"/>
             <a:tailEnd type="triangle" w="med" len="med"/>
           </a:ln>
@@ -12685,7 +13236,7 @@
       </p:cxnSp>
       <p:sp>
         <p:nvSpPr>
-          <p:cNvPr id="195" name="af-svg-text-0065-text-01"/>
+          <p:cNvPr id="195" name="af-svg-text-0065-text-01" descr="{&quot;autofigure_element_id&quot;:&quot;svg-text-0065&quot;}"/>
           <p:cNvSpPr txBox="1"/>
           <p:nvPr/>
         </p:nvSpPr>
@@ -12701,7 +13252,7 @@
           <a:effectLst/>
         </p:spPr>
         <p:txBody>
-          <a:bodyPr wrap="none" anchor="t" lIns="0" rIns="0" tIns="0" bIns="0">
+          <a:bodyPr wrap="none" lIns="0" tIns="0" rIns="0" bIns="0" anchor="t">
             <a:spAutoFit/>
           </a:bodyPr>
           <a:lstStyle/>
@@ -12721,18 +13272,18 @@
       </p:sp>
       <p:pic>
         <p:nvPicPr>
-          <p:cNvPr id="196" name="af-atomic-environment-globe-atomic-raster-01" descr="image.png"/>
+          <p:cNvPr id="196" name="af-atomic-environment-globe-atomic-raster-01" descr="{&quot;autofigure_element_id&quot;:&quot;atomic:environment-globe&quot;}"/>
           <p:cNvPicPr>
             <a:picLocks noChangeAspect="1"/>
           </p:cNvPicPr>
           <p:nvPr>
             <p:custDataLst>
-              <p:tags r:id="rId5"/>
+              <p:tags r:id="rId2"/>
             </p:custDataLst>
           </p:nvPr>
         </p:nvPicPr>
         <p:blipFill>
-          <a:blip r:embed="rId4"/>
+          <a:blip r:embed="rId5"/>
           <a:stretch>
             <a:fillRect/>
           </a:stretch>
@@ -12749,7 +13300,7 @@
       </p:pic>
       <p:sp>
         <p:nvSpPr>
-          <p:cNvPr id="197" name="af-svg-text-0066-text-01"/>
+          <p:cNvPr id="197" name="af-svg-text-0066-text-01" descr="{&quot;autofigure_element_id&quot;:&quot;svg-text-0066&quot;}"/>
           <p:cNvSpPr txBox="1"/>
           <p:nvPr/>
         </p:nvSpPr>
@@ -12765,7 +13316,7 @@
           <a:effectLst/>
         </p:spPr>
         <p:txBody>
-          <a:bodyPr wrap="none" anchor="t" lIns="0" rIns="0" tIns="0" bIns="0">
+          <a:bodyPr wrap="none" lIns="0" tIns="0" rIns="0" bIns="0" anchor="t">
             <a:spAutoFit/>
           </a:bodyPr>
           <a:lstStyle/>
@@ -12792,27 +13343,40 @@
 </file>
 
 <file path=ppt/tags/tag1.xml><?xml version="1.0" encoding="utf-8"?>
-<ns0:tagLst xmlns:ns0="http://schemas.openxmlformats.org/presentationml/2006/main">
-  <ns0:tag name="AISCIENTIFICILLUSTRATORASSETID" val="atomic:observation"/>
-  <ns0:tag name="AISCIENTIFICILLUSTRATORSOURCESHA256" val="61c6c0a2d3ee6722cb36713edacd8310a676e2855245e250f1f1a8cae56f5e9f"/>
-  <ns0:tag name="AISCIENTIFICILLUSTRATORRASTERREASON" val="Reference-faithful irreducible creative microasset authorized by the user."/>
-  <ns0:tag name="AISCIENTIFICILLUSTRATORSOURCETIGHTLYCROPPED" val="True"/>
-  <ns0:tag name="AISCIENTIFICILLUSTRATORATOMICRASTERUNIT" val="True"/>
-  <ns0:tag name="AISCIENTIFICILLUSTRATORCONTAINSRECONSTRUCTABLECONTENT" val="False"/>
-  <ns0:tag name="AISCIENTIFICILLUSTRATORDECOMPOSITIONNOTE" val="No faithful native decomposition; formal text, formulas, nodes, and topology remain native."/>
-</ns0:tagLst>
+<p:tagLst xmlns:a="http://schemas.openxmlformats.org/drawingml/2006/main" xmlns:r="http://schemas.openxmlformats.org/officeDocument/2006/relationships" xmlns:p="http://schemas.openxmlformats.org/presentationml/2006/main">
+  <p:tag name="AISCIENTIFICILLUSTRATORSESSIONID" val="HEX:37343232323035622D613933312D343435312D623438312D663164353230663165396465"/>
+  <p:tag name="AISCIENTIFICILLUSTRATORPROJECTID" val="HEX:6175746F6669677572652D30312D6D6F64756C61722D6167656E74"/>
+  <p:tag name="AISCIENTIFICILLUSTRATORTASKMODE" val="HEX:5245434F4E5354525543545F31544F31"/>
+  <p:tag name="AISCIENTIFICILLUSTRATORTARGETID" val="HEX:6175746F6669677572652D70707478"/>
+  <p:tag name="AISCIENTIFICILLUSTRATORSCENESCHEMAVERSION" val="HEX:322E312E30"/>
+  <p:tag name="AISCIENTIFICILLUSTRATORSCENEGRAPHSHA256" val="HEX:37393537643135633566373030353861343030386130316431363339613130363938303133623132643531663834646633383634376465376465633934343931"/>
+  <p:tag name="AISCIENTIFICILLUSTRATORRENDERPLANSHA256" val="HEX:34623531366166313738346235613065343830616230373963316265383531313933383931373739313335613366336434643566336530346366333765633531"/>
+  <p:tag name="AISCIENTIFICILLUSTRATORREVISION" val="HEX:30"/>
+</p:tagLst>
 </file>
 
 <file path=ppt/tags/tag2.xml><?xml version="1.0" encoding="utf-8"?>
-<ns0:tagLst xmlns:ns0="http://schemas.openxmlformats.org/presentationml/2006/main">
-  <ns0:tag name="AISCIENTIFICILLUSTRATORASSETID" val="atomic:environment-globe"/>
-  <ns0:tag name="AISCIENTIFICILLUSTRATORSOURCESHA256" val="3bfe64f24f546aab0797223e0256f9da48314e668dc18d93a0b27347b84ba21d"/>
-  <ns0:tag name="AISCIENTIFICILLUSTRATORRASTERREASON" val="Reference-faithful irreducible creative microasset authorized by the user."/>
-  <ns0:tag name="AISCIENTIFICILLUSTRATORSOURCETIGHTLYCROPPED" val="True"/>
-  <ns0:tag name="AISCIENTIFICILLUSTRATORATOMICRASTERUNIT" val="True"/>
-  <ns0:tag name="AISCIENTIFICILLUSTRATORCONTAINSRECONSTRUCTABLECONTENT" val="False"/>
-  <ns0:tag name="AISCIENTIFICILLUSTRATORDECOMPOSITIONNOTE" val="No faithful native decomposition; formal text, formulas, nodes, and topology remain native."/>
-</ns0:tagLst>
+<p:tagLst xmlns:a="http://schemas.openxmlformats.org/drawingml/2006/main" xmlns:r="http://schemas.openxmlformats.org/officeDocument/2006/relationships" xmlns:p="http://schemas.openxmlformats.org/presentationml/2006/main">
+  <p:tag name="AISCIENTIFICILLUSTRATORASSETID" val="atomic:observation"/>
+  <p:tag name="AISCIENTIFICILLUSTRATORSOURCESHA256" val="61c6c0a2d3ee6722cb36713edacd8310a676e2855245e250f1f1a8cae56f5e9f"/>
+  <p:tag name="AISCIENTIFICILLUSTRATORRASTERREASON" val="Reference-faithful irreducible creative microasset authorized by the user."/>
+  <p:tag name="AISCIENTIFICILLUSTRATORSOURCETIGHTLYCROPPED" val="True"/>
+  <p:tag name="AISCIENTIFICILLUSTRATORATOMICRASTERUNIT" val="True"/>
+  <p:tag name="AISCIENTIFICILLUSTRATORCONTAINSRECONSTRUCTABLECONTENT" val="False"/>
+  <p:tag name="AISCIENTIFICILLUSTRATORDECOMPOSITIONNOTE" val="No faithful native decomposition; formal text, formulas, nodes, and topology remain native."/>
+</p:tagLst>
+</file>
+
+<file path=ppt/tags/tag3.xml><?xml version="1.0" encoding="utf-8"?>
+<p:tagLst xmlns:a="http://schemas.openxmlformats.org/drawingml/2006/main" xmlns:r="http://schemas.openxmlformats.org/officeDocument/2006/relationships" xmlns:p="http://schemas.openxmlformats.org/presentationml/2006/main">
+  <p:tag name="AISCIENTIFICILLUSTRATORASSETID" val="atomic:environment-globe"/>
+  <p:tag name="AISCIENTIFICILLUSTRATORSOURCESHA256" val="3bfe64f24f546aab0797223e0256f9da48314e668dc18d93a0b27347b84ba21d"/>
+  <p:tag name="AISCIENTIFICILLUSTRATORRASTERREASON" val="Reference-faithful irreducible creative microasset authorized by the user."/>
+  <p:tag name="AISCIENTIFICILLUSTRATORSOURCETIGHTLYCROPPED" val="True"/>
+  <p:tag name="AISCIENTIFICILLUSTRATORATOMICRASTERUNIT" val="True"/>
+  <p:tag name="AISCIENTIFICILLUSTRATORCONTAINSRECONSTRUCTABLECONTENT" val="False"/>
+  <p:tag name="AISCIENTIFICILLUSTRATORDECOMPOSITIONNOTE" val="No faithful native decomposition; formal text, formulas, nodes, and topology remain native."/>
+</p:tagLst>
 </file>
 
 <file path=ppt/theme/theme1.xml><?xml version="1.0" encoding="utf-8"?>
